--- a/docs/slides/APNET-keicho-60min.pptx
+++ b/docs/slides/APNET-keicho-60min.pptx
@@ -64,9 +64,13 @@
     <p:sldId id="312" r:id="rId58"/>
     <p:sldId id="313" r:id="rId59"/>
     <p:sldId id="314" r:id="rId60"/>
+    <p:sldId id="315" r:id="rId61"/>
+    <p:sldId id="316" r:id="rId62"/>
+    <p:sldId id="317" r:id="rId63"/>
+    <p:sldId id="318" r:id="rId64"/>
   </p:sldIdLst>
   <p:notesMasterIdLst>
-    <p:notesMasterId r:id="rId61"/>
+    <p:notesMasterId r:id="rId65"/>
   </p:notesMasterIdLst>
   <p:sldSz cx="12192000" cy="6858000"/>
   <p:notesSz cx="6858000" cy="12192000"/>
@@ -163,6 +167,285 @@
     </a:lvl9pPr>
   </p:defaultTextStyle>
 </p:presentation>
+</file>
+
+<file path=ppt/charts/chart1.xml><?xml version="1.0" encoding="utf-8"?>
+<c:chartSpace xmlns:c="http://schemas.openxmlformats.org/drawingml/2006/chart" xmlns:a="http://schemas.openxmlformats.org/drawingml/2006/main" xmlns:r="http://schemas.openxmlformats.org/officeDocument/2006/relationships">
+  <c:date1904 val="0"/>
+  <c:roundedCorners val="1"/>
+  <c:chart>
+    <c:autoTitleDeleted val="1"/>
+    <c:plotArea>
+      <c:layout/>
+      <c:lineChart>
+        <c:varyColors val="0"/>
+        <c:ser>
+          <c:idx val="0"/>
+          <c:order val="0"/>
+          <c:tx>
+            <c:strRef>
+              <c:f>Sheet1!$B$1</c:f>
+              <c:strCache>
+                <c:ptCount val="1"/>
+                <c:pt idx="0">
+                  <c:v>PHQ-9</c:v>
+                </c:pt>
+              </c:strCache>
+            </c:strRef>
+          </c:tx>
+          <c:spPr>
+            <a:solidFill>
+              <a:srgbClr val="9C5446"/>
+            </a:solidFill>
+            <a:ln w="31750" cap="flat">
+              <a:solidFill>
+                <a:srgbClr val="9C5446"/>
+              </a:solidFill>
+              <a:prstDash val="solid"/>
+              <a:round/>
+            </a:ln>
+            <a:effectLst/>
+          </c:spPr>
+          <c:invertIfNegative val="0"/>
+          <c:dLbls>
+            <c:numFmt formatCode="#,##0" sourceLinked="0"/>
+            <c:txPr>
+              <a:bodyPr/>
+              <a:lstStyle/>
+              <a:p>
+                <a:pPr>
+                  <a:defRPr b="0" i="0" strike="noStrike" sz="1200" u="none">
+                    <a:solidFill>
+                      <a:srgbClr val="000000"/>
+                    </a:solidFill>
+                    <a:latin typeface="Arial"/>
+                  </a:defRPr>
+                </a:pPr>
+              </a:p>
+            </c:txPr>
+            <c:showLegendKey val="0"/>
+            <c:showVal val="0"/>
+            <c:showCatName val="0"/>
+            <c:showSerName val="0"/>
+            <c:showPercent val="0"/>
+            <c:showBubbleSize val="0"/>
+            <c:showLeaderLines val="0"/>
+          </c:dLbls>
+          <c:marker>
+            <c:symbol val="circle"/>
+            <c:size val="8"/>
+            <c:spPr>
+              <a:solidFill>
+                <a:srgbClr val="9C5446"/>
+              </a:solidFill>
+              <a:ln w="9525" cap="flat">
+                <a:solidFill>
+                  <a:srgbClr val="FCFAF4"/>
+                </a:solidFill>
+                <a:prstDash val="solid"/>
+                <a:round/>
+              </a:ln>
+              <a:effectLst/>
+            </c:spPr>
+          </c:marker>
+          <c:cat>
+            <c:multiLvlStrRef>
+              <c:f>Sheet1!$A$2:$A$6</c:f>
+              <c:multiLvlStrCache>
+                <c:ptCount val="5"/>
+                <c:lvl>
+                  <c:pt idx="0">
+                    <c:v>初診</c:v>
+                  </c:pt>
+                  <c:pt idx="1">
+                    <c:v>5診目</c:v>
+                  </c:pt>
+                  <c:pt idx="2">
+                    <c:v>10診目</c:v>
+                  </c:pt>
+                  <c:pt idx="3">
+                    <c:v>15診目</c:v>
+                  </c:pt>
+                  <c:pt idx="4">
+                    <c:v>20診目</c:v>
+                  </c:pt>
+                </c:lvl>
+              </c:multiLvlStrCache>
+            </c:multiLvlStrRef>
+          </c:cat>
+          <c:val>
+            <c:numRef>
+              <c:f>Sheet1!$B$2:$B$6</c:f>
+              <c:numCache>
+                <c:formatCode>General</c:formatCode>
+                <c:ptCount val="5"/>
+                <c:pt idx="0">
+                  <c:v>13</c:v>
+                </c:pt>
+                <c:pt idx="1">
+                  <c:v>17</c:v>
+                </c:pt>
+                <c:pt idx="2">
+                  <c:v>10</c:v>
+                </c:pt>
+                <c:pt idx="3">
+                  <c:v>6</c:v>
+                </c:pt>
+                <c:pt idx="4">
+                  <c:v>5</c:v>
+                </c:pt>
+              </c:numCache>
+            </c:numRef>
+          </c:val>
+          <c:smooth val="0"/>
+        </c:ser>
+        <c:dLbls>
+          <c:numFmt formatCode="#,##0" sourceLinked="0"/>
+          <c:txPr>
+            <a:bodyPr/>
+            <a:lstStyle/>
+            <a:p>
+              <a:pPr>
+                <a:defRPr b="0" i="0" strike="noStrike" sz="1200" u="none">
+                  <a:solidFill>
+                    <a:srgbClr val="000000"/>
+                  </a:solidFill>
+                  <a:latin typeface="Arial"/>
+                </a:defRPr>
+              </a:pPr>
+            </a:p>
+          </c:txPr>
+          <c:showLegendKey val="0"/>
+          <c:showVal val="0"/>
+          <c:showCatName val="0"/>
+          <c:showSerName val="0"/>
+          <c:showPercent val="0"/>
+          <c:showBubbleSize val="0"/>
+          <c:showLeaderLines val="0"/>
+        </c:dLbls>
+        <c:marker val="1"/>
+        <c:axId val="2094734554"/>
+        <c:axId val="2094734552"/>
+        <c:axId val="2094734556"/>
+      </c:lineChart>
+      <c:catAx>
+        <c:axId val="2094734554"/>
+        <c:scaling>
+          <c:orientation val="minMax"/>
+        </c:scaling>
+        <c:delete val="0"/>
+        <c:axPos val="b"/>
+        <c:numFmt formatCode="General" sourceLinked="1"/>
+        <c:majorTickMark val="out"/>
+        <c:minorTickMark val="none"/>
+        <c:tickLblPos val="low"/>
+        <c:spPr>
+          <a:ln w="12700" cap="flat">
+            <a:solidFill>
+              <a:srgbClr val="D3C7B2"/>
+            </a:solidFill>
+            <a:prstDash val="solid"/>
+            <a:round/>
+          </a:ln>
+        </c:spPr>
+        <c:txPr>
+          <a:bodyPr/>
+          <a:lstStyle/>
+          <a:p>
+            <a:pPr>
+              <a:defRPr sz="1000" b="0" i="0" u="none" strike="noStrike">
+                <a:solidFill>
+                  <a:srgbClr val="7A6E60"/>
+                </a:solidFill>
+                <a:latin typeface="游ゴシック"/>
+              </a:defRPr>
+            </a:pPr>
+            <a:endParaRPr lang="en-US"/>
+          </a:p>
+        </c:txPr>
+        <c:crossAx val="2094734552"/>
+        <c:crosses val="autoZero"/>
+        <c:auto val="1"/>
+        <c:lblAlgn val="ctr"/>
+        <c:noMultiLvlLbl val="1"/>
+      </c:catAx>
+      <c:valAx>
+        <c:axId val="2094734552"/>
+        <c:scaling>
+          <c:orientation val="minMax"/>
+          <c:max val="20"/>
+          <c:min val="0"/>
+        </c:scaling>
+        <c:delete val="0"/>
+        <c:axPos val="l"/>
+        <c:majorGridlines>
+          <c:spPr>
+            <a:ln w="12700" cap="flat">
+              <a:solidFill>
+                <a:srgbClr val="DED3C0"/>
+              </a:solidFill>
+              <a:prstDash val="solid"/>
+              <a:round/>
+            </a:ln>
+          </c:spPr>
+        </c:majorGridlines>
+        <c:numFmt formatCode="General" sourceLinked="0"/>
+        <c:majorTickMark val="out"/>
+        <c:minorTickMark val="none"/>
+        <c:tickLblPos val="nextTo"/>
+        <c:spPr>
+          <a:ln w="12700" cap="flat">
+            <a:noFill/>
+            <a:prstDash val="solid"/>
+            <a:round/>
+          </a:ln>
+        </c:spPr>
+        <c:txPr>
+          <a:bodyPr/>
+          <a:lstStyle/>
+          <a:p>
+            <a:pPr>
+              <a:defRPr sz="1000" b="0" i="0" u="none" strike="noStrike">
+                <a:solidFill>
+                  <a:srgbClr val="7A6E60"/>
+                </a:solidFill>
+                <a:latin typeface="游ゴシック"/>
+              </a:defRPr>
+            </a:pPr>
+            <a:endParaRPr lang="en-US"/>
+          </a:p>
+        </c:txPr>
+        <c:crossAx val="2094734554"/>
+        <c:crosses val="autoZero"/>
+        <c:crossBetween val="between"/>
+        <c:majorUnit val="5"/>
+      </c:valAx>
+      <c:spPr>
+        <a:solidFill>
+          <a:srgbClr val="ECE3D4"/>
+        </a:solidFill>
+        <a:ln w="12700" cap="flat">
+          <a:solidFill>
+            <a:srgbClr val="ECE3D4"/>
+          </a:solidFill>
+        </a:ln>
+        <a:effectLst/>
+      </c:spPr>
+    </c:plotArea>
+    <c:plotVisOnly val="1"/>
+    <c:dispBlanksAs val="span"/>
+  </c:chart>
+  <c:spPr>
+    <a:noFill/>
+    <a:ln>
+      <a:noFill/>
+    </a:ln>
+    <a:effectLst/>
+  </c:spPr>
+  <c:externalData r:id="rId1">
+    <c:autoUpdate val="0"/>
+  </c:externalData>
+</c:chartSpace>
 </file>
 
 <file path=ppt/notesMasters/notesMaster1.xml><?xml version="1.0" encoding="utf-8"?>
@@ -651,7 +934,7 @@
           <a:p>
             <a:r>
               <a:rPr lang="en-US" dirty="0"/>
-              <a:t>【10:15-10:45】
+              <a:t>【9:25-9:55】
 ★テーマ宣言。ここで聴衆に今日の地図を渡す。
 『東洋医学の話はしません』と絞ることで、話が締まる。欲張らない。
 ★『技法です』と言い切ることが、後半の『訓練』『環境』の話への伏線になる。</a:t>
@@ -742,7 +1025,7 @@
           <a:p>
             <a:r>
               <a:rPr lang="en-US" dirty="0"/>
-              <a:t>【10:45-12:00】
+              <a:t>【9:55-11:05】
 ★8枚目の「東洋医学、できていますか？」への答えを、ここで返す。
 四診のうち「問」だけを朱にしているのがポイント。望・聞・切は自分で取れるが、
 問診だけは患者さんに話してもらわないと1ミリも進まない。
@@ -834,7 +1117,7 @@
           <a:p>
             <a:r>
               <a:rPr lang="en-US" dirty="0"/>
-              <a:t>【12:00-13:30】
+              <a:t>【11:05-12:25】
 ★東洋医学（前スライド）と現代の疼痛診療が、同じ結論に着地することを見せる。
 「古い/新しい」の話ではなく、どちらも入口は対話だ、と。
 ★出典は必ず明示すること。原典のスライドをそのまま複写せず、要約で提示しています。
@@ -927,7 +1210,7 @@
           <a:p>
             <a:r>
               <a:rPr lang="en-US" dirty="0"/>
-              <a:t>【13:30-15:00】
+              <a:t>【12:25-13:45】
 ★ご自身の学会発表からの引用なので、堂々と出せます。
 ★②と④は傾聴そのもの。①も、聴かなければ異変に気づけない。③も、
 　困りごとを聞き出せなければ どの資源に繋ぐか決められない。
@@ -1020,7 +1303,7 @@
           <a:p>
             <a:r>
               <a:rPr lang="en-US" dirty="0"/>
-              <a:t>【15:00-17:00】
+              <a:t>【13:45-15:30】
 ★この講演でいちばん強い実例。ここを丁寧に。
 会話を実際に演じる（患者役と自分役で声色を変える）と一気に引き込めます。
 ★言いたいのは「傾聴＝優しさ」ではなく「傾聴＝安全性」。
@@ -1114,7 +1397,7 @@
           <a:p>
             <a:r>
               <a:rPr lang="en-US" dirty="0"/>
-              <a:t>【17:00-18:30】自覚のスイッチ。
+              <a:t>【15:30-16:50】自覚のスイッチ。
 ★Zoom投票をここで使う（カメラオフ100名の参加感をつくる）。
 投票を締めて結果を画面共有し、「8割の方が③ですね」と読み上げる。
 その数字が次のスライドに直結する。</a:t>
@@ -1205,7 +1488,7 @@
           <a:p>
             <a:r>
               <a:rPr lang="en-US" dirty="0"/>
-              <a:t>【18:30-19:15】
+              <a:t>【16:50-17:30】
 ★ここで責めると問合せは来ない。必ず逃げ道を用意する。
 「習っていないだけ」＝『習えば変わる』への伏線。</a:t>
             </a:r>
@@ -1295,7 +1578,7 @@
           <a:p>
             <a:r>
               <a:rPr lang="en-US" dirty="0"/>
-              <a:t>【19:15-20:45】
+              <a:t>【17:30-18:45】
 ★ご自身の第4報のデータ。数字はPDFの記載どおりです。発表前に最新値をご確認ください。
 ★締めの一行がこのスライドの主役。
 　「受診を迷っている方が来る」＝だからレッドフラッグを拾う耳が要る、
@@ -1388,7 +1671,7 @@
           <a:p>
             <a:r>
               <a:rPr lang="en-US" dirty="0"/>
-              <a:t>【20:45-21:30】
+              <a:t>【18:45-19:20】
 この講演を貫く一行。ここで一度置いて、最後（53枚目）で同じ言葉に戻る。
 読んだあと一拍おいてから次へ。急がない。</a:t>
             </a:r>
@@ -1478,7 +1761,7 @@
           <a:p>
             <a:r>
               <a:rPr lang="en-US" dirty="0"/>
-              <a:t>【21:30-22:45】
+              <a:t>【19:20-20:25】
 言い切る。ここで『え、違うの？』という顔をさせたい。
 特に③は多くの人が『我慢すること』だと思っている。</a:t>
             </a:r>
@@ -1658,7 +1941,7 @@
           <a:p>
             <a:r>
               <a:rPr lang="en-US" dirty="0"/>
-              <a:t>【22:45-24:15】
+              <a:t>【20:25-21:45】
 ロジャーズをそのまま説明すると眠くなる。必ず鍼灸の言葉に翻訳して話す。
 『証を立てる前に』のくだりが、この講演でいちばん鍼灸師に刺さる言い回し。</a:t>
             </a:r>
@@ -1748,7 +2031,7 @@
           <a:p>
             <a:r>
               <a:rPr lang="en-US" dirty="0"/>
-              <a:t>【24:15-25:30】沈黙は『気を待つ』のと同じ、と重ねると鍼灸師には一発で伝わる。</a:t>
+              <a:t>【21:45-22:50】沈黙は『気を待つ』のと同じ、と重ねると鍼灸師には一発で伝わる。</a:t>
             </a:r>
             <a:endParaRPr lang="en-US" dirty="0"/>
           </a:p>
@@ -1836,7 +2119,7 @@
           <a:p>
             <a:r>
               <a:rPr lang="en-US" dirty="0"/>
-              <a:t>【25:30-26:45】その場で1回、声に出して実演してみせるとよい。
+              <a:t>【22:50-23:55】その場で1回、声に出して実演してみせるとよい。
 ★実例を足すなら：「薬が怖い」と言われたとき、
 　『どんなところが怖いですか？』『どうしてそう思うんですか？』と返すだけ。
 　それで出てきた不安を、主治医に相談できる形に整理して渡す。
@@ -1928,7 +2211,7 @@
           <a:p>
             <a:r>
               <a:rPr lang="en-US" dirty="0"/>
-              <a:t>【26:45-27:50】ここで『訓練』という言葉を初めて出す。後半のサロンの話への伏線。</a:t>
+              <a:t>【23:55-24:55】ここで『訓練』という言葉を初めて出す。後半のサロンの話への伏線。</a:t>
             </a:r>
             <a:endParaRPr lang="en-US" dirty="0"/>
           </a:p>
@@ -2016,7 +2299,7 @@
           <a:p>
             <a:r>
               <a:rPr lang="en-US" dirty="0"/>
-              <a:t>【27:50-28:20】
+              <a:t>【24:55-25:20】
 ワークへの切り替え。ここで声のトーンを一段上げる。</a:t>
             </a:r>
             <a:endParaRPr lang="en-US" dirty="0"/>
@@ -2105,7 +2388,7 @@
           <a:p>
             <a:r>
               <a:rPr lang="en-US" dirty="0"/>
-              <a:t>【28:20-29:00】
+              <a:t>【25:20-26:00】
 ★制約を『わざとそうした』に変える。ここで場の空気が一段変わる。
 『カメラはオフのままで大丈夫』は必ず言う。言うほど参加率が上がる。</a:t>
             </a:r>
@@ -2195,7 +2478,7 @@
           <a:p>
             <a:r>
               <a:rPr lang="en-US" dirty="0"/>
-              <a:t>【29:00-30:00】
+              <a:t>【26:00-27:00】
 ★カメラオフでも100%全員が当事者になる、唯一のワーク。絶対に削らない。
 『紙とペン』は開始前アナウンスでも流してもらうこと。
 録画で見ている方へ：「ここで一時停止してください」と一言添える。</a:t>
@@ -2286,7 +2569,7 @@
           <a:p>
             <a:r>
               <a:rPr lang="en-US" dirty="0"/>
-              <a:t>【30:00-31:30】
+              <a:t>【27:00-28:30】
 ここは黙る。BGMを小さくかけてもよい。
 タイマーはスマホか腕時計で計る（PowerPointは自動カウントダウンできません）。
 途中で話しかけない。60秒過ぎたら次のスライドへ。</a:t>
@@ -2377,7 +2660,7 @@
           <a:p>
             <a:r>
               <a:rPr lang="en-US" dirty="0"/>
-              <a:t>【31:30-32:00】
+              <a:t>【28:30-29:00】
 無言でこのスライドに切り替えるだけ。声はかけない。</a:t>
             </a:r>
             <a:endParaRPr lang="en-US" dirty="0"/>
@@ -2466,7 +2749,7 @@
           <a:p>
             <a:r>
               <a:rPr lang="en-US" dirty="0"/>
-              <a:t>【32:00-33:30】
+              <a:t>【29:00-30:20】
 ★数字1文字なら100名でも一気に流れる。
 「0」「1」が並ぶ光景そのものがメッセージ。『ほら、みなさん同じです』と拾う。
 ★サロンメンバー1〜2名に、最初に投げる役を頼んでおくこと（口火を切る役）。</a:t>
@@ -2557,7 +2840,7 @@
           <a:p>
             <a:r>
               <a:rPr lang="en-US" dirty="0"/>
-              <a:t>【1:20-3:00】
+              <a:t>【1:20-2:50】
 「これは医師を対象にした研究です」と必ず断る。鍼灸師のデータではない。
 最後の一行で、問題提起から一転して『鍼灸師は聴ける職種』という誇りを立てる。</a:t>
             </a:r>
@@ -2647,7 +2930,7 @@
           <a:p>
             <a:r>
               <a:rPr lang="en-US" dirty="0"/>
-              <a:t>【33:30-34:00】
+              <a:t>【30:20-30:50】
 次の10枚が1秒ずつのカウントダウンスライドです。
 ★事前設定：カウントダウン10枚を選択 →「画面切り替え」→「自動的に切り替え 00:01」
 　クリック時のチェックは外す。これで自動で10秒進みます。</a:t>
@@ -3537,7 +3820,7 @@
           <a:p>
             <a:r>
               <a:rPr lang="en-US" dirty="0"/>
-              <a:t>【3:00-4:30】
+              <a:t>【2:50-4:10】
 ★非常に個人的な開示です。話すかどうかは、ご自身で決めてください。
 　削除しても講演は成立します。ただ、この講演では最も強い一枚になり得ます。
 淡々と言う。同情を求めない。事実だけ置いて、最後の一行に重心をかける。
@@ -3717,7 +4000,7 @@
           <a:p>
             <a:r>
               <a:rPr lang="en-US" dirty="0"/>
-              <a:t>【34:10-35:00】
+              <a:t>【31:00-31:50】
 『あなたが沈黙をつぶしている理由』——ここは責めるトーンにしない。
 自分もそうだった、という言い方で。</a:t>
             </a:r>
@@ -3807,7 +4090,7 @@
           <a:p>
             <a:r>
               <a:rPr lang="en-US" dirty="0"/>
-              <a:t>【35:00-35:40】
+              <a:t>【31:50-32:30】
 ★音声は事前録音しておく（パターンA・B 各60秒）。生の実演はぶれる。
 相方はサロンメンバーに依頼。音量を揃えること。
 ★Zoomの画面共有で「コンピューターの音声を共有」を必ずON。リハで要テスト。</a:t>
@@ -3898,7 +4181,7 @@
           <a:p>
             <a:r>
               <a:rPr lang="en-US" dirty="0"/>
-              <a:t>【35:40-39:30】
+              <a:t>【32:30-36:10】
 2本の音声を流したあと、このスライドで問いかける。
 答えは待たなくていい。次のスライドで言い切る。</a:t>
             </a:r>
@@ -3988,7 +4271,7 @@
           <a:p>
             <a:r>
               <a:rPr lang="en-US" dirty="0"/>
-              <a:t>【39:30-40:00】
+              <a:t>【36:10-36:40】
 この講演でいちばん強いメッセージ。ゆっくり、間を空けて言う。
 『優しくしましょう』では鍼灸師は動かない。『情報が取れる』なら動く。</a:t>
             </a:r>
@@ -4078,7 +4361,7 @@
           <a:p>
             <a:r>
               <a:rPr lang="en-US" dirty="0"/>
-              <a:t>【40:00-42:30】
+              <a:t>【36:40-39:00】
 ★一斉送信にすることで『自分だけ書く』恥ずかしさが消える。
 ★共同ホストに事前依頼：流れてきた投稿を3つコピーしておいてもらう。
 ★『全部は読めません、3つだけ』を先に宣言（読まれない不満を防ぐ）。
@@ -4170,7 +4453,7 @@
           <a:p>
             <a:r>
               <a:rPr lang="en-US" dirty="0"/>
-              <a:t>【42:30-43:00】
+              <a:t>【39:00-39:30】
 ★希望のピーク。ここで聴衆は『やってみたい』状態。
 『あとで出しますが、先に撮っておきたい方はどうぞ』と一言だけ。売り込まない。
 ★QR画像を貼り替えてください（点線枠を削除して画像を配置）。</a:t>
@@ -4261,7 +4544,7 @@
           <a:p>
             <a:r>
               <a:rPr lang="en-US" dirty="0"/>
-              <a:t>【43:00-43:45】
+              <a:t>【39:30-40:10】
 先に3つ見せてから、1枚ずつ展開する（地図を渡してから歩く）。</a:t>
             </a:r>
             <a:endParaRPr lang="en-US" dirty="0"/>
@@ -4350,7 +4633,7 @@
           <a:p>
             <a:r>
               <a:rPr lang="en-US" dirty="0"/>
-              <a:t>【43:45-45:45】『90秒』という具体的な数字が、持ち帰りやすさを決める。ここを一番ゆっくり話す。</a:t>
+              <a:t>【40:10-41:50】『90秒』という具体的な数字が、持ち帰りやすさを決める。ここを一番ゆっくり話す。</a:t>
             </a:r>
             <a:endParaRPr lang="en-US" dirty="0"/>
           </a:p>
@@ -4438,7 +4721,7 @@
           <a:p>
             <a:r>
               <a:rPr lang="en-US" dirty="0"/>
-              <a:t>【45:45-47:15】その場で1回、声に出して実演してみせるとよい。</a:t>
+              <a:t>【41:50-43:10】その場で1回、声に出して実演してみせるとよい。</a:t>
             </a:r>
             <a:endParaRPr lang="en-US" dirty="0"/>
           </a:p>
@@ -4526,7 +4809,7 @@
           <a:p>
             <a:r>
               <a:rPr lang="en-US" dirty="0"/>
-              <a:t>【4:30-5:45】
+              <a:t>【4:10-5:20】
 自己開示。ここが弱いと、後半すべてが『上手い人の話』になって他人事になる。
 エピソードは1つだけ。具体的に、短く。
 ※ここに当時の写真を1枚入れてもよい。</a:t>
@@ -4617,7 +4900,7 @@
           <a:p>
             <a:r>
               <a:rPr lang="en-US" dirty="0"/>
-              <a:t>【47:15-48:45】✕と◯の対比は音読する。耳だけで聴いている人がいる。</a:t>
+              <a:t>【43:10-44:30】✕と◯の対比は音読する。耳だけで聴いている人がいる。</a:t>
             </a:r>
             <a:endParaRPr lang="en-US" dirty="0"/>
           </a:p>
@@ -4705,13 +4988,10 @@
           <a:p>
             <a:r>
               <a:rPr lang="en-US" dirty="0"/>
-              <a:t>【48:45-50:15】
-★「症状が良くなりました」ではなく「生活が動きました」で語る。
-　鍼灸師の聴衆には、こちらのほうが圧倒的に刺さります。
-★締めの2行が、次の『私の失敗（ひとりでやると壊れます）』への橋です。
-　抱え込まないこと、外に繋ぐこと。ここを言っておくと、
-　後半のサロン／ここちはりの話が『仲間が要る』という文脈で通ります。
-※個別の症例を語る場合は、個人が特定されない形で。掲載許可の確認を。</a:t>
+              <a:t>【44:30-45:40】
+★共同演者（松浦悠人先生・柴田健一先生）のお名前と学会名・年をご確認ください。
+『目標：働くこと』を必ず読む。これが傾聴で聴き取った治療目標です。
+症状ではなく、その人が何をしたいのか。ここが後半の型②③に繋がります。</a:t>
             </a:r>
             <a:endParaRPr lang="en-US" dirty="0"/>
           </a:p>
@@ -4799,10 +5079,11 @@
           <a:p>
             <a:r>
               <a:rPr lang="en-US" dirty="0"/>
-              <a:t>【50:15-51:45】
-★ここが、後半への唯一の橋。飛ばすと最後がただの宣伝になる。
-弱さを見せることで、次のスライドの提案が『売り込み』でなく『招待』になる。
-声を落として、ゆっくり。</a:t>
+              <a:t>【45:40-46:50】
+★ここを丁寧にやると、鍼灸師の聴衆が『自分にもできる』と思えます。
+　奇をてらった手技は使っていない、と言い切ること。
+★締めの一行が重要：差は鍼灸の腕ではなく、上に乗せた傾聴にある、という含み。
+　言い過ぎない。「特別なことはしていません」で止めて、次のスライドへ。</a:t>
             </a:r>
             <a:endParaRPr lang="en-US" dirty="0"/>
           </a:p>
@@ -4890,9 +5171,13 @@
           <a:p>
             <a:r>
               <a:rPr lang="en-US" dirty="0"/>
-              <a:t>【51:45-53:00】
-★『できない自分が悪い』を『環境がなかっただけ』に変える。
-ここまで来て初めて、場の提案が自然になる。</a:t>
+              <a:t>【46:50-48:20】
+★この講演の核心スライド。いちばん時間をかけてよい場所です。
+受容共感 → 情報整理 → 行動と問題の焦点化 → 感情の認知。
+いきなり4段目をやると失敗します。信頼ができる前に感情に触れない。
+★「順番がある」＝「学べる」ということ。
+　才能の話ではないという、この講演全体の主張がここで実証されます。
+　57枚目『独学で伸びない理由』への最短の橋になります。</a:t>
             </a:r>
             <a:endParaRPr lang="en-US" dirty="0"/>
           </a:p>
@@ -4980,9 +5265,13 @@
           <a:p>
             <a:r>
               <a:rPr lang="en-US" dirty="0"/>
-              <a:t>【53:00-54:15】
-★『学ぶ場』ではなく『伴走する場』と言い切る。ここが差別化。
-※サロンの様子の写真（salon-zoom.png / training-workshop.jpg）を入れてもよい。</a:t>
+              <a:t>【48:20-49:30】
+★5診目で いったん上がっている（13→17）ことを隠さない。
+　「最初はむしろ上がりました」と正直に言うほうが、信頼されます。
+　※理由は症例報告では述べられていないので、推測を語らないこと。
+★PHQ-15（身体症状）がほぼ横ばいであることも、そのまま伝える。
+　過大に言わないことが、この講演全体の誠実さを担保します。
+締めの一行は、静かに。「入院は、回避できました」</a:t>
             </a:r>
             <a:endParaRPr lang="en-US" dirty="0"/>
           </a:p>
@@ -5070,10 +5359,13 @@
           <a:p>
             <a:r>
               <a:rPr lang="en-US" dirty="0"/>
-              <a:t>【54:15-55:15】
-★主語を必ずメンバーにする。自分の実績にしない。
-『あの人にできたなら、私にも』という自己投影が、問合せを生む。
-※許可済みの写真や声を1〜2つ入れると、さらに効きます。</a:t>
+              <a:t>【49:30-50:10】
+★「症状が良くなりました」ではなく「生活が動きました」で語る。
+　鍼灸師の聴衆には、こちらのほうが圧倒的に刺さります。
+★締めの2行が、次の『私の失敗（ひとりでやると壊れます）』への橋です。
+　抱え込まないこと、外に繋ぐこと。ここを言っておくと、
+　後半のサロン／ここちはりの話が『仲間が要る』という文脈で通ります。
+※個別の症例を語る場合は、個人が特定されない形で。掲載許可の確認を。</a:t>
             </a:r>
             <a:endParaRPr lang="en-US" dirty="0"/>
           </a:p>
@@ -5161,10 +5453,10 @@
           <a:p>
             <a:r>
               <a:rPr lang="en-US" dirty="0"/>
-              <a:t>【55:15-56:15】
-★ここで初めて『メンター』という言葉を出す。
-「1対1で伴走してほしい、という方には こちらがあります」
-売り込まない。選択肢として置くだけ。</a:t>
+              <a:t>【50:10-51:30】
+★ここが、後半への唯一の橋。飛ばすと最後がただの宣伝になる。
+弱さを見せることで、次のスライドの提案が『売り込み』でなく『招待』になる。
+声を落として、ゆっくり。</a:t>
             </a:r>
             <a:endParaRPr lang="en-US" dirty="0"/>
           </a:p>
@@ -5252,9 +5544,9 @@
           <a:p>
             <a:r>
               <a:rPr lang="en-US" dirty="0"/>
-              <a:t>【56:15-57:00】
-★持ち帰りは必ず1つに絞る。3つ渡すと0個になる。
-数字（90秒）が入っていることが重要。抽象的な標語は持ち帰れない。</a:t>
+              <a:t>【51:30-52:40】
+★『できない自分が悪い』を『環境がなかっただけ』に変える。
+ここまで来て初めて、場の提案が自然になる。</a:t>
             </a:r>
             <a:endParaRPr lang="en-US" dirty="0"/>
           </a:p>
@@ -5342,9 +5634,9 @@
           <a:p>
             <a:r>
               <a:rPr lang="en-US" dirty="0"/>
-              <a:t>【57:00-57:45】
-冒頭（12枚目）と同じ言葉で閉じる。
-読んだあと、3秒 黙る。ここで拍手が来る設計。</a:t>
+              <a:t>【52:40-53:50】
+★『学ぶ場』ではなく『伴走する場』と言い切る。ここが差別化。
+※サロンの様子の写真（salon-zoom.png / training-workshop.jpg）を入れてもよい。</a:t>
             </a:r>
             <a:endParaRPr lang="en-US" dirty="0"/>
           </a:p>
@@ -5432,15 +5724,10 @@
           <a:p>
             <a:r>
               <a:rPr lang="en-US" dirty="0"/>
-              <a:t>【57:45-60:00】
-★このスライドを30秒 黙って映す。読み取り待ち。ここを急ぐと激減します。
-★Q&amp;Aの間も、このスライドを出しっぱなしにする。
-★チャットにも同じリンクを投下（事前にメモ帳に用意してコピペ／共同ホストに依頼）。
-　ただしチャットは録画に残らないので、画面表示が本体です。
-★短縮URLは口頭でも読み上げる（音声だけで聴いている人がいます）。
-【Q&amp;Aのコツ】
-質問には即答せず、まず「その患者さん、なんて仰ってました？」と聴き返す。
-傾聴の実演が、いちばん強い営業になります。</a:t>
+              <a:t>【53:50-54:45】
+★主語を必ずメンバーにする。自分の実績にしない。
+『あの人にできたなら、私にも』という自己投影が、問合せを生む。
+※許可済みの写真や声を1〜2つ入れると、さらに効きます。</a:t>
             </a:r>
             <a:endParaRPr lang="en-US" dirty="0"/>
           </a:p>
@@ -5528,7 +5815,7 @@
           <a:p>
             <a:r>
               <a:rPr lang="en-US" dirty="0"/>
-              <a:t>【5:45-6:45】
+              <a:t>【5:20-6:15】
 傾聴で何が変わったかを、症状の改善ではなく『関係・継続・自分の消耗度』で語る。
 数字は信頼の担保として置くだけ。誇らない。</a:t>
             </a:r>
@@ -5554,6 +5841,373 @@
             <a:fld id="{F7021451-1387-4CA6-816F-3879F97B5CBC}" type="slidenum">
               <a:rPr lang="en-US"/>
               <a:t>6</a:t>
+            </a:fld>
+            <a:endParaRPr lang="en-US"/>
+          </a:p>
+        </p:txBody>
+      </p:sp>
+    </p:spTree>
+    <p:extLst>
+      <p:ext uri="{BB962C8B-B14F-4D97-AF65-F5344CB8AC3E}">
+        <p14:creationId xmlns:p14="http://schemas.microsoft.com/office/powerpoint/2010/main" val="1024086991"/>
+      </p:ext>
+    </p:extLst>
+  </p:cSld>
+  <p:clrMapOvr>
+    <a:masterClrMapping/>
+  </p:clrMapOvr>
+</p:notes>
+</file>
+
+<file path=ppt/notesSlides/notesSlide60.xml><?xml version="1.0" encoding="utf-8"?>
+<p:notes xmlns:a="http://schemas.openxmlformats.org/drawingml/2006/main" xmlns:r="http://schemas.openxmlformats.org/officeDocument/2006/relationships" xmlns:p="http://schemas.openxmlformats.org/presentationml/2006/main">
+  <p:cSld>
+    <p:spTree>
+      <p:nvGrpSpPr>
+        <p:cNvPr id="1" name=""/>
+        <p:cNvGrpSpPr/>
+        <p:nvPr/>
+      </p:nvGrpSpPr>
+      <p:grpSpPr>
+        <a:xfrm>
+          <a:off x="0" y="0"/>
+          <a:ext cx="0" cy="0"/>
+          <a:chOff x="0" y="0"/>
+          <a:chExt cx="0" cy="0"/>
+        </a:xfrm>
+      </p:grpSpPr>
+      <p:sp>
+        <p:nvSpPr>
+          <p:cNvPr id="2" name="Slide Image Placeholder 1"/>
+          <p:cNvSpPr>
+            <a:spLocks noGrp="1" noRot="1" noChangeAspect="1"/>
+          </p:cNvSpPr>
+          <p:nvPr>
+            <p:ph type="sldImg"/>
+          </p:nvPr>
+        </p:nvSpPr>
+        <p:spPr/>
+      </p:sp>
+      <p:sp>
+        <p:nvSpPr>
+          <p:cNvPr id="3" name="Notes Placeholder 2"/>
+          <p:cNvSpPr>
+            <a:spLocks noGrp="1"/>
+          </p:cNvSpPr>
+          <p:nvPr>
+            <p:ph type="body" idx="1"/>
+          </p:nvPr>
+        </p:nvSpPr>
+        <p:spPr/>
+        <p:txBody>
+          <a:bodyPr/>
+          <a:lstStyle/>
+          <a:p>
+            <a:r>
+              <a:rPr lang="en-US" dirty="0"/>
+              <a:t>【54:45-55:45】
+★ここで初めて『メンター』という言葉を出す。
+「1対1で伴走してほしい、という方には こちらがあります」
+売り込まない。選択肢として置くだけ。</a:t>
+            </a:r>
+            <a:endParaRPr lang="en-US" dirty="0"/>
+          </a:p>
+        </p:txBody>
+      </p:sp>
+      <p:sp>
+        <p:nvSpPr>
+          <p:cNvPr id="4" name="Slide Number Placeholder 3"/>
+          <p:cNvSpPr>
+            <a:spLocks noGrp="1"/>
+          </p:cNvSpPr>
+          <p:nvPr>
+            <p:ph type="sldNum" sz="quarter" idx="10"/>
+          </p:nvPr>
+        </p:nvSpPr>
+        <p:spPr/>
+        <p:txBody>
+          <a:bodyPr/>
+          <a:lstStyle/>
+          <a:p>
+            <a:fld id="{F7021451-1387-4CA6-816F-3879F97B5CBC}" type="slidenum">
+              <a:rPr lang="en-US"/>
+              <a:t>60</a:t>
+            </a:fld>
+            <a:endParaRPr lang="en-US"/>
+          </a:p>
+        </p:txBody>
+      </p:sp>
+    </p:spTree>
+    <p:extLst>
+      <p:ext uri="{BB962C8B-B14F-4D97-AF65-F5344CB8AC3E}">
+        <p14:creationId xmlns:p14="http://schemas.microsoft.com/office/powerpoint/2010/main" val="1024086991"/>
+      </p:ext>
+    </p:extLst>
+  </p:cSld>
+  <p:clrMapOvr>
+    <a:masterClrMapping/>
+  </p:clrMapOvr>
+</p:notes>
+</file>
+
+<file path=ppt/notesSlides/notesSlide61.xml><?xml version="1.0" encoding="utf-8"?>
+<p:notes xmlns:a="http://schemas.openxmlformats.org/drawingml/2006/main" xmlns:r="http://schemas.openxmlformats.org/officeDocument/2006/relationships" xmlns:p="http://schemas.openxmlformats.org/presentationml/2006/main">
+  <p:cSld>
+    <p:spTree>
+      <p:nvGrpSpPr>
+        <p:cNvPr id="1" name=""/>
+        <p:cNvGrpSpPr/>
+        <p:nvPr/>
+      </p:nvGrpSpPr>
+      <p:grpSpPr>
+        <a:xfrm>
+          <a:off x="0" y="0"/>
+          <a:ext cx="0" cy="0"/>
+          <a:chOff x="0" y="0"/>
+          <a:chExt cx="0" cy="0"/>
+        </a:xfrm>
+      </p:grpSpPr>
+      <p:sp>
+        <p:nvSpPr>
+          <p:cNvPr id="2" name="Slide Image Placeholder 1"/>
+          <p:cNvSpPr>
+            <a:spLocks noGrp="1" noRot="1" noChangeAspect="1"/>
+          </p:cNvSpPr>
+          <p:nvPr>
+            <p:ph type="sldImg"/>
+          </p:nvPr>
+        </p:nvSpPr>
+        <p:spPr/>
+      </p:sp>
+      <p:sp>
+        <p:nvSpPr>
+          <p:cNvPr id="3" name="Notes Placeholder 2"/>
+          <p:cNvSpPr>
+            <a:spLocks noGrp="1"/>
+          </p:cNvSpPr>
+          <p:nvPr>
+            <p:ph type="body" idx="1"/>
+          </p:nvPr>
+        </p:nvSpPr>
+        <p:spPr/>
+        <p:txBody>
+          <a:bodyPr/>
+          <a:lstStyle/>
+          <a:p>
+            <a:r>
+              <a:rPr lang="en-US" dirty="0"/>
+              <a:t>【55:45-56:40】
+★持ち帰りは必ず1つに絞る。3つ渡すと0個になる。
+数字（90秒）が入っていることが重要。抽象的な標語は持ち帰れない。</a:t>
+            </a:r>
+            <a:endParaRPr lang="en-US" dirty="0"/>
+          </a:p>
+        </p:txBody>
+      </p:sp>
+      <p:sp>
+        <p:nvSpPr>
+          <p:cNvPr id="4" name="Slide Number Placeholder 3"/>
+          <p:cNvSpPr>
+            <a:spLocks noGrp="1"/>
+          </p:cNvSpPr>
+          <p:nvPr>
+            <p:ph type="sldNum" sz="quarter" idx="10"/>
+          </p:nvPr>
+        </p:nvSpPr>
+        <p:spPr/>
+        <p:txBody>
+          <a:bodyPr/>
+          <a:lstStyle/>
+          <a:p>
+            <a:fld id="{F7021451-1387-4CA6-816F-3879F97B5CBC}" type="slidenum">
+              <a:rPr lang="en-US"/>
+              <a:t>61</a:t>
+            </a:fld>
+            <a:endParaRPr lang="en-US"/>
+          </a:p>
+        </p:txBody>
+      </p:sp>
+    </p:spTree>
+    <p:extLst>
+      <p:ext uri="{BB962C8B-B14F-4D97-AF65-F5344CB8AC3E}">
+        <p14:creationId xmlns:p14="http://schemas.microsoft.com/office/powerpoint/2010/main" val="1024086991"/>
+      </p:ext>
+    </p:extLst>
+  </p:cSld>
+  <p:clrMapOvr>
+    <a:masterClrMapping/>
+  </p:clrMapOvr>
+</p:notes>
+</file>
+
+<file path=ppt/notesSlides/notesSlide62.xml><?xml version="1.0" encoding="utf-8"?>
+<p:notes xmlns:a="http://schemas.openxmlformats.org/drawingml/2006/main" xmlns:r="http://schemas.openxmlformats.org/officeDocument/2006/relationships" xmlns:p="http://schemas.openxmlformats.org/presentationml/2006/main">
+  <p:cSld>
+    <p:spTree>
+      <p:nvGrpSpPr>
+        <p:cNvPr id="1" name=""/>
+        <p:cNvGrpSpPr/>
+        <p:nvPr/>
+      </p:nvGrpSpPr>
+      <p:grpSpPr>
+        <a:xfrm>
+          <a:off x="0" y="0"/>
+          <a:ext cx="0" cy="0"/>
+          <a:chOff x="0" y="0"/>
+          <a:chExt cx="0" cy="0"/>
+        </a:xfrm>
+      </p:grpSpPr>
+      <p:sp>
+        <p:nvSpPr>
+          <p:cNvPr id="2" name="Slide Image Placeholder 1"/>
+          <p:cNvSpPr>
+            <a:spLocks noGrp="1" noRot="1" noChangeAspect="1"/>
+          </p:cNvSpPr>
+          <p:nvPr>
+            <p:ph type="sldImg"/>
+          </p:nvPr>
+        </p:nvSpPr>
+        <p:spPr/>
+      </p:sp>
+      <p:sp>
+        <p:nvSpPr>
+          <p:cNvPr id="3" name="Notes Placeholder 2"/>
+          <p:cNvSpPr>
+            <a:spLocks noGrp="1"/>
+          </p:cNvSpPr>
+          <p:nvPr>
+            <p:ph type="body" idx="1"/>
+          </p:nvPr>
+        </p:nvSpPr>
+        <p:spPr/>
+        <p:txBody>
+          <a:bodyPr/>
+          <a:lstStyle/>
+          <a:p>
+            <a:r>
+              <a:rPr lang="en-US" dirty="0"/>
+              <a:t>【56:40-57:30】
+冒頭（12枚目）と同じ言葉で閉じる。
+読んだあと、3秒 黙る。ここで拍手が来る設計。</a:t>
+            </a:r>
+            <a:endParaRPr lang="en-US" dirty="0"/>
+          </a:p>
+        </p:txBody>
+      </p:sp>
+      <p:sp>
+        <p:nvSpPr>
+          <p:cNvPr id="4" name="Slide Number Placeholder 3"/>
+          <p:cNvSpPr>
+            <a:spLocks noGrp="1"/>
+          </p:cNvSpPr>
+          <p:nvPr>
+            <p:ph type="sldNum" sz="quarter" idx="10"/>
+          </p:nvPr>
+        </p:nvSpPr>
+        <p:spPr/>
+        <p:txBody>
+          <a:bodyPr/>
+          <a:lstStyle/>
+          <a:p>
+            <a:fld id="{F7021451-1387-4CA6-816F-3879F97B5CBC}" type="slidenum">
+              <a:rPr lang="en-US"/>
+              <a:t>62</a:t>
+            </a:fld>
+            <a:endParaRPr lang="en-US"/>
+          </a:p>
+        </p:txBody>
+      </p:sp>
+    </p:spTree>
+    <p:extLst>
+      <p:ext uri="{BB962C8B-B14F-4D97-AF65-F5344CB8AC3E}">
+        <p14:creationId xmlns:p14="http://schemas.microsoft.com/office/powerpoint/2010/main" val="1024086991"/>
+      </p:ext>
+    </p:extLst>
+  </p:cSld>
+  <p:clrMapOvr>
+    <a:masterClrMapping/>
+  </p:clrMapOvr>
+</p:notes>
+</file>
+
+<file path=ppt/notesSlides/notesSlide63.xml><?xml version="1.0" encoding="utf-8"?>
+<p:notes xmlns:a="http://schemas.openxmlformats.org/drawingml/2006/main" xmlns:r="http://schemas.openxmlformats.org/officeDocument/2006/relationships" xmlns:p="http://schemas.openxmlformats.org/presentationml/2006/main">
+  <p:cSld>
+    <p:spTree>
+      <p:nvGrpSpPr>
+        <p:cNvPr id="1" name=""/>
+        <p:cNvGrpSpPr/>
+        <p:nvPr/>
+      </p:nvGrpSpPr>
+      <p:grpSpPr>
+        <a:xfrm>
+          <a:off x="0" y="0"/>
+          <a:ext cx="0" cy="0"/>
+          <a:chOff x="0" y="0"/>
+          <a:chExt cx="0" cy="0"/>
+        </a:xfrm>
+      </p:grpSpPr>
+      <p:sp>
+        <p:nvSpPr>
+          <p:cNvPr id="2" name="Slide Image Placeholder 1"/>
+          <p:cNvSpPr>
+            <a:spLocks noGrp="1" noRot="1" noChangeAspect="1"/>
+          </p:cNvSpPr>
+          <p:nvPr>
+            <p:ph type="sldImg"/>
+          </p:nvPr>
+        </p:nvSpPr>
+        <p:spPr/>
+      </p:sp>
+      <p:sp>
+        <p:nvSpPr>
+          <p:cNvPr id="3" name="Notes Placeholder 2"/>
+          <p:cNvSpPr>
+            <a:spLocks noGrp="1"/>
+          </p:cNvSpPr>
+          <p:nvPr>
+            <p:ph type="body" idx="1"/>
+          </p:nvPr>
+        </p:nvSpPr>
+        <p:spPr/>
+        <p:txBody>
+          <a:bodyPr/>
+          <a:lstStyle/>
+          <a:p>
+            <a:r>
+              <a:rPr lang="en-US" dirty="0"/>
+              <a:t>【57:30-60:00】
+★このスライドを30秒 黙って映す。読み取り待ち。ここを急ぐと激減します。
+★Q&amp;Aの間も、このスライドを出しっぱなしにする。
+★チャットにも同じリンクを投下（事前にメモ帳に用意してコピペ／共同ホストに依頼）。
+　ただしチャットは録画に残らないので、画面表示が本体です。
+★短縮URLは口頭でも読み上げる（音声だけで聴いている人がいます）。
+【Q&amp;Aのコツ】
+質問には即答せず、まず「その患者さん、なんて仰ってました？」と聴き返す。
+傾聴の実演が、いちばん強い営業になります。</a:t>
+            </a:r>
+            <a:endParaRPr lang="en-US" dirty="0"/>
+          </a:p>
+        </p:txBody>
+      </p:sp>
+      <p:sp>
+        <p:nvSpPr>
+          <p:cNvPr id="4" name="Slide Number Placeholder 3"/>
+          <p:cNvSpPr>
+            <a:spLocks noGrp="1"/>
+          </p:cNvSpPr>
+          <p:nvPr>
+            <p:ph type="sldNum" sz="quarter" idx="10"/>
+          </p:nvPr>
+        </p:nvSpPr>
+        <p:spPr/>
+        <p:txBody>
+          <a:bodyPr/>
+          <a:lstStyle/>
+          <a:p>
+            <a:fld id="{F7021451-1387-4CA6-816F-3879F97B5CBC}" type="slidenum">
+              <a:rPr lang="en-US"/>
+              <a:t>63</a:t>
             </a:fld>
             <a:endParaRPr lang="en-US"/>
           </a:p>
@@ -5618,7 +6272,7 @@
           <a:p>
             <a:r>
               <a:rPr lang="en-US" dirty="0"/>
-              <a:t>【6:45-8:00】20秒で流す。
+              <a:t>【6:15-7:20】20秒で流す。
 「詳しくは最後に」と言って進む＝最後まで残る理由をつくる。
 実績の羅列にならないよう、早口にならず淡々と。</a:t>
             </a:r>
@@ -5708,7 +6362,7 @@
           <a:p>
             <a:r>
               <a:rPr lang="en-US" dirty="0"/>
-              <a:t>【8:00-9:15】
+              <a:t>【7:20-8:30】
 ★『40分あります』（3枚目）を受けて、「実際、医師の先生方からもこう言われます」と繋ぐ。
 ★これは調査データではなく、ご自身が言われてきた実感として話すこと。
 　「私が言われるのは」「よく言われるのは」という言い方で。データとして提示しない。
@@ -5800,7 +6454,7 @@
           <a:p>
             <a:r>
               <a:rPr lang="en-US" dirty="0"/>
-              <a:t>【9:15-10:15】
+              <a:t>【8:30-9:25】
 ★講演でいちばん空気が変わる場所。ここは急がない。
 2つの問いを読んだあと、必ず3秒黙る。会場（画面の向こう）に考えさせる。
 最後の一行は、自分のこととして静かに言う。責める調子にしない。
@@ -24660,7 +25314,7 @@
         <p:spPr>
           <a:xfrm>
             <a:off x="731520" y="310896"/>
-            <a:ext cx="10728655" cy="260292"/>
+            <a:ext cx="10728655" cy="266955"/>
           </a:xfrm>
           <a:prstGeom prst="rect">
             <a:avLst/>
@@ -24684,7 +25338,7 @@
                 <a:ea typeface="游ゴシック" pitchFamily="34" charset="-122"/>
                 <a:cs typeface="游ゴシック" pitchFamily="34" charset="-120"/>
               </a:rPr>
-              <a:t>明日からの臨床</a:t>
+              <a:t>症例</a:t>
             </a:r>
             <a:endParaRPr lang="en-US" sz="1100" dirty="0"/>
           </a:p>
@@ -24698,8 +25352,8 @@
         </p:nvSpPr>
         <p:spPr>
           <a:xfrm>
-            <a:off x="731520" y="591211"/>
-            <a:ext cx="10728655" cy="1051180"/>
+            <a:off x="731520" y="598386"/>
+            <a:ext cx="10728655" cy="1078087"/>
           </a:xfrm>
           <a:prstGeom prst="rect">
             <a:avLst/>
@@ -24726,7 +25380,7 @@
                 <a:ea typeface="游明朝" pitchFamily="34" charset="-122"/>
                 <a:cs typeface="游明朝" pitchFamily="34" charset="-120"/>
               </a:rPr>
-              <a:t>続けて来られた方に、起きたこと</a:t>
+              <a:t>標準治療で、難渋していた方</a:t>
             </a:r>
             <a:endParaRPr lang="en-US" sz="3200" dirty="0"/>
           </a:p>
@@ -24740,12 +25394,12 @@
         </p:nvSpPr>
         <p:spPr>
           <a:xfrm>
-            <a:off x="731520" y="2072873"/>
-            <a:ext cx="5227168" cy="1301460"/>
+            <a:off x="731520" y="2117975"/>
+            <a:ext cx="6008047" cy="2823561"/>
           </a:xfrm>
           <a:prstGeom prst="roundRect">
             <a:avLst>
-              <a:gd name="adj" fmla="val 7026"/>
+              <a:gd name="adj" fmla="val 3238"/>
             </a:avLst>
           </a:prstGeom>
           <a:solidFill>
@@ -24769,8 +25423,8 @@
         </p:nvSpPr>
         <p:spPr>
           <a:xfrm>
-            <a:off x="1097280" y="2293120"/>
-            <a:ext cx="4495648" cy="420472"/>
+            <a:off x="1188720" y="2426000"/>
+            <a:ext cx="5093647" cy="410700"/>
           </a:xfrm>
           <a:prstGeom prst="rect">
             <a:avLst/>
@@ -24786,17 +25440,17 @@
               <a:buNone/>
             </a:pPr>
             <a:r>
-              <a:rPr lang="en-US" sz="1800" b="1" dirty="0">
-                <a:solidFill>
-                  <a:srgbClr val="9C5446"/>
+              <a:rPr lang="en-US" sz="1900" b="1" dirty="0">
+                <a:solidFill>
+                  <a:srgbClr val="2B2620"/>
                 </a:solidFill>
                 <a:latin typeface="游明朝" pitchFamily="34" charset="0"/>
                 <a:ea typeface="游明朝" pitchFamily="34" charset="-122"/>
                 <a:cs typeface="游明朝" pitchFamily="34" charset="-120"/>
               </a:rPr>
-              <a:t>復職・転職</a:t>
-            </a:r>
-            <a:endParaRPr lang="en-US" sz="1800" dirty="0"/>
+              <a:t>42歳　女性　主婦</a:t>
+            </a:r>
+            <a:endParaRPr lang="en-US" sz="1900" dirty="0"/>
           </a:p>
         </p:txBody>
       </p:sp>
@@ -24808,27 +25462,27 @@
         </p:nvSpPr>
         <p:spPr>
           <a:xfrm>
-            <a:off x="1097280" y="2753637"/>
-            <a:ext cx="4495648" cy="550618"/>
-          </a:xfrm>
-          <a:prstGeom prst="rect">
-            <a:avLst/>
-          </a:prstGeom>
-          <a:noFill/>
-          <a:ln/>
-        </p:spPr>
-        <p:txBody>
-          <a:bodyPr wrap="square" lIns="0" tIns="0" rIns="0" bIns="0" rtlCol="0" anchor="ctr"/>
-          <a:lstStyle/>
-          <a:p>
-            <a:pPr indent="0" marL="0">
+            <a:off x="1188720" y="2939375"/>
+            <a:ext cx="5093647" cy="1848149"/>
+          </a:xfrm>
+          <a:prstGeom prst="rect">
+            <a:avLst/>
+          </a:prstGeom>
+          <a:noFill/>
+          <a:ln/>
+        </p:spPr>
+        <p:txBody>
+          <a:bodyPr wrap="square" lIns="0" tIns="0" rIns="0" bIns="0" rtlCol="0" anchor="t"/>
+          <a:lstStyle/>
+          <a:p>
+            <a:pPr algn="l" indent="0" marL="0">
               <a:lnSpc>
-                <a:spcPts val="2100"/>
+                <a:spcPts val="2700"/>
               </a:lnSpc>
               <a:buNone/>
             </a:pPr>
             <a:r>
-              <a:rPr lang="en-US" sz="1250" dirty="0">
+              <a:rPr lang="en-US" sz="1450" dirty="0">
                 <a:solidFill>
                   <a:srgbClr val="2B2620"/>
                 </a:solidFill>
@@ -24836,19 +25490,28 @@
                 <a:ea typeface="游ゴシック" pitchFamily="34" charset="-122"/>
                 <a:cs typeface="游ゴシック" pitchFamily="34" charset="-120"/>
               </a:rPr>
-              <a:t>鍼灸を続けながら復職、または</a:t>
-            </a:r>
-            <a:endParaRPr lang="en-US" sz="1250" dirty="0"/>
-          </a:p>
-          <a:p>
-            <a:pPr indent="0" marL="0">
+              <a:t>主訴：全身倦怠感・頭痛・睡眠障害</a:t>
+            </a:r>
+            <a:endParaRPr lang="en-US" sz="1450" dirty="0"/>
+          </a:p>
+          <a:p>
+            <a:pPr algn="l" indent="0" marL="0">
               <a:lnSpc>
-                <a:spcPts val="2100"/>
+                <a:spcPts val="2700"/>
               </a:lnSpc>
               <a:buNone/>
             </a:pPr>
-            <a:r>
-              <a:rPr lang="en-US" sz="1250" dirty="0">
+            <a:endParaRPr lang="en-US" sz="1450" dirty="0"/>
+          </a:p>
+          <a:p>
+            <a:pPr algn="l" indent="0" marL="0">
+              <a:lnSpc>
+                <a:spcPts val="2700"/>
+              </a:lnSpc>
+              <a:buNone/>
+            </a:pPr>
+            <a:r>
+              <a:rPr lang="en-US" sz="1450" dirty="0">
                 <a:solidFill>
                   <a:srgbClr val="2B2620"/>
                 </a:solidFill>
@@ -24856,40 +25519,90 @@
                 <a:ea typeface="游ゴシック" pitchFamily="34" charset="-122"/>
                 <a:cs typeface="游ゴシック" pitchFamily="34" charset="-120"/>
               </a:rPr>
-              <a:t>より自分に合った職場へ移った</a:t>
-            </a:r>
-            <a:endParaRPr lang="en-US" sz="1250" dirty="0"/>
-          </a:p>
-        </p:txBody>
-      </p:sp>
-      <p:sp>
-        <p:nvSpPr>
-          <p:cNvPr id="7" name="Shape 5"/>
-          <p:cNvSpPr/>
-          <p:nvPr/>
-        </p:nvSpPr>
-        <p:spPr>
-          <a:xfrm>
-            <a:off x="6233008" y="2072873"/>
-            <a:ext cx="5227168" cy="1301460"/>
-          </a:xfrm>
-          <a:prstGeom prst="roundRect">
-            <a:avLst>
-              <a:gd name="adj" fmla="val 7026"/>
-            </a:avLst>
-          </a:prstGeom>
-          <a:solidFill>
-            <a:srgbClr val="FCFAF4"/>
-          </a:solidFill>
-          <a:ln/>
-          <a:effectLst>
-            <a:outerShdw sx="100000" sy="100000" kx="0" ky="0" algn="bl" rotWithShape="0" blurRad="127000" dist="508" dir="5400000">
-              <a:srgbClr val="8C7F6E">
-                <a:alpha val="25000"/>
-              </a:srgbClr>
-            </a:outerShdw>
-          </a:effectLst>
-        </p:spPr>
+              <a:t>うつ病の発症から17年。再発をくり返してきた。</a:t>
+            </a:r>
+            <a:endParaRPr lang="en-US" sz="1450" dirty="0"/>
+          </a:p>
+          <a:p>
+            <a:pPr algn="l" indent="0" marL="0">
+              <a:lnSpc>
+                <a:spcPts val="2700"/>
+              </a:lnSpc>
+              <a:buNone/>
+            </a:pPr>
+            <a:r>
+              <a:rPr lang="en-US" sz="1450" dirty="0">
+                <a:solidFill>
+                  <a:srgbClr val="2B2620"/>
+                </a:solidFill>
+                <a:latin typeface="游ゴシック" pitchFamily="34" charset="0"/>
+                <a:ea typeface="游ゴシック" pitchFamily="34" charset="-122"/>
+                <a:cs typeface="游ゴシック" pitchFamily="34" charset="-120"/>
+              </a:rPr>
+              <a:t>2ヶ月前、任意入院を勧められた。</a:t>
+            </a:r>
+            <a:endParaRPr lang="en-US" sz="1450" dirty="0"/>
+          </a:p>
+          <a:p>
+            <a:pPr algn="l" indent="0" marL="0">
+              <a:lnSpc>
+                <a:spcPts val="2700"/>
+              </a:lnSpc>
+              <a:buNone/>
+            </a:pPr>
+            <a:r>
+              <a:rPr lang="en-US" sz="1450" dirty="0">
+                <a:solidFill>
+                  <a:srgbClr val="2B2620"/>
+                </a:solidFill>
+                <a:latin typeface="游ゴシック" pitchFamily="34" charset="0"/>
+                <a:ea typeface="游ゴシック" pitchFamily="34" charset="-122"/>
+                <a:cs typeface="游ゴシック" pitchFamily="34" charset="-120"/>
+              </a:rPr>
+              <a:t>けれど子どもは3歳。入院は、難しかった。</a:t>
+            </a:r>
+            <a:endParaRPr lang="en-US" sz="1450" dirty="0"/>
+          </a:p>
+        </p:txBody>
+      </p:sp>
+      <p:sp>
+        <p:nvSpPr>
+          <p:cNvPr id="7" name="Text 5"/>
+          <p:cNvSpPr txBox="1"/>
+          <p:nvPr/>
+        </p:nvSpPr>
+        <p:spPr>
+          <a:xfrm>
+            <a:off x="7242487" y="2220650"/>
+            <a:ext cx="4217688" cy="308025"/>
+          </a:xfrm>
+          <a:prstGeom prst="rect">
+            <a:avLst/>
+          </a:prstGeom>
+          <a:noFill/>
+          <a:ln/>
+        </p:spPr>
+        <p:txBody>
+          <a:bodyPr wrap="square" lIns="0" tIns="0" rIns="0" bIns="0" rtlCol="0" anchor="ctr"/>
+          <a:lstStyle/>
+          <a:p>
+            <a:pPr indent="0" marL="0">
+              <a:buNone/>
+            </a:pPr>
+            <a:r>
+              <a:rPr lang="en-US" sz="1100" b="1" dirty="0">
+                <a:solidFill>
+                  <a:srgbClr val="7A6E60"/>
+                </a:solidFill>
+                <a:latin typeface="游ゴシック" pitchFamily="34" charset="0"/>
+                <a:ea typeface="游ゴシック" pitchFamily="34" charset="-122"/>
+                <a:cs typeface="游ゴシック" pitchFamily="34" charset="-120"/>
+              </a:rPr>
+              <a:t>初診時</a:t>
+            </a:r>
+            <a:endParaRPr lang="en-US" sz="1100" dirty="0"/>
+          </a:p>
+        </p:txBody>
       </p:sp>
       <p:sp>
         <p:nvSpPr>
@@ -24899,8 +25612,8 @@
         </p:nvSpPr>
         <p:spPr>
           <a:xfrm>
-            <a:off x="6598768" y="2293120"/>
-            <a:ext cx="4495648" cy="420472"/>
+            <a:off x="7242487" y="2549210"/>
+            <a:ext cx="4217688" cy="431235"/>
           </a:xfrm>
           <a:prstGeom prst="rect">
             <a:avLst/>
@@ -24916,17 +25629,17 @@
               <a:buNone/>
             </a:pPr>
             <a:r>
-              <a:rPr lang="en-US" sz="1800" b="1" dirty="0">
-                <a:solidFill>
-                  <a:srgbClr val="5E7060"/>
+              <a:rPr lang="en-US" sz="1700" b="1" dirty="0">
+                <a:solidFill>
+                  <a:srgbClr val="2B2620"/>
                 </a:solidFill>
                 <a:latin typeface="游明朝" pitchFamily="34" charset="0"/>
                 <a:ea typeface="游明朝" pitchFamily="34" charset="-122"/>
                 <a:cs typeface="游明朝" pitchFamily="34" charset="-120"/>
               </a:rPr>
-              <a:t>起業・就労形態の変更</a:t>
-            </a:r>
-            <a:endParaRPr lang="en-US" sz="1800" dirty="0"/>
+              <a:t>PHQ-9　13点　／　PHQ-15　20点</a:t>
+            </a:r>
+            <a:endParaRPr lang="en-US" sz="1700" dirty="0"/>
           </a:p>
         </p:txBody>
       </p:sp>
@@ -24938,8 +25651,8 @@
         </p:nvSpPr>
         <p:spPr>
           <a:xfrm>
-            <a:off x="6598768" y="2753637"/>
-            <a:ext cx="4495648" cy="550618"/>
+            <a:off x="7242487" y="3165260"/>
+            <a:ext cx="4217688" cy="308025"/>
           </a:xfrm>
           <a:prstGeom prst="rect">
             <a:avLst/>
@@ -24952,85 +25665,111 @@
           <a:lstStyle/>
           <a:p>
             <a:pPr indent="0" marL="0">
-              <a:lnSpc>
-                <a:spcPts val="2100"/>
-              </a:lnSpc>
-              <a:buNone/>
-            </a:pPr>
-            <a:r>
-              <a:rPr lang="en-US" sz="1250" dirty="0">
-                <a:solidFill>
-                  <a:srgbClr val="2B2620"/>
+              <a:buNone/>
+            </a:pPr>
+            <a:r>
+              <a:rPr lang="en-US" sz="1100" b="1" dirty="0">
+                <a:solidFill>
+                  <a:srgbClr val="7A6E60"/>
                 </a:solidFill>
                 <a:latin typeface="游ゴシック" pitchFamily="34" charset="0"/>
                 <a:ea typeface="游ゴシック" pitchFamily="34" charset="-122"/>
                 <a:cs typeface="游ゴシック" pitchFamily="34" charset="-120"/>
               </a:rPr>
-              <a:t>新しい働き方を選び、自分の</a:t>
-            </a:r>
-            <a:endParaRPr lang="en-US" sz="1250" dirty="0"/>
-          </a:p>
+              <a:t>東洋医学的病態</a:t>
+            </a:r>
+            <a:endParaRPr lang="en-US" sz="1100" dirty="0"/>
+          </a:p>
+        </p:txBody>
+      </p:sp>
+      <p:sp>
+        <p:nvSpPr>
+          <p:cNvPr id="10" name="Text 8"/>
+          <p:cNvSpPr txBox="1"/>
+          <p:nvPr/>
+        </p:nvSpPr>
+        <p:spPr>
+          <a:xfrm>
+            <a:off x="7242487" y="3493819"/>
+            <a:ext cx="4217688" cy="431235"/>
+          </a:xfrm>
+          <a:prstGeom prst="rect">
+            <a:avLst/>
+          </a:prstGeom>
+          <a:noFill/>
+          <a:ln/>
+        </p:spPr>
+        <p:txBody>
+          <a:bodyPr wrap="square" lIns="0" tIns="0" rIns="0" bIns="0" rtlCol="0" anchor="ctr"/>
+          <a:lstStyle/>
           <a:p>
             <a:pPr indent="0" marL="0">
-              <a:lnSpc>
-                <a:spcPts val="2100"/>
-              </a:lnSpc>
-              <a:buNone/>
-            </a:pPr>
-            <a:r>
-              <a:rPr lang="en-US" sz="1250" dirty="0">
+              <a:buNone/>
+            </a:pPr>
+            <a:r>
+              <a:rPr lang="en-US" sz="1700" b="1" dirty="0">
                 <a:solidFill>
                   <a:srgbClr val="2B2620"/>
+                </a:solidFill>
+                <a:latin typeface="游明朝" pitchFamily="34" charset="0"/>
+                <a:ea typeface="游明朝" pitchFamily="34" charset="-122"/>
+                <a:cs typeface="游明朝" pitchFamily="34" charset="-120"/>
+              </a:rPr>
+              <a:t>脾陽虚・胃熱・肝鬱気滞</a:t>
+            </a:r>
+            <a:endParaRPr lang="en-US" sz="1700" dirty="0"/>
+          </a:p>
+        </p:txBody>
+      </p:sp>
+      <p:sp>
+        <p:nvSpPr>
+          <p:cNvPr id="11" name="Text 9"/>
+          <p:cNvSpPr txBox="1"/>
+          <p:nvPr/>
+        </p:nvSpPr>
+        <p:spPr>
+          <a:xfrm>
+            <a:off x="7242487" y="4109869"/>
+            <a:ext cx="4217688" cy="308025"/>
+          </a:xfrm>
+          <a:prstGeom prst="rect">
+            <a:avLst/>
+          </a:prstGeom>
+          <a:noFill/>
+          <a:ln/>
+        </p:spPr>
+        <p:txBody>
+          <a:bodyPr wrap="square" lIns="0" tIns="0" rIns="0" bIns="0" rtlCol="0" anchor="ctr"/>
+          <a:lstStyle/>
+          <a:p>
+            <a:pPr indent="0" marL="0">
+              <a:buNone/>
+            </a:pPr>
+            <a:r>
+              <a:rPr lang="en-US" sz="1100" b="1" dirty="0">
+                <a:solidFill>
+                  <a:srgbClr val="7A6E60"/>
                 </a:solidFill>
                 <a:latin typeface="游ゴシック" pitchFamily="34" charset="0"/>
                 <a:ea typeface="游ゴシック" pitchFamily="34" charset="-122"/>
                 <a:cs typeface="游ゴシック" pitchFamily="34" charset="-120"/>
               </a:rPr>
-              <a:t>ペースで社会参加を続けている</a:t>
-            </a:r>
-            <a:endParaRPr lang="en-US" sz="1250" dirty="0"/>
-          </a:p>
-        </p:txBody>
-      </p:sp>
-      <p:sp>
-        <p:nvSpPr>
-          <p:cNvPr id="10" name="Shape 8"/>
-          <p:cNvSpPr/>
-          <p:nvPr/>
-        </p:nvSpPr>
-        <p:spPr>
-          <a:xfrm>
-            <a:off x="731520" y="3574558"/>
-            <a:ext cx="5227168" cy="1301460"/>
-          </a:xfrm>
-          <a:prstGeom prst="roundRect">
-            <a:avLst>
-              <a:gd name="adj" fmla="val 7026"/>
-            </a:avLst>
-          </a:prstGeom>
-          <a:solidFill>
-            <a:srgbClr val="FCFAF4"/>
-          </a:solidFill>
-          <a:ln/>
-          <a:effectLst>
-            <a:outerShdw sx="100000" sy="100000" kx="0" ky="0" algn="bl" rotWithShape="0" blurRad="127000" dist="508" dir="5400000">
-              <a:srgbClr val="8C7F6E">
-                <a:alpha val="25000"/>
-              </a:srgbClr>
-            </a:outerShdw>
-          </a:effectLst>
-        </p:spPr>
-      </p:sp>
-      <p:sp>
-        <p:nvSpPr>
-          <p:cNvPr id="11" name="Text 9"/>
-          <p:cNvSpPr txBox="1"/>
-          <p:nvPr/>
-        </p:nvSpPr>
-        <p:spPr>
-          <a:xfrm>
-            <a:off x="1097280" y="3794806"/>
-            <a:ext cx="4495648" cy="420472"/>
+              <a:t>ご本人の目標</a:t>
+            </a:r>
+            <a:endParaRPr lang="en-US" sz="1100" dirty="0"/>
+          </a:p>
+        </p:txBody>
+      </p:sp>
+      <p:sp>
+        <p:nvSpPr>
+          <p:cNvPr id="12" name="Text 10"/>
+          <p:cNvSpPr txBox="1"/>
+          <p:nvPr/>
+        </p:nvSpPr>
+        <p:spPr>
+          <a:xfrm>
+            <a:off x="7242487" y="4438429"/>
+            <a:ext cx="4217688" cy="431235"/>
           </a:xfrm>
           <a:prstGeom prst="rect">
             <a:avLst/>
@@ -25046,30 +25785,30 @@
               <a:buNone/>
             </a:pPr>
             <a:r>
-              <a:rPr lang="en-US" sz="1800" b="1" dirty="0">
-                <a:solidFill>
-                  <a:srgbClr val="5E7060"/>
+              <a:rPr lang="en-US" sz="2200" b="1" dirty="0">
+                <a:solidFill>
+                  <a:srgbClr val="9C5446"/>
                 </a:solidFill>
                 <a:latin typeface="游明朝" pitchFamily="34" charset="0"/>
                 <a:ea typeface="游明朝" pitchFamily="34" charset="-122"/>
                 <a:cs typeface="游明朝" pitchFamily="34" charset="-120"/>
               </a:rPr>
-              <a:t>日常生活の安定</a:t>
-            </a:r>
-            <a:endParaRPr lang="en-US" sz="1800" dirty="0"/>
-          </a:p>
-        </p:txBody>
-      </p:sp>
-      <p:sp>
-        <p:nvSpPr>
-          <p:cNvPr id="12" name="Text 10"/>
-          <p:cNvSpPr txBox="1"/>
-          <p:nvPr/>
-        </p:nvSpPr>
-        <p:spPr>
-          <a:xfrm>
-            <a:off x="1097280" y="4255322"/>
-            <a:ext cx="4495648" cy="550618"/>
+              <a:t>「働くこと」</a:t>
+            </a:r>
+            <a:endParaRPr lang="en-US" sz="2200" dirty="0"/>
+          </a:p>
+        </p:txBody>
+      </p:sp>
+      <p:sp>
+        <p:nvSpPr>
+          <p:cNvPr id="13" name="Text 11"/>
+          <p:cNvSpPr txBox="1"/>
+          <p:nvPr/>
+        </p:nvSpPr>
+        <p:spPr>
+          <a:xfrm>
+            <a:off x="731520" y="5249561"/>
+            <a:ext cx="10728655" cy="564712"/>
           </a:xfrm>
           <a:prstGeom prst="rect">
             <a:avLst/>
@@ -25082,257 +25821,65 @@
           <a:lstStyle/>
           <a:p>
             <a:pPr indent="0" marL="0">
-              <a:lnSpc>
-                <a:spcPts val="2100"/>
-              </a:lnSpc>
-              <a:buNone/>
-            </a:pPr>
-            <a:r>
-              <a:rPr lang="en-US" sz="1250" dirty="0">
+              <a:buNone/>
+            </a:pPr>
+            <a:r>
+              <a:rPr lang="en-US" sz="2300" b="1" dirty="0">
                 <a:solidFill>
                   <a:srgbClr val="2B2620"/>
+                </a:solidFill>
+                <a:latin typeface="游明朝" pitchFamily="34" charset="0"/>
+                <a:ea typeface="游明朝" pitchFamily="34" charset="-122"/>
+                <a:cs typeface="游明朝" pitchFamily="34" charset="-120"/>
+              </a:rPr>
+              <a:t>入院を避けたい。それが、来院の理由でした。</a:t>
+            </a:r>
+            <a:endParaRPr lang="en-US" sz="2300" dirty="0"/>
+          </a:p>
+        </p:txBody>
+      </p:sp>
+      <p:sp>
+        <p:nvSpPr>
+          <p:cNvPr id="14" name="Text 12"/>
+          <p:cNvSpPr txBox="1"/>
+          <p:nvPr/>
+        </p:nvSpPr>
+        <p:spPr>
+          <a:xfrm>
+            <a:off x="731520" y="5968286"/>
+            <a:ext cx="10728655" cy="359362"/>
+          </a:xfrm>
+          <a:prstGeom prst="rect">
+            <a:avLst/>
+          </a:prstGeom>
+          <a:noFill/>
+          <a:ln/>
+        </p:spPr>
+        <p:txBody>
+          <a:bodyPr wrap="square" lIns="0" tIns="0" rIns="0" bIns="0" rtlCol="0" anchor="ctr"/>
+          <a:lstStyle/>
+          <a:p>
+            <a:pPr indent="0" marL="0">
+              <a:buNone/>
+            </a:pPr>
+            <a:r>
+              <a:rPr lang="en-US" sz="1000" dirty="0">
+                <a:solidFill>
+                  <a:srgbClr val="9E9484"/>
                 </a:solidFill>
                 <a:latin typeface="游ゴシック" pitchFamily="34" charset="0"/>
                 <a:ea typeface="游ゴシック" pitchFamily="34" charset="-122"/>
                 <a:cs typeface="游ゴシック" pitchFamily="34" charset="-120"/>
               </a:rPr>
-              <a:t>就労形態を調整しながら、</a:t>
-            </a:r>
-            <a:endParaRPr lang="en-US" sz="1250" dirty="0"/>
-          </a:p>
-          <a:p>
-            <a:pPr indent="0" marL="0">
-              <a:lnSpc>
-                <a:spcPts val="2100"/>
-              </a:lnSpc>
-              <a:buNone/>
-            </a:pPr>
-            <a:r>
-              <a:rPr lang="en-US" sz="1250" dirty="0">
-                <a:solidFill>
-                  <a:srgbClr val="2B2620"/>
-                </a:solidFill>
-                <a:latin typeface="游ゴシック" pitchFamily="34" charset="0"/>
-                <a:ea typeface="游ゴシック" pitchFamily="34" charset="-122"/>
-                <a:cs typeface="游ゴシック" pitchFamily="34" charset="-120"/>
-              </a:rPr>
-              <a:t>安定した生活を継続している</a:t>
-            </a:r>
-            <a:endParaRPr lang="en-US" sz="1250" dirty="0"/>
-          </a:p>
-        </p:txBody>
-      </p:sp>
-      <p:sp>
-        <p:nvSpPr>
-          <p:cNvPr id="13" name="Shape 11"/>
-          <p:cNvSpPr/>
-          <p:nvPr/>
-        </p:nvSpPr>
-        <p:spPr>
-          <a:xfrm>
-            <a:off x="6233008" y="3574558"/>
-            <a:ext cx="5227168" cy="1301460"/>
-          </a:xfrm>
-          <a:prstGeom prst="roundRect">
-            <a:avLst>
-              <a:gd name="adj" fmla="val 7026"/>
-            </a:avLst>
-          </a:prstGeom>
-          <a:solidFill>
-            <a:srgbClr val="FCFAF4"/>
-          </a:solidFill>
-          <a:ln/>
-          <a:effectLst>
-            <a:outerShdw sx="100000" sy="100000" kx="0" ky="0" algn="bl" rotWithShape="0" blurRad="127000" dist="508" dir="5400000">
-              <a:srgbClr val="8C7F6E">
-                <a:alpha val="25000"/>
-              </a:srgbClr>
-            </a:outerShdw>
-          </a:effectLst>
-        </p:spPr>
-      </p:sp>
-      <p:sp>
-        <p:nvSpPr>
-          <p:cNvPr id="14" name="Text 12"/>
-          <p:cNvSpPr txBox="1"/>
-          <p:nvPr/>
-        </p:nvSpPr>
-        <p:spPr>
-          <a:xfrm>
-            <a:off x="6598768" y="3794806"/>
-            <a:ext cx="4495648" cy="420472"/>
-          </a:xfrm>
-          <a:prstGeom prst="rect">
-            <a:avLst/>
-          </a:prstGeom>
-          <a:noFill/>
-          <a:ln/>
-        </p:spPr>
-        <p:txBody>
-          <a:bodyPr wrap="square" lIns="0" tIns="0" rIns="0" bIns="0" rtlCol="0" anchor="ctr"/>
-          <a:lstStyle/>
-          <a:p>
-            <a:pPr indent="0" marL="0">
-              <a:buNone/>
-            </a:pPr>
-            <a:r>
-              <a:rPr lang="en-US" sz="1800" b="1" dirty="0">
-                <a:solidFill>
-                  <a:srgbClr val="9C5446"/>
-                </a:solidFill>
-                <a:latin typeface="游明朝" pitchFamily="34" charset="0"/>
-                <a:ea typeface="游明朝" pitchFamily="34" charset="-122"/>
-                <a:cs typeface="游明朝" pitchFamily="34" charset="-120"/>
-              </a:rPr>
-              <a:t>多職種連携による支援</a:t>
-            </a:r>
-            <a:endParaRPr lang="en-US" sz="1800" dirty="0"/>
+              <a:t>米倉まな・松浦悠人・柴田健一「標準治療で難渋したうつ病患者に鍼灸と傾聴が奏功した一症例」日本うつ病学会</a:t>
+            </a:r>
+            <a:endParaRPr lang="en-US" sz="1000" dirty="0"/>
           </a:p>
         </p:txBody>
       </p:sp>
       <p:sp>
         <p:nvSpPr>
           <p:cNvPr id="15" name="Text 13"/>
-          <p:cNvSpPr txBox="1"/>
-          <p:nvPr/>
-        </p:nvSpPr>
-        <p:spPr>
-          <a:xfrm>
-            <a:off x="6598768" y="4255322"/>
-            <a:ext cx="4495648" cy="550618"/>
-          </a:xfrm>
-          <a:prstGeom prst="rect">
-            <a:avLst/>
-          </a:prstGeom>
-          <a:noFill/>
-          <a:ln/>
-        </p:spPr>
-        <p:txBody>
-          <a:bodyPr wrap="square" lIns="0" tIns="0" rIns="0" bIns="0" rtlCol="0" anchor="ctr"/>
-          <a:lstStyle/>
-          <a:p>
-            <a:pPr indent="0" marL="0">
-              <a:lnSpc>
-                <a:spcPts val="2100"/>
-              </a:lnSpc>
-              <a:buNone/>
-            </a:pPr>
-            <a:r>
-              <a:rPr lang="en-US" sz="1250" dirty="0">
-                <a:solidFill>
-                  <a:srgbClr val="2B2620"/>
-                </a:solidFill>
-                <a:latin typeface="游ゴシック" pitchFamily="34" charset="0"/>
-                <a:ea typeface="游ゴシック" pitchFamily="34" charset="-122"/>
-                <a:cs typeface="游ゴシック" pitchFamily="34" charset="-120"/>
-              </a:rPr>
-              <a:t>医師・薬剤師・行政制度を</a:t>
-            </a:r>
-            <a:endParaRPr lang="en-US" sz="1250" dirty="0"/>
-          </a:p>
-          <a:p>
-            <a:pPr indent="0" marL="0">
-              <a:lnSpc>
-                <a:spcPts val="2100"/>
-              </a:lnSpc>
-              <a:buNone/>
-            </a:pPr>
-            <a:r>
-              <a:rPr lang="en-US" sz="1250" dirty="0">
-                <a:solidFill>
-                  <a:srgbClr val="2B2620"/>
-                </a:solidFill>
-                <a:latin typeface="游ゴシック" pitchFamily="34" charset="0"/>
-                <a:ea typeface="游ゴシック" pitchFamily="34" charset="-122"/>
-                <a:cs typeface="游ゴシック" pitchFamily="34" charset="-120"/>
-              </a:rPr>
-              <a:t>組み合わせて社会復帰を目指す</a:t>
-            </a:r>
-            <a:endParaRPr lang="en-US" sz="1250" dirty="0"/>
-          </a:p>
-        </p:txBody>
-      </p:sp>
-      <p:sp>
-        <p:nvSpPr>
-          <p:cNvPr id="16" name="Text 14"/>
-          <p:cNvSpPr txBox="1"/>
-          <p:nvPr/>
-        </p:nvSpPr>
-        <p:spPr>
-          <a:xfrm>
-            <a:off x="731520" y="5226412"/>
-            <a:ext cx="10728655" cy="600674"/>
-          </a:xfrm>
-          <a:prstGeom prst="rect">
-            <a:avLst/>
-          </a:prstGeom>
-          <a:noFill/>
-          <a:ln/>
-        </p:spPr>
-        <p:txBody>
-          <a:bodyPr wrap="square" lIns="0" tIns="0" rIns="0" bIns="0" rtlCol="0" anchor="ctr"/>
-          <a:lstStyle/>
-          <a:p>
-            <a:pPr indent="0" marL="0">
-              <a:buNone/>
-            </a:pPr>
-            <a:r>
-              <a:rPr lang="en-US" sz="2500" b="1" dirty="0">
-                <a:solidFill>
-                  <a:srgbClr val="2B2620"/>
-                </a:solidFill>
-                <a:latin typeface="游明朝" pitchFamily="34" charset="0"/>
-                <a:ea typeface="游明朝" pitchFamily="34" charset="-122"/>
-                <a:cs typeface="游明朝" pitchFamily="34" charset="-120"/>
-              </a:rPr>
-              <a:t>鍼灸院の中だけで、支援を完結させない。</a:t>
-            </a:r>
-            <a:endParaRPr lang="en-US" sz="2500" dirty="0"/>
-          </a:p>
-        </p:txBody>
-      </p:sp>
-      <p:sp>
-        <p:nvSpPr>
-          <p:cNvPr id="17" name="Text 15"/>
-          <p:cNvSpPr txBox="1"/>
-          <p:nvPr/>
-        </p:nvSpPr>
-        <p:spPr>
-          <a:xfrm>
-            <a:off x="731520" y="5877142"/>
-            <a:ext cx="10728655" cy="450506"/>
-          </a:xfrm>
-          <a:prstGeom prst="rect">
-            <a:avLst/>
-          </a:prstGeom>
-          <a:noFill/>
-          <a:ln/>
-        </p:spPr>
-        <p:txBody>
-          <a:bodyPr wrap="square" lIns="0" tIns="0" rIns="0" bIns="0" rtlCol="0" anchor="ctr"/>
-          <a:lstStyle/>
-          <a:p>
-            <a:pPr indent="0" marL="0">
-              <a:buNone/>
-            </a:pPr>
-            <a:r>
-              <a:rPr lang="en-US" sz="1500" dirty="0">
-                <a:solidFill>
-                  <a:srgbClr val="7A6E60"/>
-                </a:solidFill>
-                <a:latin typeface="游ゴシック" pitchFamily="34" charset="0"/>
-                <a:ea typeface="游ゴシック" pitchFamily="34" charset="-122"/>
-                <a:cs typeface="游ゴシック" pitchFamily="34" charset="-120"/>
-              </a:rPr>
-              <a:t>医師・行政制度・地域の医療資源を、組み合わせて使う。</a:t>
-            </a:r>
-            <a:endParaRPr lang="en-US" sz="1500" dirty="0"/>
-          </a:p>
-        </p:txBody>
-      </p:sp>
-      <p:sp>
-        <p:nvSpPr>
-          <p:cNvPr id="18" name="Text 16"/>
           <p:cNvSpPr txBox="1"/>
           <p:nvPr/>
         </p:nvSpPr>
@@ -25383,7 +25930,7 @@
     <p:bg>
       <p:bgPr>
         <a:solidFill>
-          <a:srgbClr val="2B2620"/>
+          <a:srgbClr val="ECE3D4"/>
         </a:solidFill>
       </p:bgPr>
     </p:bg>
@@ -25410,7 +25957,7 @@
         <p:spPr>
           <a:xfrm>
             <a:off x="731520" y="310896"/>
-            <a:ext cx="10728655" cy="306136"/>
+            <a:ext cx="10728655" cy="273968"/>
           </a:xfrm>
           <a:prstGeom prst="rect">
             <a:avLst/>
@@ -25428,13 +25975,13 @@
             <a:r>
               <a:rPr lang="en-US" sz="1100" b="1" spc="200" kern="0" dirty="0">
                 <a:solidFill>
-                  <a:srgbClr val="A2937F"/>
+                  <a:srgbClr val="9C5446"/>
                 </a:solidFill>
                 <a:latin typeface="游ゴシック" pitchFamily="34" charset="0"/>
                 <a:ea typeface="游ゴシック" pitchFamily="34" charset="-122"/>
                 <a:cs typeface="游ゴシック" pitchFamily="34" charset="-120"/>
               </a:rPr>
-              <a:t>明日からの臨床</a:t>
+              <a:t>症例</a:t>
             </a:r>
             <a:endParaRPr lang="en-US" sz="1100" dirty="0"/>
           </a:p>
@@ -25448,8 +25995,8 @@
         </p:nvSpPr>
         <p:spPr>
           <a:xfrm>
-            <a:off x="731520" y="640581"/>
-            <a:ext cx="10728655" cy="1236319"/>
+            <a:off x="731520" y="605938"/>
+            <a:ext cx="10728655" cy="1106408"/>
           </a:xfrm>
           <a:prstGeom prst="rect">
             <a:avLst/>
@@ -25470,13 +26017,13 @@
             <a:r>
               <a:rPr lang="en-US" sz="3200" b="1" dirty="0">
                 <a:solidFill>
-                  <a:srgbClr val="ECE3D4"/>
+                  <a:srgbClr val="2B2620"/>
                 </a:solidFill>
                 <a:latin typeface="游明朝" pitchFamily="34" charset="0"/>
                 <a:ea typeface="游明朝" pitchFamily="34" charset="-122"/>
                 <a:cs typeface="游明朝" pitchFamily="34" charset="-120"/>
               </a:rPr>
-              <a:t>ただ、私は一度 失敗しています</a:t>
+              <a:t>鍼灸で、やっていたこと</a:t>
             </a:r>
             <a:endParaRPr lang="en-US" sz="3200" dirty="0"/>
           </a:p>
@@ -25490,18 +26037,25 @@
         </p:nvSpPr>
         <p:spPr>
           <a:xfrm>
-            <a:off x="731520" y="2383202"/>
-            <a:ext cx="10728655" cy="2708127"/>
+            <a:off x="731520" y="2165447"/>
+            <a:ext cx="6222620" cy="632233"/>
           </a:xfrm>
           <a:prstGeom prst="roundRect">
             <a:avLst>
-              <a:gd name="adj" fmla="val 3377"/>
+              <a:gd name="adj" fmla="val 14463"/>
             </a:avLst>
           </a:prstGeom>
           <a:solidFill>
-            <a:srgbClr val="35302A"/>
+            <a:srgbClr val="FCFAF4"/>
           </a:solidFill>
           <a:ln/>
+          <a:effectLst>
+            <a:outerShdw sx="100000" sy="100000" kx="0" ky="0" algn="bl" rotWithShape="0" blurRad="127000" dist="508" dir="5400000">
+              <a:srgbClr val="8C7F6E">
+                <a:alpha val="25000"/>
+              </a:srgbClr>
+            </a:outerShdw>
+          </a:effectLst>
         </p:spPr>
       </p:sp>
       <p:sp>
@@ -25512,99 +26066,329 @@
         </p:nvSpPr>
         <p:spPr>
           <a:xfrm>
-            <a:off x="1280160" y="2854181"/>
-            <a:ext cx="9631375" cy="1883915"/>
-          </a:xfrm>
-          <a:prstGeom prst="rect">
-            <a:avLst/>
-          </a:prstGeom>
-          <a:noFill/>
-          <a:ln/>
-        </p:spPr>
-        <p:txBody>
-          <a:bodyPr wrap="square" lIns="0" tIns="0" rIns="0" bIns="0" rtlCol="0" anchor="t"/>
-          <a:lstStyle/>
-          <a:p>
-            <a:pPr algn="l" indent="0" marL="0">
-              <a:lnSpc>
-                <a:spcPts val="3400"/>
-              </a:lnSpc>
-              <a:buNone/>
-            </a:pPr>
-            <a:r>
-              <a:rPr lang="en-US" sz="1800" dirty="0">
-                <a:solidFill>
-                  <a:srgbClr val="ECE3D4"/>
+            <a:off x="1051560" y="2165447"/>
+            <a:ext cx="1463040" cy="632233"/>
+          </a:xfrm>
+          <a:prstGeom prst="rect">
+            <a:avLst/>
+          </a:prstGeom>
+          <a:noFill/>
+          <a:ln/>
+        </p:spPr>
+        <p:txBody>
+          <a:bodyPr wrap="square" lIns="0" tIns="0" rIns="0" bIns="0" rtlCol="0" anchor="ctr"/>
+          <a:lstStyle/>
+          <a:p>
+            <a:pPr indent="0" marL="0">
+              <a:buNone/>
+            </a:pPr>
+            <a:r>
+              <a:rPr lang="en-US" sz="1600" b="1" dirty="0">
+                <a:solidFill>
+                  <a:srgbClr val="9C5446"/>
+                </a:solidFill>
+                <a:latin typeface="游明朝" pitchFamily="34" charset="0"/>
+                <a:ea typeface="游明朝" pitchFamily="34" charset="-122"/>
+                <a:cs typeface="游明朝" pitchFamily="34" charset="-120"/>
+              </a:rPr>
+              <a:t>温補脾陽</a:t>
+            </a:r>
+            <a:endParaRPr lang="en-US" sz="1600" dirty="0"/>
+          </a:p>
+        </p:txBody>
+      </p:sp>
+      <p:sp>
+        <p:nvSpPr>
+          <p:cNvPr id="6" name="Text 4"/>
+          <p:cNvSpPr txBox="1"/>
+          <p:nvPr/>
+        </p:nvSpPr>
+        <p:spPr>
+          <a:xfrm>
+            <a:off x="2651760" y="2165447"/>
+            <a:ext cx="4028060" cy="632233"/>
+          </a:xfrm>
+          <a:prstGeom prst="rect">
+            <a:avLst/>
+          </a:prstGeom>
+          <a:noFill/>
+          <a:ln/>
+        </p:spPr>
+        <p:txBody>
+          <a:bodyPr wrap="square" lIns="0" tIns="0" rIns="0" bIns="0" rtlCol="0" anchor="ctr"/>
+          <a:lstStyle/>
+          <a:p>
+            <a:pPr indent="0" marL="0">
+              <a:buNone/>
+            </a:pPr>
+            <a:r>
+              <a:rPr lang="en-US" sz="1300" dirty="0">
+                <a:solidFill>
+                  <a:srgbClr val="2B2620"/>
                 </a:solidFill>
                 <a:latin typeface="游ゴシック" pitchFamily="34" charset="0"/>
                 <a:ea typeface="游ゴシック" pitchFamily="34" charset="-122"/>
                 <a:cs typeface="游ゴシック" pitchFamily="34" charset="-120"/>
               </a:rPr>
-              <a:t>聴きすぎて、自分が消耗した時期があります。</a:t>
-            </a:r>
-            <a:endParaRPr lang="en-US" sz="1800" dirty="0"/>
-          </a:p>
-          <a:p>
-            <a:pPr algn="l" indent="0" marL="0">
-              <a:lnSpc>
-                <a:spcPts val="3400"/>
-              </a:lnSpc>
-              <a:buNone/>
-            </a:pPr>
-            <a:r>
-              <a:rPr lang="en-US" sz="1800" dirty="0">
-                <a:solidFill>
-                  <a:srgbClr val="ECE3D4"/>
+              <a:t>全身倦怠感・めまい・冷え</a:t>
+            </a:r>
+            <a:endParaRPr lang="en-US" sz="1300" dirty="0"/>
+          </a:p>
+        </p:txBody>
+      </p:sp>
+      <p:sp>
+        <p:nvSpPr>
+          <p:cNvPr id="7" name="Shape 5"/>
+          <p:cNvSpPr/>
+          <p:nvPr/>
+        </p:nvSpPr>
+        <p:spPr>
+          <a:xfrm>
+            <a:off x="731520" y="2924126"/>
+            <a:ext cx="6222620" cy="632233"/>
+          </a:xfrm>
+          <a:prstGeom prst="roundRect">
+            <a:avLst>
+              <a:gd name="adj" fmla="val 14463"/>
+            </a:avLst>
+          </a:prstGeom>
+          <a:solidFill>
+            <a:srgbClr val="FCFAF4"/>
+          </a:solidFill>
+          <a:ln/>
+          <a:effectLst>
+            <a:outerShdw sx="100000" sy="100000" kx="0" ky="0" algn="bl" rotWithShape="0" blurRad="127000" dist="508" dir="5400000">
+              <a:srgbClr val="8C7F6E">
+                <a:alpha val="25000"/>
+              </a:srgbClr>
+            </a:outerShdw>
+          </a:effectLst>
+        </p:spPr>
+      </p:sp>
+      <p:sp>
+        <p:nvSpPr>
+          <p:cNvPr id="8" name="Text 6"/>
+          <p:cNvSpPr txBox="1"/>
+          <p:nvPr/>
+        </p:nvSpPr>
+        <p:spPr>
+          <a:xfrm>
+            <a:off x="1051560" y="2924126"/>
+            <a:ext cx="1463040" cy="632233"/>
+          </a:xfrm>
+          <a:prstGeom prst="rect">
+            <a:avLst/>
+          </a:prstGeom>
+          <a:noFill/>
+          <a:ln/>
+        </p:spPr>
+        <p:txBody>
+          <a:bodyPr wrap="square" lIns="0" tIns="0" rIns="0" bIns="0" rtlCol="0" anchor="ctr"/>
+          <a:lstStyle/>
+          <a:p>
+            <a:pPr indent="0" marL="0">
+              <a:buNone/>
+            </a:pPr>
+            <a:r>
+              <a:rPr lang="en-US" sz="1600" b="1" dirty="0">
+                <a:solidFill>
+                  <a:srgbClr val="9C5446"/>
+                </a:solidFill>
+                <a:latin typeface="游明朝" pitchFamily="34" charset="0"/>
+                <a:ea typeface="游明朝" pitchFamily="34" charset="-122"/>
+                <a:cs typeface="游明朝" pitchFamily="34" charset="-120"/>
+              </a:rPr>
+              <a:t>清胃熱</a:t>
+            </a:r>
+            <a:endParaRPr lang="en-US" sz="1600" dirty="0"/>
+          </a:p>
+        </p:txBody>
+      </p:sp>
+      <p:sp>
+        <p:nvSpPr>
+          <p:cNvPr id="9" name="Text 7"/>
+          <p:cNvSpPr txBox="1"/>
+          <p:nvPr/>
+        </p:nvSpPr>
+        <p:spPr>
+          <a:xfrm>
+            <a:off x="2651760" y="2924126"/>
+            <a:ext cx="4028060" cy="632233"/>
+          </a:xfrm>
+          <a:prstGeom prst="rect">
+            <a:avLst/>
+          </a:prstGeom>
+          <a:noFill/>
+          <a:ln/>
+        </p:spPr>
+        <p:txBody>
+          <a:bodyPr wrap="square" lIns="0" tIns="0" rIns="0" bIns="0" rtlCol="0" anchor="ctr"/>
+          <a:lstStyle/>
+          <a:p>
+            <a:pPr indent="0" marL="0">
+              <a:buNone/>
+            </a:pPr>
+            <a:r>
+              <a:rPr lang="en-US" sz="1300" dirty="0">
+                <a:solidFill>
+                  <a:srgbClr val="2B2620"/>
                 </a:solidFill>
                 <a:latin typeface="游ゴシック" pitchFamily="34" charset="0"/>
                 <a:ea typeface="游ゴシック" pitchFamily="34" charset="-122"/>
                 <a:cs typeface="游ゴシック" pitchFamily="34" charset="-120"/>
               </a:rPr>
-              <a:t>カウンセラーになろうとして、施術がぶれた時期もありました。</a:t>
-            </a:r>
-            <a:endParaRPr lang="en-US" sz="1800" dirty="0"/>
-          </a:p>
-          <a:p>
-            <a:pPr algn="l" indent="0" marL="0">
-              <a:lnSpc>
-                <a:spcPts val="3400"/>
-              </a:lnSpc>
-              <a:buNone/>
-            </a:pPr>
-            <a:endParaRPr lang="en-US" sz="1800" dirty="0"/>
-          </a:p>
-          <a:p>
-            <a:pPr algn="l" indent="0" marL="0">
-              <a:lnSpc>
-                <a:spcPts val="3400"/>
-              </a:lnSpc>
-              <a:buNone/>
-            </a:pPr>
-            <a:r>
-              <a:rPr lang="en-US" sz="1800" dirty="0">
-                <a:solidFill>
-                  <a:srgbClr val="ECE3D4"/>
+              <a:t>胃のむかつき・便秘</a:t>
+            </a:r>
+            <a:endParaRPr lang="en-US" sz="1300" dirty="0"/>
+          </a:p>
+        </p:txBody>
+      </p:sp>
+      <p:sp>
+        <p:nvSpPr>
+          <p:cNvPr id="10" name="Shape 8"/>
+          <p:cNvSpPr/>
+          <p:nvPr/>
+        </p:nvSpPr>
+        <p:spPr>
+          <a:xfrm>
+            <a:off x="731520" y="3682806"/>
+            <a:ext cx="6222620" cy="632233"/>
+          </a:xfrm>
+          <a:prstGeom prst="roundRect">
+            <a:avLst>
+              <a:gd name="adj" fmla="val 14463"/>
+            </a:avLst>
+          </a:prstGeom>
+          <a:solidFill>
+            <a:srgbClr val="FCFAF4"/>
+          </a:solidFill>
+          <a:ln/>
+          <a:effectLst>
+            <a:outerShdw sx="100000" sy="100000" kx="0" ky="0" algn="bl" rotWithShape="0" blurRad="127000" dist="508" dir="5400000">
+              <a:srgbClr val="8C7F6E">
+                <a:alpha val="25000"/>
+              </a:srgbClr>
+            </a:outerShdw>
+          </a:effectLst>
+        </p:spPr>
+      </p:sp>
+      <p:sp>
+        <p:nvSpPr>
+          <p:cNvPr id="11" name="Text 9"/>
+          <p:cNvSpPr txBox="1"/>
+          <p:nvPr/>
+        </p:nvSpPr>
+        <p:spPr>
+          <a:xfrm>
+            <a:off x="1051560" y="3682806"/>
+            <a:ext cx="1463040" cy="632233"/>
+          </a:xfrm>
+          <a:prstGeom prst="rect">
+            <a:avLst/>
+          </a:prstGeom>
+          <a:noFill/>
+          <a:ln/>
+        </p:spPr>
+        <p:txBody>
+          <a:bodyPr wrap="square" lIns="0" tIns="0" rIns="0" bIns="0" rtlCol="0" anchor="ctr"/>
+          <a:lstStyle/>
+          <a:p>
+            <a:pPr indent="0" marL="0">
+              <a:buNone/>
+            </a:pPr>
+            <a:r>
+              <a:rPr lang="en-US" sz="1600" b="1" dirty="0">
+                <a:solidFill>
+                  <a:srgbClr val="9C5446"/>
+                </a:solidFill>
+                <a:latin typeface="游明朝" pitchFamily="34" charset="0"/>
+                <a:ea typeface="游明朝" pitchFamily="34" charset="-122"/>
+                <a:cs typeface="游明朝" pitchFamily="34" charset="-120"/>
+              </a:rPr>
+              <a:t>疏肝理気</a:t>
+            </a:r>
+            <a:endParaRPr lang="en-US" sz="1600" dirty="0"/>
+          </a:p>
+        </p:txBody>
+      </p:sp>
+      <p:sp>
+        <p:nvSpPr>
+          <p:cNvPr id="12" name="Text 10"/>
+          <p:cNvSpPr txBox="1"/>
+          <p:nvPr/>
+        </p:nvSpPr>
+        <p:spPr>
+          <a:xfrm>
+            <a:off x="2651760" y="3682806"/>
+            <a:ext cx="4028060" cy="632233"/>
+          </a:xfrm>
+          <a:prstGeom prst="rect">
+            <a:avLst/>
+          </a:prstGeom>
+          <a:noFill/>
+          <a:ln/>
+        </p:spPr>
+        <p:txBody>
+          <a:bodyPr wrap="square" lIns="0" tIns="0" rIns="0" bIns="0" rtlCol="0" anchor="ctr"/>
+          <a:lstStyle/>
+          <a:p>
+            <a:pPr indent="0" marL="0">
+              <a:buNone/>
+            </a:pPr>
+            <a:r>
+              <a:rPr lang="en-US" sz="1300" dirty="0">
+                <a:solidFill>
+                  <a:srgbClr val="2B2620"/>
                 </a:solidFill>
                 <a:latin typeface="游ゴシック" pitchFamily="34" charset="0"/>
                 <a:ea typeface="游ゴシック" pitchFamily="34" charset="-122"/>
                 <a:cs typeface="游ゴシック" pitchFamily="34" charset="-120"/>
               </a:rPr>
-              <a:t>傾聴には、自分を守る技術がセットで必要です。</a:t>
-            </a:r>
-            <a:endParaRPr lang="en-US" sz="1800" dirty="0"/>
-          </a:p>
-        </p:txBody>
-      </p:sp>
-      <p:sp>
-        <p:nvSpPr>
-          <p:cNvPr id="6" name="Text 4"/>
-          <p:cNvSpPr txBox="1"/>
-          <p:nvPr/>
-        </p:nvSpPr>
-        <p:spPr>
-          <a:xfrm>
-            <a:off x="731520" y="5503435"/>
-            <a:ext cx="10728655" cy="824213"/>
+              <a:t>頭痛・睡眠障害・イライラ</a:t>
+            </a:r>
+            <a:endParaRPr lang="en-US" sz="1300" dirty="0"/>
+          </a:p>
+        </p:txBody>
+      </p:sp>
+      <p:sp>
+        <p:nvSpPr>
+          <p:cNvPr id="13" name="Shape 11"/>
+          <p:cNvSpPr/>
+          <p:nvPr/>
+        </p:nvSpPr>
+        <p:spPr>
+          <a:xfrm>
+            <a:off x="7319900" y="2165447"/>
+            <a:ext cx="4140275" cy="2465709"/>
+          </a:xfrm>
+          <a:prstGeom prst="roundRect">
+            <a:avLst>
+              <a:gd name="adj" fmla="val 3708"/>
+            </a:avLst>
+          </a:prstGeom>
+          <a:solidFill>
+            <a:srgbClr val="FCFAF4"/>
+          </a:solidFill>
+          <a:ln/>
+          <a:effectLst>
+            <a:outerShdw sx="100000" sy="100000" kx="0" ky="0" algn="bl" rotWithShape="0" blurRad="127000" dist="508" dir="5400000">
+              <a:srgbClr val="8C7F6E">
+                <a:alpha val="25000"/>
+              </a:srgbClr>
+            </a:outerShdw>
+          </a:effectLst>
+        </p:spPr>
+      </p:sp>
+      <p:sp>
+        <p:nvSpPr>
+          <p:cNvPr id="14" name="Text 12"/>
+          <p:cNvSpPr txBox="1"/>
+          <p:nvPr/>
+        </p:nvSpPr>
+        <p:spPr>
+          <a:xfrm>
+            <a:off x="7639940" y="2428877"/>
+            <a:ext cx="3500195" cy="337191"/>
           </a:xfrm>
           <a:prstGeom prst="rect">
             <a:avLst/>
@@ -25620,23 +26404,225 @@
               <a:buNone/>
             </a:pPr>
             <a:r>
-              <a:rPr lang="en-US" sz="3000" b="1" dirty="0">
-                <a:solidFill>
-                  <a:srgbClr val="9C5446"/>
+              <a:rPr lang="en-US" sz="1100" b="1" dirty="0">
+                <a:solidFill>
+                  <a:srgbClr val="7A6E60"/>
+                </a:solidFill>
+                <a:latin typeface="游ゴシック" pitchFamily="34" charset="0"/>
+                <a:ea typeface="游ゴシック" pitchFamily="34" charset="-122"/>
+                <a:cs typeface="游ゴシック" pitchFamily="34" charset="-120"/>
+              </a:rPr>
+              <a:t>使った経穴</a:t>
+            </a:r>
+            <a:endParaRPr lang="en-US" sz="1100" dirty="0"/>
+          </a:p>
+        </p:txBody>
+      </p:sp>
+      <p:sp>
+        <p:nvSpPr>
+          <p:cNvPr id="15" name="Text 13"/>
+          <p:cNvSpPr txBox="1"/>
+          <p:nvPr/>
+        </p:nvSpPr>
+        <p:spPr>
+          <a:xfrm>
+            <a:off x="7639940" y="2818754"/>
+            <a:ext cx="3500195" cy="895664"/>
+          </a:xfrm>
+          <a:prstGeom prst="rect">
+            <a:avLst/>
+          </a:prstGeom>
+          <a:noFill/>
+          <a:ln/>
+        </p:spPr>
+        <p:txBody>
+          <a:bodyPr wrap="square" lIns="0" tIns="0" rIns="0" bIns="0" rtlCol="0" anchor="ctr"/>
+          <a:lstStyle/>
+          <a:p>
+            <a:pPr indent="0" marL="0">
+              <a:lnSpc>
+                <a:spcPts val="3200"/>
+              </a:lnSpc>
+              <a:buNone/>
+            </a:pPr>
+            <a:r>
+              <a:rPr lang="en-US" sz="1900" b="1" dirty="0">
+                <a:solidFill>
+                  <a:srgbClr val="2B2620"/>
                 </a:solidFill>
                 <a:latin typeface="游明朝" pitchFamily="34" charset="0"/>
                 <a:ea typeface="游明朝" pitchFamily="34" charset="-122"/>
                 <a:cs typeface="游明朝" pitchFamily="34" charset="-120"/>
               </a:rPr>
-              <a:t>ひとりでやると、壊れます。</a:t>
-            </a:r>
-            <a:endParaRPr lang="en-US" sz="3000" dirty="0"/>
-          </a:p>
-        </p:txBody>
-      </p:sp>
-      <p:sp>
-        <p:nvSpPr>
-          <p:cNvPr id="7" name="Text 5"/>
+              <a:t>百会　風池　完骨　肩井</a:t>
+            </a:r>
+            <a:endParaRPr lang="en-US" sz="1900" dirty="0"/>
+          </a:p>
+          <a:p>
+            <a:pPr indent="0" marL="0">
+              <a:lnSpc>
+                <a:spcPts val="3200"/>
+              </a:lnSpc>
+              <a:buNone/>
+            </a:pPr>
+            <a:r>
+              <a:rPr lang="en-US" sz="1900" b="1" dirty="0">
+                <a:solidFill>
+                  <a:srgbClr val="2B2620"/>
+                </a:solidFill>
+                <a:latin typeface="游明朝" pitchFamily="34" charset="0"/>
+                <a:ea typeface="游明朝" pitchFamily="34" charset="-122"/>
+                <a:cs typeface="游明朝" pitchFamily="34" charset="-120"/>
+              </a:rPr>
+              <a:t>足三里　三陰交</a:t>
+            </a:r>
+            <a:endParaRPr lang="en-US" sz="1900" dirty="0"/>
+          </a:p>
+        </p:txBody>
+      </p:sp>
+      <p:sp>
+        <p:nvSpPr>
+          <p:cNvPr id="16" name="Text 14"/>
+          <p:cNvSpPr txBox="1"/>
+          <p:nvPr/>
+        </p:nvSpPr>
+        <p:spPr>
+          <a:xfrm>
+            <a:off x="7639940" y="3798715"/>
+            <a:ext cx="3500195" cy="421489"/>
+          </a:xfrm>
+          <a:prstGeom prst="rect">
+            <a:avLst/>
+          </a:prstGeom>
+          <a:noFill/>
+          <a:ln/>
+        </p:spPr>
+        <p:txBody>
+          <a:bodyPr wrap="square" lIns="0" tIns="0" rIns="0" bIns="0" rtlCol="0" anchor="ctr"/>
+          <a:lstStyle/>
+          <a:p>
+            <a:pPr indent="0" marL="0">
+              <a:buNone/>
+            </a:pPr>
+            <a:r>
+              <a:rPr lang="en-US" sz="1300" dirty="0">
+                <a:solidFill>
+                  <a:srgbClr val="5E7060"/>
+                </a:solidFill>
+                <a:latin typeface="游ゴシック" pitchFamily="34" charset="0"/>
+                <a:ea typeface="游ゴシック" pitchFamily="34" charset="-122"/>
+                <a:cs typeface="游ゴシック" pitchFamily="34" charset="-120"/>
+              </a:rPr>
+              <a:t>＋　腹部の散鍼（鍼による擦過刺激）</a:t>
+            </a:r>
+            <a:endParaRPr lang="en-US" sz="1300" dirty="0"/>
+          </a:p>
+        </p:txBody>
+      </p:sp>
+      <p:sp>
+        <p:nvSpPr>
+          <p:cNvPr id="17" name="Text 15"/>
+          <p:cNvSpPr txBox="1"/>
+          <p:nvPr/>
+        </p:nvSpPr>
+        <p:spPr>
+          <a:xfrm>
+            <a:off x="731520" y="4799751"/>
+            <a:ext cx="10728655" cy="842978"/>
+          </a:xfrm>
+          <a:prstGeom prst="rect">
+            <a:avLst/>
+          </a:prstGeom>
+          <a:noFill/>
+          <a:ln/>
+        </p:spPr>
+        <p:txBody>
+          <a:bodyPr wrap="square" lIns="0" tIns="0" rIns="0" bIns="0" rtlCol="0" anchor="t"/>
+          <a:lstStyle/>
+          <a:p>
+            <a:pPr algn="l" indent="0" marL="0">
+              <a:lnSpc>
+                <a:spcPts val="2100"/>
+              </a:lnSpc>
+              <a:buNone/>
+            </a:pPr>
+            <a:r>
+              <a:rPr lang="en-US" sz="1200" dirty="0">
+                <a:solidFill>
+                  <a:srgbClr val="7A6E60"/>
+                </a:solidFill>
+                <a:latin typeface="游ゴシック" pitchFamily="34" charset="0"/>
+                <a:ea typeface="游ゴシック" pitchFamily="34" charset="-122"/>
+                <a:cs typeface="游ゴシック" pitchFamily="34" charset="-120"/>
+              </a:rPr>
+              <a:t>使用鍼：0.12〜0.20mm ステンレス鍼　／　灸：温筒灸・棒灸</a:t>
+            </a:r>
+            <a:endParaRPr lang="en-US" sz="1200" dirty="0"/>
+          </a:p>
+          <a:p>
+            <a:pPr algn="l" indent="0" marL="0">
+              <a:lnSpc>
+                <a:spcPts val="2100"/>
+              </a:lnSpc>
+              <a:buNone/>
+            </a:pPr>
+            <a:r>
+              <a:rPr lang="en-US" sz="1200" dirty="0">
+                <a:solidFill>
+                  <a:srgbClr val="7A6E60"/>
+                </a:solidFill>
+                <a:latin typeface="游ゴシック" pitchFamily="34" charset="0"/>
+                <a:ea typeface="游ゴシック" pitchFamily="34" charset="-122"/>
+                <a:cs typeface="游ゴシック" pitchFamily="34" charset="-120"/>
+              </a:rPr>
+              <a:t>10診目〜 頭部に電気鍼（1Hz・15分）　／　15診目〜 頭痛にセルフケアの耳灸を指導</a:t>
+            </a:r>
+            <a:endParaRPr lang="en-US" sz="1200" dirty="0"/>
+          </a:p>
+        </p:txBody>
+      </p:sp>
+      <p:sp>
+        <p:nvSpPr>
+          <p:cNvPr id="18" name="Text 16"/>
+          <p:cNvSpPr txBox="1"/>
+          <p:nvPr/>
+        </p:nvSpPr>
+        <p:spPr>
+          <a:xfrm>
+            <a:off x="731520" y="5748101"/>
+            <a:ext cx="10728655" cy="579547"/>
+          </a:xfrm>
+          <a:prstGeom prst="rect">
+            <a:avLst/>
+          </a:prstGeom>
+          <a:noFill/>
+          <a:ln/>
+        </p:spPr>
+        <p:txBody>
+          <a:bodyPr wrap="square" lIns="0" tIns="0" rIns="0" bIns="0" rtlCol="0" anchor="ctr"/>
+          <a:lstStyle/>
+          <a:p>
+            <a:pPr indent="0" marL="0">
+              <a:buNone/>
+            </a:pPr>
+            <a:r>
+              <a:rPr lang="en-US" sz="2400" b="1" dirty="0">
+                <a:solidFill>
+                  <a:srgbClr val="2B2620"/>
+                </a:solidFill>
+                <a:latin typeface="游明朝" pitchFamily="34" charset="0"/>
+                <a:ea typeface="游明朝" pitchFamily="34" charset="-122"/>
+                <a:cs typeface="游明朝" pitchFamily="34" charset="-120"/>
+              </a:rPr>
+              <a:t>鍼灸は、特別なことをしていません。</a:t>
+            </a:r>
+            <a:endParaRPr lang="en-US" sz="2400" dirty="0"/>
+          </a:p>
+        </p:txBody>
+      </p:sp>
+      <p:sp>
+        <p:nvSpPr>
+          <p:cNvPr id="19" name="Text 17"/>
           <p:cNvSpPr txBox="1"/>
           <p:nvPr/>
         </p:nvSpPr>
@@ -25661,7 +26647,7 @@
             <a:r>
               <a:rPr lang="en-US" sz="1000" dirty="0">
                 <a:solidFill>
-                  <a:srgbClr val="6B5F51"/>
+                  <a:srgbClr val="B7A991"/>
                 </a:solidFill>
                 <a:latin typeface="游ゴシック" pitchFamily="34" charset="0"/>
                 <a:ea typeface="游ゴシック" pitchFamily="34" charset="-122"/>
@@ -25714,7 +26700,7 @@
         <p:spPr>
           <a:xfrm>
             <a:off x="731520" y="310896"/>
-            <a:ext cx="10728655" cy="276388"/>
+            <a:ext cx="10728655" cy="260292"/>
           </a:xfrm>
           <a:prstGeom prst="rect">
             <a:avLst/>
@@ -25738,7 +26724,7 @@
                 <a:ea typeface="游ゴシック" pitchFamily="34" charset="-122"/>
                 <a:cs typeface="游ゴシック" pitchFamily="34" charset="-120"/>
               </a:rPr>
-              <a:t>続けるために</a:t>
+              <a:t>症例</a:t>
             </a:r>
             <a:endParaRPr lang="en-US" sz="1100" dirty="0"/>
           </a:p>
@@ -25752,8 +26738,8 @@
         </p:nvSpPr>
         <p:spPr>
           <a:xfrm>
-            <a:off x="731520" y="608545"/>
-            <a:ext cx="10728655" cy="1116182"/>
+            <a:off x="731520" y="591211"/>
+            <a:ext cx="10728655" cy="1051180"/>
           </a:xfrm>
           <a:prstGeom prst="rect">
             <a:avLst/>
@@ -25780,7 +26766,7 @@
                 <a:ea typeface="游明朝" pitchFamily="34" charset="-122"/>
                 <a:cs typeface="游明朝" pitchFamily="34" charset="-120"/>
               </a:rPr>
-              <a:t>傾聴が、独学で伸びない3つの理由</a:t>
+              <a:t>同じように、聴いていたわけではありません</a:t>
             </a:r>
             <a:endParaRPr lang="en-US" sz="3200" dirty="0"/>
           </a:p>
@@ -25794,12 +26780,12 @@
         </p:nvSpPr>
         <p:spPr>
           <a:xfrm>
-            <a:off x="731520" y="2181829"/>
-            <a:ext cx="10728655" cy="935467"/>
+            <a:off x="731520" y="2072873"/>
+            <a:ext cx="10728655" cy="740831"/>
           </a:xfrm>
           <a:prstGeom prst="roundRect">
             <a:avLst>
-              <a:gd name="adj" fmla="val 9775"/>
+              <a:gd name="adj" fmla="val 12343"/>
             </a:avLst>
           </a:prstGeom>
           <a:solidFill>
@@ -25817,73 +26803,53 @@
       </p:sp>
       <p:sp>
         <p:nvSpPr>
-          <p:cNvPr id="5" name="Shape 3"/>
-          <p:cNvSpPr/>
-          <p:nvPr/>
-        </p:nvSpPr>
-        <p:spPr>
-          <a:xfrm>
-            <a:off x="1005840" y="2402675"/>
-            <a:ext cx="493776" cy="493776"/>
-          </a:xfrm>
-          <a:prstGeom prst="ellipse">
-            <a:avLst/>
-          </a:prstGeom>
-          <a:solidFill>
-            <a:srgbClr val="2B2620"/>
-          </a:solidFill>
-          <a:ln/>
-        </p:spPr>
-      </p:sp>
-      <p:sp>
-        <p:nvSpPr>
-          <p:cNvPr id="6" name="Text 4"/>
-          <p:cNvSpPr txBox="1"/>
-          <p:nvPr/>
-        </p:nvSpPr>
-        <p:spPr>
-          <a:xfrm>
-            <a:off x="1005840" y="2362545"/>
-            <a:ext cx="493776" cy="574036"/>
-          </a:xfrm>
-          <a:prstGeom prst="rect">
-            <a:avLst/>
-          </a:prstGeom>
-          <a:noFill/>
-          <a:ln/>
-        </p:spPr>
-        <p:txBody>
-          <a:bodyPr wrap="square" lIns="0" tIns="0" rIns="0" bIns="0" rtlCol="0" anchor="ctr"/>
-          <a:lstStyle/>
-          <a:p>
-            <a:pPr algn="ctr" indent="0" marL="0">
-              <a:buNone/>
-            </a:pPr>
-            <a:r>
-              <a:rPr lang="en-US" sz="1600" b="1" dirty="0">
-                <a:solidFill>
-                  <a:srgbClr val="FCFAF4"/>
+          <p:cNvPr id="5" name="Text 3"/>
+          <p:cNvSpPr txBox="1"/>
+          <p:nvPr/>
+        </p:nvSpPr>
+        <p:spPr>
+          <a:xfrm>
+            <a:off x="1051560" y="2072873"/>
+            <a:ext cx="1005840" cy="740831"/>
+          </a:xfrm>
+          <a:prstGeom prst="rect">
+            <a:avLst/>
+          </a:prstGeom>
+          <a:noFill/>
+          <a:ln/>
+        </p:spPr>
+        <p:txBody>
+          <a:bodyPr wrap="square" lIns="0" tIns="0" rIns="0" bIns="0" rtlCol="0" anchor="ctr"/>
+          <a:lstStyle/>
+          <a:p>
+            <a:pPr indent="0" marL="0">
+              <a:buNone/>
+            </a:pPr>
+            <a:r>
+              <a:rPr lang="en-US" sz="1500" b="1" dirty="0">
+                <a:solidFill>
+                  <a:srgbClr val="9C5446"/>
                 </a:solidFill>
                 <a:latin typeface="游明朝" pitchFamily="34" charset="0"/>
                 <a:ea typeface="游明朝" pitchFamily="34" charset="-122"/>
                 <a:cs typeface="游明朝" pitchFamily="34" charset="-120"/>
               </a:rPr>
-              <a:t>1</a:t>
-            </a:r>
-            <a:endParaRPr lang="en-US" sz="1600" dirty="0"/>
-          </a:p>
-        </p:txBody>
-      </p:sp>
-      <p:sp>
-        <p:nvSpPr>
-          <p:cNvPr id="7" name="Text 5"/>
-          <p:cNvSpPr txBox="1"/>
-          <p:nvPr/>
-        </p:nvSpPr>
-        <p:spPr>
-          <a:xfrm>
-            <a:off x="1691640" y="2181829"/>
-            <a:ext cx="4937760" cy="935467"/>
+              <a:t>2–4診</a:t>
+            </a:r>
+            <a:endParaRPr lang="en-US" sz="1500" dirty="0"/>
+          </a:p>
+        </p:txBody>
+      </p:sp>
+      <p:sp>
+        <p:nvSpPr>
+          <p:cNvPr id="6" name="Text 4"/>
+          <p:cNvSpPr txBox="1"/>
+          <p:nvPr/>
+        </p:nvSpPr>
+        <p:spPr>
+          <a:xfrm>
+            <a:off x="2194560" y="2072873"/>
+            <a:ext cx="4480560" cy="740831"/>
           </a:xfrm>
           <a:prstGeom prst="rect">
             <a:avLst/>
@@ -25899,7 +26865,7 @@
               <a:buNone/>
             </a:pPr>
             <a:r>
-              <a:rPr lang="en-US" sz="1600" b="1" dirty="0">
+              <a:rPr lang="en-US" sz="1350" b="1" dirty="0">
                 <a:solidFill>
                   <a:srgbClr val="2B2620"/>
                 </a:solidFill>
@@ -25907,48 +26873,87 @@
                 <a:ea typeface="游ゴシック" pitchFamily="34" charset="-122"/>
                 <a:cs typeface="游ゴシック" pitchFamily="34" charset="-120"/>
               </a:rPr>
-              <a:t>自分の聴き方は、自分では見えない</a:t>
-            </a:r>
-            <a:endParaRPr lang="en-US" sz="1600" dirty="0"/>
-          </a:p>
-        </p:txBody>
-      </p:sp>
-      <p:sp>
-        <p:nvSpPr>
-          <p:cNvPr id="8" name="Text 6"/>
-          <p:cNvSpPr txBox="1"/>
-          <p:nvPr/>
-        </p:nvSpPr>
-        <p:spPr>
-          <a:xfrm>
-            <a:off x="6766560" y="2181829"/>
-            <a:ext cx="4419295" cy="935467"/>
-          </a:xfrm>
-          <a:prstGeom prst="rect">
-            <a:avLst/>
-          </a:prstGeom>
-          <a:noFill/>
-          <a:ln/>
-        </p:spPr>
-        <p:txBody>
-          <a:bodyPr wrap="square" lIns="0" tIns="0" rIns="0" bIns="0" rtlCol="0" anchor="ctr"/>
-          <a:lstStyle/>
-          <a:p>
-            <a:pPr indent="0" marL="0">
-              <a:buNone/>
-            </a:pPr>
-            <a:r>
-              <a:rPr lang="en-US" sz="1500" dirty="0">
-                <a:solidFill>
-                  <a:srgbClr val="9C5446"/>
+              <a:t>受容と共感で、まず信頼関係をつくる</a:t>
+            </a:r>
+            <a:endParaRPr lang="en-US" sz="1350" dirty="0"/>
+          </a:p>
+        </p:txBody>
+      </p:sp>
+      <p:sp>
+        <p:nvSpPr>
+          <p:cNvPr id="7" name="Text 5"/>
+          <p:cNvSpPr txBox="1"/>
+          <p:nvPr/>
+        </p:nvSpPr>
+        <p:spPr>
+          <a:xfrm>
+            <a:off x="6766560" y="2072873"/>
+            <a:ext cx="365760" cy="740831"/>
+          </a:xfrm>
+          <a:prstGeom prst="rect">
+            <a:avLst/>
+          </a:prstGeom>
+          <a:noFill/>
+          <a:ln/>
+        </p:spPr>
+        <p:txBody>
+          <a:bodyPr wrap="square" lIns="0" tIns="0" rIns="0" bIns="0" rtlCol="0" anchor="ctr"/>
+          <a:lstStyle/>
+          <a:p>
+            <a:pPr algn="ctr" indent="0" marL="0">
+              <a:buNone/>
+            </a:pPr>
+            <a:r>
+              <a:rPr lang="en-US" sz="1200" dirty="0">
+                <a:solidFill>
+                  <a:srgbClr val="7A6E60"/>
                 </a:solidFill>
                 <a:latin typeface="游ゴシック" pitchFamily="34" charset="0"/>
                 <a:ea typeface="游ゴシック" pitchFamily="34" charset="-122"/>
                 <a:cs typeface="游ゴシック" pitchFamily="34" charset="-120"/>
               </a:rPr>
-              <a:t>→　フィードバックしてくれる人が要る</a:t>
-            </a:r>
-            <a:endParaRPr lang="en-US" sz="1500" dirty="0"/>
+              <a:t>→</a:t>
+            </a:r>
+            <a:endParaRPr lang="en-US" sz="1200" dirty="0"/>
+          </a:p>
+        </p:txBody>
+      </p:sp>
+      <p:sp>
+        <p:nvSpPr>
+          <p:cNvPr id="8" name="Text 6"/>
+          <p:cNvSpPr txBox="1"/>
+          <p:nvPr/>
+        </p:nvSpPr>
+        <p:spPr>
+          <a:xfrm>
+            <a:off x="7223760" y="2072873"/>
+            <a:ext cx="3916375" cy="740831"/>
+          </a:xfrm>
+          <a:prstGeom prst="rect">
+            <a:avLst/>
+          </a:prstGeom>
+          <a:noFill/>
+          <a:ln/>
+        </p:spPr>
+        <p:txBody>
+          <a:bodyPr wrap="square" lIns="0" tIns="0" rIns="0" bIns="0" rtlCol="0" anchor="ctr"/>
+          <a:lstStyle/>
+          <a:p>
+            <a:pPr indent="0" marL="0">
+              <a:buNone/>
+            </a:pPr>
+            <a:r>
+              <a:rPr lang="en-US" sz="1300" dirty="0">
+                <a:solidFill>
+                  <a:srgbClr val="7A6E60"/>
+                </a:solidFill>
+                <a:latin typeface="游ゴシック" pitchFamily="34" charset="0"/>
+                <a:ea typeface="游ゴシック" pitchFamily="34" charset="-122"/>
+                <a:cs typeface="游ゴシック" pitchFamily="34" charset="-120"/>
+              </a:rPr>
+              <a:t>頭痛薬と頓服が、止まった</a:t>
+            </a:r>
+            <a:endParaRPr lang="en-US" sz="1300" dirty="0"/>
           </a:p>
         </p:txBody>
       </p:sp>
@@ -25960,12 +26965,12 @@
         </p:nvSpPr>
         <p:spPr>
           <a:xfrm>
-            <a:off x="731520" y="3298011"/>
-            <a:ext cx="10728655" cy="935467"/>
+            <a:off x="731520" y="2933839"/>
+            <a:ext cx="10728655" cy="740831"/>
           </a:xfrm>
           <a:prstGeom prst="roundRect">
             <a:avLst>
-              <a:gd name="adj" fmla="val 9775"/>
+              <a:gd name="adj" fmla="val 12343"/>
             </a:avLst>
           </a:prstGeom>
           <a:solidFill>
@@ -25983,73 +26988,53 @@
       </p:sp>
       <p:sp>
         <p:nvSpPr>
-          <p:cNvPr id="10" name="Shape 8"/>
-          <p:cNvSpPr/>
-          <p:nvPr/>
-        </p:nvSpPr>
-        <p:spPr>
-          <a:xfrm>
-            <a:off x="1005840" y="3518857"/>
-            <a:ext cx="493776" cy="493776"/>
-          </a:xfrm>
-          <a:prstGeom prst="ellipse">
-            <a:avLst/>
-          </a:prstGeom>
-          <a:solidFill>
-            <a:srgbClr val="2B2620"/>
-          </a:solidFill>
-          <a:ln/>
-        </p:spPr>
-      </p:sp>
-      <p:sp>
-        <p:nvSpPr>
-          <p:cNvPr id="11" name="Text 9"/>
-          <p:cNvSpPr txBox="1"/>
-          <p:nvPr/>
-        </p:nvSpPr>
-        <p:spPr>
-          <a:xfrm>
-            <a:off x="1005840" y="3478727"/>
-            <a:ext cx="493776" cy="574036"/>
-          </a:xfrm>
-          <a:prstGeom prst="rect">
-            <a:avLst/>
-          </a:prstGeom>
-          <a:noFill/>
-          <a:ln/>
-        </p:spPr>
-        <p:txBody>
-          <a:bodyPr wrap="square" lIns="0" tIns="0" rIns="0" bIns="0" rtlCol="0" anchor="ctr"/>
-          <a:lstStyle/>
-          <a:p>
-            <a:pPr algn="ctr" indent="0" marL="0">
-              <a:buNone/>
-            </a:pPr>
-            <a:r>
-              <a:rPr lang="en-US" sz="1600" b="1" dirty="0">
-                <a:solidFill>
-                  <a:srgbClr val="FCFAF4"/>
+          <p:cNvPr id="10" name="Text 8"/>
+          <p:cNvSpPr txBox="1"/>
+          <p:nvPr/>
+        </p:nvSpPr>
+        <p:spPr>
+          <a:xfrm>
+            <a:off x="1051560" y="2933839"/>
+            <a:ext cx="1005840" cy="740831"/>
+          </a:xfrm>
+          <a:prstGeom prst="rect">
+            <a:avLst/>
+          </a:prstGeom>
+          <a:noFill/>
+          <a:ln/>
+        </p:spPr>
+        <p:txBody>
+          <a:bodyPr wrap="square" lIns="0" tIns="0" rIns="0" bIns="0" rtlCol="0" anchor="ctr"/>
+          <a:lstStyle/>
+          <a:p>
+            <a:pPr indent="0" marL="0">
+              <a:buNone/>
+            </a:pPr>
+            <a:r>
+              <a:rPr lang="en-US" sz="1500" b="1" dirty="0">
+                <a:solidFill>
+                  <a:srgbClr val="5E7060"/>
                 </a:solidFill>
                 <a:latin typeface="游明朝" pitchFamily="34" charset="0"/>
                 <a:ea typeface="游明朝" pitchFamily="34" charset="-122"/>
                 <a:cs typeface="游明朝" pitchFamily="34" charset="-120"/>
               </a:rPr>
-              <a:t>2</a:t>
-            </a:r>
-            <a:endParaRPr lang="en-US" sz="1600" dirty="0"/>
-          </a:p>
-        </p:txBody>
-      </p:sp>
-      <p:sp>
-        <p:nvSpPr>
-          <p:cNvPr id="12" name="Text 10"/>
-          <p:cNvSpPr txBox="1"/>
-          <p:nvPr/>
-        </p:nvSpPr>
-        <p:spPr>
-          <a:xfrm>
-            <a:off x="1691640" y="3298011"/>
-            <a:ext cx="4937760" cy="935467"/>
+              <a:t>5–10診</a:t>
+            </a:r>
+            <a:endParaRPr lang="en-US" sz="1500" dirty="0"/>
+          </a:p>
+        </p:txBody>
+      </p:sp>
+      <p:sp>
+        <p:nvSpPr>
+          <p:cNvPr id="11" name="Text 9"/>
+          <p:cNvSpPr txBox="1"/>
+          <p:nvPr/>
+        </p:nvSpPr>
+        <p:spPr>
+          <a:xfrm>
+            <a:off x="2194560" y="2933839"/>
+            <a:ext cx="4480560" cy="740831"/>
           </a:xfrm>
           <a:prstGeom prst="rect">
             <a:avLst/>
@@ -26065,7 +27050,7 @@
               <a:buNone/>
             </a:pPr>
             <a:r>
-              <a:rPr lang="en-US" sz="1600" b="1" dirty="0">
+              <a:rPr lang="en-US" sz="1350" b="1" dirty="0">
                 <a:solidFill>
                   <a:srgbClr val="2B2620"/>
                 </a:solidFill>
@@ -26073,48 +27058,87 @@
                 <a:ea typeface="游ゴシック" pitchFamily="34" charset="-122"/>
                 <a:cs typeface="游ゴシック" pitchFamily="34" charset="-120"/>
               </a:rPr>
-              <a:t>聴きっぱなしだと、消耗する</a:t>
-            </a:r>
-            <a:endParaRPr lang="en-US" sz="1600" dirty="0"/>
-          </a:p>
-        </p:txBody>
-      </p:sp>
-      <p:sp>
-        <p:nvSpPr>
-          <p:cNvPr id="13" name="Text 11"/>
-          <p:cNvSpPr txBox="1"/>
-          <p:nvPr/>
-        </p:nvSpPr>
-        <p:spPr>
-          <a:xfrm>
-            <a:off x="6766560" y="3298011"/>
-            <a:ext cx="4419295" cy="935467"/>
-          </a:xfrm>
-          <a:prstGeom prst="rect">
-            <a:avLst/>
-          </a:prstGeom>
-          <a:noFill/>
-          <a:ln/>
-        </p:spPr>
-        <p:txBody>
-          <a:bodyPr wrap="square" lIns="0" tIns="0" rIns="0" bIns="0" rtlCol="0" anchor="ctr"/>
-          <a:lstStyle/>
-          <a:p>
-            <a:pPr indent="0" marL="0">
-              <a:buNone/>
-            </a:pPr>
-            <a:r>
-              <a:rPr lang="en-US" sz="1500" dirty="0">
-                <a:solidFill>
-                  <a:srgbClr val="9C5446"/>
+              <a:t>家族の課題について、情報を整理する</a:t>
+            </a:r>
+            <a:endParaRPr lang="en-US" sz="1350" dirty="0"/>
+          </a:p>
+        </p:txBody>
+      </p:sp>
+      <p:sp>
+        <p:nvSpPr>
+          <p:cNvPr id="12" name="Text 10"/>
+          <p:cNvSpPr txBox="1"/>
+          <p:nvPr/>
+        </p:nvSpPr>
+        <p:spPr>
+          <a:xfrm>
+            <a:off x="6766560" y="2933839"/>
+            <a:ext cx="365760" cy="740831"/>
+          </a:xfrm>
+          <a:prstGeom prst="rect">
+            <a:avLst/>
+          </a:prstGeom>
+          <a:noFill/>
+          <a:ln/>
+        </p:spPr>
+        <p:txBody>
+          <a:bodyPr wrap="square" lIns="0" tIns="0" rIns="0" bIns="0" rtlCol="0" anchor="ctr"/>
+          <a:lstStyle/>
+          <a:p>
+            <a:pPr algn="ctr" indent="0" marL="0">
+              <a:buNone/>
+            </a:pPr>
+            <a:r>
+              <a:rPr lang="en-US" sz="1200" dirty="0">
+                <a:solidFill>
+                  <a:srgbClr val="7A6E60"/>
                 </a:solidFill>
                 <a:latin typeface="游ゴシック" pitchFamily="34" charset="0"/>
                 <a:ea typeface="游ゴシック" pitchFamily="34" charset="-122"/>
                 <a:cs typeface="游ゴシック" pitchFamily="34" charset="-120"/>
               </a:rPr>
-              <a:t>→　受け止めてもらう側が要る</a:t>
-            </a:r>
-            <a:endParaRPr lang="en-US" sz="1500" dirty="0"/>
+              <a:t>→</a:t>
+            </a:r>
+            <a:endParaRPr lang="en-US" sz="1200" dirty="0"/>
+          </a:p>
+        </p:txBody>
+      </p:sp>
+      <p:sp>
+        <p:nvSpPr>
+          <p:cNvPr id="13" name="Text 11"/>
+          <p:cNvSpPr txBox="1"/>
+          <p:nvPr/>
+        </p:nvSpPr>
+        <p:spPr>
+          <a:xfrm>
+            <a:off x="7223760" y="2933839"/>
+            <a:ext cx="3916375" cy="740831"/>
+          </a:xfrm>
+          <a:prstGeom prst="rect">
+            <a:avLst/>
+          </a:prstGeom>
+          <a:noFill/>
+          <a:ln/>
+        </p:spPr>
+        <p:txBody>
+          <a:bodyPr wrap="square" lIns="0" tIns="0" rIns="0" bIns="0" rtlCol="0" anchor="ctr"/>
+          <a:lstStyle/>
+          <a:p>
+            <a:pPr indent="0" marL="0">
+              <a:buNone/>
+            </a:pPr>
+            <a:r>
+              <a:rPr lang="en-US" sz="1300" dirty="0">
+                <a:solidFill>
+                  <a:srgbClr val="7A6E60"/>
+                </a:solidFill>
+                <a:latin typeface="游ゴシック" pitchFamily="34" charset="0"/>
+                <a:ea typeface="游ゴシック" pitchFamily="34" charset="-122"/>
+                <a:cs typeface="游ゴシック" pitchFamily="34" charset="-120"/>
+              </a:rPr>
+              <a:t>抑うつを感じにくくなり、出かけるように</a:t>
+            </a:r>
+            <a:endParaRPr lang="en-US" sz="1300" dirty="0"/>
           </a:p>
         </p:txBody>
       </p:sp>
@@ -26126,12 +27150,12 @@
         </p:nvSpPr>
         <p:spPr>
           <a:xfrm>
-            <a:off x="731520" y="4414193"/>
-            <a:ext cx="10728655" cy="935467"/>
+            <a:off x="731520" y="3794806"/>
+            <a:ext cx="10728655" cy="740831"/>
           </a:xfrm>
           <a:prstGeom prst="roundRect">
             <a:avLst>
-              <a:gd name="adj" fmla="val 9775"/>
+              <a:gd name="adj" fmla="val 12343"/>
             </a:avLst>
           </a:prstGeom>
           <a:solidFill>
@@ -26149,73 +27173,53 @@
       </p:sp>
       <p:sp>
         <p:nvSpPr>
-          <p:cNvPr id="15" name="Shape 13"/>
-          <p:cNvSpPr/>
-          <p:nvPr/>
-        </p:nvSpPr>
-        <p:spPr>
-          <a:xfrm>
-            <a:off x="1005840" y="4635039"/>
-            <a:ext cx="493776" cy="493776"/>
-          </a:xfrm>
-          <a:prstGeom prst="ellipse">
-            <a:avLst/>
-          </a:prstGeom>
-          <a:solidFill>
-            <a:srgbClr val="2B2620"/>
-          </a:solidFill>
-          <a:ln/>
-        </p:spPr>
-      </p:sp>
-      <p:sp>
-        <p:nvSpPr>
-          <p:cNvPr id="16" name="Text 14"/>
-          <p:cNvSpPr txBox="1"/>
-          <p:nvPr/>
-        </p:nvSpPr>
-        <p:spPr>
-          <a:xfrm>
-            <a:off x="1005840" y="4594908"/>
-            <a:ext cx="493776" cy="574036"/>
-          </a:xfrm>
-          <a:prstGeom prst="rect">
-            <a:avLst/>
-          </a:prstGeom>
-          <a:noFill/>
-          <a:ln/>
-        </p:spPr>
-        <p:txBody>
-          <a:bodyPr wrap="square" lIns="0" tIns="0" rIns="0" bIns="0" rtlCol="0" anchor="ctr"/>
-          <a:lstStyle/>
-          <a:p>
-            <a:pPr algn="ctr" indent="0" marL="0">
-              <a:buNone/>
-            </a:pPr>
-            <a:r>
-              <a:rPr lang="en-US" sz="1600" b="1" dirty="0">
-                <a:solidFill>
-                  <a:srgbClr val="FCFAF4"/>
+          <p:cNvPr id="15" name="Text 13"/>
+          <p:cNvSpPr txBox="1"/>
+          <p:nvPr/>
+        </p:nvSpPr>
+        <p:spPr>
+          <a:xfrm>
+            <a:off x="1051560" y="3794806"/>
+            <a:ext cx="1005840" cy="740831"/>
+          </a:xfrm>
+          <a:prstGeom prst="rect">
+            <a:avLst/>
+          </a:prstGeom>
+          <a:noFill/>
+          <a:ln/>
+        </p:spPr>
+        <p:txBody>
+          <a:bodyPr wrap="square" lIns="0" tIns="0" rIns="0" bIns="0" rtlCol="0" anchor="ctr"/>
+          <a:lstStyle/>
+          <a:p>
+            <a:pPr indent="0" marL="0">
+              <a:buNone/>
+            </a:pPr>
+            <a:r>
+              <a:rPr lang="en-US" sz="1500" b="1" dirty="0">
+                <a:solidFill>
+                  <a:srgbClr val="9C5446"/>
                 </a:solidFill>
                 <a:latin typeface="游明朝" pitchFamily="34" charset="0"/>
                 <a:ea typeface="游明朝" pitchFamily="34" charset="-122"/>
                 <a:cs typeface="游明朝" pitchFamily="34" charset="-120"/>
               </a:rPr>
-              <a:t>3</a:t>
-            </a:r>
-            <a:endParaRPr lang="en-US" sz="1600" dirty="0"/>
-          </a:p>
-        </p:txBody>
-      </p:sp>
-      <p:sp>
-        <p:nvSpPr>
-          <p:cNvPr id="17" name="Text 15"/>
-          <p:cNvSpPr txBox="1"/>
-          <p:nvPr/>
-        </p:nvSpPr>
-        <p:spPr>
-          <a:xfrm>
-            <a:off x="1691640" y="4414193"/>
-            <a:ext cx="4937760" cy="935467"/>
+              <a:t>11–15診</a:t>
+            </a:r>
+            <a:endParaRPr lang="en-US" sz="1500" dirty="0"/>
+          </a:p>
+        </p:txBody>
+      </p:sp>
+      <p:sp>
+        <p:nvSpPr>
+          <p:cNvPr id="16" name="Text 14"/>
+          <p:cNvSpPr txBox="1"/>
+          <p:nvPr/>
+        </p:nvSpPr>
+        <p:spPr>
+          <a:xfrm>
+            <a:off x="2194560" y="3794806"/>
+            <a:ext cx="4480560" cy="740831"/>
           </a:xfrm>
           <a:prstGeom prst="rect">
             <a:avLst/>
@@ -26231,7 +27235,7 @@
               <a:buNone/>
             </a:pPr>
             <a:r>
-              <a:rPr lang="en-US" sz="1600" b="1" dirty="0">
+              <a:rPr lang="en-US" sz="1350" b="1" dirty="0">
                 <a:solidFill>
                   <a:srgbClr val="2B2620"/>
                 </a:solidFill>
@@ -26239,61 +27243,61 @@
                 <a:ea typeface="游ゴシック" pitchFamily="34" charset="-122"/>
                 <a:cs typeface="游ゴシック" pitchFamily="34" charset="-120"/>
               </a:rPr>
-              <a:t>3週間で、元に戻る</a:t>
-            </a:r>
-            <a:endParaRPr lang="en-US" sz="1600" dirty="0"/>
-          </a:p>
-        </p:txBody>
-      </p:sp>
-      <p:sp>
-        <p:nvSpPr>
-          <p:cNvPr id="18" name="Text 16"/>
-          <p:cNvSpPr txBox="1"/>
-          <p:nvPr/>
-        </p:nvSpPr>
-        <p:spPr>
-          <a:xfrm>
-            <a:off x="6766560" y="4414193"/>
-            <a:ext cx="4419295" cy="935467"/>
-          </a:xfrm>
-          <a:prstGeom prst="rect">
-            <a:avLst/>
-          </a:prstGeom>
-          <a:noFill/>
-          <a:ln/>
-        </p:spPr>
-        <p:txBody>
-          <a:bodyPr wrap="square" lIns="0" tIns="0" rIns="0" bIns="0" rtlCol="0" anchor="ctr"/>
-          <a:lstStyle/>
-          <a:p>
-            <a:pPr indent="0" marL="0">
-              <a:buNone/>
-            </a:pPr>
-            <a:r>
-              <a:rPr lang="en-US" sz="1500" dirty="0">
-                <a:solidFill>
-                  <a:srgbClr val="9C5446"/>
+              <a:t>行動と問題に焦点を当て、できる範囲を明確に</a:t>
+            </a:r>
+            <a:endParaRPr lang="en-US" sz="1350" dirty="0"/>
+          </a:p>
+        </p:txBody>
+      </p:sp>
+      <p:sp>
+        <p:nvSpPr>
+          <p:cNvPr id="17" name="Text 15"/>
+          <p:cNvSpPr txBox="1"/>
+          <p:nvPr/>
+        </p:nvSpPr>
+        <p:spPr>
+          <a:xfrm>
+            <a:off x="6766560" y="3794806"/>
+            <a:ext cx="365760" cy="740831"/>
+          </a:xfrm>
+          <a:prstGeom prst="rect">
+            <a:avLst/>
+          </a:prstGeom>
+          <a:noFill/>
+          <a:ln/>
+        </p:spPr>
+        <p:txBody>
+          <a:bodyPr wrap="square" lIns="0" tIns="0" rIns="0" bIns="0" rtlCol="0" anchor="ctr"/>
+          <a:lstStyle/>
+          <a:p>
+            <a:pPr algn="ctr" indent="0" marL="0">
+              <a:buNone/>
+            </a:pPr>
+            <a:r>
+              <a:rPr lang="en-US" sz="1200" dirty="0">
+                <a:solidFill>
+                  <a:srgbClr val="7A6E60"/>
                 </a:solidFill>
                 <a:latin typeface="游ゴシック" pitchFamily="34" charset="0"/>
                 <a:ea typeface="游ゴシック" pitchFamily="34" charset="-122"/>
                 <a:cs typeface="游ゴシック" pitchFamily="34" charset="-120"/>
               </a:rPr>
-              <a:t>→　続ける仕組みが要る</a:t>
-            </a:r>
-            <a:endParaRPr lang="en-US" sz="1500" dirty="0"/>
-          </a:p>
-        </p:txBody>
-      </p:sp>
-      <p:sp>
-        <p:nvSpPr>
-          <p:cNvPr id="19" name="Text 17"/>
-          <p:cNvSpPr txBox="1"/>
-          <p:nvPr/>
-        </p:nvSpPr>
-        <p:spPr>
-          <a:xfrm>
-            <a:off x="731520" y="5689830"/>
-            <a:ext cx="10728655" cy="637818"/>
+              <a:t>→</a:t>
+            </a:r>
+            <a:endParaRPr lang="en-US" sz="1200" dirty="0"/>
+          </a:p>
+        </p:txBody>
+      </p:sp>
+      <p:sp>
+        <p:nvSpPr>
+          <p:cNvPr id="18" name="Text 16"/>
+          <p:cNvSpPr txBox="1"/>
+          <p:nvPr/>
+        </p:nvSpPr>
+        <p:spPr>
+          <a:xfrm>
+            <a:off x="7223760" y="3794806"/>
+            <a:ext cx="3916375" cy="740831"/>
           </a:xfrm>
           <a:prstGeom prst="rect">
             <a:avLst/>
@@ -26309,15 +27313,239 @@
               <a:buNone/>
             </a:pPr>
             <a:r>
-              <a:rPr lang="en-US" sz="2600" b="1" dirty="0">
-                <a:solidFill>
-                  <a:srgbClr val="2B2620"/>
+              <a:rPr lang="en-US" sz="1300" dirty="0">
+                <a:solidFill>
+                  <a:srgbClr val="7A6E60"/>
+                </a:solidFill>
+                <a:latin typeface="游ゴシック" pitchFamily="34" charset="0"/>
+                <a:ea typeface="游ゴシック" pitchFamily="34" charset="-122"/>
+                <a:cs typeface="游ゴシック" pitchFamily="34" charset="-120"/>
+              </a:rPr>
+              <a:t>主治医も親も「回復に驚いている」</a:t>
+            </a:r>
+            <a:endParaRPr lang="en-US" sz="1300" dirty="0"/>
+          </a:p>
+        </p:txBody>
+      </p:sp>
+      <p:sp>
+        <p:nvSpPr>
+          <p:cNvPr id="19" name="Shape 17"/>
+          <p:cNvSpPr/>
+          <p:nvPr/>
+        </p:nvSpPr>
+        <p:spPr>
+          <a:xfrm>
+            <a:off x="731520" y="4655772"/>
+            <a:ext cx="10728655" cy="740831"/>
+          </a:xfrm>
+          <a:prstGeom prst="roundRect">
+            <a:avLst>
+              <a:gd name="adj" fmla="val 12343"/>
+            </a:avLst>
+          </a:prstGeom>
+          <a:solidFill>
+            <a:srgbClr val="FCFAF4"/>
+          </a:solidFill>
+          <a:ln/>
+          <a:effectLst>
+            <a:outerShdw sx="100000" sy="100000" kx="0" ky="0" algn="bl" rotWithShape="0" blurRad="127000" dist="508" dir="5400000">
+              <a:srgbClr val="8C7F6E">
+                <a:alpha val="25000"/>
+              </a:srgbClr>
+            </a:outerShdw>
+          </a:effectLst>
+        </p:spPr>
+      </p:sp>
+      <p:sp>
+        <p:nvSpPr>
+          <p:cNvPr id="20" name="Text 18"/>
+          <p:cNvSpPr txBox="1"/>
+          <p:nvPr/>
+        </p:nvSpPr>
+        <p:spPr>
+          <a:xfrm>
+            <a:off x="1051560" y="4655772"/>
+            <a:ext cx="1005840" cy="740831"/>
+          </a:xfrm>
+          <a:prstGeom prst="rect">
+            <a:avLst/>
+          </a:prstGeom>
+          <a:noFill/>
+          <a:ln/>
+        </p:spPr>
+        <p:txBody>
+          <a:bodyPr wrap="square" lIns="0" tIns="0" rIns="0" bIns="0" rtlCol="0" anchor="ctr"/>
+          <a:lstStyle/>
+          <a:p>
+            <a:pPr indent="0" marL="0">
+              <a:buNone/>
+            </a:pPr>
+            <a:r>
+              <a:rPr lang="en-US" sz="1500" b="1" dirty="0">
+                <a:solidFill>
+                  <a:srgbClr val="5E7060"/>
                 </a:solidFill>
                 <a:latin typeface="游明朝" pitchFamily="34" charset="0"/>
                 <a:ea typeface="游明朝" pitchFamily="34" charset="-122"/>
                 <a:cs typeface="游明朝" pitchFamily="34" charset="-120"/>
               </a:rPr>
-              <a:t>才能の話ではありません。環境の話です。</a:t>
+              <a:t>16–20診</a:t>
+            </a:r>
+            <a:endParaRPr lang="en-US" sz="1500" dirty="0"/>
+          </a:p>
+        </p:txBody>
+      </p:sp>
+      <p:sp>
+        <p:nvSpPr>
+          <p:cNvPr id="21" name="Text 19"/>
+          <p:cNvSpPr txBox="1"/>
+          <p:nvPr/>
+        </p:nvSpPr>
+        <p:spPr>
+          <a:xfrm>
+            <a:off x="2194560" y="4655772"/>
+            <a:ext cx="4480560" cy="740831"/>
+          </a:xfrm>
+          <a:prstGeom prst="rect">
+            <a:avLst/>
+          </a:prstGeom>
+          <a:noFill/>
+          <a:ln/>
+        </p:spPr>
+        <p:txBody>
+          <a:bodyPr wrap="square" lIns="0" tIns="0" rIns="0" bIns="0" rtlCol="0" anchor="ctr"/>
+          <a:lstStyle/>
+          <a:p>
+            <a:pPr indent="0" marL="0">
+              <a:buNone/>
+            </a:pPr>
+            <a:r>
+              <a:rPr lang="en-US" sz="1350" b="1" dirty="0">
+                <a:solidFill>
+                  <a:srgbClr val="2B2620"/>
+                </a:solidFill>
+                <a:latin typeface="游ゴシック" pitchFamily="34" charset="0"/>
+                <a:ea typeface="游ゴシック" pitchFamily="34" charset="-122"/>
+                <a:cs typeface="游ゴシック" pitchFamily="34" charset="-120"/>
+              </a:rPr>
+              <a:t>どう感じているかを聴き、感情の認知を促す</a:t>
+            </a:r>
+            <a:endParaRPr lang="en-US" sz="1350" dirty="0"/>
+          </a:p>
+        </p:txBody>
+      </p:sp>
+      <p:sp>
+        <p:nvSpPr>
+          <p:cNvPr id="22" name="Text 20"/>
+          <p:cNvSpPr txBox="1"/>
+          <p:nvPr/>
+        </p:nvSpPr>
+        <p:spPr>
+          <a:xfrm>
+            <a:off x="6766560" y="4655772"/>
+            <a:ext cx="365760" cy="740831"/>
+          </a:xfrm>
+          <a:prstGeom prst="rect">
+            <a:avLst/>
+          </a:prstGeom>
+          <a:noFill/>
+          <a:ln/>
+        </p:spPr>
+        <p:txBody>
+          <a:bodyPr wrap="square" lIns="0" tIns="0" rIns="0" bIns="0" rtlCol="0" anchor="ctr"/>
+          <a:lstStyle/>
+          <a:p>
+            <a:pPr algn="ctr" indent="0" marL="0">
+              <a:buNone/>
+            </a:pPr>
+            <a:r>
+              <a:rPr lang="en-US" sz="1200" dirty="0">
+                <a:solidFill>
+                  <a:srgbClr val="7A6E60"/>
+                </a:solidFill>
+                <a:latin typeface="游ゴシック" pitchFamily="34" charset="0"/>
+                <a:ea typeface="游ゴシック" pitchFamily="34" charset="-122"/>
+                <a:cs typeface="游ゴシック" pitchFamily="34" charset="-120"/>
+              </a:rPr>
+              <a:t>→</a:t>
+            </a:r>
+            <a:endParaRPr lang="en-US" sz="1200" dirty="0"/>
+          </a:p>
+        </p:txBody>
+      </p:sp>
+      <p:sp>
+        <p:nvSpPr>
+          <p:cNvPr id="23" name="Text 21"/>
+          <p:cNvSpPr txBox="1"/>
+          <p:nvPr/>
+        </p:nvSpPr>
+        <p:spPr>
+          <a:xfrm>
+            <a:off x="7223760" y="4655772"/>
+            <a:ext cx="3916375" cy="740831"/>
+          </a:xfrm>
+          <a:prstGeom prst="rect">
+            <a:avLst/>
+          </a:prstGeom>
+          <a:noFill/>
+          <a:ln/>
+        </p:spPr>
+        <p:txBody>
+          <a:bodyPr wrap="square" lIns="0" tIns="0" rIns="0" bIns="0" rtlCol="0" anchor="ctr"/>
+          <a:lstStyle/>
+          <a:p>
+            <a:pPr indent="0" marL="0">
+              <a:buNone/>
+            </a:pPr>
+            <a:r>
+              <a:rPr lang="en-US" sz="1300" dirty="0">
+                <a:solidFill>
+                  <a:srgbClr val="7A6E60"/>
+                </a:solidFill>
+                <a:latin typeface="游ゴシック" pitchFamily="34" charset="0"/>
+                <a:ea typeface="游ゴシック" pitchFamily="34" charset="-122"/>
+                <a:cs typeface="游ゴシック" pitchFamily="34" charset="-120"/>
+              </a:rPr>
+              <a:t>「次回も鍼灸、楽しみにしている」</a:t>
+            </a:r>
+            <a:endParaRPr lang="en-US" sz="1300" dirty="0"/>
+          </a:p>
+        </p:txBody>
+      </p:sp>
+      <p:sp>
+        <p:nvSpPr>
+          <p:cNvPr id="24" name="Text 22"/>
+          <p:cNvSpPr txBox="1"/>
+          <p:nvPr/>
+        </p:nvSpPr>
+        <p:spPr>
+          <a:xfrm>
+            <a:off x="731520" y="5726974"/>
+            <a:ext cx="10728655" cy="600674"/>
+          </a:xfrm>
+          <a:prstGeom prst="rect">
+            <a:avLst/>
+          </a:prstGeom>
+          <a:noFill/>
+          <a:ln/>
+        </p:spPr>
+        <p:txBody>
+          <a:bodyPr wrap="square" lIns="0" tIns="0" rIns="0" bIns="0" rtlCol="0" anchor="ctr"/>
+          <a:lstStyle/>
+          <a:p>
+            <a:pPr indent="0" marL="0">
+              <a:buNone/>
+            </a:pPr>
+            <a:r>
+              <a:rPr lang="en-US" sz="2600" b="1" dirty="0">
+                <a:solidFill>
+                  <a:srgbClr val="2B2620"/>
+                </a:solidFill>
+                <a:latin typeface="游明朝" pitchFamily="34" charset="0"/>
+                <a:ea typeface="游明朝" pitchFamily="34" charset="-122"/>
+                <a:cs typeface="游明朝" pitchFamily="34" charset="-120"/>
+              </a:rPr>
+              <a:t>傾聴にも、順番があります。</a:t>
             </a:r>
             <a:endParaRPr lang="en-US" sz="2600" dirty="0"/>
           </a:p>
@@ -26325,7 +27553,7 @@
       </p:sp>
       <p:sp>
         <p:nvSpPr>
-          <p:cNvPr id="20" name="Text 18"/>
+          <p:cNvPr id="25" name="Text 23"/>
           <p:cNvSpPr txBox="1"/>
           <p:nvPr/>
         </p:nvSpPr>
@@ -26403,7 +27631,7 @@
         <p:spPr>
           <a:xfrm>
             <a:off x="731520" y="310896"/>
-            <a:ext cx="10728655" cy="283912"/>
+            <a:ext cx="10728655" cy="258144"/>
           </a:xfrm>
           <a:prstGeom prst="rect">
             <a:avLst/>
@@ -26427,7 +27655,7 @@
                 <a:ea typeface="游ゴシック" pitchFamily="34" charset="-122"/>
                 <a:cs typeface="游ゴシック" pitchFamily="34" charset="-120"/>
               </a:rPr>
-              <a:t>続けるために</a:t>
+              <a:t>症例</a:t>
             </a:r>
             <a:endParaRPr lang="en-US" sz="1100" dirty="0"/>
           </a:p>
@@ -26441,8 +27669,8 @@
         </p:nvSpPr>
         <p:spPr>
           <a:xfrm>
-            <a:off x="731520" y="616647"/>
-            <a:ext cx="10728655" cy="1146568"/>
+            <a:off x="731520" y="588898"/>
+            <a:ext cx="10728655" cy="1042507"/>
           </a:xfrm>
           <a:prstGeom prst="rect">
             <a:avLst/>
@@ -26469,7 +27697,7 @@
                 <a:ea typeface="游明朝" pitchFamily="34" charset="-122"/>
                 <a:cs typeface="游明朝" pitchFamily="34" charset="-120"/>
               </a:rPr>
-              <a:t>だから、場をつくりました</a:t>
+              <a:t>20診　184日</a:t>
             </a:r>
             <a:endParaRPr lang="en-US" sz="3200" dirty="0"/>
           </a:p>
@@ -26477,43 +27705,14 @@
       </p:sp>
       <p:sp>
         <p:nvSpPr>
-          <p:cNvPr id="4" name="Shape 2"/>
-          <p:cNvSpPr/>
-          <p:nvPr/>
-        </p:nvSpPr>
-        <p:spPr>
-          <a:xfrm>
-            <a:off x="731520" y="2178164"/>
-            <a:ext cx="5578901" cy="3166712"/>
-          </a:xfrm>
-          <a:prstGeom prst="roundRect">
-            <a:avLst>
-              <a:gd name="adj" fmla="val 2888"/>
-            </a:avLst>
-          </a:prstGeom>
-          <a:solidFill>
-            <a:srgbClr val="FCFAF4"/>
-          </a:solidFill>
-          <a:ln/>
-          <a:effectLst>
-            <a:outerShdw sx="100000" sy="100000" kx="0" ky="0" algn="bl" rotWithShape="0" blurRad="127000" dist="508" dir="5400000">
-              <a:srgbClr val="8C7F6E">
-                <a:alpha val="25000"/>
-              </a:srgbClr>
-            </a:outerShdw>
-          </a:effectLst>
-        </p:spPr>
-      </p:sp>
-      <p:sp>
-        <p:nvSpPr>
-          <p:cNvPr id="5" name="Text 3"/>
-          <p:cNvSpPr txBox="1"/>
-          <p:nvPr/>
-        </p:nvSpPr>
-        <p:spPr>
-          <a:xfrm>
-            <a:off x="1188720" y="2560353"/>
-            <a:ext cx="4664501" cy="1037371"/>
+          <p:cNvPr id="4" name="Text 2"/>
+          <p:cNvSpPr txBox="1"/>
+          <p:nvPr/>
+        </p:nvSpPr>
+        <p:spPr>
+          <a:xfrm>
+            <a:off x="731520" y="2008692"/>
+            <a:ext cx="6437193" cy="317716"/>
           </a:xfrm>
           <a:prstGeom prst="rect">
             <a:avLst/>
@@ -26526,56 +27725,127 @@
           <a:lstStyle/>
           <a:p>
             <a:pPr indent="0" marL="0">
-              <a:lnSpc>
-                <a:spcPts val="3800"/>
-              </a:lnSpc>
-              <a:buNone/>
-            </a:pPr>
-            <a:r>
-              <a:rPr lang="en-US" sz="2500" b="1" dirty="0">
-                <a:solidFill>
-                  <a:srgbClr val="2B2620"/>
+              <a:buNone/>
+            </a:pPr>
+            <a:r>
+              <a:rPr lang="en-US" sz="1200" b="1" dirty="0">
+                <a:solidFill>
+                  <a:srgbClr val="7A6E60"/>
+                </a:solidFill>
+                <a:latin typeface="游ゴシック" pitchFamily="34" charset="0"/>
+                <a:ea typeface="游ゴシック" pitchFamily="34" charset="-122"/>
+                <a:cs typeface="游ゴシック" pitchFamily="34" charset="-120"/>
+              </a:rPr>
+              <a:t>PHQ-9（うつ症状）の推移</a:t>
+            </a:r>
+            <a:endParaRPr lang="en-US" sz="1200" dirty="0"/>
+          </a:p>
+        </p:txBody>
+      </p:sp>
+      <p:graphicFrame>
+        <p:nvGraphicFramePr>
+          <p:cNvPr id="5" name="Chart 0" descr=""/>
+          <p:cNvGraphicFramePr/>
+          <p:nvPr/>
+        </p:nvGraphicFramePr>
+        <p:xfrm>
+          <a:off x="640080" y="2356195"/>
+          <a:ext cx="6437193" cy="2581445"/>
+        </p:xfrm>
+        <a:graphic xmlns:a="http://schemas.openxmlformats.org/drawingml/2006/main">
+          <a:graphicData uri="http://schemas.openxmlformats.org/drawingml/2006/chart">
+            <c:chart xmlns:c="http://schemas.openxmlformats.org/drawingml/2006/chart" r:id="rId1"/>
+          </a:graphicData>
+        </a:graphic>
+      </p:graphicFrame>
+      <p:sp>
+        <p:nvSpPr>
+          <p:cNvPr id="6" name="Text 3"/>
+          <p:cNvSpPr txBox="1"/>
+          <p:nvPr/>
+        </p:nvSpPr>
+        <p:spPr>
+          <a:xfrm>
+            <a:off x="7383286" y="2157622"/>
+            <a:ext cx="4076889" cy="297859"/>
+          </a:xfrm>
+          <a:prstGeom prst="rect">
+            <a:avLst/>
+          </a:prstGeom>
+          <a:noFill/>
+          <a:ln/>
+        </p:spPr>
+        <p:txBody>
+          <a:bodyPr wrap="square" lIns="0" tIns="0" rIns="0" bIns="0" rtlCol="0" anchor="ctr"/>
+          <a:lstStyle/>
+          <a:p>
+            <a:pPr indent="0" marL="0">
+              <a:buNone/>
+            </a:pPr>
+            <a:r>
+              <a:rPr lang="en-US" sz="1100" b="1" dirty="0">
+                <a:solidFill>
+                  <a:srgbClr val="7A6E60"/>
+                </a:solidFill>
+                <a:latin typeface="游ゴシック" pitchFamily="34" charset="0"/>
+                <a:ea typeface="游ゴシック" pitchFamily="34" charset="-122"/>
+                <a:cs typeface="游ゴシック" pitchFamily="34" charset="-120"/>
+              </a:rPr>
+              <a:t>PHQ-9</a:t>
+            </a:r>
+            <a:endParaRPr lang="en-US" sz="1100" dirty="0"/>
+          </a:p>
+        </p:txBody>
+      </p:sp>
+      <p:sp>
+        <p:nvSpPr>
+          <p:cNvPr id="7" name="Text 4"/>
+          <p:cNvSpPr txBox="1"/>
+          <p:nvPr/>
+        </p:nvSpPr>
+        <p:spPr>
+          <a:xfrm>
+            <a:off x="7383286" y="2455481"/>
+            <a:ext cx="4076889" cy="943220"/>
+          </a:xfrm>
+          <a:prstGeom prst="rect">
+            <a:avLst/>
+          </a:prstGeom>
+          <a:noFill/>
+          <a:ln/>
+        </p:spPr>
+        <p:txBody>
+          <a:bodyPr wrap="square" lIns="0" tIns="0" rIns="0" bIns="0" rtlCol="0" anchor="ctr"/>
+          <a:lstStyle/>
+          <a:p>
+            <a:pPr indent="0" marL="0">
+              <a:buNone/>
+            </a:pPr>
+            <a:r>
+              <a:rPr lang="en-US" sz="4600" b="1" dirty="0">
+                <a:solidFill>
+                  <a:srgbClr val="9C5446"/>
                 </a:solidFill>
                 <a:latin typeface="游明朝" pitchFamily="34" charset="0"/>
                 <a:ea typeface="游明朝" pitchFamily="34" charset="-122"/>
                 <a:cs typeface="游明朝" pitchFamily="34" charset="-120"/>
               </a:rPr>
-              <a:t>オンラインサロン</a:t>
-            </a:r>
-            <a:endParaRPr lang="en-US" sz="2500" dirty="0"/>
-          </a:p>
-          <a:p>
-            <a:pPr indent="0" marL="0">
-              <a:lnSpc>
-                <a:spcPts val="3800"/>
-              </a:lnSpc>
-              <a:buNone/>
-            </a:pPr>
-            <a:r>
-              <a:rPr lang="en-US" sz="2500" b="1" dirty="0">
-                <a:solidFill>
-                  <a:srgbClr val="2B2620"/>
-                </a:solidFill>
-                <a:latin typeface="游明朝" pitchFamily="34" charset="0"/>
-                <a:ea typeface="游明朝" pitchFamily="34" charset="-122"/>
-                <a:cs typeface="游明朝" pitchFamily="34" charset="-120"/>
-              </a:rPr>
-              <a:t>ここちめいど</a:t>
-            </a:r>
-            <a:endParaRPr lang="en-US" sz="2500" dirty="0"/>
-          </a:p>
-        </p:txBody>
-      </p:sp>
-      <p:sp>
-        <p:nvSpPr>
-          <p:cNvPr id="6" name="Text 4"/>
-          <p:cNvSpPr txBox="1"/>
-          <p:nvPr/>
-        </p:nvSpPr>
-        <p:spPr>
-          <a:xfrm>
-            <a:off x="1188720" y="3761520"/>
-            <a:ext cx="4664501" cy="873576"/>
+              <a:t>13　→　5</a:t>
+            </a:r>
+            <a:endParaRPr lang="en-US" sz="4600" dirty="0"/>
+          </a:p>
+        </p:txBody>
+      </p:sp>
+      <p:sp>
+        <p:nvSpPr>
+          <p:cNvPr id="8" name="Text 5"/>
+          <p:cNvSpPr txBox="1"/>
+          <p:nvPr/>
+        </p:nvSpPr>
+        <p:spPr>
+          <a:xfrm>
+            <a:off x="7383286" y="3547631"/>
+            <a:ext cx="4076889" cy="1489295"/>
           </a:xfrm>
           <a:prstGeom prst="rect">
             <a:avLst/>
@@ -26594,17 +27864,17 @@
               <a:buNone/>
             </a:pPr>
             <a:r>
-              <a:rPr lang="en-US" sz="1400" dirty="0">
-                <a:solidFill>
-                  <a:srgbClr val="7A6E60"/>
+              <a:rPr lang="en-US" sz="1350" dirty="0">
+                <a:solidFill>
+                  <a:srgbClr val="2B2620"/>
                 </a:solidFill>
                 <a:latin typeface="游ゴシック" pitchFamily="34" charset="0"/>
                 <a:ea typeface="游ゴシック" pitchFamily="34" charset="-122"/>
                 <a:cs typeface="游ゴシック" pitchFamily="34" charset="-120"/>
               </a:rPr>
-              <a:t>傾聴を学ぶ、鍼灸師のコミュニティ</a:t>
-            </a:r>
-            <a:endParaRPr lang="en-US" sz="1400" dirty="0"/>
+              <a:t>身体症状（PHQ-15）は 20 → 19。</a:t>
+            </a:r>
+            <a:endParaRPr lang="en-US" sz="1350" dirty="0"/>
           </a:p>
           <a:p>
             <a:pPr algn="l" indent="0" marL="0">
@@ -26614,128 +27884,118 @@
               <a:buNone/>
             </a:pPr>
             <a:r>
-              <a:rPr lang="en-US" sz="1400" dirty="0">
-                <a:solidFill>
-                  <a:srgbClr val="7A6E60"/>
+              <a:rPr lang="en-US" sz="1350" dirty="0">
+                <a:solidFill>
+                  <a:srgbClr val="2B2620"/>
                 </a:solidFill>
                 <a:latin typeface="游ゴシック" pitchFamily="34" charset="0"/>
                 <a:ea typeface="游ゴシック" pitchFamily="34" charset="-122"/>
                 <a:cs typeface="游ゴシック" pitchFamily="34" charset="-120"/>
               </a:rPr>
-              <a:t>2020年4月から、5年目です。</a:t>
-            </a:r>
-            <a:endParaRPr lang="en-US" sz="1400" dirty="0"/>
-          </a:p>
-        </p:txBody>
-      </p:sp>
-      <p:sp>
-        <p:nvSpPr>
-          <p:cNvPr id="7" name="Text 5"/>
-          <p:cNvSpPr txBox="1"/>
-          <p:nvPr/>
-        </p:nvSpPr>
-        <p:spPr>
-          <a:xfrm>
-            <a:off x="1188720" y="4744292"/>
-            <a:ext cx="4664501" cy="382189"/>
-          </a:xfrm>
-          <a:prstGeom prst="rect">
-            <a:avLst/>
-          </a:prstGeom>
-          <a:noFill/>
-          <a:ln/>
-        </p:spPr>
-        <p:txBody>
-          <a:bodyPr wrap="square" lIns="0" tIns="0" rIns="0" bIns="0" rtlCol="0" anchor="ctr"/>
-          <a:lstStyle/>
-          <a:p>
-            <a:pPr indent="0" marL="0">
-              <a:buNone/>
-            </a:pPr>
-            <a:r>
-              <a:rPr lang="en-US" sz="1200" dirty="0">
-                <a:solidFill>
-                  <a:srgbClr val="5E7060"/>
+              <a:t>大きくは変わっていません。</a:t>
+            </a:r>
+            <a:endParaRPr lang="en-US" sz="1350" dirty="0"/>
+          </a:p>
+          <a:p>
+            <a:pPr algn="l" indent="0" marL="0">
+              <a:lnSpc>
+                <a:spcPts val="2400"/>
+              </a:lnSpc>
+              <a:buNone/>
+            </a:pPr>
+            <a:endParaRPr lang="en-US" sz="1350" dirty="0"/>
+          </a:p>
+          <a:p>
+            <a:pPr algn="l" indent="0" marL="0">
+              <a:lnSpc>
+                <a:spcPts val="2400"/>
+              </a:lnSpc>
+              <a:buNone/>
+            </a:pPr>
+            <a:r>
+              <a:rPr lang="en-US" sz="1350" dirty="0">
+                <a:solidFill>
+                  <a:srgbClr val="2B2620"/>
                 </a:solidFill>
                 <a:latin typeface="游ゴシック" pitchFamily="34" charset="0"/>
                 <a:ea typeface="游ゴシック" pitchFamily="34" charset="-122"/>
                 <a:cs typeface="游ゴシック" pitchFamily="34" charset="-120"/>
               </a:rPr>
-              <a:t>cocochimade.me</a:t>
-            </a:r>
-            <a:endParaRPr lang="en-US" sz="1200" dirty="0"/>
-          </a:p>
-        </p:txBody>
-      </p:sp>
-      <p:sp>
-        <p:nvSpPr>
-          <p:cNvPr id="8" name="Shape 6"/>
-          <p:cNvSpPr/>
-          <p:nvPr/>
-        </p:nvSpPr>
-        <p:spPr>
-          <a:xfrm>
-            <a:off x="6767621" y="2433847"/>
-            <a:ext cx="384048" cy="384048"/>
-          </a:xfrm>
-          <a:prstGeom prst="ellipse">
-            <a:avLst/>
-          </a:prstGeom>
-          <a:solidFill>
-            <a:srgbClr val="5E7060"/>
-          </a:solidFill>
-          <a:ln/>
-        </p:spPr>
-      </p:sp>
-      <p:sp>
-        <p:nvSpPr>
-          <p:cNvPr id="9" name="Text 7"/>
-          <p:cNvSpPr txBox="1"/>
-          <p:nvPr/>
-        </p:nvSpPr>
-        <p:spPr>
-          <a:xfrm>
-            <a:off x="6767621" y="2396558"/>
-            <a:ext cx="384048" cy="458627"/>
-          </a:xfrm>
-          <a:prstGeom prst="rect">
-            <a:avLst/>
-          </a:prstGeom>
-          <a:noFill/>
-          <a:ln/>
-        </p:spPr>
-        <p:txBody>
-          <a:bodyPr wrap="square" lIns="0" tIns="0" rIns="0" bIns="0" rtlCol="0" anchor="ctr"/>
-          <a:lstStyle/>
-          <a:p>
-            <a:pPr algn="ctr" indent="0" marL="0">
-              <a:buNone/>
-            </a:pPr>
-            <a:r>
-              <a:rPr lang="en-US" sz="1200" b="1" dirty="0">
-                <a:solidFill>
-                  <a:srgbClr val="FCFAF4"/>
+              <a:t>変わったのは、気分と睡眠、</a:t>
+            </a:r>
+            <a:endParaRPr lang="en-US" sz="1350" dirty="0"/>
+          </a:p>
+          <a:p>
+            <a:pPr algn="l" indent="0" marL="0">
+              <a:lnSpc>
+                <a:spcPts val="2400"/>
+              </a:lnSpc>
+              <a:buNone/>
+            </a:pPr>
+            <a:r>
+              <a:rPr lang="en-US" sz="1350" dirty="0">
+                <a:solidFill>
+                  <a:srgbClr val="2B2620"/>
+                </a:solidFill>
+                <a:latin typeface="游ゴシック" pitchFamily="34" charset="0"/>
+                <a:ea typeface="游ゴシック" pitchFamily="34" charset="-122"/>
+                <a:cs typeface="游ゴシック" pitchFamily="34" charset="-120"/>
+              </a:rPr>
+              <a:t>そして日常生活でした。</a:t>
+            </a:r>
+            <a:endParaRPr lang="en-US" sz="1350" dirty="0"/>
+          </a:p>
+        </p:txBody>
+      </p:sp>
+      <p:sp>
+        <p:nvSpPr>
+          <p:cNvPr id="9" name="Text 6"/>
+          <p:cNvSpPr txBox="1"/>
+          <p:nvPr/>
+        </p:nvSpPr>
+        <p:spPr>
+          <a:xfrm>
+            <a:off x="731520" y="5285141"/>
+            <a:ext cx="10728655" cy="595718"/>
+          </a:xfrm>
+          <a:prstGeom prst="rect">
+            <a:avLst/>
+          </a:prstGeom>
+          <a:noFill/>
+          <a:ln/>
+        </p:spPr>
+        <p:txBody>
+          <a:bodyPr wrap="square" lIns="0" tIns="0" rIns="0" bIns="0" rtlCol="0" anchor="ctr"/>
+          <a:lstStyle/>
+          <a:p>
+            <a:pPr indent="0" marL="0">
+              <a:buNone/>
+            </a:pPr>
+            <a:r>
+              <a:rPr lang="en-US" sz="2800" b="1" dirty="0">
+                <a:solidFill>
+                  <a:srgbClr val="2B2620"/>
                 </a:solidFill>
                 <a:latin typeface="游明朝" pitchFamily="34" charset="0"/>
                 <a:ea typeface="游明朝" pitchFamily="34" charset="-122"/>
                 <a:cs typeface="游明朝" pitchFamily="34" charset="-120"/>
               </a:rPr>
-              <a:t>◯</a:t>
-            </a:r>
-            <a:endParaRPr lang="en-US" sz="1200" dirty="0"/>
-          </a:p>
-        </p:txBody>
-      </p:sp>
-      <p:sp>
-        <p:nvSpPr>
-          <p:cNvPr id="10" name="Text 8"/>
-          <p:cNvSpPr txBox="1"/>
-          <p:nvPr/>
-        </p:nvSpPr>
-        <p:spPr>
-          <a:xfrm>
-            <a:off x="7316261" y="2363799"/>
-            <a:ext cx="4143914" cy="545985"/>
+              <a:t>入院は、回避できました。</a:t>
+            </a:r>
+            <a:endParaRPr lang="en-US" sz="2800" dirty="0"/>
+          </a:p>
+        </p:txBody>
+      </p:sp>
+      <p:sp>
+        <p:nvSpPr>
+          <p:cNvPr id="10" name="Text 7"/>
+          <p:cNvSpPr txBox="1"/>
+          <p:nvPr/>
+        </p:nvSpPr>
+        <p:spPr>
+          <a:xfrm>
+            <a:off x="731520" y="5980146"/>
+            <a:ext cx="10728655" cy="347502"/>
           </a:xfrm>
           <a:prstGeom prst="rect">
             <a:avLst/>
@@ -26751,281 +28011,23 @@
               <a:buNone/>
             </a:pPr>
             <a:r>
-              <a:rPr lang="en-US" sz="1550" b="1" dirty="0">
-                <a:solidFill>
-                  <a:srgbClr val="2B2620"/>
+              <a:rPr lang="en-US" sz="1000" dirty="0">
+                <a:solidFill>
+                  <a:srgbClr val="9E9484"/>
                 </a:solidFill>
                 <a:latin typeface="游ゴシック" pitchFamily="34" charset="0"/>
                 <a:ea typeface="游ゴシック" pitchFamily="34" charset="-122"/>
                 <a:cs typeface="游ゴシック" pitchFamily="34" charset="-120"/>
               </a:rPr>
-              <a:t>学ぶだけでは、終わらせない</a:t>
-            </a:r>
-            <a:endParaRPr lang="en-US" sz="1550" dirty="0"/>
-          </a:p>
-        </p:txBody>
-      </p:sp>
-      <p:sp>
-        <p:nvSpPr>
-          <p:cNvPr id="11" name="Shape 9"/>
-          <p:cNvSpPr/>
-          <p:nvPr/>
-        </p:nvSpPr>
-        <p:spPr>
-          <a:xfrm>
-            <a:off x="6767621" y="3471218"/>
-            <a:ext cx="384048" cy="384048"/>
-          </a:xfrm>
-          <a:prstGeom prst="ellipse">
-            <a:avLst/>
-          </a:prstGeom>
-          <a:solidFill>
-            <a:srgbClr val="9C5446"/>
-          </a:solidFill>
-          <a:ln/>
-        </p:spPr>
-      </p:sp>
-      <p:sp>
-        <p:nvSpPr>
-          <p:cNvPr id="12" name="Text 10"/>
-          <p:cNvSpPr txBox="1"/>
-          <p:nvPr/>
-        </p:nvSpPr>
-        <p:spPr>
-          <a:xfrm>
-            <a:off x="6767621" y="3433929"/>
-            <a:ext cx="384048" cy="458627"/>
-          </a:xfrm>
-          <a:prstGeom prst="rect">
-            <a:avLst/>
-          </a:prstGeom>
-          <a:noFill/>
-          <a:ln/>
-        </p:spPr>
-        <p:txBody>
-          <a:bodyPr wrap="square" lIns="0" tIns="0" rIns="0" bIns="0" rtlCol="0" anchor="ctr"/>
-          <a:lstStyle/>
-          <a:p>
-            <a:pPr algn="ctr" indent="0" marL="0">
-              <a:buNone/>
-            </a:pPr>
-            <a:r>
-              <a:rPr lang="en-US" sz="1200" b="1" dirty="0">
-                <a:solidFill>
-                  <a:srgbClr val="FCFAF4"/>
-                </a:solidFill>
-                <a:latin typeface="游明朝" pitchFamily="34" charset="0"/>
-                <a:ea typeface="游明朝" pitchFamily="34" charset="-122"/>
-                <a:cs typeface="游明朝" pitchFamily="34" charset="-120"/>
-              </a:rPr>
-              <a:t>◯</a:t>
-            </a:r>
-            <a:endParaRPr lang="en-US" sz="1200" dirty="0"/>
-          </a:p>
-        </p:txBody>
-      </p:sp>
-      <p:sp>
-        <p:nvSpPr>
-          <p:cNvPr id="13" name="Text 11"/>
-          <p:cNvSpPr txBox="1"/>
-          <p:nvPr/>
-        </p:nvSpPr>
-        <p:spPr>
-          <a:xfrm>
-            <a:off x="7316261" y="3401170"/>
-            <a:ext cx="4143914" cy="545985"/>
-          </a:xfrm>
-          <a:prstGeom prst="rect">
-            <a:avLst/>
-          </a:prstGeom>
-          <a:noFill/>
-          <a:ln/>
-        </p:spPr>
-        <p:txBody>
-          <a:bodyPr wrap="square" lIns="0" tIns="0" rIns="0" bIns="0" rtlCol="0" anchor="ctr"/>
-          <a:lstStyle/>
-          <a:p>
-            <a:pPr indent="0" marL="0">
-              <a:buNone/>
-            </a:pPr>
-            <a:r>
-              <a:rPr lang="en-US" sz="1550" b="1" dirty="0">
-                <a:solidFill>
-                  <a:srgbClr val="2B2620"/>
-                </a:solidFill>
-                <a:latin typeface="游ゴシック" pitchFamily="34" charset="0"/>
-                <a:ea typeface="游ゴシック" pitchFamily="34" charset="-122"/>
-                <a:cs typeface="游ゴシック" pitchFamily="34" charset="-120"/>
-              </a:rPr>
-              <a:t>書く・出す・立つ　まで伴走する</a:t>
-            </a:r>
-            <a:endParaRPr lang="en-US" sz="1550" dirty="0"/>
-          </a:p>
-        </p:txBody>
-      </p:sp>
-      <p:sp>
-        <p:nvSpPr>
-          <p:cNvPr id="14" name="Shape 12"/>
-          <p:cNvSpPr/>
-          <p:nvPr/>
-        </p:nvSpPr>
-        <p:spPr>
-          <a:xfrm>
-            <a:off x="6767621" y="4508589"/>
-            <a:ext cx="384048" cy="384048"/>
-          </a:xfrm>
-          <a:prstGeom prst="ellipse">
-            <a:avLst/>
-          </a:prstGeom>
-          <a:solidFill>
-            <a:srgbClr val="5E7060"/>
-          </a:solidFill>
-          <a:ln/>
-        </p:spPr>
-      </p:sp>
-      <p:sp>
-        <p:nvSpPr>
-          <p:cNvPr id="15" name="Text 13"/>
-          <p:cNvSpPr txBox="1"/>
-          <p:nvPr/>
-        </p:nvSpPr>
-        <p:spPr>
-          <a:xfrm>
-            <a:off x="6767621" y="4471300"/>
-            <a:ext cx="384048" cy="458627"/>
-          </a:xfrm>
-          <a:prstGeom prst="rect">
-            <a:avLst/>
-          </a:prstGeom>
-          <a:noFill/>
-          <a:ln/>
-        </p:spPr>
-        <p:txBody>
-          <a:bodyPr wrap="square" lIns="0" tIns="0" rIns="0" bIns="0" rtlCol="0" anchor="ctr"/>
-          <a:lstStyle/>
-          <a:p>
-            <a:pPr algn="ctr" indent="0" marL="0">
-              <a:buNone/>
-            </a:pPr>
-            <a:r>
-              <a:rPr lang="en-US" sz="1200" b="1" dirty="0">
-                <a:solidFill>
-                  <a:srgbClr val="FCFAF4"/>
-                </a:solidFill>
-                <a:latin typeface="游明朝" pitchFamily="34" charset="0"/>
-                <a:ea typeface="游明朝" pitchFamily="34" charset="-122"/>
-                <a:cs typeface="游明朝" pitchFamily="34" charset="-120"/>
-              </a:rPr>
-              <a:t>◯</a:t>
-            </a:r>
-            <a:endParaRPr lang="en-US" sz="1200" dirty="0"/>
-          </a:p>
-        </p:txBody>
-      </p:sp>
-      <p:sp>
-        <p:nvSpPr>
-          <p:cNvPr id="16" name="Text 14"/>
-          <p:cNvSpPr txBox="1"/>
-          <p:nvPr/>
-        </p:nvSpPr>
-        <p:spPr>
-          <a:xfrm>
-            <a:off x="7316261" y="4438541"/>
-            <a:ext cx="4143914" cy="545985"/>
-          </a:xfrm>
-          <a:prstGeom prst="rect">
-            <a:avLst/>
-          </a:prstGeom>
-          <a:noFill/>
-          <a:ln/>
-        </p:spPr>
-        <p:txBody>
-          <a:bodyPr wrap="square" lIns="0" tIns="0" rIns="0" bIns="0" rtlCol="0" anchor="ctr"/>
-          <a:lstStyle/>
-          <a:p>
-            <a:pPr indent="0" marL="0">
-              <a:buNone/>
-            </a:pPr>
-            <a:r>
-              <a:rPr lang="en-US" sz="1550" b="1" dirty="0">
-                <a:solidFill>
-                  <a:srgbClr val="2B2620"/>
-                </a:solidFill>
-                <a:latin typeface="游ゴシック" pitchFamily="34" charset="0"/>
-                <a:ea typeface="游ゴシック" pitchFamily="34" charset="-122"/>
-                <a:cs typeface="游ゴシック" pitchFamily="34" charset="-120"/>
-              </a:rPr>
-              <a:t>5年間で、学会発表の体制をつくった</a:t>
-            </a:r>
-            <a:endParaRPr lang="en-US" sz="1550" dirty="0"/>
-          </a:p>
-        </p:txBody>
-      </p:sp>
-      <p:sp>
-        <p:nvSpPr>
-          <p:cNvPr id="17" name="Text 15"/>
-          <p:cNvSpPr txBox="1"/>
-          <p:nvPr/>
-        </p:nvSpPr>
-        <p:spPr>
-          <a:xfrm>
-            <a:off x="6767621" y="5563269"/>
-            <a:ext cx="4692554" cy="764379"/>
-          </a:xfrm>
-          <a:prstGeom prst="rect">
-            <a:avLst/>
-          </a:prstGeom>
-          <a:noFill/>
-          <a:ln/>
-        </p:spPr>
-        <p:txBody>
-          <a:bodyPr wrap="square" lIns="0" tIns="0" rIns="0" bIns="0" rtlCol="0" anchor="ctr"/>
-          <a:lstStyle/>
-          <a:p>
-            <a:pPr indent="0" marL="0">
-              <a:lnSpc>
-                <a:spcPts val="1900"/>
-              </a:lnSpc>
-              <a:buNone/>
-            </a:pPr>
-            <a:r>
-              <a:rPr lang="en-US" sz="1150" dirty="0">
-                <a:solidFill>
-                  <a:srgbClr val="7A6E60"/>
-                </a:solidFill>
-                <a:latin typeface="游ゴシック" pitchFamily="34" charset="0"/>
-                <a:ea typeface="游ゴシック" pitchFamily="34" charset="-122"/>
-                <a:cs typeface="游ゴシック" pitchFamily="34" charset="-120"/>
-              </a:rPr>
-              <a:t>2026年 全日本鍼灸学会</a:t>
-            </a:r>
-            <a:endParaRPr lang="en-US" sz="1150" dirty="0"/>
-          </a:p>
-          <a:p>
-            <a:pPr indent="0" marL="0">
-              <a:lnSpc>
-                <a:spcPts val="1900"/>
-              </a:lnSpc>
-              <a:buNone/>
-            </a:pPr>
-            <a:r>
-              <a:rPr lang="en-US" sz="1150" dirty="0">
-                <a:solidFill>
-                  <a:srgbClr val="7A6E60"/>
-                </a:solidFill>
-                <a:latin typeface="游ゴシック" pitchFamily="34" charset="0"/>
-                <a:ea typeface="游ゴシック" pitchFamily="34" charset="-122"/>
-                <a:cs typeface="游ゴシック" pitchFamily="34" charset="-120"/>
-              </a:rPr>
-              <a:t>「鍼灸師コミュニティの学会発表体制構築 ―5年間の分析―」</a:t>
-            </a:r>
-            <a:endParaRPr lang="en-US" sz="1150" dirty="0"/>
-          </a:p>
-        </p:txBody>
-      </p:sp>
-      <p:sp>
-        <p:nvSpPr>
-          <p:cNvPr id="18" name="Text 16"/>
+              <a:t>米倉まな・松浦悠人・柴田健一「標準治療で難渋したうつ病患者に鍼灸と傾聴が奏功した一症例」日本うつ病学会</a:t>
+            </a:r>
+            <a:endParaRPr lang="en-US" sz="1000" dirty="0"/>
+          </a:p>
+        </p:txBody>
+      </p:sp>
+      <p:sp>
+        <p:nvSpPr>
+          <p:cNvPr id="11" name="Text 8"/>
           <p:cNvSpPr txBox="1"/>
           <p:nvPr/>
         </p:nvSpPr>
@@ -27103,7 +28105,7 @@
         <p:spPr>
           <a:xfrm>
             <a:off x="731520" y="310896"/>
-            <a:ext cx="10728655" cy="300260"/>
+            <a:ext cx="10728655" cy="260292"/>
           </a:xfrm>
           <a:prstGeom prst="rect">
             <a:avLst/>
@@ -27127,7 +28129,7 @@
                 <a:ea typeface="游ゴシック" pitchFamily="34" charset="-122"/>
                 <a:cs typeface="游ゴシック" pitchFamily="34" charset="-120"/>
               </a:rPr>
-              <a:t>続けるために</a:t>
+              <a:t>明日からの臨床</a:t>
             </a:r>
             <a:endParaRPr lang="en-US" sz="1100" dirty="0"/>
           </a:p>
@@ -27141,8 +28143,8 @@
         </p:nvSpPr>
         <p:spPr>
           <a:xfrm>
-            <a:off x="731520" y="634253"/>
-            <a:ext cx="10728655" cy="1212589"/>
+            <a:off x="731520" y="591211"/>
+            <a:ext cx="10728655" cy="1051180"/>
           </a:xfrm>
           <a:prstGeom prst="rect">
             <a:avLst/>
@@ -27169,7 +28171,7 @@
                 <a:ea typeface="游明朝" pitchFamily="34" charset="-122"/>
                 <a:cs typeface="游明朝" pitchFamily="34" charset="-120"/>
               </a:rPr>
-              <a:t>メンバーに、起きたこと</a:t>
+              <a:t>続けて来られた方に、起きたこと</a:t>
             </a:r>
             <a:endParaRPr lang="en-US" sz="3200" dirty="0"/>
           </a:p>
@@ -27183,12 +28185,12 @@
         </p:nvSpPr>
         <p:spPr>
           <a:xfrm>
-            <a:off x="731520" y="2401169"/>
-            <a:ext cx="3256178" cy="2713890"/>
+            <a:off x="731520" y="2072873"/>
+            <a:ext cx="5227168" cy="1301460"/>
           </a:xfrm>
           <a:prstGeom prst="roundRect">
             <a:avLst>
-              <a:gd name="adj" fmla="val 3369"/>
+              <a:gd name="adj" fmla="val 7026"/>
             </a:avLst>
           </a:prstGeom>
           <a:solidFill>
@@ -27212,8 +28214,8 @@
         </p:nvSpPr>
         <p:spPr>
           <a:xfrm>
-            <a:off x="1051560" y="2805365"/>
-            <a:ext cx="2616098" cy="577423"/>
+            <a:off x="1097280" y="2293120"/>
+            <a:ext cx="4495648" cy="420472"/>
           </a:xfrm>
           <a:prstGeom prst="rect">
             <a:avLst/>
@@ -27229,7 +28231,7 @@
               <a:buNone/>
             </a:pPr>
             <a:r>
-              <a:rPr lang="en-US" sz="2200" b="1" dirty="0">
+              <a:rPr lang="en-US" sz="1800" b="1" dirty="0">
                 <a:solidFill>
                   <a:srgbClr val="9C5446"/>
                 </a:solidFill>
@@ -27237,9 +28239,9 @@
                 <a:ea typeface="游明朝" pitchFamily="34" charset="-122"/>
                 <a:cs typeface="游明朝" pitchFamily="34" charset="-120"/>
               </a:rPr>
-              <a:t>学会発表</a:t>
-            </a:r>
-            <a:endParaRPr lang="en-US" sz="2200" dirty="0"/>
+              <a:t>復職・転職</a:t>
+            </a:r>
+            <a:endParaRPr lang="en-US" sz="1800" dirty="0"/>
           </a:p>
         </p:txBody>
       </p:sp>
@@ -27251,8 +28253,8 @@
         </p:nvSpPr>
         <p:spPr>
           <a:xfrm>
-            <a:off x="1051560" y="3498273"/>
-            <a:ext cx="2616098" cy="1270332"/>
+            <a:off x="1097280" y="2753637"/>
+            <a:ext cx="4495648" cy="550618"/>
           </a:xfrm>
           <a:prstGeom prst="rect">
             <a:avLst/>
@@ -27266,12 +28268,12 @@
           <a:p>
             <a:pPr indent="0" marL="0">
               <a:lnSpc>
-                <a:spcPts val="2500"/>
+                <a:spcPts val="2100"/>
               </a:lnSpc>
               <a:buNone/>
             </a:pPr>
             <a:r>
-              <a:rPr lang="en-US" sz="1400" dirty="0">
+              <a:rPr lang="en-US" sz="1250" dirty="0">
                 <a:solidFill>
                   <a:srgbClr val="2B2620"/>
                 </a:solidFill>
@@ -27279,19 +28281,19 @@
                 <a:ea typeface="游ゴシック" pitchFamily="34" charset="-122"/>
                 <a:cs typeface="游ゴシック" pitchFamily="34" charset="-120"/>
               </a:rPr>
-              <a:t>はじめての演題を、</a:t>
-            </a:r>
-            <a:endParaRPr lang="en-US" sz="1400" dirty="0"/>
+              <a:t>鍼灸を続けながら復職、または</a:t>
+            </a:r>
+            <a:endParaRPr lang="en-US" sz="1250" dirty="0"/>
           </a:p>
           <a:p>
             <a:pPr indent="0" marL="0">
               <a:lnSpc>
-                <a:spcPts val="2500"/>
+                <a:spcPts val="2100"/>
               </a:lnSpc>
               <a:buNone/>
             </a:pPr>
             <a:r>
-              <a:rPr lang="en-US" sz="1400" dirty="0">
+              <a:rPr lang="en-US" sz="1250" dirty="0">
                 <a:solidFill>
                   <a:srgbClr val="2B2620"/>
                 </a:solidFill>
@@ -27299,9 +28301,9 @@
                 <a:ea typeface="游ゴシック" pitchFamily="34" charset="-122"/>
                 <a:cs typeface="游ゴシック" pitchFamily="34" charset="-120"/>
               </a:rPr>
-              <a:t>自分の名前で出した</a:t>
-            </a:r>
-            <a:endParaRPr lang="en-US" sz="1400" dirty="0"/>
+              <a:t>より自分に合った職場へ移った</a:t>
+            </a:r>
+            <a:endParaRPr lang="en-US" sz="1250" dirty="0"/>
           </a:p>
         </p:txBody>
       </p:sp>
@@ -27313,12 +28315,12 @@
         </p:nvSpPr>
         <p:spPr>
           <a:xfrm>
-            <a:off x="4307738" y="2401169"/>
-            <a:ext cx="3256178" cy="2713890"/>
+            <a:off x="6233008" y="2072873"/>
+            <a:ext cx="5227168" cy="1301460"/>
           </a:xfrm>
           <a:prstGeom prst="roundRect">
             <a:avLst>
-              <a:gd name="adj" fmla="val 3369"/>
+              <a:gd name="adj" fmla="val 7026"/>
             </a:avLst>
           </a:prstGeom>
           <a:solidFill>
@@ -27342,8 +28344,8 @@
         </p:nvSpPr>
         <p:spPr>
           <a:xfrm>
-            <a:off x="4627778" y="2805365"/>
-            <a:ext cx="2616098" cy="577423"/>
+            <a:off x="6598768" y="2293120"/>
+            <a:ext cx="4495648" cy="420472"/>
           </a:xfrm>
           <a:prstGeom prst="rect">
             <a:avLst/>
@@ -27359,17 +28361,17 @@
               <a:buNone/>
             </a:pPr>
             <a:r>
-              <a:rPr lang="en-US" sz="2200" b="1" dirty="0">
-                <a:solidFill>
-                  <a:srgbClr val="9C5446"/>
+              <a:rPr lang="en-US" sz="1800" b="1" dirty="0">
+                <a:solidFill>
+                  <a:srgbClr val="5E7060"/>
                 </a:solidFill>
                 <a:latin typeface="游明朝" pitchFamily="34" charset="0"/>
                 <a:ea typeface="游明朝" pitchFamily="34" charset="-122"/>
                 <a:cs typeface="游明朝" pitchFamily="34" charset="-120"/>
               </a:rPr>
-              <a:t>書籍出版</a:t>
-            </a:r>
-            <a:endParaRPr lang="en-US" sz="2200" dirty="0"/>
+              <a:t>起業・就労形態の変更</a:t>
+            </a:r>
+            <a:endParaRPr lang="en-US" sz="1800" dirty="0"/>
           </a:p>
         </p:txBody>
       </p:sp>
@@ -27381,8 +28383,8 @@
         </p:nvSpPr>
         <p:spPr>
           <a:xfrm>
-            <a:off x="4627778" y="3498273"/>
-            <a:ext cx="2616098" cy="1270332"/>
+            <a:off x="6598768" y="2753637"/>
+            <a:ext cx="4495648" cy="550618"/>
           </a:xfrm>
           <a:prstGeom prst="rect">
             <a:avLst/>
@@ -27396,12 +28398,12 @@
           <a:p>
             <a:pPr indent="0" marL="0">
               <a:lnSpc>
-                <a:spcPts val="2500"/>
+                <a:spcPts val="2100"/>
               </a:lnSpc>
               <a:buNone/>
             </a:pPr>
             <a:r>
-              <a:rPr lang="en-US" sz="1400" dirty="0">
+              <a:rPr lang="en-US" sz="1250" dirty="0">
                 <a:solidFill>
                   <a:srgbClr val="2B2620"/>
                 </a:solidFill>
@@ -27409,19 +28411,19 @@
                 <a:ea typeface="游ゴシック" pitchFamily="34" charset="-122"/>
                 <a:cs typeface="游ゴシック" pitchFamily="34" charset="-120"/>
               </a:rPr>
-              <a:t>サロンから</a:t>
-            </a:r>
-            <a:endParaRPr lang="en-US" sz="1400" dirty="0"/>
+              <a:t>新しい働き方を選び、自分の</a:t>
+            </a:r>
+            <a:endParaRPr lang="en-US" sz="1250" dirty="0"/>
           </a:p>
           <a:p>
             <a:pPr indent="0" marL="0">
               <a:lnSpc>
-                <a:spcPts val="2500"/>
+                <a:spcPts val="2100"/>
               </a:lnSpc>
               <a:buNone/>
             </a:pPr>
             <a:r>
-              <a:rPr lang="en-US" sz="1400" dirty="0">
+              <a:rPr lang="en-US" sz="1250" dirty="0">
                 <a:solidFill>
                   <a:srgbClr val="2B2620"/>
                 </a:solidFill>
@@ -27429,9 +28431,9 @@
                 <a:ea typeface="游ゴシック" pitchFamily="34" charset="-122"/>
                 <a:cs typeface="游ゴシック" pitchFamily="34" charset="-120"/>
               </a:rPr>
-              <a:t>著者が生まれた</a:t>
-            </a:r>
-            <a:endParaRPr lang="en-US" sz="1400" dirty="0"/>
+              <a:t>ペースで社会参加を続けている</a:t>
+            </a:r>
+            <a:endParaRPr lang="en-US" sz="1250" dirty="0"/>
           </a:p>
         </p:txBody>
       </p:sp>
@@ -27443,12 +28445,12 @@
         </p:nvSpPr>
         <p:spPr>
           <a:xfrm>
-            <a:off x="7883957" y="2401169"/>
-            <a:ext cx="3256178" cy="2713890"/>
+            <a:off x="731520" y="3574558"/>
+            <a:ext cx="5227168" cy="1301460"/>
           </a:xfrm>
           <a:prstGeom prst="roundRect">
             <a:avLst>
-              <a:gd name="adj" fmla="val 3369"/>
+              <a:gd name="adj" fmla="val 7026"/>
             </a:avLst>
           </a:prstGeom>
           <a:solidFill>
@@ -27472,8 +28474,8 @@
         </p:nvSpPr>
         <p:spPr>
           <a:xfrm>
-            <a:off x="8203997" y="2805365"/>
-            <a:ext cx="2616098" cy="577423"/>
+            <a:off x="1097280" y="3794806"/>
+            <a:ext cx="4495648" cy="420472"/>
           </a:xfrm>
           <a:prstGeom prst="rect">
             <a:avLst/>
@@ -27489,17 +28491,17 @@
               <a:buNone/>
             </a:pPr>
             <a:r>
-              <a:rPr lang="en-US" sz="2200" b="1" dirty="0">
-                <a:solidFill>
-                  <a:srgbClr val="9C5446"/>
+              <a:rPr lang="en-US" sz="1800" b="1" dirty="0">
+                <a:solidFill>
+                  <a:srgbClr val="5E7060"/>
                 </a:solidFill>
                 <a:latin typeface="游明朝" pitchFamily="34" charset="0"/>
                 <a:ea typeface="游明朝" pitchFamily="34" charset="-122"/>
                 <a:cs typeface="游明朝" pitchFamily="34" charset="-120"/>
               </a:rPr>
-              <a:t>院が変わった</a:t>
-            </a:r>
-            <a:endParaRPr lang="en-US" sz="2200" dirty="0"/>
+              <a:t>日常生活の安定</a:t>
+            </a:r>
+            <a:endParaRPr lang="en-US" sz="1800" dirty="0"/>
           </a:p>
         </p:txBody>
       </p:sp>
@@ -27511,8 +28513,8 @@
         </p:nvSpPr>
         <p:spPr>
           <a:xfrm>
-            <a:off x="8203997" y="3498273"/>
-            <a:ext cx="2616098" cy="1270332"/>
+            <a:off x="1097280" y="4255322"/>
+            <a:ext cx="4495648" cy="550618"/>
           </a:xfrm>
           <a:prstGeom prst="rect">
             <a:avLst/>
@@ -27526,12 +28528,12 @@
           <a:p>
             <a:pPr indent="0" marL="0">
               <a:lnSpc>
-                <a:spcPts val="2500"/>
+                <a:spcPts val="2100"/>
               </a:lnSpc>
               <a:buNone/>
             </a:pPr>
             <a:r>
-              <a:rPr lang="en-US" sz="1400" dirty="0">
+              <a:rPr lang="en-US" sz="1250" dirty="0">
                 <a:solidFill>
                   <a:srgbClr val="2B2620"/>
                 </a:solidFill>
@@ -27539,19 +28541,19 @@
                 <a:ea typeface="游ゴシック" pitchFamily="34" charset="-122"/>
                 <a:cs typeface="游ゴシック" pitchFamily="34" charset="-120"/>
               </a:rPr>
-              <a:t>予約が埋まり、</a:t>
-            </a:r>
-            <a:endParaRPr lang="en-US" sz="1400" dirty="0"/>
+              <a:t>就労形態を調整しながら、</a:t>
+            </a:r>
+            <a:endParaRPr lang="en-US" sz="1250" dirty="0"/>
           </a:p>
           <a:p>
             <a:pPr indent="0" marL="0">
               <a:lnSpc>
-                <a:spcPts val="2500"/>
+                <a:spcPts val="2100"/>
               </a:lnSpc>
               <a:buNone/>
             </a:pPr>
             <a:r>
-              <a:rPr lang="en-US" sz="1400" dirty="0">
+              <a:rPr lang="en-US" sz="1250" dirty="0">
                 <a:solidFill>
                   <a:srgbClr val="2B2620"/>
                 </a:solidFill>
@@ -27559,22 +28561,51 @@
                 <a:ea typeface="游ゴシック" pitchFamily="34" charset="-122"/>
                 <a:cs typeface="游ゴシック" pitchFamily="34" charset="-120"/>
               </a:rPr>
-              <a:t>紹介が増えた</a:t>
-            </a:r>
-            <a:endParaRPr lang="en-US" sz="1400" dirty="0"/>
-          </a:p>
-        </p:txBody>
-      </p:sp>
-      <p:sp>
-        <p:nvSpPr>
-          <p:cNvPr id="13" name="Text 11"/>
-          <p:cNvSpPr txBox="1"/>
-          <p:nvPr/>
-        </p:nvSpPr>
-        <p:spPr>
-          <a:xfrm>
-            <a:off x="731520" y="5634740"/>
-            <a:ext cx="10728655" cy="692908"/>
+              <a:t>安定した生活を継続している</a:t>
+            </a:r>
+            <a:endParaRPr lang="en-US" sz="1250" dirty="0"/>
+          </a:p>
+        </p:txBody>
+      </p:sp>
+      <p:sp>
+        <p:nvSpPr>
+          <p:cNvPr id="13" name="Shape 11"/>
+          <p:cNvSpPr/>
+          <p:nvPr/>
+        </p:nvSpPr>
+        <p:spPr>
+          <a:xfrm>
+            <a:off x="6233008" y="3574558"/>
+            <a:ext cx="5227168" cy="1301460"/>
+          </a:xfrm>
+          <a:prstGeom prst="roundRect">
+            <a:avLst>
+              <a:gd name="adj" fmla="val 7026"/>
+            </a:avLst>
+          </a:prstGeom>
+          <a:solidFill>
+            <a:srgbClr val="FCFAF4"/>
+          </a:solidFill>
+          <a:ln/>
+          <a:effectLst>
+            <a:outerShdw sx="100000" sy="100000" kx="0" ky="0" algn="bl" rotWithShape="0" blurRad="127000" dist="508" dir="5400000">
+              <a:srgbClr val="8C7F6E">
+                <a:alpha val="25000"/>
+              </a:srgbClr>
+            </a:outerShdw>
+          </a:effectLst>
+        </p:spPr>
+      </p:sp>
+      <p:sp>
+        <p:nvSpPr>
+          <p:cNvPr id="14" name="Text 12"/>
+          <p:cNvSpPr txBox="1"/>
+          <p:nvPr/>
+        </p:nvSpPr>
+        <p:spPr>
+          <a:xfrm>
+            <a:off x="6598768" y="3794806"/>
+            <a:ext cx="4495648" cy="420472"/>
           </a:xfrm>
           <a:prstGeom prst="rect">
             <a:avLst/>
@@ -27590,23 +28621,163 @@
               <a:buNone/>
             </a:pPr>
             <a:r>
-              <a:rPr lang="en-US" sz="2400" b="1" dirty="0">
-                <a:solidFill>
-                  <a:srgbClr val="2B2620"/>
+              <a:rPr lang="en-US" sz="1800" b="1" dirty="0">
+                <a:solidFill>
+                  <a:srgbClr val="9C5446"/>
                 </a:solidFill>
                 <a:latin typeface="游明朝" pitchFamily="34" charset="0"/>
                 <a:ea typeface="游明朝" pitchFamily="34" charset="-122"/>
                 <a:cs typeface="游明朝" pitchFamily="34" charset="-120"/>
               </a:rPr>
-              <a:t>全部、私ではなく、メンバーがやったことです。</a:t>
-            </a:r>
-            <a:endParaRPr lang="en-US" sz="2400" dirty="0"/>
-          </a:p>
-        </p:txBody>
-      </p:sp>
-      <p:sp>
-        <p:nvSpPr>
-          <p:cNvPr id="14" name="Text 12"/>
+              <a:t>多職種連携による支援</a:t>
+            </a:r>
+            <a:endParaRPr lang="en-US" sz="1800" dirty="0"/>
+          </a:p>
+        </p:txBody>
+      </p:sp>
+      <p:sp>
+        <p:nvSpPr>
+          <p:cNvPr id="15" name="Text 13"/>
+          <p:cNvSpPr txBox="1"/>
+          <p:nvPr/>
+        </p:nvSpPr>
+        <p:spPr>
+          <a:xfrm>
+            <a:off x="6598768" y="4255322"/>
+            <a:ext cx="4495648" cy="550618"/>
+          </a:xfrm>
+          <a:prstGeom prst="rect">
+            <a:avLst/>
+          </a:prstGeom>
+          <a:noFill/>
+          <a:ln/>
+        </p:spPr>
+        <p:txBody>
+          <a:bodyPr wrap="square" lIns="0" tIns="0" rIns="0" bIns="0" rtlCol="0" anchor="ctr"/>
+          <a:lstStyle/>
+          <a:p>
+            <a:pPr indent="0" marL="0">
+              <a:lnSpc>
+                <a:spcPts val="2100"/>
+              </a:lnSpc>
+              <a:buNone/>
+            </a:pPr>
+            <a:r>
+              <a:rPr lang="en-US" sz="1250" dirty="0">
+                <a:solidFill>
+                  <a:srgbClr val="2B2620"/>
+                </a:solidFill>
+                <a:latin typeface="游ゴシック" pitchFamily="34" charset="0"/>
+                <a:ea typeface="游ゴシック" pitchFamily="34" charset="-122"/>
+                <a:cs typeface="游ゴシック" pitchFamily="34" charset="-120"/>
+              </a:rPr>
+              <a:t>医師・薬剤師・行政制度を</a:t>
+            </a:r>
+            <a:endParaRPr lang="en-US" sz="1250" dirty="0"/>
+          </a:p>
+          <a:p>
+            <a:pPr indent="0" marL="0">
+              <a:lnSpc>
+                <a:spcPts val="2100"/>
+              </a:lnSpc>
+              <a:buNone/>
+            </a:pPr>
+            <a:r>
+              <a:rPr lang="en-US" sz="1250" dirty="0">
+                <a:solidFill>
+                  <a:srgbClr val="2B2620"/>
+                </a:solidFill>
+                <a:latin typeface="游ゴシック" pitchFamily="34" charset="0"/>
+                <a:ea typeface="游ゴシック" pitchFamily="34" charset="-122"/>
+                <a:cs typeface="游ゴシック" pitchFamily="34" charset="-120"/>
+              </a:rPr>
+              <a:t>組み合わせて社会復帰を目指す</a:t>
+            </a:r>
+            <a:endParaRPr lang="en-US" sz="1250" dirty="0"/>
+          </a:p>
+        </p:txBody>
+      </p:sp>
+      <p:sp>
+        <p:nvSpPr>
+          <p:cNvPr id="16" name="Text 14"/>
+          <p:cNvSpPr txBox="1"/>
+          <p:nvPr/>
+        </p:nvSpPr>
+        <p:spPr>
+          <a:xfrm>
+            <a:off x="731520" y="5226412"/>
+            <a:ext cx="10728655" cy="600674"/>
+          </a:xfrm>
+          <a:prstGeom prst="rect">
+            <a:avLst/>
+          </a:prstGeom>
+          <a:noFill/>
+          <a:ln/>
+        </p:spPr>
+        <p:txBody>
+          <a:bodyPr wrap="square" lIns="0" tIns="0" rIns="0" bIns="0" rtlCol="0" anchor="ctr"/>
+          <a:lstStyle/>
+          <a:p>
+            <a:pPr indent="0" marL="0">
+              <a:buNone/>
+            </a:pPr>
+            <a:r>
+              <a:rPr lang="en-US" sz="2500" b="1" dirty="0">
+                <a:solidFill>
+                  <a:srgbClr val="2B2620"/>
+                </a:solidFill>
+                <a:latin typeface="游明朝" pitchFamily="34" charset="0"/>
+                <a:ea typeface="游明朝" pitchFamily="34" charset="-122"/>
+                <a:cs typeface="游明朝" pitchFamily="34" charset="-120"/>
+              </a:rPr>
+              <a:t>鍼灸院の中だけで、支援を完結させない。</a:t>
+            </a:r>
+            <a:endParaRPr lang="en-US" sz="2500" dirty="0"/>
+          </a:p>
+        </p:txBody>
+      </p:sp>
+      <p:sp>
+        <p:nvSpPr>
+          <p:cNvPr id="17" name="Text 15"/>
+          <p:cNvSpPr txBox="1"/>
+          <p:nvPr/>
+        </p:nvSpPr>
+        <p:spPr>
+          <a:xfrm>
+            <a:off x="731520" y="5877142"/>
+            <a:ext cx="10728655" cy="450506"/>
+          </a:xfrm>
+          <a:prstGeom prst="rect">
+            <a:avLst/>
+          </a:prstGeom>
+          <a:noFill/>
+          <a:ln/>
+        </p:spPr>
+        <p:txBody>
+          <a:bodyPr wrap="square" lIns="0" tIns="0" rIns="0" bIns="0" rtlCol="0" anchor="ctr"/>
+          <a:lstStyle/>
+          <a:p>
+            <a:pPr indent="0" marL="0">
+              <a:buNone/>
+            </a:pPr>
+            <a:r>
+              <a:rPr lang="en-US" sz="1500" dirty="0">
+                <a:solidFill>
+                  <a:srgbClr val="7A6E60"/>
+                </a:solidFill>
+                <a:latin typeface="游ゴシック" pitchFamily="34" charset="0"/>
+                <a:ea typeface="游ゴシック" pitchFamily="34" charset="-122"/>
+                <a:cs typeface="游ゴシック" pitchFamily="34" charset="-120"/>
+              </a:rPr>
+              <a:t>医師・行政制度・地域の医療資源を、組み合わせて使う。</a:t>
+            </a:r>
+            <a:endParaRPr lang="en-US" sz="1500" dirty="0"/>
+          </a:p>
+        </p:txBody>
+      </p:sp>
+      <p:sp>
+        <p:nvSpPr>
+          <p:cNvPr id="18" name="Text 16"/>
           <p:cNvSpPr txBox="1"/>
           <p:nvPr/>
         </p:nvSpPr>
@@ -27654,6 +28825,310 @@
 <file path=ppt/slides/slide56.xml><?xml version="1.0" encoding="utf-8"?>
 <p:sld xmlns:a="http://schemas.openxmlformats.org/drawingml/2006/main" xmlns:r="http://schemas.openxmlformats.org/officeDocument/2006/relationships" xmlns:p="http://schemas.openxmlformats.org/presentationml/2006/main">
   <p:cSld name="Slide 56">
+    <p:bg>
+      <p:bgPr>
+        <a:solidFill>
+          <a:srgbClr val="2B2620"/>
+        </a:solidFill>
+      </p:bgPr>
+    </p:bg>
+    <p:spTree>
+      <p:nvGrpSpPr>
+        <p:cNvPr id="1" name=""/>
+        <p:cNvGrpSpPr/>
+        <p:nvPr/>
+      </p:nvGrpSpPr>
+      <p:grpSpPr>
+        <a:xfrm>
+          <a:off x="0" y="0"/>
+          <a:ext cx="0" cy="0"/>
+          <a:chOff x="0" y="0"/>
+          <a:chExt cx="0" cy="0"/>
+        </a:xfrm>
+      </p:grpSpPr>
+      <p:sp>
+        <p:nvSpPr>
+          <p:cNvPr id="2" name="Text 0"/>
+          <p:cNvSpPr txBox="1"/>
+          <p:nvPr/>
+        </p:nvSpPr>
+        <p:spPr>
+          <a:xfrm>
+            <a:off x="731520" y="310896"/>
+            <a:ext cx="10728655" cy="306136"/>
+          </a:xfrm>
+          <a:prstGeom prst="rect">
+            <a:avLst/>
+          </a:prstGeom>
+          <a:noFill/>
+          <a:ln/>
+        </p:spPr>
+        <p:txBody>
+          <a:bodyPr wrap="square" lIns="0" tIns="0" rIns="0" bIns="0" rtlCol="0" anchor="ctr"/>
+          <a:lstStyle/>
+          <a:p>
+            <a:pPr algn="l" indent="0" marL="0">
+              <a:buNone/>
+            </a:pPr>
+            <a:r>
+              <a:rPr lang="en-US" sz="1100" b="1" spc="200" kern="0" dirty="0">
+                <a:solidFill>
+                  <a:srgbClr val="A2937F"/>
+                </a:solidFill>
+                <a:latin typeface="游ゴシック" pitchFamily="34" charset="0"/>
+                <a:ea typeface="游ゴシック" pitchFamily="34" charset="-122"/>
+                <a:cs typeface="游ゴシック" pitchFamily="34" charset="-120"/>
+              </a:rPr>
+              <a:t>明日からの臨床</a:t>
+            </a:r>
+            <a:endParaRPr lang="en-US" sz="1100" dirty="0"/>
+          </a:p>
+        </p:txBody>
+      </p:sp>
+      <p:sp>
+        <p:nvSpPr>
+          <p:cNvPr id="3" name="Text 1"/>
+          <p:cNvSpPr txBox="1"/>
+          <p:nvPr/>
+        </p:nvSpPr>
+        <p:spPr>
+          <a:xfrm>
+            <a:off x="731520" y="640581"/>
+            <a:ext cx="10728655" cy="1236319"/>
+          </a:xfrm>
+          <a:prstGeom prst="rect">
+            <a:avLst/>
+          </a:prstGeom>
+          <a:noFill/>
+          <a:ln/>
+        </p:spPr>
+        <p:txBody>
+          <a:bodyPr wrap="square" lIns="0" tIns="0" rIns="0" bIns="0" rtlCol="0" anchor="ctr"/>
+          <a:lstStyle/>
+          <a:p>
+            <a:pPr algn="l" indent="0" marL="0">
+              <a:lnSpc>
+                <a:spcPts val="4200"/>
+              </a:lnSpc>
+              <a:buNone/>
+            </a:pPr>
+            <a:r>
+              <a:rPr lang="en-US" sz="3200" b="1" dirty="0">
+                <a:solidFill>
+                  <a:srgbClr val="ECE3D4"/>
+                </a:solidFill>
+                <a:latin typeface="游明朝" pitchFamily="34" charset="0"/>
+                <a:ea typeface="游明朝" pitchFamily="34" charset="-122"/>
+                <a:cs typeface="游明朝" pitchFamily="34" charset="-120"/>
+              </a:rPr>
+              <a:t>ただ、私は一度 失敗しています</a:t>
+            </a:r>
+            <a:endParaRPr lang="en-US" sz="3200" dirty="0"/>
+          </a:p>
+        </p:txBody>
+      </p:sp>
+      <p:sp>
+        <p:nvSpPr>
+          <p:cNvPr id="4" name="Shape 2"/>
+          <p:cNvSpPr/>
+          <p:nvPr/>
+        </p:nvSpPr>
+        <p:spPr>
+          <a:xfrm>
+            <a:off x="731520" y="2383202"/>
+            <a:ext cx="10728655" cy="2708127"/>
+          </a:xfrm>
+          <a:prstGeom prst="roundRect">
+            <a:avLst>
+              <a:gd name="adj" fmla="val 3377"/>
+            </a:avLst>
+          </a:prstGeom>
+          <a:solidFill>
+            <a:srgbClr val="35302A"/>
+          </a:solidFill>
+          <a:ln/>
+        </p:spPr>
+      </p:sp>
+      <p:sp>
+        <p:nvSpPr>
+          <p:cNvPr id="5" name="Text 3"/>
+          <p:cNvSpPr txBox="1"/>
+          <p:nvPr/>
+        </p:nvSpPr>
+        <p:spPr>
+          <a:xfrm>
+            <a:off x="1280160" y="2854181"/>
+            <a:ext cx="9631375" cy="1883915"/>
+          </a:xfrm>
+          <a:prstGeom prst="rect">
+            <a:avLst/>
+          </a:prstGeom>
+          <a:noFill/>
+          <a:ln/>
+        </p:spPr>
+        <p:txBody>
+          <a:bodyPr wrap="square" lIns="0" tIns="0" rIns="0" bIns="0" rtlCol="0" anchor="t"/>
+          <a:lstStyle/>
+          <a:p>
+            <a:pPr algn="l" indent="0" marL="0">
+              <a:lnSpc>
+                <a:spcPts val="3400"/>
+              </a:lnSpc>
+              <a:buNone/>
+            </a:pPr>
+            <a:r>
+              <a:rPr lang="en-US" sz="1800" dirty="0">
+                <a:solidFill>
+                  <a:srgbClr val="ECE3D4"/>
+                </a:solidFill>
+                <a:latin typeface="游ゴシック" pitchFamily="34" charset="0"/>
+                <a:ea typeface="游ゴシック" pitchFamily="34" charset="-122"/>
+                <a:cs typeface="游ゴシック" pitchFamily="34" charset="-120"/>
+              </a:rPr>
+              <a:t>聴きすぎて、自分が消耗した時期があります。</a:t>
+            </a:r>
+            <a:endParaRPr lang="en-US" sz="1800" dirty="0"/>
+          </a:p>
+          <a:p>
+            <a:pPr algn="l" indent="0" marL="0">
+              <a:lnSpc>
+                <a:spcPts val="3400"/>
+              </a:lnSpc>
+              <a:buNone/>
+            </a:pPr>
+            <a:r>
+              <a:rPr lang="en-US" sz="1800" dirty="0">
+                <a:solidFill>
+                  <a:srgbClr val="ECE3D4"/>
+                </a:solidFill>
+                <a:latin typeface="游ゴシック" pitchFamily="34" charset="0"/>
+                <a:ea typeface="游ゴシック" pitchFamily="34" charset="-122"/>
+                <a:cs typeface="游ゴシック" pitchFamily="34" charset="-120"/>
+              </a:rPr>
+              <a:t>カウンセラーになろうとして、施術がぶれた時期もありました。</a:t>
+            </a:r>
+            <a:endParaRPr lang="en-US" sz="1800" dirty="0"/>
+          </a:p>
+          <a:p>
+            <a:pPr algn="l" indent="0" marL="0">
+              <a:lnSpc>
+                <a:spcPts val="3400"/>
+              </a:lnSpc>
+              <a:buNone/>
+            </a:pPr>
+            <a:endParaRPr lang="en-US" sz="1800" dirty="0"/>
+          </a:p>
+          <a:p>
+            <a:pPr algn="l" indent="0" marL="0">
+              <a:lnSpc>
+                <a:spcPts val="3400"/>
+              </a:lnSpc>
+              <a:buNone/>
+            </a:pPr>
+            <a:r>
+              <a:rPr lang="en-US" sz="1800" dirty="0">
+                <a:solidFill>
+                  <a:srgbClr val="ECE3D4"/>
+                </a:solidFill>
+                <a:latin typeface="游ゴシック" pitchFamily="34" charset="0"/>
+                <a:ea typeface="游ゴシック" pitchFamily="34" charset="-122"/>
+                <a:cs typeface="游ゴシック" pitchFamily="34" charset="-120"/>
+              </a:rPr>
+              <a:t>傾聴には、自分を守る技術がセットで必要です。</a:t>
+            </a:r>
+            <a:endParaRPr lang="en-US" sz="1800" dirty="0"/>
+          </a:p>
+        </p:txBody>
+      </p:sp>
+      <p:sp>
+        <p:nvSpPr>
+          <p:cNvPr id="6" name="Text 4"/>
+          <p:cNvSpPr txBox="1"/>
+          <p:nvPr/>
+        </p:nvSpPr>
+        <p:spPr>
+          <a:xfrm>
+            <a:off x="731520" y="5503435"/>
+            <a:ext cx="10728655" cy="824213"/>
+          </a:xfrm>
+          <a:prstGeom prst="rect">
+            <a:avLst/>
+          </a:prstGeom>
+          <a:noFill/>
+          <a:ln/>
+        </p:spPr>
+        <p:txBody>
+          <a:bodyPr wrap="square" lIns="0" tIns="0" rIns="0" bIns="0" rtlCol="0" anchor="ctr"/>
+          <a:lstStyle/>
+          <a:p>
+            <a:pPr indent="0" marL="0">
+              <a:buNone/>
+            </a:pPr>
+            <a:r>
+              <a:rPr lang="en-US" sz="3000" b="1" dirty="0">
+                <a:solidFill>
+                  <a:srgbClr val="9C5446"/>
+                </a:solidFill>
+                <a:latin typeface="游明朝" pitchFamily="34" charset="0"/>
+                <a:ea typeface="游明朝" pitchFamily="34" charset="-122"/>
+                <a:cs typeface="游明朝" pitchFamily="34" charset="-120"/>
+              </a:rPr>
+              <a:t>ひとりでやると、壊れます。</a:t>
+            </a:r>
+            <a:endParaRPr lang="en-US" sz="3000" dirty="0"/>
+          </a:p>
+        </p:txBody>
+      </p:sp>
+      <p:sp>
+        <p:nvSpPr>
+          <p:cNvPr id="7" name="Text 5"/>
+          <p:cNvSpPr txBox="1"/>
+          <p:nvPr/>
+        </p:nvSpPr>
+        <p:spPr>
+          <a:xfrm>
+            <a:off x="11414455" y="6400800"/>
+            <a:ext cx="457200" cy="274320"/>
+          </a:xfrm>
+          <a:prstGeom prst="rect">
+            <a:avLst/>
+          </a:prstGeom>
+          <a:noFill/>
+          <a:ln/>
+        </p:spPr>
+        <p:txBody>
+          <a:bodyPr wrap="square" lIns="0" tIns="0" rIns="0" bIns="0" rtlCol="0" anchor="ctr"/>
+          <a:lstStyle/>
+          <a:p>
+            <a:pPr algn="r" indent="0" marL="0">
+              <a:buNone/>
+            </a:pPr>
+            <a:r>
+              <a:rPr lang="en-US" sz="1000" dirty="0">
+                <a:solidFill>
+                  <a:srgbClr val="6B5F51"/>
+                </a:solidFill>
+                <a:latin typeface="游ゴシック" pitchFamily="34" charset="0"/>
+                <a:ea typeface="游ゴシック" pitchFamily="34" charset="-122"/>
+                <a:cs typeface="游ゴシック" pitchFamily="34" charset="-120"/>
+              </a:rPr>
+              <a:t>56</a:t>
+            </a:r>
+            <a:endParaRPr lang="en-US" sz="1000" dirty="0"/>
+          </a:p>
+        </p:txBody>
+      </p:sp>
+    </p:spTree>
+  </p:cSld>
+  <p:clrMapOvr>
+    <a:masterClrMapping/>
+  </p:clrMapOvr>
+</p:sld>
+</file>
+
+<file path=ppt/slides/slide57.xml><?xml version="1.0" encoding="utf-8"?>
+<p:sld xmlns:a="http://schemas.openxmlformats.org/drawingml/2006/main" xmlns:r="http://schemas.openxmlformats.org/officeDocument/2006/relationships" xmlns:p="http://schemas.openxmlformats.org/presentationml/2006/main">
+  <p:cSld name="Slide 57">
     <p:bg>
       <p:bgPr>
         <a:solidFill>
@@ -27684,7 +29159,7 @@
         <p:spPr>
           <a:xfrm>
             <a:off x="731520" y="310896"/>
-            <a:ext cx="10728655" cy="318577"/>
+            <a:ext cx="10728655" cy="276388"/>
           </a:xfrm>
           <a:prstGeom prst="rect">
             <a:avLst/>
@@ -27722,8 +29197,8 @@
         </p:nvSpPr>
         <p:spPr>
           <a:xfrm>
-            <a:off x="731520" y="653979"/>
-            <a:ext cx="10728655" cy="1286561"/>
+            <a:off x="731520" y="608545"/>
+            <a:ext cx="10728655" cy="1116182"/>
           </a:xfrm>
           <a:prstGeom prst="rect">
             <a:avLst/>
@@ -27750,7 +29225,7 @@
                 <a:ea typeface="游明朝" pitchFamily="34" charset="-122"/>
                 <a:cs typeface="游明朝" pitchFamily="34" charset="-120"/>
               </a:rPr>
-              <a:t>1対1で伴走してほしい方へ</a:t>
+              <a:t>傾聴が、独学で伸びない3つの理由</a:t>
             </a:r>
             <a:endParaRPr lang="en-US" sz="3200" dirty="0"/>
           </a:p>
@@ -27764,12 +29239,12 @@
         </p:nvSpPr>
         <p:spPr>
           <a:xfrm>
-            <a:off x="731520" y="2406152"/>
-            <a:ext cx="10728655" cy="3369564"/>
+            <a:off x="731520" y="2181829"/>
+            <a:ext cx="10728655" cy="935467"/>
           </a:xfrm>
           <a:prstGeom prst="roundRect">
             <a:avLst>
-              <a:gd name="adj" fmla="val 2714"/>
+              <a:gd name="adj" fmla="val 9775"/>
             </a:avLst>
           </a:prstGeom>
           <a:solidFill>
@@ -27787,53 +29262,73 @@
       </p:sp>
       <p:sp>
         <p:nvSpPr>
-          <p:cNvPr id="5" name="Text 3"/>
-          <p:cNvSpPr txBox="1"/>
-          <p:nvPr/>
-        </p:nvSpPr>
-        <p:spPr>
-          <a:xfrm>
-            <a:off x="1234440" y="2773741"/>
-            <a:ext cx="3657600" cy="735178"/>
-          </a:xfrm>
-          <a:prstGeom prst="rect">
-            <a:avLst/>
-          </a:prstGeom>
-          <a:noFill/>
-          <a:ln/>
-        </p:spPr>
-        <p:txBody>
-          <a:bodyPr wrap="square" lIns="0" tIns="0" rIns="0" bIns="0" rtlCol="0" anchor="ctr"/>
-          <a:lstStyle/>
-          <a:p>
-            <a:pPr indent="0" marL="0">
-              <a:buNone/>
-            </a:pPr>
-            <a:r>
-              <a:rPr lang="en-US" sz="2800" b="1" dirty="0">
-                <a:solidFill>
-                  <a:srgbClr val="2B2620"/>
+          <p:cNvPr id="5" name="Shape 3"/>
+          <p:cNvSpPr/>
+          <p:nvPr/>
+        </p:nvSpPr>
+        <p:spPr>
+          <a:xfrm>
+            <a:off x="1005840" y="2402675"/>
+            <a:ext cx="493776" cy="493776"/>
+          </a:xfrm>
+          <a:prstGeom prst="ellipse">
+            <a:avLst/>
+          </a:prstGeom>
+          <a:solidFill>
+            <a:srgbClr val="2B2620"/>
+          </a:solidFill>
+          <a:ln/>
+        </p:spPr>
+      </p:sp>
+      <p:sp>
+        <p:nvSpPr>
+          <p:cNvPr id="6" name="Text 4"/>
+          <p:cNvSpPr txBox="1"/>
+          <p:nvPr/>
+        </p:nvSpPr>
+        <p:spPr>
+          <a:xfrm>
+            <a:off x="1005840" y="2362545"/>
+            <a:ext cx="493776" cy="574036"/>
+          </a:xfrm>
+          <a:prstGeom prst="rect">
+            <a:avLst/>
+          </a:prstGeom>
+          <a:noFill/>
+          <a:ln/>
+        </p:spPr>
+        <p:txBody>
+          <a:bodyPr wrap="square" lIns="0" tIns="0" rIns="0" bIns="0" rtlCol="0" anchor="ctr"/>
+          <a:lstStyle/>
+          <a:p>
+            <a:pPr algn="ctr" indent="0" marL="0">
+              <a:buNone/>
+            </a:pPr>
+            <a:r>
+              <a:rPr lang="en-US" sz="1600" b="1" dirty="0">
+                <a:solidFill>
+                  <a:srgbClr val="FCFAF4"/>
                 </a:solidFill>
                 <a:latin typeface="游明朝" pitchFamily="34" charset="0"/>
                 <a:ea typeface="游明朝" pitchFamily="34" charset="-122"/>
                 <a:cs typeface="游明朝" pitchFamily="34" charset="-120"/>
               </a:rPr>
-              <a:t>ここちはり</a:t>
-            </a:r>
-            <a:endParaRPr lang="en-US" sz="2800" dirty="0"/>
-          </a:p>
-        </p:txBody>
-      </p:sp>
-      <p:sp>
-        <p:nvSpPr>
-          <p:cNvPr id="6" name="Text 4"/>
-          <p:cNvSpPr txBox="1"/>
-          <p:nvPr/>
-        </p:nvSpPr>
-        <p:spPr>
-          <a:xfrm>
-            <a:off x="1234440" y="3570183"/>
-            <a:ext cx="5029200" cy="490118"/>
+              <a:t>1</a:t>
+            </a:r>
+            <a:endParaRPr lang="en-US" sz="1600" dirty="0"/>
+          </a:p>
+        </p:txBody>
+      </p:sp>
+      <p:sp>
+        <p:nvSpPr>
+          <p:cNvPr id="7" name="Text 5"/>
+          <p:cNvSpPr txBox="1"/>
+          <p:nvPr/>
+        </p:nvSpPr>
+        <p:spPr>
+          <a:xfrm>
+            <a:off x="1691640" y="2181829"/>
+            <a:ext cx="4937760" cy="935467"/>
           </a:xfrm>
           <a:prstGeom prst="rect">
             <a:avLst/>
@@ -27849,50 +29344,118 @@
               <a:buNone/>
             </a:pPr>
             <a:r>
-              <a:rPr lang="en-US" sz="1300" dirty="0">
-                <a:solidFill>
-                  <a:srgbClr val="7A6E60"/>
+              <a:rPr lang="en-US" sz="1600" b="1" dirty="0">
+                <a:solidFill>
+                  <a:srgbClr val="2B2620"/>
                 </a:solidFill>
                 <a:latin typeface="游ゴシック" pitchFamily="34" charset="0"/>
                 <a:ea typeface="游ゴシック" pitchFamily="34" charset="-122"/>
                 <a:cs typeface="游ゴシック" pitchFamily="34" charset="-120"/>
               </a:rPr>
-              <a:t>施術者育成・コンサル／2025年11月開始</a:t>
-            </a:r>
-            <a:endParaRPr lang="en-US" sz="1300" dirty="0"/>
-          </a:p>
-        </p:txBody>
-      </p:sp>
-      <p:sp>
-        <p:nvSpPr>
-          <p:cNvPr id="7" name="Shape 5"/>
+              <a:t>自分の聴き方は、自分では見えない</a:t>
+            </a:r>
+            <a:endParaRPr lang="en-US" sz="1600" dirty="0"/>
+          </a:p>
+        </p:txBody>
+      </p:sp>
+      <p:sp>
+        <p:nvSpPr>
+          <p:cNvPr id="8" name="Text 6"/>
+          <p:cNvSpPr txBox="1"/>
+          <p:nvPr/>
+        </p:nvSpPr>
+        <p:spPr>
+          <a:xfrm>
+            <a:off x="6766560" y="2181829"/>
+            <a:ext cx="4419295" cy="935467"/>
+          </a:xfrm>
+          <a:prstGeom prst="rect">
+            <a:avLst/>
+          </a:prstGeom>
+          <a:noFill/>
+          <a:ln/>
+        </p:spPr>
+        <p:txBody>
+          <a:bodyPr wrap="square" lIns="0" tIns="0" rIns="0" bIns="0" rtlCol="0" anchor="ctr"/>
+          <a:lstStyle/>
+          <a:p>
+            <a:pPr indent="0" marL="0">
+              <a:buNone/>
+            </a:pPr>
+            <a:r>
+              <a:rPr lang="en-US" sz="1500" dirty="0">
+                <a:solidFill>
+                  <a:srgbClr val="9C5446"/>
+                </a:solidFill>
+                <a:latin typeface="游ゴシック" pitchFamily="34" charset="0"/>
+                <a:ea typeface="游ゴシック" pitchFamily="34" charset="-122"/>
+                <a:cs typeface="游ゴシック" pitchFamily="34" charset="-120"/>
+              </a:rPr>
+              <a:t>→　フィードバックしてくれる人が要る</a:t>
+            </a:r>
+            <a:endParaRPr lang="en-US" sz="1500" dirty="0"/>
+          </a:p>
+        </p:txBody>
+      </p:sp>
+      <p:sp>
+        <p:nvSpPr>
+          <p:cNvPr id="9" name="Shape 7"/>
           <p:cNvSpPr/>
           <p:nvPr/>
         </p:nvSpPr>
         <p:spPr>
           <a:xfrm>
-            <a:off x="1234440" y="4453037"/>
-            <a:ext cx="868680" cy="868680"/>
+            <a:off x="731520" y="3298011"/>
+            <a:ext cx="10728655" cy="935467"/>
+          </a:xfrm>
+          <a:prstGeom prst="roundRect">
+            <a:avLst>
+              <a:gd name="adj" fmla="val 9775"/>
+            </a:avLst>
+          </a:prstGeom>
+          <a:solidFill>
+            <a:srgbClr val="FCFAF4"/>
+          </a:solidFill>
+          <a:ln/>
+          <a:effectLst>
+            <a:outerShdw sx="100000" sy="100000" kx="0" ky="0" algn="bl" rotWithShape="0" blurRad="127000" dist="508" dir="5400000">
+              <a:srgbClr val="8C7F6E">
+                <a:alpha val="25000"/>
+              </a:srgbClr>
+            </a:outerShdw>
+          </a:effectLst>
+        </p:spPr>
+      </p:sp>
+      <p:sp>
+        <p:nvSpPr>
+          <p:cNvPr id="10" name="Shape 8"/>
+          <p:cNvSpPr/>
+          <p:nvPr/>
+        </p:nvSpPr>
+        <p:spPr>
+          <a:xfrm>
+            <a:off x="1005840" y="3518857"/>
+            <a:ext cx="493776" cy="493776"/>
           </a:xfrm>
           <a:prstGeom prst="ellipse">
             <a:avLst/>
           </a:prstGeom>
           <a:solidFill>
-            <a:srgbClr val="9C5446"/>
+            <a:srgbClr val="2B2620"/>
           </a:solidFill>
           <a:ln/>
         </p:spPr>
       </p:sp>
       <p:sp>
         <p:nvSpPr>
-          <p:cNvPr id="8" name="Text 6"/>
-          <p:cNvSpPr txBox="1"/>
-          <p:nvPr/>
-        </p:nvSpPr>
-        <p:spPr>
-          <a:xfrm>
-            <a:off x="1234440" y="4305361"/>
-            <a:ext cx="868680" cy="1164031"/>
+          <p:cNvPr id="11" name="Text 9"/>
+          <p:cNvSpPr txBox="1"/>
+          <p:nvPr/>
+        </p:nvSpPr>
+        <p:spPr>
+          <a:xfrm>
+            <a:off x="1005840" y="3478727"/>
+            <a:ext cx="493776" cy="574036"/>
           </a:xfrm>
           <a:prstGeom prst="rect">
             <a:avLst/>
@@ -27908,7 +29471,7 @@
               <a:buNone/>
             </a:pPr>
             <a:r>
-              <a:rPr lang="en-US" sz="1500" b="1" dirty="0">
+              <a:rPr lang="en-US" sz="1600" b="1" dirty="0">
                 <a:solidFill>
                   <a:srgbClr val="FCFAF4"/>
                 </a:solidFill>
@@ -27916,7 +29479,85 @@
                 <a:ea typeface="游明朝" pitchFamily="34" charset="-122"/>
                 <a:cs typeface="游明朝" pitchFamily="34" charset="-120"/>
               </a:rPr>
-              <a:t>感情</a:t>
+              <a:t>2</a:t>
+            </a:r>
+            <a:endParaRPr lang="en-US" sz="1600" dirty="0"/>
+          </a:p>
+        </p:txBody>
+      </p:sp>
+      <p:sp>
+        <p:nvSpPr>
+          <p:cNvPr id="12" name="Text 10"/>
+          <p:cNvSpPr txBox="1"/>
+          <p:nvPr/>
+        </p:nvSpPr>
+        <p:spPr>
+          <a:xfrm>
+            <a:off x="1691640" y="3298011"/>
+            <a:ext cx="4937760" cy="935467"/>
+          </a:xfrm>
+          <a:prstGeom prst="rect">
+            <a:avLst/>
+          </a:prstGeom>
+          <a:noFill/>
+          <a:ln/>
+        </p:spPr>
+        <p:txBody>
+          <a:bodyPr wrap="square" lIns="0" tIns="0" rIns="0" bIns="0" rtlCol="0" anchor="ctr"/>
+          <a:lstStyle/>
+          <a:p>
+            <a:pPr indent="0" marL="0">
+              <a:buNone/>
+            </a:pPr>
+            <a:r>
+              <a:rPr lang="en-US" sz="1600" b="1" dirty="0">
+                <a:solidFill>
+                  <a:srgbClr val="2B2620"/>
+                </a:solidFill>
+                <a:latin typeface="游ゴシック" pitchFamily="34" charset="0"/>
+                <a:ea typeface="游ゴシック" pitchFamily="34" charset="-122"/>
+                <a:cs typeface="游ゴシック" pitchFamily="34" charset="-120"/>
+              </a:rPr>
+              <a:t>聴きっぱなしだと、消耗する</a:t>
+            </a:r>
+            <a:endParaRPr lang="en-US" sz="1600" dirty="0"/>
+          </a:p>
+        </p:txBody>
+      </p:sp>
+      <p:sp>
+        <p:nvSpPr>
+          <p:cNvPr id="13" name="Text 11"/>
+          <p:cNvSpPr txBox="1"/>
+          <p:nvPr/>
+        </p:nvSpPr>
+        <p:spPr>
+          <a:xfrm>
+            <a:off x="6766560" y="3298011"/>
+            <a:ext cx="4419295" cy="935467"/>
+          </a:xfrm>
+          <a:prstGeom prst="rect">
+            <a:avLst/>
+          </a:prstGeom>
+          <a:noFill/>
+          <a:ln/>
+        </p:spPr>
+        <p:txBody>
+          <a:bodyPr wrap="square" lIns="0" tIns="0" rIns="0" bIns="0" rtlCol="0" anchor="ctr"/>
+          <a:lstStyle/>
+          <a:p>
+            <a:pPr indent="0" marL="0">
+              <a:buNone/>
+            </a:pPr>
+            <a:r>
+              <a:rPr lang="en-US" sz="1500" dirty="0">
+                <a:solidFill>
+                  <a:srgbClr val="9C5446"/>
+                </a:solidFill>
+                <a:latin typeface="游ゴシック" pitchFamily="34" charset="0"/>
+                <a:ea typeface="游ゴシック" pitchFamily="34" charset="-122"/>
+                <a:cs typeface="游ゴシック" pitchFamily="34" charset="-120"/>
+              </a:rPr>
+              <a:t>→　受け止めてもらう側が要る</a:t>
             </a:r>
             <a:endParaRPr lang="en-US" sz="1500" dirty="0"/>
           </a:p>
@@ -27924,34 +29565,63 @@
       </p:sp>
       <p:sp>
         <p:nvSpPr>
-          <p:cNvPr id="9" name="Shape 7"/>
+          <p:cNvPr id="14" name="Shape 12"/>
           <p:cNvSpPr/>
           <p:nvPr/>
         </p:nvSpPr>
         <p:spPr>
           <a:xfrm>
-            <a:off x="2286000" y="4453037"/>
-            <a:ext cx="868680" cy="868680"/>
+            <a:off x="731520" y="4414193"/>
+            <a:ext cx="10728655" cy="935467"/>
+          </a:xfrm>
+          <a:prstGeom prst="roundRect">
+            <a:avLst>
+              <a:gd name="adj" fmla="val 9775"/>
+            </a:avLst>
+          </a:prstGeom>
+          <a:solidFill>
+            <a:srgbClr val="FCFAF4"/>
+          </a:solidFill>
+          <a:ln/>
+          <a:effectLst>
+            <a:outerShdw sx="100000" sy="100000" kx="0" ky="0" algn="bl" rotWithShape="0" blurRad="127000" dist="508" dir="5400000">
+              <a:srgbClr val="8C7F6E">
+                <a:alpha val="25000"/>
+              </a:srgbClr>
+            </a:outerShdw>
+          </a:effectLst>
+        </p:spPr>
+      </p:sp>
+      <p:sp>
+        <p:nvSpPr>
+          <p:cNvPr id="15" name="Shape 13"/>
+          <p:cNvSpPr/>
+          <p:nvPr/>
+        </p:nvSpPr>
+        <p:spPr>
+          <a:xfrm>
+            <a:off x="1005840" y="4635039"/>
+            <a:ext cx="493776" cy="493776"/>
           </a:xfrm>
           <a:prstGeom prst="ellipse">
             <a:avLst/>
           </a:prstGeom>
           <a:solidFill>
-            <a:srgbClr val="5E7060"/>
+            <a:srgbClr val="2B2620"/>
           </a:solidFill>
           <a:ln/>
         </p:spPr>
       </p:sp>
       <p:sp>
         <p:nvSpPr>
-          <p:cNvPr id="10" name="Text 8"/>
-          <p:cNvSpPr txBox="1"/>
-          <p:nvPr/>
-        </p:nvSpPr>
-        <p:spPr>
-          <a:xfrm>
-            <a:off x="2286000" y="4305361"/>
-            <a:ext cx="868680" cy="1164031"/>
+          <p:cNvPr id="16" name="Text 14"/>
+          <p:cNvSpPr txBox="1"/>
+          <p:nvPr/>
+        </p:nvSpPr>
+        <p:spPr>
+          <a:xfrm>
+            <a:off x="1005840" y="4594908"/>
+            <a:ext cx="493776" cy="574036"/>
           </a:xfrm>
           <a:prstGeom prst="rect">
             <a:avLst/>
@@ -27967,7 +29637,7 @@
               <a:buNone/>
             </a:pPr>
             <a:r>
-              <a:rPr lang="en-US" sz="1500" b="1" dirty="0">
+              <a:rPr lang="en-US" sz="1600" b="1" dirty="0">
                 <a:solidFill>
                   <a:srgbClr val="FCFAF4"/>
                 </a:solidFill>
@@ -27975,7 +29645,85 @@
                 <a:ea typeface="游明朝" pitchFamily="34" charset="-122"/>
                 <a:cs typeface="游明朝" pitchFamily="34" charset="-120"/>
               </a:rPr>
-              <a:t>心</a:t>
+              <a:t>3</a:t>
+            </a:r>
+            <a:endParaRPr lang="en-US" sz="1600" dirty="0"/>
+          </a:p>
+        </p:txBody>
+      </p:sp>
+      <p:sp>
+        <p:nvSpPr>
+          <p:cNvPr id="17" name="Text 15"/>
+          <p:cNvSpPr txBox="1"/>
+          <p:nvPr/>
+        </p:nvSpPr>
+        <p:spPr>
+          <a:xfrm>
+            <a:off x="1691640" y="4414193"/>
+            <a:ext cx="4937760" cy="935467"/>
+          </a:xfrm>
+          <a:prstGeom prst="rect">
+            <a:avLst/>
+          </a:prstGeom>
+          <a:noFill/>
+          <a:ln/>
+        </p:spPr>
+        <p:txBody>
+          <a:bodyPr wrap="square" lIns="0" tIns="0" rIns="0" bIns="0" rtlCol="0" anchor="ctr"/>
+          <a:lstStyle/>
+          <a:p>
+            <a:pPr indent="0" marL="0">
+              <a:buNone/>
+            </a:pPr>
+            <a:r>
+              <a:rPr lang="en-US" sz="1600" b="1" dirty="0">
+                <a:solidFill>
+                  <a:srgbClr val="2B2620"/>
+                </a:solidFill>
+                <a:latin typeface="游ゴシック" pitchFamily="34" charset="0"/>
+                <a:ea typeface="游ゴシック" pitchFamily="34" charset="-122"/>
+                <a:cs typeface="游ゴシック" pitchFamily="34" charset="-120"/>
+              </a:rPr>
+              <a:t>3週間で、元に戻る</a:t>
+            </a:r>
+            <a:endParaRPr lang="en-US" sz="1600" dirty="0"/>
+          </a:p>
+        </p:txBody>
+      </p:sp>
+      <p:sp>
+        <p:nvSpPr>
+          <p:cNvPr id="18" name="Text 16"/>
+          <p:cNvSpPr txBox="1"/>
+          <p:nvPr/>
+        </p:nvSpPr>
+        <p:spPr>
+          <a:xfrm>
+            <a:off x="6766560" y="4414193"/>
+            <a:ext cx="4419295" cy="935467"/>
+          </a:xfrm>
+          <a:prstGeom prst="rect">
+            <a:avLst/>
+          </a:prstGeom>
+          <a:noFill/>
+          <a:ln/>
+        </p:spPr>
+        <p:txBody>
+          <a:bodyPr wrap="square" lIns="0" tIns="0" rIns="0" bIns="0" rtlCol="0" anchor="ctr"/>
+          <a:lstStyle/>
+          <a:p>
+            <a:pPr indent="0" marL="0">
+              <a:buNone/>
+            </a:pPr>
+            <a:r>
+              <a:rPr lang="en-US" sz="1500" dirty="0">
+                <a:solidFill>
+                  <a:srgbClr val="9C5446"/>
+                </a:solidFill>
+                <a:latin typeface="游ゴシック" pitchFamily="34" charset="0"/>
+                <a:ea typeface="游ゴシック" pitchFamily="34" charset="-122"/>
+                <a:cs typeface="游ゴシック" pitchFamily="34" charset="-120"/>
+              </a:rPr>
+              <a:t>→　続ける仕組みが要る</a:t>
             </a:r>
             <a:endParaRPr lang="en-US" sz="1500" dirty="0"/>
           </a:p>
@@ -27983,218 +29731,77 @@
       </p:sp>
       <p:sp>
         <p:nvSpPr>
-          <p:cNvPr id="11" name="Shape 9"/>
-          <p:cNvSpPr/>
-          <p:nvPr/>
-        </p:nvSpPr>
-        <p:spPr>
-          <a:xfrm>
-            <a:off x="3337560" y="4453037"/>
-            <a:ext cx="868680" cy="868680"/>
-          </a:xfrm>
-          <a:prstGeom prst="ellipse">
-            <a:avLst/>
-          </a:prstGeom>
-          <a:solidFill>
-            <a:srgbClr val="9C5446"/>
-          </a:solidFill>
-          <a:ln/>
-        </p:spPr>
-      </p:sp>
-      <p:sp>
-        <p:nvSpPr>
-          <p:cNvPr id="12" name="Text 10"/>
-          <p:cNvSpPr txBox="1"/>
-          <p:nvPr/>
-        </p:nvSpPr>
-        <p:spPr>
-          <a:xfrm>
-            <a:off x="3337560" y="4305361"/>
-            <a:ext cx="868680" cy="1164031"/>
-          </a:xfrm>
-          <a:prstGeom prst="rect">
-            <a:avLst/>
-          </a:prstGeom>
-          <a:noFill/>
-          <a:ln/>
-        </p:spPr>
-        <p:txBody>
-          <a:bodyPr wrap="square" lIns="0" tIns="0" rIns="0" bIns="0" rtlCol="0" anchor="ctr"/>
-          <a:lstStyle/>
-          <a:p>
-            <a:pPr algn="ctr" indent="0" marL="0">
-              <a:buNone/>
-            </a:pPr>
-            <a:r>
-              <a:rPr lang="en-US" sz="1500" b="1" dirty="0">
-                <a:solidFill>
-                  <a:srgbClr val="FCFAF4"/>
+          <p:cNvPr id="19" name="Text 17"/>
+          <p:cNvSpPr txBox="1"/>
+          <p:nvPr/>
+        </p:nvSpPr>
+        <p:spPr>
+          <a:xfrm>
+            <a:off x="731520" y="5689830"/>
+            <a:ext cx="10728655" cy="637818"/>
+          </a:xfrm>
+          <a:prstGeom prst="rect">
+            <a:avLst/>
+          </a:prstGeom>
+          <a:noFill/>
+          <a:ln/>
+        </p:spPr>
+        <p:txBody>
+          <a:bodyPr wrap="square" lIns="0" tIns="0" rIns="0" bIns="0" rtlCol="0" anchor="ctr"/>
+          <a:lstStyle/>
+          <a:p>
+            <a:pPr indent="0" marL="0">
+              <a:buNone/>
+            </a:pPr>
+            <a:r>
+              <a:rPr lang="en-US" sz="2600" b="1" dirty="0">
+                <a:solidFill>
+                  <a:srgbClr val="2B2620"/>
                 </a:solidFill>
                 <a:latin typeface="游明朝" pitchFamily="34" charset="0"/>
                 <a:ea typeface="游明朝" pitchFamily="34" charset="-122"/>
                 <a:cs typeface="游明朝" pitchFamily="34" charset="-120"/>
               </a:rPr>
-              <a:t>身体</a:t>
-            </a:r>
-            <a:endParaRPr lang="en-US" sz="1500" dirty="0"/>
-          </a:p>
-        </p:txBody>
-      </p:sp>
-      <p:sp>
-        <p:nvSpPr>
-          <p:cNvPr id="13" name="Shape 11"/>
-          <p:cNvSpPr/>
-          <p:nvPr/>
-        </p:nvSpPr>
-        <p:spPr>
-          <a:xfrm>
-            <a:off x="4389120" y="4453037"/>
-            <a:ext cx="868680" cy="868680"/>
-          </a:xfrm>
-          <a:prstGeom prst="ellipse">
-            <a:avLst/>
-          </a:prstGeom>
-          <a:solidFill>
-            <a:srgbClr val="5E7060"/>
-          </a:solidFill>
-          <a:ln/>
-        </p:spPr>
-      </p:sp>
-      <p:sp>
-        <p:nvSpPr>
-          <p:cNvPr id="14" name="Text 12"/>
-          <p:cNvSpPr txBox="1"/>
-          <p:nvPr/>
-        </p:nvSpPr>
-        <p:spPr>
-          <a:xfrm>
-            <a:off x="4389120" y="4305361"/>
-            <a:ext cx="868680" cy="1164031"/>
-          </a:xfrm>
-          <a:prstGeom prst="rect">
-            <a:avLst/>
-          </a:prstGeom>
-          <a:noFill/>
-          <a:ln/>
-        </p:spPr>
-        <p:txBody>
-          <a:bodyPr wrap="square" lIns="0" tIns="0" rIns="0" bIns="0" rtlCol="0" anchor="ctr"/>
-          <a:lstStyle/>
-          <a:p>
-            <a:pPr algn="ctr" indent="0" marL="0">
-              <a:buNone/>
-            </a:pPr>
-            <a:r>
-              <a:rPr lang="en-US" sz="1500" b="1" dirty="0">
-                <a:solidFill>
-                  <a:srgbClr val="FCFAF4"/>
-                </a:solidFill>
-                <a:latin typeface="游明朝" pitchFamily="34" charset="0"/>
-                <a:ea typeface="游明朝" pitchFamily="34" charset="-122"/>
-                <a:cs typeface="游明朝" pitchFamily="34" charset="-120"/>
-              </a:rPr>
-              <a:t>技術</a:t>
-            </a:r>
-            <a:endParaRPr lang="en-US" sz="1500" dirty="0"/>
-          </a:p>
-        </p:txBody>
-      </p:sp>
-      <p:sp>
-        <p:nvSpPr>
-          <p:cNvPr id="15" name="Text 13"/>
-          <p:cNvSpPr txBox="1"/>
-          <p:nvPr/>
-        </p:nvSpPr>
-        <p:spPr>
-          <a:xfrm>
-            <a:off x="5852160" y="4244096"/>
-            <a:ext cx="5059375" cy="1347826"/>
-          </a:xfrm>
-          <a:prstGeom prst="rect">
-            <a:avLst/>
-          </a:prstGeom>
-          <a:noFill/>
-          <a:ln/>
-        </p:spPr>
-        <p:txBody>
-          <a:bodyPr wrap="square" lIns="0" tIns="0" rIns="0" bIns="0" rtlCol="0" anchor="t"/>
-          <a:lstStyle/>
-          <a:p>
-            <a:pPr algn="l" indent="0" marL="0">
-              <a:lnSpc>
-                <a:spcPts val="2700"/>
-              </a:lnSpc>
-              <a:buNone/>
-            </a:pPr>
-            <a:r>
-              <a:rPr lang="en-US" sz="1500" dirty="0">
-                <a:solidFill>
-                  <a:srgbClr val="2B2620"/>
+              <a:t>才能の話ではありません。環境の話です。</a:t>
+            </a:r>
+            <a:endParaRPr lang="en-US" sz="2600" dirty="0"/>
+          </a:p>
+        </p:txBody>
+      </p:sp>
+      <p:sp>
+        <p:nvSpPr>
+          <p:cNvPr id="20" name="Text 18"/>
+          <p:cNvSpPr txBox="1"/>
+          <p:nvPr/>
+        </p:nvSpPr>
+        <p:spPr>
+          <a:xfrm>
+            <a:off x="11414455" y="6400800"/>
+            <a:ext cx="457200" cy="274320"/>
+          </a:xfrm>
+          <a:prstGeom prst="rect">
+            <a:avLst/>
+          </a:prstGeom>
+          <a:noFill/>
+          <a:ln/>
+        </p:spPr>
+        <p:txBody>
+          <a:bodyPr wrap="square" lIns="0" tIns="0" rIns="0" bIns="0" rtlCol="0" anchor="ctr"/>
+          <a:lstStyle/>
+          <a:p>
+            <a:pPr algn="r" indent="0" marL="0">
+              <a:buNone/>
+            </a:pPr>
+            <a:r>
+              <a:rPr lang="en-US" sz="1000" dirty="0">
+                <a:solidFill>
+                  <a:srgbClr val="B7A991"/>
                 </a:solidFill>
                 <a:latin typeface="游ゴシック" pitchFamily="34" charset="0"/>
                 <a:ea typeface="游ゴシック" pitchFamily="34" charset="-122"/>
                 <a:cs typeface="游ゴシック" pitchFamily="34" charset="-120"/>
               </a:rPr>
-              <a:t>この4つの軸で、あなたの臨床を一緒に見ていきます。</a:t>
-            </a:r>
-            <a:endParaRPr lang="en-US" sz="1500" dirty="0"/>
-          </a:p>
-          <a:p>
-            <a:pPr algn="l" indent="0" marL="0">
-              <a:lnSpc>
-                <a:spcPts val="2700"/>
-              </a:lnSpc>
-              <a:buNone/>
-            </a:pPr>
-            <a:r>
-              <a:rPr lang="en-US" sz="1500" dirty="0">
-                <a:solidFill>
-                  <a:srgbClr val="2B2620"/>
-                </a:solidFill>
-                <a:latin typeface="游ゴシック" pitchFamily="34" charset="0"/>
-                <a:ea typeface="游ゴシック" pitchFamily="34" charset="-122"/>
-                <a:cs typeface="游ゴシック" pitchFamily="34" charset="-120"/>
-              </a:rPr>
-              <a:t>症例データベースも、公開して運用しています。</a:t>
-            </a:r>
-            <a:endParaRPr lang="en-US" sz="1500" dirty="0"/>
-          </a:p>
-        </p:txBody>
-      </p:sp>
-      <p:sp>
-        <p:nvSpPr>
-          <p:cNvPr id="16" name="Text 14"/>
-          <p:cNvSpPr txBox="1"/>
-          <p:nvPr/>
-        </p:nvSpPr>
-        <p:spPr>
-          <a:xfrm>
-            <a:off x="11414455" y="6400800"/>
-            <a:ext cx="457200" cy="274320"/>
-          </a:xfrm>
-          <a:prstGeom prst="rect">
-            <a:avLst/>
-          </a:prstGeom>
-          <a:noFill/>
-          <a:ln/>
-        </p:spPr>
-        <p:txBody>
-          <a:bodyPr wrap="square" lIns="0" tIns="0" rIns="0" bIns="0" rtlCol="0" anchor="ctr"/>
-          <a:lstStyle/>
-          <a:p>
-            <a:pPr algn="r" indent="0" marL="0">
-              <a:buNone/>
-            </a:pPr>
-            <a:r>
-              <a:rPr lang="en-US" sz="1000" dirty="0">
-                <a:solidFill>
-                  <a:srgbClr val="B7A991"/>
-                </a:solidFill>
-                <a:latin typeface="游ゴシック" pitchFamily="34" charset="0"/>
-                <a:ea typeface="游ゴシック" pitchFamily="34" charset="-122"/>
-                <a:cs typeface="游ゴシック" pitchFamily="34" charset="-120"/>
-              </a:rPr>
-              <a:t>56</a:t>
+              <a:t>57</a:t>
             </a:r>
             <a:endParaRPr lang="en-US" sz="1000" dirty="0"/>
           </a:p>
@@ -28208,13 +29815,13 @@
 </p:sld>
 </file>
 
-<file path=ppt/slides/slide57.xml><?xml version="1.0" encoding="utf-8"?>
+<file path=ppt/slides/slide58.xml><?xml version="1.0" encoding="utf-8"?>
 <p:sld xmlns:a="http://schemas.openxmlformats.org/drawingml/2006/main" xmlns:r="http://schemas.openxmlformats.org/officeDocument/2006/relationships" xmlns:p="http://schemas.openxmlformats.org/presentationml/2006/main">
-  <p:cSld name="Slide 57">
+  <p:cSld name="Slide 58">
     <p:bg>
       <p:bgPr>
         <a:solidFill>
-          <a:srgbClr val="2B2620"/>
+          <a:srgbClr val="ECE3D4"/>
         </a:solidFill>
       </p:bgPr>
     </p:bg>
@@ -28240,52 +29847,382 @@
         </p:nvSpPr>
         <p:spPr>
           <a:xfrm>
-            <a:off x="731520" y="1897380"/>
-            <a:ext cx="10728655" cy="548640"/>
-          </a:xfrm>
-          <a:prstGeom prst="rect">
-            <a:avLst/>
-          </a:prstGeom>
-          <a:noFill/>
-          <a:ln/>
-        </p:spPr>
-        <p:txBody>
-          <a:bodyPr wrap="square" lIns="0" tIns="0" rIns="0" bIns="0" rtlCol="0" anchor="ctr"/>
-          <a:lstStyle/>
-          <a:p>
-            <a:pPr indent="0" marL="0">
-              <a:buNone/>
-            </a:pPr>
-            <a:r>
-              <a:rPr lang="en-US" sz="1800" dirty="0">
-                <a:solidFill>
-                  <a:srgbClr val="A2937F"/>
+            <a:off x="731520" y="310896"/>
+            <a:ext cx="10728655" cy="283912"/>
+          </a:xfrm>
+          <a:prstGeom prst="rect">
+            <a:avLst/>
+          </a:prstGeom>
+          <a:noFill/>
+          <a:ln/>
+        </p:spPr>
+        <p:txBody>
+          <a:bodyPr wrap="square" lIns="0" tIns="0" rIns="0" bIns="0" rtlCol="0" anchor="ctr"/>
+          <a:lstStyle/>
+          <a:p>
+            <a:pPr algn="l" indent="0" marL="0">
+              <a:buNone/>
+            </a:pPr>
+            <a:r>
+              <a:rPr lang="en-US" sz="1100" b="1" spc="200" kern="0" dirty="0">
+                <a:solidFill>
+                  <a:srgbClr val="9C5446"/>
                 </a:solidFill>
                 <a:latin typeface="游ゴシック" pitchFamily="34" charset="0"/>
                 <a:ea typeface="游ゴシック" pitchFamily="34" charset="-122"/>
                 <a:cs typeface="游ゴシック" pitchFamily="34" charset="-120"/>
               </a:rPr>
-              <a:t>今日、ひとつだけ持ち帰るなら</a:t>
-            </a:r>
-            <a:endParaRPr lang="en-US" sz="1800" dirty="0"/>
-          </a:p>
-        </p:txBody>
-      </p:sp>
-      <p:sp>
-        <p:nvSpPr>
-          <p:cNvPr id="3" name="Shape 1"/>
+              <a:t>続けるために</a:t>
+            </a:r>
+            <a:endParaRPr lang="en-US" sz="1100" dirty="0"/>
+          </a:p>
+        </p:txBody>
+      </p:sp>
+      <p:sp>
+        <p:nvSpPr>
+          <p:cNvPr id="3" name="Text 1"/>
+          <p:cNvSpPr txBox="1"/>
+          <p:nvPr/>
+        </p:nvSpPr>
+        <p:spPr>
+          <a:xfrm>
+            <a:off x="731520" y="616647"/>
+            <a:ext cx="10728655" cy="1146568"/>
+          </a:xfrm>
+          <a:prstGeom prst="rect">
+            <a:avLst/>
+          </a:prstGeom>
+          <a:noFill/>
+          <a:ln/>
+        </p:spPr>
+        <p:txBody>
+          <a:bodyPr wrap="square" lIns="0" tIns="0" rIns="0" bIns="0" rtlCol="0" anchor="ctr"/>
+          <a:lstStyle/>
+          <a:p>
+            <a:pPr algn="l" indent="0" marL="0">
+              <a:lnSpc>
+                <a:spcPts val="4200"/>
+              </a:lnSpc>
+              <a:buNone/>
+            </a:pPr>
+            <a:r>
+              <a:rPr lang="en-US" sz="3200" b="1" dirty="0">
+                <a:solidFill>
+                  <a:srgbClr val="2B2620"/>
+                </a:solidFill>
+                <a:latin typeface="游明朝" pitchFamily="34" charset="0"/>
+                <a:ea typeface="游明朝" pitchFamily="34" charset="-122"/>
+                <a:cs typeface="游明朝" pitchFamily="34" charset="-120"/>
+              </a:rPr>
+              <a:t>だから、場をつくりました</a:t>
+            </a:r>
+            <a:endParaRPr lang="en-US" sz="3200" dirty="0"/>
+          </a:p>
+        </p:txBody>
+      </p:sp>
+      <p:sp>
+        <p:nvSpPr>
+          <p:cNvPr id="4" name="Shape 2"/>
           <p:cNvSpPr/>
           <p:nvPr/>
         </p:nvSpPr>
         <p:spPr>
           <a:xfrm>
-            <a:off x="731520" y="2628900"/>
-            <a:ext cx="10728655" cy="1600200"/>
+            <a:off x="731520" y="2178164"/>
+            <a:ext cx="5578901" cy="3166712"/>
           </a:xfrm>
           <a:prstGeom prst="roundRect">
             <a:avLst>
-              <a:gd name="adj" fmla="val 6857"/>
+              <a:gd name="adj" fmla="val 2888"/>
             </a:avLst>
+          </a:prstGeom>
+          <a:solidFill>
+            <a:srgbClr val="FCFAF4"/>
+          </a:solidFill>
+          <a:ln/>
+          <a:effectLst>
+            <a:outerShdw sx="100000" sy="100000" kx="0" ky="0" algn="bl" rotWithShape="0" blurRad="127000" dist="508" dir="5400000">
+              <a:srgbClr val="8C7F6E">
+                <a:alpha val="25000"/>
+              </a:srgbClr>
+            </a:outerShdw>
+          </a:effectLst>
+        </p:spPr>
+      </p:sp>
+      <p:sp>
+        <p:nvSpPr>
+          <p:cNvPr id="5" name="Text 3"/>
+          <p:cNvSpPr txBox="1"/>
+          <p:nvPr/>
+        </p:nvSpPr>
+        <p:spPr>
+          <a:xfrm>
+            <a:off x="1188720" y="2560353"/>
+            <a:ext cx="4664501" cy="1037371"/>
+          </a:xfrm>
+          <a:prstGeom prst="rect">
+            <a:avLst/>
+          </a:prstGeom>
+          <a:noFill/>
+          <a:ln/>
+        </p:spPr>
+        <p:txBody>
+          <a:bodyPr wrap="square" lIns="0" tIns="0" rIns="0" bIns="0" rtlCol="0" anchor="ctr"/>
+          <a:lstStyle/>
+          <a:p>
+            <a:pPr indent="0" marL="0">
+              <a:lnSpc>
+                <a:spcPts val="3800"/>
+              </a:lnSpc>
+              <a:buNone/>
+            </a:pPr>
+            <a:r>
+              <a:rPr lang="en-US" sz="2500" b="1" dirty="0">
+                <a:solidFill>
+                  <a:srgbClr val="2B2620"/>
+                </a:solidFill>
+                <a:latin typeface="游明朝" pitchFamily="34" charset="0"/>
+                <a:ea typeface="游明朝" pitchFamily="34" charset="-122"/>
+                <a:cs typeface="游明朝" pitchFamily="34" charset="-120"/>
+              </a:rPr>
+              <a:t>オンラインサロン</a:t>
+            </a:r>
+            <a:endParaRPr lang="en-US" sz="2500" dirty="0"/>
+          </a:p>
+          <a:p>
+            <a:pPr indent="0" marL="0">
+              <a:lnSpc>
+                <a:spcPts val="3800"/>
+              </a:lnSpc>
+              <a:buNone/>
+            </a:pPr>
+            <a:r>
+              <a:rPr lang="en-US" sz="2500" b="1" dirty="0">
+                <a:solidFill>
+                  <a:srgbClr val="2B2620"/>
+                </a:solidFill>
+                <a:latin typeface="游明朝" pitchFamily="34" charset="0"/>
+                <a:ea typeface="游明朝" pitchFamily="34" charset="-122"/>
+                <a:cs typeface="游明朝" pitchFamily="34" charset="-120"/>
+              </a:rPr>
+              <a:t>ここちめいど</a:t>
+            </a:r>
+            <a:endParaRPr lang="en-US" sz="2500" dirty="0"/>
+          </a:p>
+        </p:txBody>
+      </p:sp>
+      <p:sp>
+        <p:nvSpPr>
+          <p:cNvPr id="6" name="Text 4"/>
+          <p:cNvSpPr txBox="1"/>
+          <p:nvPr/>
+        </p:nvSpPr>
+        <p:spPr>
+          <a:xfrm>
+            <a:off x="1188720" y="3761520"/>
+            <a:ext cx="4664501" cy="873576"/>
+          </a:xfrm>
+          <a:prstGeom prst="rect">
+            <a:avLst/>
+          </a:prstGeom>
+          <a:noFill/>
+          <a:ln/>
+        </p:spPr>
+        <p:txBody>
+          <a:bodyPr wrap="square" lIns="0" tIns="0" rIns="0" bIns="0" rtlCol="0" anchor="t"/>
+          <a:lstStyle/>
+          <a:p>
+            <a:pPr algn="l" indent="0" marL="0">
+              <a:lnSpc>
+                <a:spcPts val="2400"/>
+              </a:lnSpc>
+              <a:buNone/>
+            </a:pPr>
+            <a:r>
+              <a:rPr lang="en-US" sz="1400" dirty="0">
+                <a:solidFill>
+                  <a:srgbClr val="7A6E60"/>
+                </a:solidFill>
+                <a:latin typeface="游ゴシック" pitchFamily="34" charset="0"/>
+                <a:ea typeface="游ゴシック" pitchFamily="34" charset="-122"/>
+                <a:cs typeface="游ゴシック" pitchFamily="34" charset="-120"/>
+              </a:rPr>
+              <a:t>傾聴を学ぶ、鍼灸師のコミュニティ</a:t>
+            </a:r>
+            <a:endParaRPr lang="en-US" sz="1400" dirty="0"/>
+          </a:p>
+          <a:p>
+            <a:pPr algn="l" indent="0" marL="0">
+              <a:lnSpc>
+                <a:spcPts val="2400"/>
+              </a:lnSpc>
+              <a:buNone/>
+            </a:pPr>
+            <a:r>
+              <a:rPr lang="en-US" sz="1400" dirty="0">
+                <a:solidFill>
+                  <a:srgbClr val="7A6E60"/>
+                </a:solidFill>
+                <a:latin typeface="游ゴシック" pitchFamily="34" charset="0"/>
+                <a:ea typeface="游ゴシック" pitchFamily="34" charset="-122"/>
+                <a:cs typeface="游ゴシック" pitchFamily="34" charset="-120"/>
+              </a:rPr>
+              <a:t>2020年4月から、5年目です。</a:t>
+            </a:r>
+            <a:endParaRPr lang="en-US" sz="1400" dirty="0"/>
+          </a:p>
+        </p:txBody>
+      </p:sp>
+      <p:sp>
+        <p:nvSpPr>
+          <p:cNvPr id="7" name="Text 5"/>
+          <p:cNvSpPr txBox="1"/>
+          <p:nvPr/>
+        </p:nvSpPr>
+        <p:spPr>
+          <a:xfrm>
+            <a:off x="1188720" y="4744292"/>
+            <a:ext cx="4664501" cy="382189"/>
+          </a:xfrm>
+          <a:prstGeom prst="rect">
+            <a:avLst/>
+          </a:prstGeom>
+          <a:noFill/>
+          <a:ln/>
+        </p:spPr>
+        <p:txBody>
+          <a:bodyPr wrap="square" lIns="0" tIns="0" rIns="0" bIns="0" rtlCol="0" anchor="ctr"/>
+          <a:lstStyle/>
+          <a:p>
+            <a:pPr indent="0" marL="0">
+              <a:buNone/>
+            </a:pPr>
+            <a:r>
+              <a:rPr lang="en-US" sz="1200" dirty="0">
+                <a:solidFill>
+                  <a:srgbClr val="5E7060"/>
+                </a:solidFill>
+                <a:latin typeface="游ゴシック" pitchFamily="34" charset="0"/>
+                <a:ea typeface="游ゴシック" pitchFamily="34" charset="-122"/>
+                <a:cs typeface="游ゴシック" pitchFamily="34" charset="-120"/>
+              </a:rPr>
+              <a:t>cocochimade.me</a:t>
+            </a:r>
+            <a:endParaRPr lang="en-US" sz="1200" dirty="0"/>
+          </a:p>
+        </p:txBody>
+      </p:sp>
+      <p:sp>
+        <p:nvSpPr>
+          <p:cNvPr id="8" name="Shape 6"/>
+          <p:cNvSpPr/>
+          <p:nvPr/>
+        </p:nvSpPr>
+        <p:spPr>
+          <a:xfrm>
+            <a:off x="6767621" y="2433847"/>
+            <a:ext cx="384048" cy="384048"/>
+          </a:xfrm>
+          <a:prstGeom prst="ellipse">
+            <a:avLst/>
+          </a:prstGeom>
+          <a:solidFill>
+            <a:srgbClr val="5E7060"/>
+          </a:solidFill>
+          <a:ln/>
+        </p:spPr>
+      </p:sp>
+      <p:sp>
+        <p:nvSpPr>
+          <p:cNvPr id="9" name="Text 7"/>
+          <p:cNvSpPr txBox="1"/>
+          <p:nvPr/>
+        </p:nvSpPr>
+        <p:spPr>
+          <a:xfrm>
+            <a:off x="6767621" y="2396558"/>
+            <a:ext cx="384048" cy="458627"/>
+          </a:xfrm>
+          <a:prstGeom prst="rect">
+            <a:avLst/>
+          </a:prstGeom>
+          <a:noFill/>
+          <a:ln/>
+        </p:spPr>
+        <p:txBody>
+          <a:bodyPr wrap="square" lIns="0" tIns="0" rIns="0" bIns="0" rtlCol="0" anchor="ctr"/>
+          <a:lstStyle/>
+          <a:p>
+            <a:pPr algn="ctr" indent="0" marL="0">
+              <a:buNone/>
+            </a:pPr>
+            <a:r>
+              <a:rPr lang="en-US" sz="1200" b="1" dirty="0">
+                <a:solidFill>
+                  <a:srgbClr val="FCFAF4"/>
+                </a:solidFill>
+                <a:latin typeface="游明朝" pitchFamily="34" charset="0"/>
+                <a:ea typeface="游明朝" pitchFamily="34" charset="-122"/>
+                <a:cs typeface="游明朝" pitchFamily="34" charset="-120"/>
+              </a:rPr>
+              <a:t>◯</a:t>
+            </a:r>
+            <a:endParaRPr lang="en-US" sz="1200" dirty="0"/>
+          </a:p>
+        </p:txBody>
+      </p:sp>
+      <p:sp>
+        <p:nvSpPr>
+          <p:cNvPr id="10" name="Text 8"/>
+          <p:cNvSpPr txBox="1"/>
+          <p:nvPr/>
+        </p:nvSpPr>
+        <p:spPr>
+          <a:xfrm>
+            <a:off x="7316261" y="2363799"/>
+            <a:ext cx="4143914" cy="545985"/>
+          </a:xfrm>
+          <a:prstGeom prst="rect">
+            <a:avLst/>
+          </a:prstGeom>
+          <a:noFill/>
+          <a:ln/>
+        </p:spPr>
+        <p:txBody>
+          <a:bodyPr wrap="square" lIns="0" tIns="0" rIns="0" bIns="0" rtlCol="0" anchor="ctr"/>
+          <a:lstStyle/>
+          <a:p>
+            <a:pPr indent="0" marL="0">
+              <a:buNone/>
+            </a:pPr>
+            <a:r>
+              <a:rPr lang="en-US" sz="1550" b="1" dirty="0">
+                <a:solidFill>
+                  <a:srgbClr val="2B2620"/>
+                </a:solidFill>
+                <a:latin typeface="游ゴシック" pitchFamily="34" charset="0"/>
+                <a:ea typeface="游ゴシック" pitchFamily="34" charset="-122"/>
+                <a:cs typeface="游ゴシック" pitchFamily="34" charset="-120"/>
+              </a:rPr>
+              <a:t>学ぶだけでは、終わらせない</a:t>
+            </a:r>
+            <a:endParaRPr lang="en-US" sz="1550" dirty="0"/>
+          </a:p>
+        </p:txBody>
+      </p:sp>
+      <p:sp>
+        <p:nvSpPr>
+          <p:cNvPr id="11" name="Shape 9"/>
+          <p:cNvSpPr/>
+          <p:nvPr/>
+        </p:nvSpPr>
+        <p:spPr>
+          <a:xfrm>
+            <a:off x="6767621" y="3471218"/>
+            <a:ext cx="384048" cy="384048"/>
+          </a:xfrm>
+          <a:prstGeom prst="ellipse">
+            <a:avLst/>
           </a:prstGeom>
           <a:solidFill>
             <a:srgbClr val="9C5446"/>
@@ -28295,14 +30232,14 @@
       </p:sp>
       <p:sp>
         <p:nvSpPr>
-          <p:cNvPr id="4" name="Text 2"/>
-          <p:cNvSpPr txBox="1"/>
-          <p:nvPr/>
-        </p:nvSpPr>
-        <p:spPr>
-          <a:xfrm>
-            <a:off x="731520" y="2628900"/>
-            <a:ext cx="10728655" cy="1600200"/>
+          <p:cNvPr id="12" name="Text 10"/>
+          <p:cNvSpPr txBox="1"/>
+          <p:nvPr/>
+        </p:nvSpPr>
+        <p:spPr>
+          <a:xfrm>
+            <a:off x="6767621" y="3433929"/>
+            <a:ext cx="384048" cy="458627"/>
           </a:xfrm>
           <a:prstGeom prst="rect">
             <a:avLst/>
@@ -28318,254 +30255,222 @@
               <a:buNone/>
             </a:pPr>
             <a:r>
-              <a:rPr lang="en-US" sz="4200" b="1" dirty="0">
-                <a:solidFill>
-                  <a:srgbClr val="FFFFFF"/>
+              <a:rPr lang="en-US" sz="1200" b="1" dirty="0">
+                <a:solidFill>
+                  <a:srgbClr val="FCFAF4"/>
                 </a:solidFill>
                 <a:latin typeface="游明朝" pitchFamily="34" charset="0"/>
                 <a:ea typeface="游明朝" pitchFamily="34" charset="-122"/>
                 <a:cs typeface="游明朝" pitchFamily="34" charset="-120"/>
               </a:rPr>
-              <a:t>最初の90秒、遮らない。</a:t>
-            </a:r>
-            <a:endParaRPr lang="en-US" sz="4200" dirty="0"/>
-          </a:p>
-        </p:txBody>
-      </p:sp>
-      <p:sp>
-        <p:nvSpPr>
-          <p:cNvPr id="5" name="Text 3"/>
-          <p:cNvSpPr txBox="1"/>
-          <p:nvPr/>
-        </p:nvSpPr>
-        <p:spPr>
-          <a:xfrm>
-            <a:off x="731520" y="4503420"/>
-            <a:ext cx="10728655" cy="457200"/>
-          </a:xfrm>
-          <a:prstGeom prst="rect">
-            <a:avLst/>
-          </a:prstGeom>
-          <a:noFill/>
-          <a:ln/>
-        </p:spPr>
-        <p:txBody>
-          <a:bodyPr wrap="square" lIns="0" tIns="0" rIns="0" bIns="0" rtlCol="0" anchor="ctr"/>
-          <a:lstStyle/>
-          <a:p>
-            <a:pPr algn="ctr" indent="0" marL="0">
-              <a:buNone/>
-            </a:pPr>
-            <a:r>
-              <a:rPr lang="en-US" sz="1800" dirty="0">
-                <a:solidFill>
-                  <a:srgbClr val="ECE3D4"/>
+              <a:t>◯</a:t>
+            </a:r>
+            <a:endParaRPr lang="en-US" sz="1200" dirty="0"/>
+          </a:p>
+        </p:txBody>
+      </p:sp>
+      <p:sp>
+        <p:nvSpPr>
+          <p:cNvPr id="13" name="Text 11"/>
+          <p:cNvSpPr txBox="1"/>
+          <p:nvPr/>
+        </p:nvSpPr>
+        <p:spPr>
+          <a:xfrm>
+            <a:off x="7316261" y="3401170"/>
+            <a:ext cx="4143914" cy="545985"/>
+          </a:xfrm>
+          <a:prstGeom prst="rect">
+            <a:avLst/>
+          </a:prstGeom>
+          <a:noFill/>
+          <a:ln/>
+        </p:spPr>
+        <p:txBody>
+          <a:bodyPr wrap="square" lIns="0" tIns="0" rIns="0" bIns="0" rtlCol="0" anchor="ctr"/>
+          <a:lstStyle/>
+          <a:p>
+            <a:pPr indent="0" marL="0">
+              <a:buNone/>
+            </a:pPr>
+            <a:r>
+              <a:rPr lang="en-US" sz="1550" b="1" dirty="0">
+                <a:solidFill>
+                  <a:srgbClr val="2B2620"/>
                 </a:solidFill>
                 <a:latin typeface="游ゴシック" pitchFamily="34" charset="0"/>
                 <a:ea typeface="游ゴシック" pitchFamily="34" charset="-122"/>
                 <a:cs typeface="游ゴシック" pitchFamily="34" charset="-120"/>
               </a:rPr>
-              <a:t>これだけです。明日の、1人目からできます。</a:t>
-            </a:r>
-            <a:endParaRPr lang="en-US" sz="1800" dirty="0"/>
-          </a:p>
-        </p:txBody>
-      </p:sp>
-      <p:sp>
-        <p:nvSpPr>
-          <p:cNvPr id="6" name="Text 4"/>
-          <p:cNvSpPr txBox="1"/>
-          <p:nvPr/>
-        </p:nvSpPr>
-        <p:spPr>
-          <a:xfrm>
-            <a:off x="11414455" y="6400800"/>
-            <a:ext cx="457200" cy="274320"/>
-          </a:xfrm>
-          <a:prstGeom prst="rect">
-            <a:avLst/>
-          </a:prstGeom>
-          <a:noFill/>
-          <a:ln/>
-        </p:spPr>
-        <p:txBody>
-          <a:bodyPr wrap="square" lIns="0" tIns="0" rIns="0" bIns="0" rtlCol="0" anchor="ctr"/>
-          <a:lstStyle/>
-          <a:p>
-            <a:pPr algn="r" indent="0" marL="0">
-              <a:buNone/>
-            </a:pPr>
-            <a:r>
-              <a:rPr lang="en-US" sz="1000" dirty="0">
-                <a:solidFill>
-                  <a:srgbClr val="6B5F51"/>
+              <a:t>書く・出す・立つ　まで伴走する</a:t>
+            </a:r>
+            <a:endParaRPr lang="en-US" sz="1550" dirty="0"/>
+          </a:p>
+        </p:txBody>
+      </p:sp>
+      <p:sp>
+        <p:nvSpPr>
+          <p:cNvPr id="14" name="Shape 12"/>
+          <p:cNvSpPr/>
+          <p:nvPr/>
+        </p:nvSpPr>
+        <p:spPr>
+          <a:xfrm>
+            <a:off x="6767621" y="4508589"/>
+            <a:ext cx="384048" cy="384048"/>
+          </a:xfrm>
+          <a:prstGeom prst="ellipse">
+            <a:avLst/>
+          </a:prstGeom>
+          <a:solidFill>
+            <a:srgbClr val="5E7060"/>
+          </a:solidFill>
+          <a:ln/>
+        </p:spPr>
+      </p:sp>
+      <p:sp>
+        <p:nvSpPr>
+          <p:cNvPr id="15" name="Text 13"/>
+          <p:cNvSpPr txBox="1"/>
+          <p:nvPr/>
+        </p:nvSpPr>
+        <p:spPr>
+          <a:xfrm>
+            <a:off x="6767621" y="4471300"/>
+            <a:ext cx="384048" cy="458627"/>
+          </a:xfrm>
+          <a:prstGeom prst="rect">
+            <a:avLst/>
+          </a:prstGeom>
+          <a:noFill/>
+          <a:ln/>
+        </p:spPr>
+        <p:txBody>
+          <a:bodyPr wrap="square" lIns="0" tIns="0" rIns="0" bIns="0" rtlCol="0" anchor="ctr"/>
+          <a:lstStyle/>
+          <a:p>
+            <a:pPr algn="ctr" indent="0" marL="0">
+              <a:buNone/>
+            </a:pPr>
+            <a:r>
+              <a:rPr lang="en-US" sz="1200" b="1" dirty="0">
+                <a:solidFill>
+                  <a:srgbClr val="FCFAF4"/>
+                </a:solidFill>
+                <a:latin typeface="游明朝" pitchFamily="34" charset="0"/>
+                <a:ea typeface="游明朝" pitchFamily="34" charset="-122"/>
+                <a:cs typeface="游明朝" pitchFamily="34" charset="-120"/>
+              </a:rPr>
+              <a:t>◯</a:t>
+            </a:r>
+            <a:endParaRPr lang="en-US" sz="1200" dirty="0"/>
+          </a:p>
+        </p:txBody>
+      </p:sp>
+      <p:sp>
+        <p:nvSpPr>
+          <p:cNvPr id="16" name="Text 14"/>
+          <p:cNvSpPr txBox="1"/>
+          <p:nvPr/>
+        </p:nvSpPr>
+        <p:spPr>
+          <a:xfrm>
+            <a:off x="7316261" y="4438541"/>
+            <a:ext cx="4143914" cy="545985"/>
+          </a:xfrm>
+          <a:prstGeom prst="rect">
+            <a:avLst/>
+          </a:prstGeom>
+          <a:noFill/>
+          <a:ln/>
+        </p:spPr>
+        <p:txBody>
+          <a:bodyPr wrap="square" lIns="0" tIns="0" rIns="0" bIns="0" rtlCol="0" anchor="ctr"/>
+          <a:lstStyle/>
+          <a:p>
+            <a:pPr indent="0" marL="0">
+              <a:buNone/>
+            </a:pPr>
+            <a:r>
+              <a:rPr lang="en-US" sz="1550" b="1" dirty="0">
+                <a:solidFill>
+                  <a:srgbClr val="2B2620"/>
                 </a:solidFill>
                 <a:latin typeface="游ゴシック" pitchFamily="34" charset="0"/>
                 <a:ea typeface="游ゴシック" pitchFamily="34" charset="-122"/>
                 <a:cs typeface="游ゴシック" pitchFamily="34" charset="-120"/>
               </a:rPr>
-              <a:t>57</a:t>
-            </a:r>
-            <a:endParaRPr lang="en-US" sz="1000" dirty="0"/>
-          </a:p>
-        </p:txBody>
-      </p:sp>
-    </p:spTree>
-  </p:cSld>
-  <p:clrMapOvr>
-    <a:masterClrMapping/>
-  </p:clrMapOvr>
-</p:sld>
-</file>
-
-<file path=ppt/slides/slide58.xml><?xml version="1.0" encoding="utf-8"?>
-<p:sld xmlns:a="http://schemas.openxmlformats.org/drawingml/2006/main" xmlns:r="http://schemas.openxmlformats.org/officeDocument/2006/relationships" xmlns:p="http://schemas.openxmlformats.org/presentationml/2006/main">
-  <p:cSld name="Slide 58">
-    <p:bg>
-      <p:bgPr>
-        <a:solidFill>
-          <a:srgbClr val="2B2620"/>
-        </a:solidFill>
-      </p:bgPr>
-    </p:bg>
-    <p:spTree>
-      <p:nvGrpSpPr>
-        <p:cNvPr id="1" name=""/>
-        <p:cNvGrpSpPr/>
-        <p:nvPr/>
-      </p:nvGrpSpPr>
-      <p:grpSpPr>
-        <a:xfrm>
-          <a:off x="0" y="0"/>
-          <a:ext cx="0" cy="0"/>
-          <a:chOff x="0" y="0"/>
-          <a:chExt cx="0" cy="0"/>
-        </a:xfrm>
-      </p:grpSpPr>
-      <p:sp>
-        <p:nvSpPr>
-          <p:cNvPr id="2" name="Shape 0"/>
-          <p:cNvSpPr/>
-          <p:nvPr/>
-        </p:nvSpPr>
-        <p:spPr>
-          <a:xfrm>
-            <a:off x="4297680" y="558146"/>
-            <a:ext cx="5760720" cy="5760720"/>
-          </a:xfrm>
-          <a:prstGeom prst="ellipse">
-            <a:avLst/>
-          </a:prstGeom>
-          <a:solidFill>
-            <a:srgbClr val="342F28"/>
-          </a:solidFill>
-          <a:ln/>
-        </p:spPr>
-      </p:sp>
-      <p:sp>
-        <p:nvSpPr>
-          <p:cNvPr id="3" name="Text 1"/>
-          <p:cNvSpPr txBox="1"/>
-          <p:nvPr/>
-        </p:nvSpPr>
-        <p:spPr>
-          <a:xfrm>
-            <a:off x="1371600" y="2108584"/>
-            <a:ext cx="9418320" cy="1742657"/>
-          </a:xfrm>
-          <a:prstGeom prst="rect">
-            <a:avLst/>
-          </a:prstGeom>
-          <a:noFill/>
-          <a:ln/>
-        </p:spPr>
-        <p:txBody>
-          <a:bodyPr wrap="square" lIns="0" tIns="0" rIns="0" bIns="0" rtlCol="0" anchor="ctr"/>
-          <a:lstStyle/>
-          <a:p>
-            <a:pPr algn="ctr" indent="0" marL="0">
+              <a:t>5年間で、学会発表の体制をつくった</a:t>
+            </a:r>
+            <a:endParaRPr lang="en-US" sz="1550" dirty="0"/>
+          </a:p>
+        </p:txBody>
+      </p:sp>
+      <p:sp>
+        <p:nvSpPr>
+          <p:cNvPr id="17" name="Text 15"/>
+          <p:cNvSpPr txBox="1"/>
+          <p:nvPr/>
+        </p:nvSpPr>
+        <p:spPr>
+          <a:xfrm>
+            <a:off x="6767621" y="5563269"/>
+            <a:ext cx="4692554" cy="764379"/>
+          </a:xfrm>
+          <a:prstGeom prst="rect">
+            <a:avLst/>
+          </a:prstGeom>
+          <a:noFill/>
+          <a:ln/>
+        </p:spPr>
+        <p:txBody>
+          <a:bodyPr wrap="square" lIns="0" tIns="0" rIns="0" bIns="0" rtlCol="0" anchor="ctr"/>
+          <a:lstStyle/>
+          <a:p>
+            <a:pPr indent="0" marL="0">
               <a:lnSpc>
-                <a:spcPts val="6600"/>
+                <a:spcPts val="1900"/>
               </a:lnSpc>
               <a:buNone/>
             </a:pPr>
             <a:r>
-              <a:rPr lang="en-US" sz="4000" b="1" dirty="0">
-                <a:solidFill>
-                  <a:srgbClr val="ECE3D4"/>
-                </a:solidFill>
-                <a:latin typeface="游明朝" pitchFamily="34" charset="0"/>
-                <a:ea typeface="游明朝" pitchFamily="34" charset="-122"/>
-                <a:cs typeface="游明朝" pitchFamily="34" charset="-120"/>
-              </a:rPr>
-              <a:t>経絡に触れ、</a:t>
-            </a:r>
-            <a:endParaRPr lang="en-US" sz="4000" dirty="0"/>
-          </a:p>
-          <a:p>
-            <a:pPr algn="ctr" indent="0" marL="0">
+              <a:rPr lang="en-US" sz="1150" dirty="0">
+                <a:solidFill>
+                  <a:srgbClr val="7A6E60"/>
+                </a:solidFill>
+                <a:latin typeface="游ゴシック" pitchFamily="34" charset="0"/>
+                <a:ea typeface="游ゴシック" pitchFamily="34" charset="-122"/>
+                <a:cs typeface="游ゴシック" pitchFamily="34" charset="-120"/>
+              </a:rPr>
+              <a:t>2026年 全日本鍼灸学会</a:t>
+            </a:r>
+            <a:endParaRPr lang="en-US" sz="1150" dirty="0"/>
+          </a:p>
+          <a:p>
+            <a:pPr indent="0" marL="0">
               <a:lnSpc>
-                <a:spcPts val="6600"/>
+                <a:spcPts val="1900"/>
               </a:lnSpc>
               <a:buNone/>
             </a:pPr>
             <a:r>
-              <a:rPr lang="en-US" sz="4000" b="1" dirty="0">
-                <a:solidFill>
-                  <a:srgbClr val="ECE3D4"/>
-                </a:solidFill>
-                <a:latin typeface="游明朝" pitchFamily="34" charset="0"/>
-                <a:ea typeface="游明朝" pitchFamily="34" charset="-122"/>
-                <a:cs typeface="游明朝" pitchFamily="34" charset="-120"/>
-              </a:rPr>
-              <a:t>こころに耳を傾ける。</a:t>
-            </a:r>
-            <a:endParaRPr lang="en-US" sz="4000" dirty="0"/>
-          </a:p>
-        </p:txBody>
-      </p:sp>
-      <p:sp>
-        <p:nvSpPr>
-          <p:cNvPr id="4" name="Text 2"/>
-          <p:cNvSpPr txBox="1"/>
-          <p:nvPr/>
-        </p:nvSpPr>
-        <p:spPr>
-          <a:xfrm>
-            <a:off x="1371600" y="4126397"/>
-            <a:ext cx="9418320" cy="550313"/>
-          </a:xfrm>
-          <a:prstGeom prst="rect">
-            <a:avLst/>
-          </a:prstGeom>
-          <a:noFill/>
-          <a:ln/>
-        </p:spPr>
-        <p:txBody>
-          <a:bodyPr wrap="square" lIns="0" tIns="0" rIns="0" bIns="0" rtlCol="0" anchor="ctr"/>
-          <a:lstStyle/>
-          <a:p>
-            <a:pPr algn="ctr" indent="0" marL="0">
-              <a:buNone/>
-            </a:pPr>
-            <a:r>
-              <a:rPr lang="en-US" sz="2200" b="1" dirty="0">
-                <a:solidFill>
-                  <a:srgbClr val="9C5446"/>
-                </a:solidFill>
-                <a:latin typeface="游明朝" pitchFamily="34" charset="0"/>
-                <a:ea typeface="游明朝" pitchFamily="34" charset="-122"/>
-                <a:cs typeface="游明朝" pitchFamily="34" charset="-120"/>
-              </a:rPr>
-              <a:t>それが、私たちの持っているチカラです。</a:t>
-            </a:r>
-            <a:endParaRPr lang="en-US" sz="2200" dirty="0"/>
-          </a:p>
-        </p:txBody>
-      </p:sp>
-      <p:sp>
-        <p:nvSpPr>
-          <p:cNvPr id="5" name="Text 3"/>
+              <a:rPr lang="en-US" sz="1150" dirty="0">
+                <a:solidFill>
+                  <a:srgbClr val="7A6E60"/>
+                </a:solidFill>
+                <a:latin typeface="游ゴシック" pitchFamily="34" charset="0"/>
+                <a:ea typeface="游ゴシック" pitchFamily="34" charset="-122"/>
+                <a:cs typeface="游ゴシック" pitchFamily="34" charset="-120"/>
+              </a:rPr>
+              <a:t>「鍼灸師コミュニティの学会発表体制構築 ―5年間の分析―」</a:t>
+            </a:r>
+            <a:endParaRPr lang="en-US" sz="1150" dirty="0"/>
+          </a:p>
+        </p:txBody>
+      </p:sp>
+      <p:sp>
+        <p:nvSpPr>
+          <p:cNvPr id="18" name="Text 16"/>
           <p:cNvSpPr txBox="1"/>
           <p:nvPr/>
         </p:nvSpPr>
@@ -28590,7 +30495,7 @@
             <a:r>
               <a:rPr lang="en-US" sz="1000" dirty="0">
                 <a:solidFill>
-                  <a:srgbClr val="6B5F51"/>
+                  <a:srgbClr val="B7A991"/>
                 </a:solidFill>
                 <a:latin typeface="游ゴシック" pitchFamily="34" charset="0"/>
                 <a:ea typeface="游ゴシック" pitchFamily="34" charset="-122"/>
@@ -28642,8 +30547,47 @@
         </p:nvSpPr>
         <p:spPr>
           <a:xfrm>
-            <a:off x="731520" y="698768"/>
-            <a:ext cx="10728655" cy="993332"/>
+            <a:off x="731520" y="310896"/>
+            <a:ext cx="10728655" cy="300260"/>
+          </a:xfrm>
+          <a:prstGeom prst="rect">
+            <a:avLst/>
+          </a:prstGeom>
+          <a:noFill/>
+          <a:ln/>
+        </p:spPr>
+        <p:txBody>
+          <a:bodyPr wrap="square" lIns="0" tIns="0" rIns="0" bIns="0" rtlCol="0" anchor="ctr"/>
+          <a:lstStyle/>
+          <a:p>
+            <a:pPr algn="l" indent="0" marL="0">
+              <a:buNone/>
+            </a:pPr>
+            <a:r>
+              <a:rPr lang="en-US" sz="1100" b="1" spc="200" kern="0" dirty="0">
+                <a:solidFill>
+                  <a:srgbClr val="9C5446"/>
+                </a:solidFill>
+                <a:latin typeface="游ゴシック" pitchFamily="34" charset="0"/>
+                <a:ea typeface="游ゴシック" pitchFamily="34" charset="-122"/>
+                <a:cs typeface="游ゴシック" pitchFamily="34" charset="-120"/>
+              </a:rPr>
+              <a:t>続けるために</a:t>
+            </a:r>
+            <a:endParaRPr lang="en-US" sz="1100" dirty="0"/>
+          </a:p>
+        </p:txBody>
+      </p:sp>
+      <p:sp>
+        <p:nvSpPr>
+          <p:cNvPr id="3" name="Text 1"/>
+          <p:cNvSpPr txBox="1"/>
+          <p:nvPr/>
+        </p:nvSpPr>
+        <p:spPr>
+          <a:xfrm>
+            <a:off x="731520" y="634253"/>
+            <a:ext cx="10728655" cy="1212589"/>
           </a:xfrm>
           <a:prstGeom prst="rect">
             <a:avLst/>
@@ -28670,7 +30614,7 @@
                 <a:ea typeface="游明朝" pitchFamily="34" charset="-122"/>
                 <a:cs typeface="游明朝" pitchFamily="34" charset="-120"/>
               </a:rPr>
-              <a:t>その質問、そのまま送ってください</a:t>
+              <a:t>メンバーに、起きたこと</a:t>
             </a:r>
             <a:endParaRPr lang="en-US" sz="3200" dirty="0"/>
           </a:p>
@@ -28678,18 +30622,18 @@
       </p:sp>
       <p:sp>
         <p:nvSpPr>
-          <p:cNvPr id="3" name="Shape 1"/>
+          <p:cNvPr id="4" name="Shape 2"/>
           <p:cNvSpPr/>
           <p:nvPr/>
         </p:nvSpPr>
         <p:spPr>
           <a:xfrm>
-            <a:off x="731520" y="1834005"/>
-            <a:ext cx="6008047" cy="3405709"/>
+            <a:off x="731520" y="2401169"/>
+            <a:ext cx="3256178" cy="2713890"/>
           </a:xfrm>
           <a:prstGeom prst="roundRect">
             <a:avLst>
-              <a:gd name="adj" fmla="val 2685"/>
+              <a:gd name="adj" fmla="val 3369"/>
             </a:avLst>
           </a:prstGeom>
           <a:solidFill>
@@ -28707,33 +30651,72 @@
       </p:sp>
       <p:sp>
         <p:nvSpPr>
-          <p:cNvPr id="4" name="Text 2"/>
-          <p:cNvSpPr txBox="1"/>
-          <p:nvPr/>
-        </p:nvSpPr>
-        <p:spPr>
-          <a:xfrm>
-            <a:off x="1234440" y="2212417"/>
-            <a:ext cx="5002207" cy="2459678"/>
-          </a:xfrm>
-          <a:prstGeom prst="rect">
-            <a:avLst/>
-          </a:prstGeom>
-          <a:noFill/>
-          <a:ln/>
-        </p:spPr>
-        <p:txBody>
-          <a:bodyPr wrap="square" lIns="0" tIns="0" rIns="0" bIns="0" rtlCol="0" anchor="t"/>
-          <a:lstStyle/>
-          <a:p>
-            <a:pPr algn="l" indent="0" marL="0">
+          <p:cNvPr id="5" name="Text 3"/>
+          <p:cNvSpPr txBox="1"/>
+          <p:nvPr/>
+        </p:nvSpPr>
+        <p:spPr>
+          <a:xfrm>
+            <a:off x="1051560" y="2805365"/>
+            <a:ext cx="2616098" cy="577423"/>
+          </a:xfrm>
+          <a:prstGeom prst="rect">
+            <a:avLst/>
+          </a:prstGeom>
+          <a:noFill/>
+          <a:ln/>
+        </p:spPr>
+        <p:txBody>
+          <a:bodyPr wrap="square" lIns="0" tIns="0" rIns="0" bIns="0" rtlCol="0" anchor="ctr"/>
+          <a:lstStyle/>
+          <a:p>
+            <a:pPr indent="0" marL="0">
+              <a:buNone/>
+            </a:pPr>
+            <a:r>
+              <a:rPr lang="en-US" sz="2200" b="1" dirty="0">
+                <a:solidFill>
+                  <a:srgbClr val="9C5446"/>
+                </a:solidFill>
+                <a:latin typeface="游明朝" pitchFamily="34" charset="0"/>
+                <a:ea typeface="游明朝" pitchFamily="34" charset="-122"/>
+                <a:cs typeface="游明朝" pitchFamily="34" charset="-120"/>
+              </a:rPr>
+              <a:t>学会発表</a:t>
+            </a:r>
+            <a:endParaRPr lang="en-US" sz="2200" dirty="0"/>
+          </a:p>
+        </p:txBody>
+      </p:sp>
+      <p:sp>
+        <p:nvSpPr>
+          <p:cNvPr id="6" name="Text 4"/>
+          <p:cNvSpPr txBox="1"/>
+          <p:nvPr/>
+        </p:nvSpPr>
+        <p:spPr>
+          <a:xfrm>
+            <a:off x="1051560" y="3498273"/>
+            <a:ext cx="2616098" cy="1270332"/>
+          </a:xfrm>
+          <a:prstGeom prst="rect">
+            <a:avLst/>
+          </a:prstGeom>
+          <a:noFill/>
+          <a:ln/>
+        </p:spPr>
+        <p:txBody>
+          <a:bodyPr wrap="square" lIns="0" tIns="0" rIns="0" bIns="0" rtlCol="0" anchor="ctr"/>
+          <a:lstStyle/>
+          <a:p>
+            <a:pPr indent="0" marL="0">
               <a:lnSpc>
-                <a:spcPts val="3400"/>
+                <a:spcPts val="2500"/>
               </a:lnSpc>
               <a:buNone/>
             </a:pPr>
             <a:r>
-              <a:rPr lang="en-US" sz="1800" dirty="0">
+              <a:rPr lang="en-US" sz="1400" dirty="0">
                 <a:solidFill>
                   <a:srgbClr val="2B2620"/>
                 </a:solidFill>
@@ -28741,28 +30724,19 @@
                 <a:ea typeface="游ゴシック" pitchFamily="34" charset="-122"/>
                 <a:cs typeface="游ゴシック" pitchFamily="34" charset="-120"/>
               </a:rPr>
-              <a:t>「うちの院では、どうしたらいいんだろう」</a:t>
-            </a:r>
-            <a:endParaRPr lang="en-US" sz="1800" dirty="0"/>
-          </a:p>
-          <a:p>
-            <a:pPr algn="l" indent="0" marL="0">
+              <a:t>はじめての演題を、</a:t>
+            </a:r>
+            <a:endParaRPr lang="en-US" sz="1400" dirty="0"/>
+          </a:p>
+          <a:p>
+            <a:pPr indent="0" marL="0">
               <a:lnSpc>
-                <a:spcPts val="3400"/>
+                <a:spcPts val="2500"/>
               </a:lnSpc>
               <a:buNone/>
             </a:pPr>
-            <a:endParaRPr lang="en-US" sz="1800" dirty="0"/>
-          </a:p>
-          <a:p>
-            <a:pPr algn="l" indent="0" marL="0">
-              <a:lnSpc>
-                <a:spcPts val="3400"/>
-              </a:lnSpc>
-              <a:buNone/>
-            </a:pPr>
-            <a:r>
-              <a:rPr lang="en-US" sz="1800" dirty="0">
+            <a:r>
+              <a:rPr lang="en-US" sz="1400" dirty="0">
                 <a:solidFill>
                   <a:srgbClr val="2B2620"/>
                 </a:solidFill>
@@ -28770,19 +30744,109 @@
                 <a:ea typeface="游ゴシック" pitchFamily="34" charset="-122"/>
                 <a:cs typeface="游ゴシック" pitchFamily="34" charset="-120"/>
               </a:rPr>
-              <a:t>今日の話で、そう思った方。</a:t>
-            </a:r>
-            <a:endParaRPr lang="en-US" sz="1800" dirty="0"/>
-          </a:p>
-          <a:p>
-            <a:pPr algn="l" indent="0" marL="0">
+              <a:t>自分の名前で出した</a:t>
+            </a:r>
+            <a:endParaRPr lang="en-US" sz="1400" dirty="0"/>
+          </a:p>
+        </p:txBody>
+      </p:sp>
+      <p:sp>
+        <p:nvSpPr>
+          <p:cNvPr id="7" name="Shape 5"/>
+          <p:cNvSpPr/>
+          <p:nvPr/>
+        </p:nvSpPr>
+        <p:spPr>
+          <a:xfrm>
+            <a:off x="4307738" y="2401169"/>
+            <a:ext cx="3256178" cy="2713890"/>
+          </a:xfrm>
+          <a:prstGeom prst="roundRect">
+            <a:avLst>
+              <a:gd name="adj" fmla="val 3369"/>
+            </a:avLst>
+          </a:prstGeom>
+          <a:solidFill>
+            <a:srgbClr val="FCFAF4"/>
+          </a:solidFill>
+          <a:ln/>
+          <a:effectLst>
+            <a:outerShdw sx="100000" sy="100000" kx="0" ky="0" algn="bl" rotWithShape="0" blurRad="127000" dist="508" dir="5400000">
+              <a:srgbClr val="8C7F6E">
+                <a:alpha val="25000"/>
+              </a:srgbClr>
+            </a:outerShdw>
+          </a:effectLst>
+        </p:spPr>
+      </p:sp>
+      <p:sp>
+        <p:nvSpPr>
+          <p:cNvPr id="8" name="Text 6"/>
+          <p:cNvSpPr txBox="1"/>
+          <p:nvPr/>
+        </p:nvSpPr>
+        <p:spPr>
+          <a:xfrm>
+            <a:off x="4627778" y="2805365"/>
+            <a:ext cx="2616098" cy="577423"/>
+          </a:xfrm>
+          <a:prstGeom prst="rect">
+            <a:avLst/>
+          </a:prstGeom>
+          <a:noFill/>
+          <a:ln/>
+        </p:spPr>
+        <p:txBody>
+          <a:bodyPr wrap="square" lIns="0" tIns="0" rIns="0" bIns="0" rtlCol="0" anchor="ctr"/>
+          <a:lstStyle/>
+          <a:p>
+            <a:pPr indent="0" marL="0">
+              <a:buNone/>
+            </a:pPr>
+            <a:r>
+              <a:rPr lang="en-US" sz="2200" b="1" dirty="0">
+                <a:solidFill>
+                  <a:srgbClr val="9C5446"/>
+                </a:solidFill>
+                <a:latin typeface="游明朝" pitchFamily="34" charset="0"/>
+                <a:ea typeface="游明朝" pitchFamily="34" charset="-122"/>
+                <a:cs typeface="游明朝" pitchFamily="34" charset="-120"/>
+              </a:rPr>
+              <a:t>書籍出版</a:t>
+            </a:r>
+            <a:endParaRPr lang="en-US" sz="2200" dirty="0"/>
+          </a:p>
+        </p:txBody>
+      </p:sp>
+      <p:sp>
+        <p:nvSpPr>
+          <p:cNvPr id="9" name="Text 7"/>
+          <p:cNvSpPr txBox="1"/>
+          <p:nvPr/>
+        </p:nvSpPr>
+        <p:spPr>
+          <a:xfrm>
+            <a:off x="4627778" y="3498273"/>
+            <a:ext cx="2616098" cy="1270332"/>
+          </a:xfrm>
+          <a:prstGeom prst="rect">
+            <a:avLst/>
+          </a:prstGeom>
+          <a:noFill/>
+          <a:ln/>
+        </p:spPr>
+        <p:txBody>
+          <a:bodyPr wrap="square" lIns="0" tIns="0" rIns="0" bIns="0" rtlCol="0" anchor="ctr"/>
+          <a:lstStyle/>
+          <a:p>
+            <a:pPr indent="0" marL="0">
               <a:lnSpc>
-                <a:spcPts val="3400"/>
+                <a:spcPts val="2500"/>
               </a:lnSpc>
               <a:buNone/>
             </a:pPr>
             <a:r>
-              <a:rPr lang="en-US" sz="1800" dirty="0">
+              <a:rPr lang="en-US" sz="1400" dirty="0">
                 <a:solidFill>
                   <a:srgbClr val="2B2620"/>
                 </a:solidFill>
@@ -28790,28 +30854,19 @@
                 <a:ea typeface="游ゴシック" pitchFamily="34" charset="-122"/>
                 <a:cs typeface="游ゴシック" pitchFamily="34" charset="-120"/>
               </a:rPr>
-              <a:t>その質問を、そのまま送ってください。</a:t>
-            </a:r>
-            <a:endParaRPr lang="en-US" sz="1800" dirty="0"/>
-          </a:p>
-          <a:p>
-            <a:pPr algn="l" indent="0" marL="0">
+              <a:t>サロンから</a:t>
+            </a:r>
+            <a:endParaRPr lang="en-US" sz="1400" dirty="0"/>
+          </a:p>
+          <a:p>
+            <a:pPr indent="0" marL="0">
               <a:lnSpc>
-                <a:spcPts val="3400"/>
+                <a:spcPts val="2500"/>
               </a:lnSpc>
               <a:buNone/>
             </a:pPr>
-            <a:endParaRPr lang="en-US" sz="1800" dirty="0"/>
-          </a:p>
-          <a:p>
-            <a:pPr algn="l" indent="0" marL="0">
-              <a:lnSpc>
-                <a:spcPts val="3400"/>
-              </a:lnSpc>
-              <a:buNone/>
-            </a:pPr>
-            <a:r>
-              <a:rPr lang="en-US" sz="1800" dirty="0">
+            <a:r>
+              <a:rPr lang="en-US" sz="1400" dirty="0">
                 <a:solidFill>
                   <a:srgbClr val="2B2620"/>
                 </a:solidFill>
@@ -28819,172 +30874,152 @@
                 <a:ea typeface="游ゴシック" pitchFamily="34" charset="-122"/>
                 <a:cs typeface="游ゴシック" pitchFamily="34" charset="-120"/>
               </a:rPr>
-              <a:t>私が、全部読みます。</a:t>
-            </a:r>
-            <a:endParaRPr lang="en-US" sz="1800" dirty="0"/>
-          </a:p>
-        </p:txBody>
-      </p:sp>
-      <p:sp>
-        <p:nvSpPr>
-          <p:cNvPr id="5" name="Shape 3"/>
+              <a:t>著者が生まれた</a:t>
+            </a:r>
+            <a:endParaRPr lang="en-US" sz="1400" dirty="0"/>
+          </a:p>
+        </p:txBody>
+      </p:sp>
+      <p:sp>
+        <p:nvSpPr>
+          <p:cNvPr id="10" name="Shape 8"/>
           <p:cNvSpPr/>
           <p:nvPr/>
         </p:nvSpPr>
         <p:spPr>
           <a:xfrm>
-            <a:off x="7242487" y="1834005"/>
-            <a:ext cx="4217688" cy="3405709"/>
+            <a:off x="7883957" y="2401169"/>
+            <a:ext cx="3256178" cy="2713890"/>
           </a:xfrm>
           <a:prstGeom prst="roundRect">
             <a:avLst>
-              <a:gd name="adj" fmla="val 2685"/>
+              <a:gd name="adj" fmla="val 3369"/>
             </a:avLst>
           </a:prstGeom>
           <a:solidFill>
             <a:srgbClr val="FCFAF4"/>
           </a:solidFill>
-          <a:ln w="19050">
-            <a:solidFill>
-              <a:srgbClr val="9C5446"/>
-            </a:solidFill>
-            <a:prstDash val="dash"/>
-          </a:ln>
-        </p:spPr>
-      </p:sp>
-      <p:sp>
-        <p:nvSpPr>
-          <p:cNvPr id="6" name="Text 4"/>
-          <p:cNvSpPr txBox="1"/>
-          <p:nvPr/>
-        </p:nvSpPr>
-        <p:spPr>
-          <a:xfrm>
-            <a:off x="7516807" y="3016542"/>
-            <a:ext cx="3669048" cy="851427"/>
-          </a:xfrm>
-          <a:prstGeom prst="rect">
-            <a:avLst/>
-          </a:prstGeom>
-          <a:noFill/>
-          <a:ln/>
-        </p:spPr>
-        <p:txBody>
-          <a:bodyPr wrap="square" lIns="0" tIns="0" rIns="0" bIns="0" rtlCol="0" anchor="ctr"/>
-          <a:lstStyle/>
-          <a:p>
-            <a:pPr algn="ctr" indent="0" marL="0">
+          <a:ln/>
+          <a:effectLst>
+            <a:outerShdw sx="100000" sy="100000" kx="0" ky="0" algn="bl" rotWithShape="0" blurRad="127000" dist="508" dir="5400000">
+              <a:srgbClr val="8C7F6E">
+                <a:alpha val="25000"/>
+              </a:srgbClr>
+            </a:outerShdw>
+          </a:effectLst>
+        </p:spPr>
+      </p:sp>
+      <p:sp>
+        <p:nvSpPr>
+          <p:cNvPr id="11" name="Text 9"/>
+          <p:cNvSpPr txBox="1"/>
+          <p:nvPr/>
+        </p:nvSpPr>
+        <p:spPr>
+          <a:xfrm>
+            <a:off x="8203997" y="2805365"/>
+            <a:ext cx="2616098" cy="577423"/>
+          </a:xfrm>
+          <a:prstGeom prst="rect">
+            <a:avLst/>
+          </a:prstGeom>
+          <a:noFill/>
+          <a:ln/>
+        </p:spPr>
+        <p:txBody>
+          <a:bodyPr wrap="square" lIns="0" tIns="0" rIns="0" bIns="0" rtlCol="0" anchor="ctr"/>
+          <a:lstStyle/>
+          <a:p>
+            <a:pPr indent="0" marL="0">
+              <a:buNone/>
+            </a:pPr>
+            <a:r>
+              <a:rPr lang="en-US" sz="2200" b="1" dirty="0">
+                <a:solidFill>
+                  <a:srgbClr val="9C5446"/>
+                </a:solidFill>
+                <a:latin typeface="游明朝" pitchFamily="34" charset="0"/>
+                <a:ea typeface="游明朝" pitchFamily="34" charset="-122"/>
+                <a:cs typeface="游明朝" pitchFamily="34" charset="-120"/>
+              </a:rPr>
+              <a:t>院が変わった</a:t>
+            </a:r>
+            <a:endParaRPr lang="en-US" sz="2200" dirty="0"/>
+          </a:p>
+        </p:txBody>
+      </p:sp>
+      <p:sp>
+        <p:nvSpPr>
+          <p:cNvPr id="12" name="Text 10"/>
+          <p:cNvSpPr txBox="1"/>
+          <p:nvPr/>
+        </p:nvSpPr>
+        <p:spPr>
+          <a:xfrm>
+            <a:off x="8203997" y="3498273"/>
+            <a:ext cx="2616098" cy="1270332"/>
+          </a:xfrm>
+          <a:prstGeom prst="rect">
+            <a:avLst/>
+          </a:prstGeom>
+          <a:noFill/>
+          <a:ln/>
+        </p:spPr>
+        <p:txBody>
+          <a:bodyPr wrap="square" lIns="0" tIns="0" rIns="0" bIns="0" rtlCol="0" anchor="ctr"/>
+          <a:lstStyle/>
+          <a:p>
+            <a:pPr indent="0" marL="0">
               <a:lnSpc>
-                <a:spcPts val="2200"/>
+                <a:spcPts val="2500"/>
               </a:lnSpc>
               <a:buNone/>
             </a:pPr>
             <a:r>
-              <a:rPr lang="en-US" sz="1300" b="1" dirty="0">
-                <a:solidFill>
-                  <a:srgbClr val="7A6E60"/>
+              <a:rPr lang="en-US" sz="1400" dirty="0">
+                <a:solidFill>
+                  <a:srgbClr val="2B2620"/>
                 </a:solidFill>
                 <a:latin typeface="游ゴシック" pitchFamily="34" charset="0"/>
                 <a:ea typeface="游ゴシック" pitchFamily="34" charset="-122"/>
                 <a:cs typeface="游ゴシック" pitchFamily="34" charset="-120"/>
               </a:rPr>
-              <a:t>▶ 公式LINEのQRコードを</a:t>
-            </a:r>
-            <a:endParaRPr lang="en-US" sz="1300" dirty="0"/>
-          </a:p>
-          <a:p>
-            <a:pPr algn="ctr" indent="0" marL="0">
+              <a:t>予約が埋まり、</a:t>
+            </a:r>
+            <a:endParaRPr lang="en-US" sz="1400" dirty="0"/>
+          </a:p>
+          <a:p>
+            <a:pPr indent="0" marL="0">
               <a:lnSpc>
-                <a:spcPts val="2200"/>
+                <a:spcPts val="2500"/>
               </a:lnSpc>
               <a:buNone/>
             </a:pPr>
             <a:r>
-              <a:rPr lang="en-US" sz="1300" b="1" dirty="0">
-                <a:solidFill>
-                  <a:srgbClr val="7A6E60"/>
+              <a:rPr lang="en-US" sz="1400" dirty="0">
+                <a:solidFill>
+                  <a:srgbClr val="2B2620"/>
                 </a:solidFill>
                 <a:latin typeface="游ゴシック" pitchFamily="34" charset="0"/>
                 <a:ea typeface="游ゴシック" pitchFamily="34" charset="-122"/>
                 <a:cs typeface="游ゴシック" pitchFamily="34" charset="-120"/>
               </a:rPr>
-              <a:t>ここに大きく貼ってください</a:t>
-            </a:r>
-            <a:endParaRPr lang="en-US" sz="1300" dirty="0"/>
-          </a:p>
-        </p:txBody>
-      </p:sp>
-      <p:sp>
-        <p:nvSpPr>
-          <p:cNvPr id="7" name="Text 5"/>
-          <p:cNvSpPr txBox="1"/>
-          <p:nvPr/>
-        </p:nvSpPr>
-        <p:spPr>
-          <a:xfrm>
-            <a:off x="7516807" y="4482889"/>
-            <a:ext cx="3669048" cy="378412"/>
-          </a:xfrm>
-          <a:prstGeom prst="rect">
-            <a:avLst/>
-          </a:prstGeom>
-          <a:noFill/>
-          <a:ln/>
-        </p:spPr>
-        <p:txBody>
-          <a:bodyPr wrap="square" lIns="0" tIns="0" rIns="0" bIns="0" rtlCol="0" anchor="ctr"/>
-          <a:lstStyle/>
-          <a:p>
-            <a:pPr algn="ctr" indent="0" marL="0">
-              <a:buNone/>
-            </a:pPr>
-            <a:r>
-              <a:rPr lang="en-US" sz="1100" dirty="0">
-                <a:solidFill>
-                  <a:srgbClr val="7A6E60"/>
-                </a:solidFill>
-                <a:latin typeface="游ゴシック" pitchFamily="34" charset="0"/>
-                <a:ea typeface="游ゴシック" pitchFamily="34" charset="-122"/>
-                <a:cs typeface="游ゴシック" pitchFamily="34" charset="-120"/>
-              </a:rPr>
-              <a:t>▶ 短縮URLをここに（口頭でも読み上げる）</a:t>
-            </a:r>
-            <a:endParaRPr lang="en-US" sz="1100" dirty="0"/>
-          </a:p>
-        </p:txBody>
-      </p:sp>
-      <p:sp>
-        <p:nvSpPr>
-          <p:cNvPr id="8" name="Shape 6"/>
-          <p:cNvSpPr/>
-          <p:nvPr/>
-        </p:nvSpPr>
-        <p:spPr>
-          <a:xfrm>
-            <a:off x="731520" y="5428919"/>
-            <a:ext cx="10728655" cy="898729"/>
-          </a:xfrm>
-          <a:prstGeom prst="roundRect">
-            <a:avLst>
-              <a:gd name="adj" fmla="val 10174"/>
-            </a:avLst>
-          </a:prstGeom>
-          <a:solidFill>
-            <a:srgbClr val="5E7060"/>
-          </a:solidFill>
-          <a:ln/>
-        </p:spPr>
-      </p:sp>
-      <p:sp>
-        <p:nvSpPr>
-          <p:cNvPr id="9" name="Text 7"/>
-          <p:cNvSpPr txBox="1"/>
-          <p:nvPr/>
-        </p:nvSpPr>
-        <p:spPr>
-          <a:xfrm>
-            <a:off x="1097280" y="5428919"/>
-            <a:ext cx="9997135" cy="898729"/>
+              <a:t>紹介が増えた</a:t>
+            </a:r>
+            <a:endParaRPr lang="en-US" sz="1400" dirty="0"/>
+          </a:p>
+        </p:txBody>
+      </p:sp>
+      <p:sp>
+        <p:nvSpPr>
+          <p:cNvPr id="13" name="Text 11"/>
+          <p:cNvSpPr txBox="1"/>
+          <p:nvPr/>
+        </p:nvSpPr>
+        <p:spPr>
+          <a:xfrm>
+            <a:off x="731520" y="5634740"/>
+            <a:ext cx="10728655" cy="692908"/>
           </a:xfrm>
           <a:prstGeom prst="rect">
             <a:avLst/>
@@ -29000,23 +31035,23 @@
               <a:buNone/>
             </a:pPr>
             <a:r>
-              <a:rPr lang="en-US" sz="1500" b="1" dirty="0">
-                <a:solidFill>
-                  <a:srgbClr val="FFFFFF"/>
-                </a:solidFill>
-                <a:latin typeface="游ゴシック" pitchFamily="34" charset="0"/>
-                <a:ea typeface="游ゴシック" pitchFamily="34" charset="-122"/>
-                <a:cs typeface="游ゴシック" pitchFamily="34" charset="-120"/>
-              </a:rPr>
-              <a:t>録画でご覧の方も、同じように送ってください。全部読みます。　／　本日のスライドをお送りします。</a:t>
-            </a:r>
-            <a:endParaRPr lang="en-US" sz="1500" dirty="0"/>
-          </a:p>
-        </p:txBody>
-      </p:sp>
-      <p:sp>
-        <p:nvSpPr>
-          <p:cNvPr id="10" name="Text 8"/>
+              <a:rPr lang="en-US" sz="2400" b="1" dirty="0">
+                <a:solidFill>
+                  <a:srgbClr val="2B2620"/>
+                </a:solidFill>
+                <a:latin typeface="游明朝" pitchFamily="34" charset="0"/>
+                <a:ea typeface="游明朝" pitchFamily="34" charset="-122"/>
+                <a:cs typeface="游明朝" pitchFamily="34" charset="-120"/>
+              </a:rPr>
+              <a:t>全部、私ではなく、メンバーがやったことです。</a:t>
+            </a:r>
+            <a:endParaRPr lang="en-US" sz="2400" dirty="0"/>
+          </a:p>
+        </p:txBody>
+      </p:sp>
+      <p:sp>
+        <p:nvSpPr>
+          <p:cNvPr id="14" name="Text 12"/>
           <p:cNvSpPr txBox="1"/>
           <p:nvPr/>
         </p:nvSpPr>
@@ -29764,6 +31799,1416 @@
                 <a:cs typeface="游ゴシック" pitchFamily="34" charset="-120"/>
               </a:rPr>
               <a:t>6</a:t>
+            </a:r>
+            <a:endParaRPr lang="en-US" sz="1000" dirty="0"/>
+          </a:p>
+        </p:txBody>
+      </p:sp>
+    </p:spTree>
+  </p:cSld>
+  <p:clrMapOvr>
+    <a:masterClrMapping/>
+  </p:clrMapOvr>
+</p:sld>
+</file>
+
+<file path=ppt/slides/slide60.xml><?xml version="1.0" encoding="utf-8"?>
+<p:sld xmlns:a="http://schemas.openxmlformats.org/drawingml/2006/main" xmlns:r="http://schemas.openxmlformats.org/officeDocument/2006/relationships" xmlns:p="http://schemas.openxmlformats.org/presentationml/2006/main">
+  <p:cSld name="Slide 60">
+    <p:bg>
+      <p:bgPr>
+        <a:solidFill>
+          <a:srgbClr val="ECE3D4"/>
+        </a:solidFill>
+      </p:bgPr>
+    </p:bg>
+    <p:spTree>
+      <p:nvGrpSpPr>
+        <p:cNvPr id="1" name=""/>
+        <p:cNvGrpSpPr/>
+        <p:nvPr/>
+      </p:nvGrpSpPr>
+      <p:grpSpPr>
+        <a:xfrm>
+          <a:off x="0" y="0"/>
+          <a:ext cx="0" cy="0"/>
+          <a:chOff x="0" y="0"/>
+          <a:chExt cx="0" cy="0"/>
+        </a:xfrm>
+      </p:grpSpPr>
+      <p:sp>
+        <p:nvSpPr>
+          <p:cNvPr id="2" name="Text 0"/>
+          <p:cNvSpPr txBox="1"/>
+          <p:nvPr/>
+        </p:nvSpPr>
+        <p:spPr>
+          <a:xfrm>
+            <a:off x="731520" y="310896"/>
+            <a:ext cx="10728655" cy="318577"/>
+          </a:xfrm>
+          <a:prstGeom prst="rect">
+            <a:avLst/>
+          </a:prstGeom>
+          <a:noFill/>
+          <a:ln/>
+        </p:spPr>
+        <p:txBody>
+          <a:bodyPr wrap="square" lIns="0" tIns="0" rIns="0" bIns="0" rtlCol="0" anchor="ctr"/>
+          <a:lstStyle/>
+          <a:p>
+            <a:pPr algn="l" indent="0" marL="0">
+              <a:buNone/>
+            </a:pPr>
+            <a:r>
+              <a:rPr lang="en-US" sz="1100" b="1" spc="200" kern="0" dirty="0">
+                <a:solidFill>
+                  <a:srgbClr val="9C5446"/>
+                </a:solidFill>
+                <a:latin typeface="游ゴシック" pitchFamily="34" charset="0"/>
+                <a:ea typeface="游ゴシック" pitchFamily="34" charset="-122"/>
+                <a:cs typeface="游ゴシック" pitchFamily="34" charset="-120"/>
+              </a:rPr>
+              <a:t>続けるために</a:t>
+            </a:r>
+            <a:endParaRPr lang="en-US" sz="1100" dirty="0"/>
+          </a:p>
+        </p:txBody>
+      </p:sp>
+      <p:sp>
+        <p:nvSpPr>
+          <p:cNvPr id="3" name="Text 1"/>
+          <p:cNvSpPr txBox="1"/>
+          <p:nvPr/>
+        </p:nvSpPr>
+        <p:spPr>
+          <a:xfrm>
+            <a:off x="731520" y="653979"/>
+            <a:ext cx="10728655" cy="1286561"/>
+          </a:xfrm>
+          <a:prstGeom prst="rect">
+            <a:avLst/>
+          </a:prstGeom>
+          <a:noFill/>
+          <a:ln/>
+        </p:spPr>
+        <p:txBody>
+          <a:bodyPr wrap="square" lIns="0" tIns="0" rIns="0" bIns="0" rtlCol="0" anchor="ctr"/>
+          <a:lstStyle/>
+          <a:p>
+            <a:pPr algn="l" indent="0" marL="0">
+              <a:lnSpc>
+                <a:spcPts val="4200"/>
+              </a:lnSpc>
+              <a:buNone/>
+            </a:pPr>
+            <a:r>
+              <a:rPr lang="en-US" sz="3200" b="1" dirty="0">
+                <a:solidFill>
+                  <a:srgbClr val="2B2620"/>
+                </a:solidFill>
+                <a:latin typeface="游明朝" pitchFamily="34" charset="0"/>
+                <a:ea typeface="游明朝" pitchFamily="34" charset="-122"/>
+                <a:cs typeface="游明朝" pitchFamily="34" charset="-120"/>
+              </a:rPr>
+              <a:t>1対1で伴走してほしい方へ</a:t>
+            </a:r>
+            <a:endParaRPr lang="en-US" sz="3200" dirty="0"/>
+          </a:p>
+        </p:txBody>
+      </p:sp>
+      <p:sp>
+        <p:nvSpPr>
+          <p:cNvPr id="4" name="Shape 2"/>
+          <p:cNvSpPr/>
+          <p:nvPr/>
+        </p:nvSpPr>
+        <p:spPr>
+          <a:xfrm>
+            <a:off x="731520" y="2406152"/>
+            <a:ext cx="10728655" cy="3369564"/>
+          </a:xfrm>
+          <a:prstGeom prst="roundRect">
+            <a:avLst>
+              <a:gd name="adj" fmla="val 2714"/>
+            </a:avLst>
+          </a:prstGeom>
+          <a:solidFill>
+            <a:srgbClr val="FCFAF4"/>
+          </a:solidFill>
+          <a:ln/>
+          <a:effectLst>
+            <a:outerShdw sx="100000" sy="100000" kx="0" ky="0" algn="bl" rotWithShape="0" blurRad="127000" dist="508" dir="5400000">
+              <a:srgbClr val="8C7F6E">
+                <a:alpha val="25000"/>
+              </a:srgbClr>
+            </a:outerShdw>
+          </a:effectLst>
+        </p:spPr>
+      </p:sp>
+      <p:sp>
+        <p:nvSpPr>
+          <p:cNvPr id="5" name="Text 3"/>
+          <p:cNvSpPr txBox="1"/>
+          <p:nvPr/>
+        </p:nvSpPr>
+        <p:spPr>
+          <a:xfrm>
+            <a:off x="1234440" y="2773741"/>
+            <a:ext cx="3657600" cy="735178"/>
+          </a:xfrm>
+          <a:prstGeom prst="rect">
+            <a:avLst/>
+          </a:prstGeom>
+          <a:noFill/>
+          <a:ln/>
+        </p:spPr>
+        <p:txBody>
+          <a:bodyPr wrap="square" lIns="0" tIns="0" rIns="0" bIns="0" rtlCol="0" anchor="ctr"/>
+          <a:lstStyle/>
+          <a:p>
+            <a:pPr indent="0" marL="0">
+              <a:buNone/>
+            </a:pPr>
+            <a:r>
+              <a:rPr lang="en-US" sz="2800" b="1" dirty="0">
+                <a:solidFill>
+                  <a:srgbClr val="2B2620"/>
+                </a:solidFill>
+                <a:latin typeface="游明朝" pitchFamily="34" charset="0"/>
+                <a:ea typeface="游明朝" pitchFamily="34" charset="-122"/>
+                <a:cs typeface="游明朝" pitchFamily="34" charset="-120"/>
+              </a:rPr>
+              <a:t>ここちはり</a:t>
+            </a:r>
+            <a:endParaRPr lang="en-US" sz="2800" dirty="0"/>
+          </a:p>
+        </p:txBody>
+      </p:sp>
+      <p:sp>
+        <p:nvSpPr>
+          <p:cNvPr id="6" name="Text 4"/>
+          <p:cNvSpPr txBox="1"/>
+          <p:nvPr/>
+        </p:nvSpPr>
+        <p:spPr>
+          <a:xfrm>
+            <a:off x="1234440" y="3570183"/>
+            <a:ext cx="5029200" cy="490118"/>
+          </a:xfrm>
+          <a:prstGeom prst="rect">
+            <a:avLst/>
+          </a:prstGeom>
+          <a:noFill/>
+          <a:ln/>
+        </p:spPr>
+        <p:txBody>
+          <a:bodyPr wrap="square" lIns="0" tIns="0" rIns="0" bIns="0" rtlCol="0" anchor="ctr"/>
+          <a:lstStyle/>
+          <a:p>
+            <a:pPr indent="0" marL="0">
+              <a:buNone/>
+            </a:pPr>
+            <a:r>
+              <a:rPr lang="en-US" sz="1300" dirty="0">
+                <a:solidFill>
+                  <a:srgbClr val="7A6E60"/>
+                </a:solidFill>
+                <a:latin typeface="游ゴシック" pitchFamily="34" charset="0"/>
+                <a:ea typeface="游ゴシック" pitchFamily="34" charset="-122"/>
+                <a:cs typeface="游ゴシック" pitchFamily="34" charset="-120"/>
+              </a:rPr>
+              <a:t>施術者育成・コンサル／2025年11月開始</a:t>
+            </a:r>
+            <a:endParaRPr lang="en-US" sz="1300" dirty="0"/>
+          </a:p>
+        </p:txBody>
+      </p:sp>
+      <p:sp>
+        <p:nvSpPr>
+          <p:cNvPr id="7" name="Shape 5"/>
+          <p:cNvSpPr/>
+          <p:nvPr/>
+        </p:nvSpPr>
+        <p:spPr>
+          <a:xfrm>
+            <a:off x="1234440" y="4453037"/>
+            <a:ext cx="868680" cy="868680"/>
+          </a:xfrm>
+          <a:prstGeom prst="ellipse">
+            <a:avLst/>
+          </a:prstGeom>
+          <a:solidFill>
+            <a:srgbClr val="9C5446"/>
+          </a:solidFill>
+          <a:ln/>
+        </p:spPr>
+      </p:sp>
+      <p:sp>
+        <p:nvSpPr>
+          <p:cNvPr id="8" name="Text 6"/>
+          <p:cNvSpPr txBox="1"/>
+          <p:nvPr/>
+        </p:nvSpPr>
+        <p:spPr>
+          <a:xfrm>
+            <a:off x="1234440" y="4305361"/>
+            <a:ext cx="868680" cy="1164031"/>
+          </a:xfrm>
+          <a:prstGeom prst="rect">
+            <a:avLst/>
+          </a:prstGeom>
+          <a:noFill/>
+          <a:ln/>
+        </p:spPr>
+        <p:txBody>
+          <a:bodyPr wrap="square" lIns="0" tIns="0" rIns="0" bIns="0" rtlCol="0" anchor="ctr"/>
+          <a:lstStyle/>
+          <a:p>
+            <a:pPr algn="ctr" indent="0" marL="0">
+              <a:buNone/>
+            </a:pPr>
+            <a:r>
+              <a:rPr lang="en-US" sz="1500" b="1" dirty="0">
+                <a:solidFill>
+                  <a:srgbClr val="FCFAF4"/>
+                </a:solidFill>
+                <a:latin typeface="游明朝" pitchFamily="34" charset="0"/>
+                <a:ea typeface="游明朝" pitchFamily="34" charset="-122"/>
+                <a:cs typeface="游明朝" pitchFamily="34" charset="-120"/>
+              </a:rPr>
+              <a:t>感情</a:t>
+            </a:r>
+            <a:endParaRPr lang="en-US" sz="1500" dirty="0"/>
+          </a:p>
+        </p:txBody>
+      </p:sp>
+      <p:sp>
+        <p:nvSpPr>
+          <p:cNvPr id="9" name="Shape 7"/>
+          <p:cNvSpPr/>
+          <p:nvPr/>
+        </p:nvSpPr>
+        <p:spPr>
+          <a:xfrm>
+            <a:off x="2286000" y="4453037"/>
+            <a:ext cx="868680" cy="868680"/>
+          </a:xfrm>
+          <a:prstGeom prst="ellipse">
+            <a:avLst/>
+          </a:prstGeom>
+          <a:solidFill>
+            <a:srgbClr val="5E7060"/>
+          </a:solidFill>
+          <a:ln/>
+        </p:spPr>
+      </p:sp>
+      <p:sp>
+        <p:nvSpPr>
+          <p:cNvPr id="10" name="Text 8"/>
+          <p:cNvSpPr txBox="1"/>
+          <p:nvPr/>
+        </p:nvSpPr>
+        <p:spPr>
+          <a:xfrm>
+            <a:off x="2286000" y="4305361"/>
+            <a:ext cx="868680" cy="1164031"/>
+          </a:xfrm>
+          <a:prstGeom prst="rect">
+            <a:avLst/>
+          </a:prstGeom>
+          <a:noFill/>
+          <a:ln/>
+        </p:spPr>
+        <p:txBody>
+          <a:bodyPr wrap="square" lIns="0" tIns="0" rIns="0" bIns="0" rtlCol="0" anchor="ctr"/>
+          <a:lstStyle/>
+          <a:p>
+            <a:pPr algn="ctr" indent="0" marL="0">
+              <a:buNone/>
+            </a:pPr>
+            <a:r>
+              <a:rPr lang="en-US" sz="1500" b="1" dirty="0">
+                <a:solidFill>
+                  <a:srgbClr val="FCFAF4"/>
+                </a:solidFill>
+                <a:latin typeface="游明朝" pitchFamily="34" charset="0"/>
+                <a:ea typeface="游明朝" pitchFamily="34" charset="-122"/>
+                <a:cs typeface="游明朝" pitchFamily="34" charset="-120"/>
+              </a:rPr>
+              <a:t>心</a:t>
+            </a:r>
+            <a:endParaRPr lang="en-US" sz="1500" dirty="0"/>
+          </a:p>
+        </p:txBody>
+      </p:sp>
+      <p:sp>
+        <p:nvSpPr>
+          <p:cNvPr id="11" name="Shape 9"/>
+          <p:cNvSpPr/>
+          <p:nvPr/>
+        </p:nvSpPr>
+        <p:spPr>
+          <a:xfrm>
+            <a:off x="3337560" y="4453037"/>
+            <a:ext cx="868680" cy="868680"/>
+          </a:xfrm>
+          <a:prstGeom prst="ellipse">
+            <a:avLst/>
+          </a:prstGeom>
+          <a:solidFill>
+            <a:srgbClr val="9C5446"/>
+          </a:solidFill>
+          <a:ln/>
+        </p:spPr>
+      </p:sp>
+      <p:sp>
+        <p:nvSpPr>
+          <p:cNvPr id="12" name="Text 10"/>
+          <p:cNvSpPr txBox="1"/>
+          <p:nvPr/>
+        </p:nvSpPr>
+        <p:spPr>
+          <a:xfrm>
+            <a:off x="3337560" y="4305361"/>
+            <a:ext cx="868680" cy="1164031"/>
+          </a:xfrm>
+          <a:prstGeom prst="rect">
+            <a:avLst/>
+          </a:prstGeom>
+          <a:noFill/>
+          <a:ln/>
+        </p:spPr>
+        <p:txBody>
+          <a:bodyPr wrap="square" lIns="0" tIns="0" rIns="0" bIns="0" rtlCol="0" anchor="ctr"/>
+          <a:lstStyle/>
+          <a:p>
+            <a:pPr algn="ctr" indent="0" marL="0">
+              <a:buNone/>
+            </a:pPr>
+            <a:r>
+              <a:rPr lang="en-US" sz="1500" b="1" dirty="0">
+                <a:solidFill>
+                  <a:srgbClr val="FCFAF4"/>
+                </a:solidFill>
+                <a:latin typeface="游明朝" pitchFamily="34" charset="0"/>
+                <a:ea typeface="游明朝" pitchFamily="34" charset="-122"/>
+                <a:cs typeface="游明朝" pitchFamily="34" charset="-120"/>
+              </a:rPr>
+              <a:t>身体</a:t>
+            </a:r>
+            <a:endParaRPr lang="en-US" sz="1500" dirty="0"/>
+          </a:p>
+        </p:txBody>
+      </p:sp>
+      <p:sp>
+        <p:nvSpPr>
+          <p:cNvPr id="13" name="Shape 11"/>
+          <p:cNvSpPr/>
+          <p:nvPr/>
+        </p:nvSpPr>
+        <p:spPr>
+          <a:xfrm>
+            <a:off x="4389120" y="4453037"/>
+            <a:ext cx="868680" cy="868680"/>
+          </a:xfrm>
+          <a:prstGeom prst="ellipse">
+            <a:avLst/>
+          </a:prstGeom>
+          <a:solidFill>
+            <a:srgbClr val="5E7060"/>
+          </a:solidFill>
+          <a:ln/>
+        </p:spPr>
+      </p:sp>
+      <p:sp>
+        <p:nvSpPr>
+          <p:cNvPr id="14" name="Text 12"/>
+          <p:cNvSpPr txBox="1"/>
+          <p:nvPr/>
+        </p:nvSpPr>
+        <p:spPr>
+          <a:xfrm>
+            <a:off x="4389120" y="4305361"/>
+            <a:ext cx="868680" cy="1164031"/>
+          </a:xfrm>
+          <a:prstGeom prst="rect">
+            <a:avLst/>
+          </a:prstGeom>
+          <a:noFill/>
+          <a:ln/>
+        </p:spPr>
+        <p:txBody>
+          <a:bodyPr wrap="square" lIns="0" tIns="0" rIns="0" bIns="0" rtlCol="0" anchor="ctr"/>
+          <a:lstStyle/>
+          <a:p>
+            <a:pPr algn="ctr" indent="0" marL="0">
+              <a:buNone/>
+            </a:pPr>
+            <a:r>
+              <a:rPr lang="en-US" sz="1500" b="1" dirty="0">
+                <a:solidFill>
+                  <a:srgbClr val="FCFAF4"/>
+                </a:solidFill>
+                <a:latin typeface="游明朝" pitchFamily="34" charset="0"/>
+                <a:ea typeface="游明朝" pitchFamily="34" charset="-122"/>
+                <a:cs typeface="游明朝" pitchFamily="34" charset="-120"/>
+              </a:rPr>
+              <a:t>技術</a:t>
+            </a:r>
+            <a:endParaRPr lang="en-US" sz="1500" dirty="0"/>
+          </a:p>
+        </p:txBody>
+      </p:sp>
+      <p:sp>
+        <p:nvSpPr>
+          <p:cNvPr id="15" name="Text 13"/>
+          <p:cNvSpPr txBox="1"/>
+          <p:nvPr/>
+        </p:nvSpPr>
+        <p:spPr>
+          <a:xfrm>
+            <a:off x="5852160" y="4244096"/>
+            <a:ext cx="5059375" cy="1347826"/>
+          </a:xfrm>
+          <a:prstGeom prst="rect">
+            <a:avLst/>
+          </a:prstGeom>
+          <a:noFill/>
+          <a:ln/>
+        </p:spPr>
+        <p:txBody>
+          <a:bodyPr wrap="square" lIns="0" tIns="0" rIns="0" bIns="0" rtlCol="0" anchor="t"/>
+          <a:lstStyle/>
+          <a:p>
+            <a:pPr algn="l" indent="0" marL="0">
+              <a:lnSpc>
+                <a:spcPts val="2700"/>
+              </a:lnSpc>
+              <a:buNone/>
+            </a:pPr>
+            <a:r>
+              <a:rPr lang="en-US" sz="1500" dirty="0">
+                <a:solidFill>
+                  <a:srgbClr val="2B2620"/>
+                </a:solidFill>
+                <a:latin typeface="游ゴシック" pitchFamily="34" charset="0"/>
+                <a:ea typeface="游ゴシック" pitchFamily="34" charset="-122"/>
+                <a:cs typeface="游ゴシック" pitchFamily="34" charset="-120"/>
+              </a:rPr>
+              <a:t>この4つの軸で、あなたの臨床を一緒に見ていきます。</a:t>
+            </a:r>
+            <a:endParaRPr lang="en-US" sz="1500" dirty="0"/>
+          </a:p>
+          <a:p>
+            <a:pPr algn="l" indent="0" marL="0">
+              <a:lnSpc>
+                <a:spcPts val="2700"/>
+              </a:lnSpc>
+              <a:buNone/>
+            </a:pPr>
+            <a:r>
+              <a:rPr lang="en-US" sz="1500" dirty="0">
+                <a:solidFill>
+                  <a:srgbClr val="2B2620"/>
+                </a:solidFill>
+                <a:latin typeface="游ゴシック" pitchFamily="34" charset="0"/>
+                <a:ea typeface="游ゴシック" pitchFamily="34" charset="-122"/>
+                <a:cs typeface="游ゴシック" pitchFamily="34" charset="-120"/>
+              </a:rPr>
+              <a:t>症例データベースも、公開して運用しています。</a:t>
+            </a:r>
+            <a:endParaRPr lang="en-US" sz="1500" dirty="0"/>
+          </a:p>
+        </p:txBody>
+      </p:sp>
+      <p:sp>
+        <p:nvSpPr>
+          <p:cNvPr id="16" name="Text 14"/>
+          <p:cNvSpPr txBox="1"/>
+          <p:nvPr/>
+        </p:nvSpPr>
+        <p:spPr>
+          <a:xfrm>
+            <a:off x="11414455" y="6400800"/>
+            <a:ext cx="457200" cy="274320"/>
+          </a:xfrm>
+          <a:prstGeom prst="rect">
+            <a:avLst/>
+          </a:prstGeom>
+          <a:noFill/>
+          <a:ln/>
+        </p:spPr>
+        <p:txBody>
+          <a:bodyPr wrap="square" lIns="0" tIns="0" rIns="0" bIns="0" rtlCol="0" anchor="ctr"/>
+          <a:lstStyle/>
+          <a:p>
+            <a:pPr algn="r" indent="0" marL="0">
+              <a:buNone/>
+            </a:pPr>
+            <a:r>
+              <a:rPr lang="en-US" sz="1000" dirty="0">
+                <a:solidFill>
+                  <a:srgbClr val="B7A991"/>
+                </a:solidFill>
+                <a:latin typeface="游ゴシック" pitchFamily="34" charset="0"/>
+                <a:ea typeface="游ゴシック" pitchFamily="34" charset="-122"/>
+                <a:cs typeface="游ゴシック" pitchFamily="34" charset="-120"/>
+              </a:rPr>
+              <a:t>60</a:t>
+            </a:r>
+            <a:endParaRPr lang="en-US" sz="1000" dirty="0"/>
+          </a:p>
+        </p:txBody>
+      </p:sp>
+    </p:spTree>
+  </p:cSld>
+  <p:clrMapOvr>
+    <a:masterClrMapping/>
+  </p:clrMapOvr>
+</p:sld>
+</file>
+
+<file path=ppt/slides/slide61.xml><?xml version="1.0" encoding="utf-8"?>
+<p:sld xmlns:a="http://schemas.openxmlformats.org/drawingml/2006/main" xmlns:r="http://schemas.openxmlformats.org/officeDocument/2006/relationships" xmlns:p="http://schemas.openxmlformats.org/presentationml/2006/main">
+  <p:cSld name="Slide 61">
+    <p:bg>
+      <p:bgPr>
+        <a:solidFill>
+          <a:srgbClr val="2B2620"/>
+        </a:solidFill>
+      </p:bgPr>
+    </p:bg>
+    <p:spTree>
+      <p:nvGrpSpPr>
+        <p:cNvPr id="1" name=""/>
+        <p:cNvGrpSpPr/>
+        <p:nvPr/>
+      </p:nvGrpSpPr>
+      <p:grpSpPr>
+        <a:xfrm>
+          <a:off x="0" y="0"/>
+          <a:ext cx="0" cy="0"/>
+          <a:chOff x="0" y="0"/>
+          <a:chExt cx="0" cy="0"/>
+        </a:xfrm>
+      </p:grpSpPr>
+      <p:sp>
+        <p:nvSpPr>
+          <p:cNvPr id="2" name="Text 0"/>
+          <p:cNvSpPr txBox="1"/>
+          <p:nvPr/>
+        </p:nvSpPr>
+        <p:spPr>
+          <a:xfrm>
+            <a:off x="731520" y="1897380"/>
+            <a:ext cx="10728655" cy="548640"/>
+          </a:xfrm>
+          <a:prstGeom prst="rect">
+            <a:avLst/>
+          </a:prstGeom>
+          <a:noFill/>
+          <a:ln/>
+        </p:spPr>
+        <p:txBody>
+          <a:bodyPr wrap="square" lIns="0" tIns="0" rIns="0" bIns="0" rtlCol="0" anchor="ctr"/>
+          <a:lstStyle/>
+          <a:p>
+            <a:pPr indent="0" marL="0">
+              <a:buNone/>
+            </a:pPr>
+            <a:r>
+              <a:rPr lang="en-US" sz="1800" dirty="0">
+                <a:solidFill>
+                  <a:srgbClr val="A2937F"/>
+                </a:solidFill>
+                <a:latin typeface="游ゴシック" pitchFamily="34" charset="0"/>
+                <a:ea typeface="游ゴシック" pitchFamily="34" charset="-122"/>
+                <a:cs typeface="游ゴシック" pitchFamily="34" charset="-120"/>
+              </a:rPr>
+              <a:t>今日、ひとつだけ持ち帰るなら</a:t>
+            </a:r>
+            <a:endParaRPr lang="en-US" sz="1800" dirty="0"/>
+          </a:p>
+        </p:txBody>
+      </p:sp>
+      <p:sp>
+        <p:nvSpPr>
+          <p:cNvPr id="3" name="Shape 1"/>
+          <p:cNvSpPr/>
+          <p:nvPr/>
+        </p:nvSpPr>
+        <p:spPr>
+          <a:xfrm>
+            <a:off x="731520" y="2628900"/>
+            <a:ext cx="10728655" cy="1600200"/>
+          </a:xfrm>
+          <a:prstGeom prst="roundRect">
+            <a:avLst>
+              <a:gd name="adj" fmla="val 6857"/>
+            </a:avLst>
+          </a:prstGeom>
+          <a:solidFill>
+            <a:srgbClr val="9C5446"/>
+          </a:solidFill>
+          <a:ln/>
+        </p:spPr>
+      </p:sp>
+      <p:sp>
+        <p:nvSpPr>
+          <p:cNvPr id="4" name="Text 2"/>
+          <p:cNvSpPr txBox="1"/>
+          <p:nvPr/>
+        </p:nvSpPr>
+        <p:spPr>
+          <a:xfrm>
+            <a:off x="731520" y="2628900"/>
+            <a:ext cx="10728655" cy="1600200"/>
+          </a:xfrm>
+          <a:prstGeom prst="rect">
+            <a:avLst/>
+          </a:prstGeom>
+          <a:noFill/>
+          <a:ln/>
+        </p:spPr>
+        <p:txBody>
+          <a:bodyPr wrap="square" lIns="0" tIns="0" rIns="0" bIns="0" rtlCol="0" anchor="ctr"/>
+          <a:lstStyle/>
+          <a:p>
+            <a:pPr algn="ctr" indent="0" marL="0">
+              <a:buNone/>
+            </a:pPr>
+            <a:r>
+              <a:rPr lang="en-US" sz="4200" b="1" dirty="0">
+                <a:solidFill>
+                  <a:srgbClr val="FFFFFF"/>
+                </a:solidFill>
+                <a:latin typeface="游明朝" pitchFamily="34" charset="0"/>
+                <a:ea typeface="游明朝" pitchFamily="34" charset="-122"/>
+                <a:cs typeface="游明朝" pitchFamily="34" charset="-120"/>
+              </a:rPr>
+              <a:t>最初の90秒、遮らない。</a:t>
+            </a:r>
+            <a:endParaRPr lang="en-US" sz="4200" dirty="0"/>
+          </a:p>
+        </p:txBody>
+      </p:sp>
+      <p:sp>
+        <p:nvSpPr>
+          <p:cNvPr id="5" name="Text 3"/>
+          <p:cNvSpPr txBox="1"/>
+          <p:nvPr/>
+        </p:nvSpPr>
+        <p:spPr>
+          <a:xfrm>
+            <a:off x="731520" y="4503420"/>
+            <a:ext cx="10728655" cy="457200"/>
+          </a:xfrm>
+          <a:prstGeom prst="rect">
+            <a:avLst/>
+          </a:prstGeom>
+          <a:noFill/>
+          <a:ln/>
+        </p:spPr>
+        <p:txBody>
+          <a:bodyPr wrap="square" lIns="0" tIns="0" rIns="0" bIns="0" rtlCol="0" anchor="ctr"/>
+          <a:lstStyle/>
+          <a:p>
+            <a:pPr algn="ctr" indent="0" marL="0">
+              <a:buNone/>
+            </a:pPr>
+            <a:r>
+              <a:rPr lang="en-US" sz="1800" dirty="0">
+                <a:solidFill>
+                  <a:srgbClr val="ECE3D4"/>
+                </a:solidFill>
+                <a:latin typeface="游ゴシック" pitchFamily="34" charset="0"/>
+                <a:ea typeface="游ゴシック" pitchFamily="34" charset="-122"/>
+                <a:cs typeface="游ゴシック" pitchFamily="34" charset="-120"/>
+              </a:rPr>
+              <a:t>これだけです。明日の、1人目からできます。</a:t>
+            </a:r>
+            <a:endParaRPr lang="en-US" sz="1800" dirty="0"/>
+          </a:p>
+        </p:txBody>
+      </p:sp>
+      <p:sp>
+        <p:nvSpPr>
+          <p:cNvPr id="6" name="Text 4"/>
+          <p:cNvSpPr txBox="1"/>
+          <p:nvPr/>
+        </p:nvSpPr>
+        <p:spPr>
+          <a:xfrm>
+            <a:off x="11414455" y="6400800"/>
+            <a:ext cx="457200" cy="274320"/>
+          </a:xfrm>
+          <a:prstGeom prst="rect">
+            <a:avLst/>
+          </a:prstGeom>
+          <a:noFill/>
+          <a:ln/>
+        </p:spPr>
+        <p:txBody>
+          <a:bodyPr wrap="square" lIns="0" tIns="0" rIns="0" bIns="0" rtlCol="0" anchor="ctr"/>
+          <a:lstStyle/>
+          <a:p>
+            <a:pPr algn="r" indent="0" marL="0">
+              <a:buNone/>
+            </a:pPr>
+            <a:r>
+              <a:rPr lang="en-US" sz="1000" dirty="0">
+                <a:solidFill>
+                  <a:srgbClr val="6B5F51"/>
+                </a:solidFill>
+                <a:latin typeface="游ゴシック" pitchFamily="34" charset="0"/>
+                <a:ea typeface="游ゴシック" pitchFamily="34" charset="-122"/>
+                <a:cs typeface="游ゴシック" pitchFamily="34" charset="-120"/>
+              </a:rPr>
+              <a:t>61</a:t>
+            </a:r>
+            <a:endParaRPr lang="en-US" sz="1000" dirty="0"/>
+          </a:p>
+        </p:txBody>
+      </p:sp>
+    </p:spTree>
+  </p:cSld>
+  <p:clrMapOvr>
+    <a:masterClrMapping/>
+  </p:clrMapOvr>
+</p:sld>
+</file>
+
+<file path=ppt/slides/slide62.xml><?xml version="1.0" encoding="utf-8"?>
+<p:sld xmlns:a="http://schemas.openxmlformats.org/drawingml/2006/main" xmlns:r="http://schemas.openxmlformats.org/officeDocument/2006/relationships" xmlns:p="http://schemas.openxmlformats.org/presentationml/2006/main">
+  <p:cSld name="Slide 62">
+    <p:bg>
+      <p:bgPr>
+        <a:solidFill>
+          <a:srgbClr val="2B2620"/>
+        </a:solidFill>
+      </p:bgPr>
+    </p:bg>
+    <p:spTree>
+      <p:nvGrpSpPr>
+        <p:cNvPr id="1" name=""/>
+        <p:cNvGrpSpPr/>
+        <p:nvPr/>
+      </p:nvGrpSpPr>
+      <p:grpSpPr>
+        <a:xfrm>
+          <a:off x="0" y="0"/>
+          <a:ext cx="0" cy="0"/>
+          <a:chOff x="0" y="0"/>
+          <a:chExt cx="0" cy="0"/>
+        </a:xfrm>
+      </p:grpSpPr>
+      <p:sp>
+        <p:nvSpPr>
+          <p:cNvPr id="2" name="Shape 0"/>
+          <p:cNvSpPr/>
+          <p:nvPr/>
+        </p:nvSpPr>
+        <p:spPr>
+          <a:xfrm>
+            <a:off x="4297680" y="558146"/>
+            <a:ext cx="5760720" cy="5760720"/>
+          </a:xfrm>
+          <a:prstGeom prst="ellipse">
+            <a:avLst/>
+          </a:prstGeom>
+          <a:solidFill>
+            <a:srgbClr val="342F28"/>
+          </a:solidFill>
+          <a:ln/>
+        </p:spPr>
+      </p:sp>
+      <p:sp>
+        <p:nvSpPr>
+          <p:cNvPr id="3" name="Text 1"/>
+          <p:cNvSpPr txBox="1"/>
+          <p:nvPr/>
+        </p:nvSpPr>
+        <p:spPr>
+          <a:xfrm>
+            <a:off x="1371600" y="2108584"/>
+            <a:ext cx="9418320" cy="1742657"/>
+          </a:xfrm>
+          <a:prstGeom prst="rect">
+            <a:avLst/>
+          </a:prstGeom>
+          <a:noFill/>
+          <a:ln/>
+        </p:spPr>
+        <p:txBody>
+          <a:bodyPr wrap="square" lIns="0" tIns="0" rIns="0" bIns="0" rtlCol="0" anchor="ctr"/>
+          <a:lstStyle/>
+          <a:p>
+            <a:pPr algn="ctr" indent="0" marL="0">
+              <a:lnSpc>
+                <a:spcPts val="6600"/>
+              </a:lnSpc>
+              <a:buNone/>
+            </a:pPr>
+            <a:r>
+              <a:rPr lang="en-US" sz="4000" b="1" dirty="0">
+                <a:solidFill>
+                  <a:srgbClr val="ECE3D4"/>
+                </a:solidFill>
+                <a:latin typeface="游明朝" pitchFamily="34" charset="0"/>
+                <a:ea typeface="游明朝" pitchFamily="34" charset="-122"/>
+                <a:cs typeface="游明朝" pitchFamily="34" charset="-120"/>
+              </a:rPr>
+              <a:t>経絡に触れ、</a:t>
+            </a:r>
+            <a:endParaRPr lang="en-US" sz="4000" dirty="0"/>
+          </a:p>
+          <a:p>
+            <a:pPr algn="ctr" indent="0" marL="0">
+              <a:lnSpc>
+                <a:spcPts val="6600"/>
+              </a:lnSpc>
+              <a:buNone/>
+            </a:pPr>
+            <a:r>
+              <a:rPr lang="en-US" sz="4000" b="1" dirty="0">
+                <a:solidFill>
+                  <a:srgbClr val="ECE3D4"/>
+                </a:solidFill>
+                <a:latin typeface="游明朝" pitchFamily="34" charset="0"/>
+                <a:ea typeface="游明朝" pitchFamily="34" charset="-122"/>
+                <a:cs typeface="游明朝" pitchFamily="34" charset="-120"/>
+              </a:rPr>
+              <a:t>こころに耳を傾ける。</a:t>
+            </a:r>
+            <a:endParaRPr lang="en-US" sz="4000" dirty="0"/>
+          </a:p>
+        </p:txBody>
+      </p:sp>
+      <p:sp>
+        <p:nvSpPr>
+          <p:cNvPr id="4" name="Text 2"/>
+          <p:cNvSpPr txBox="1"/>
+          <p:nvPr/>
+        </p:nvSpPr>
+        <p:spPr>
+          <a:xfrm>
+            <a:off x="1371600" y="4126397"/>
+            <a:ext cx="9418320" cy="550313"/>
+          </a:xfrm>
+          <a:prstGeom prst="rect">
+            <a:avLst/>
+          </a:prstGeom>
+          <a:noFill/>
+          <a:ln/>
+        </p:spPr>
+        <p:txBody>
+          <a:bodyPr wrap="square" lIns="0" tIns="0" rIns="0" bIns="0" rtlCol="0" anchor="ctr"/>
+          <a:lstStyle/>
+          <a:p>
+            <a:pPr algn="ctr" indent="0" marL="0">
+              <a:buNone/>
+            </a:pPr>
+            <a:r>
+              <a:rPr lang="en-US" sz="2200" b="1" dirty="0">
+                <a:solidFill>
+                  <a:srgbClr val="9C5446"/>
+                </a:solidFill>
+                <a:latin typeface="游明朝" pitchFamily="34" charset="0"/>
+                <a:ea typeface="游明朝" pitchFamily="34" charset="-122"/>
+                <a:cs typeface="游明朝" pitchFamily="34" charset="-120"/>
+              </a:rPr>
+              <a:t>それが、私たちの持っているチカラです。</a:t>
+            </a:r>
+            <a:endParaRPr lang="en-US" sz="2200" dirty="0"/>
+          </a:p>
+        </p:txBody>
+      </p:sp>
+      <p:sp>
+        <p:nvSpPr>
+          <p:cNvPr id="5" name="Text 3"/>
+          <p:cNvSpPr txBox="1"/>
+          <p:nvPr/>
+        </p:nvSpPr>
+        <p:spPr>
+          <a:xfrm>
+            <a:off x="11414455" y="6400800"/>
+            <a:ext cx="457200" cy="274320"/>
+          </a:xfrm>
+          <a:prstGeom prst="rect">
+            <a:avLst/>
+          </a:prstGeom>
+          <a:noFill/>
+          <a:ln/>
+        </p:spPr>
+        <p:txBody>
+          <a:bodyPr wrap="square" lIns="0" tIns="0" rIns="0" bIns="0" rtlCol="0" anchor="ctr"/>
+          <a:lstStyle/>
+          <a:p>
+            <a:pPr algn="r" indent="0" marL="0">
+              <a:buNone/>
+            </a:pPr>
+            <a:r>
+              <a:rPr lang="en-US" sz="1000" dirty="0">
+                <a:solidFill>
+                  <a:srgbClr val="6B5F51"/>
+                </a:solidFill>
+                <a:latin typeface="游ゴシック" pitchFamily="34" charset="0"/>
+                <a:ea typeface="游ゴシック" pitchFamily="34" charset="-122"/>
+                <a:cs typeface="游ゴシック" pitchFamily="34" charset="-120"/>
+              </a:rPr>
+              <a:t>62</a:t>
+            </a:r>
+            <a:endParaRPr lang="en-US" sz="1000" dirty="0"/>
+          </a:p>
+        </p:txBody>
+      </p:sp>
+    </p:spTree>
+  </p:cSld>
+  <p:clrMapOvr>
+    <a:masterClrMapping/>
+  </p:clrMapOvr>
+</p:sld>
+</file>
+
+<file path=ppt/slides/slide63.xml><?xml version="1.0" encoding="utf-8"?>
+<p:sld xmlns:a="http://schemas.openxmlformats.org/drawingml/2006/main" xmlns:r="http://schemas.openxmlformats.org/officeDocument/2006/relationships" xmlns:p="http://schemas.openxmlformats.org/presentationml/2006/main">
+  <p:cSld name="Slide 63">
+    <p:bg>
+      <p:bgPr>
+        <a:solidFill>
+          <a:srgbClr val="ECE3D4"/>
+        </a:solidFill>
+      </p:bgPr>
+    </p:bg>
+    <p:spTree>
+      <p:nvGrpSpPr>
+        <p:cNvPr id="1" name=""/>
+        <p:cNvGrpSpPr/>
+        <p:nvPr/>
+      </p:nvGrpSpPr>
+      <p:grpSpPr>
+        <a:xfrm>
+          <a:off x="0" y="0"/>
+          <a:ext cx="0" cy="0"/>
+          <a:chOff x="0" y="0"/>
+          <a:chExt cx="0" cy="0"/>
+        </a:xfrm>
+      </p:grpSpPr>
+      <p:sp>
+        <p:nvSpPr>
+          <p:cNvPr id="2" name="Text 0"/>
+          <p:cNvSpPr txBox="1"/>
+          <p:nvPr/>
+        </p:nvSpPr>
+        <p:spPr>
+          <a:xfrm>
+            <a:off x="731520" y="698768"/>
+            <a:ext cx="10728655" cy="993332"/>
+          </a:xfrm>
+          <a:prstGeom prst="rect">
+            <a:avLst/>
+          </a:prstGeom>
+          <a:noFill/>
+          <a:ln/>
+        </p:spPr>
+        <p:txBody>
+          <a:bodyPr wrap="square" lIns="0" tIns="0" rIns="0" bIns="0" rtlCol="0" anchor="ctr"/>
+          <a:lstStyle/>
+          <a:p>
+            <a:pPr algn="l" indent="0" marL="0">
+              <a:lnSpc>
+                <a:spcPts val="4200"/>
+              </a:lnSpc>
+              <a:buNone/>
+            </a:pPr>
+            <a:r>
+              <a:rPr lang="en-US" sz="3200" b="1" dirty="0">
+                <a:solidFill>
+                  <a:srgbClr val="2B2620"/>
+                </a:solidFill>
+                <a:latin typeface="游明朝" pitchFamily="34" charset="0"/>
+                <a:ea typeface="游明朝" pitchFamily="34" charset="-122"/>
+                <a:cs typeface="游明朝" pitchFamily="34" charset="-120"/>
+              </a:rPr>
+              <a:t>その質問、そのまま送ってください</a:t>
+            </a:r>
+            <a:endParaRPr lang="en-US" sz="3200" dirty="0"/>
+          </a:p>
+        </p:txBody>
+      </p:sp>
+      <p:sp>
+        <p:nvSpPr>
+          <p:cNvPr id="3" name="Shape 1"/>
+          <p:cNvSpPr/>
+          <p:nvPr/>
+        </p:nvSpPr>
+        <p:spPr>
+          <a:xfrm>
+            <a:off x="731520" y="1834005"/>
+            <a:ext cx="6008047" cy="3405709"/>
+          </a:xfrm>
+          <a:prstGeom prst="roundRect">
+            <a:avLst>
+              <a:gd name="adj" fmla="val 2685"/>
+            </a:avLst>
+          </a:prstGeom>
+          <a:solidFill>
+            <a:srgbClr val="FCFAF4"/>
+          </a:solidFill>
+          <a:ln/>
+          <a:effectLst>
+            <a:outerShdw sx="100000" sy="100000" kx="0" ky="0" algn="bl" rotWithShape="0" blurRad="127000" dist="508" dir="5400000">
+              <a:srgbClr val="8C7F6E">
+                <a:alpha val="25000"/>
+              </a:srgbClr>
+            </a:outerShdw>
+          </a:effectLst>
+        </p:spPr>
+      </p:sp>
+      <p:sp>
+        <p:nvSpPr>
+          <p:cNvPr id="4" name="Text 2"/>
+          <p:cNvSpPr txBox="1"/>
+          <p:nvPr/>
+        </p:nvSpPr>
+        <p:spPr>
+          <a:xfrm>
+            <a:off x="1234440" y="2212417"/>
+            <a:ext cx="5002207" cy="2459678"/>
+          </a:xfrm>
+          <a:prstGeom prst="rect">
+            <a:avLst/>
+          </a:prstGeom>
+          <a:noFill/>
+          <a:ln/>
+        </p:spPr>
+        <p:txBody>
+          <a:bodyPr wrap="square" lIns="0" tIns="0" rIns="0" bIns="0" rtlCol="0" anchor="t"/>
+          <a:lstStyle/>
+          <a:p>
+            <a:pPr algn="l" indent="0" marL="0">
+              <a:lnSpc>
+                <a:spcPts val="3400"/>
+              </a:lnSpc>
+              <a:buNone/>
+            </a:pPr>
+            <a:r>
+              <a:rPr lang="en-US" sz="1800" dirty="0">
+                <a:solidFill>
+                  <a:srgbClr val="2B2620"/>
+                </a:solidFill>
+                <a:latin typeface="游ゴシック" pitchFamily="34" charset="0"/>
+                <a:ea typeface="游ゴシック" pitchFamily="34" charset="-122"/>
+                <a:cs typeface="游ゴシック" pitchFamily="34" charset="-120"/>
+              </a:rPr>
+              <a:t>「うちの院では、どうしたらいいんだろう」</a:t>
+            </a:r>
+            <a:endParaRPr lang="en-US" sz="1800" dirty="0"/>
+          </a:p>
+          <a:p>
+            <a:pPr algn="l" indent="0" marL="0">
+              <a:lnSpc>
+                <a:spcPts val="3400"/>
+              </a:lnSpc>
+              <a:buNone/>
+            </a:pPr>
+            <a:endParaRPr lang="en-US" sz="1800" dirty="0"/>
+          </a:p>
+          <a:p>
+            <a:pPr algn="l" indent="0" marL="0">
+              <a:lnSpc>
+                <a:spcPts val="3400"/>
+              </a:lnSpc>
+              <a:buNone/>
+            </a:pPr>
+            <a:r>
+              <a:rPr lang="en-US" sz="1800" dirty="0">
+                <a:solidFill>
+                  <a:srgbClr val="2B2620"/>
+                </a:solidFill>
+                <a:latin typeface="游ゴシック" pitchFamily="34" charset="0"/>
+                <a:ea typeface="游ゴシック" pitchFamily="34" charset="-122"/>
+                <a:cs typeface="游ゴシック" pitchFamily="34" charset="-120"/>
+              </a:rPr>
+              <a:t>今日の話で、そう思った方。</a:t>
+            </a:r>
+            <a:endParaRPr lang="en-US" sz="1800" dirty="0"/>
+          </a:p>
+          <a:p>
+            <a:pPr algn="l" indent="0" marL="0">
+              <a:lnSpc>
+                <a:spcPts val="3400"/>
+              </a:lnSpc>
+              <a:buNone/>
+            </a:pPr>
+            <a:r>
+              <a:rPr lang="en-US" sz="1800" dirty="0">
+                <a:solidFill>
+                  <a:srgbClr val="2B2620"/>
+                </a:solidFill>
+                <a:latin typeface="游ゴシック" pitchFamily="34" charset="0"/>
+                <a:ea typeface="游ゴシック" pitchFamily="34" charset="-122"/>
+                <a:cs typeface="游ゴシック" pitchFamily="34" charset="-120"/>
+              </a:rPr>
+              <a:t>その質問を、そのまま送ってください。</a:t>
+            </a:r>
+            <a:endParaRPr lang="en-US" sz="1800" dirty="0"/>
+          </a:p>
+          <a:p>
+            <a:pPr algn="l" indent="0" marL="0">
+              <a:lnSpc>
+                <a:spcPts val="3400"/>
+              </a:lnSpc>
+              <a:buNone/>
+            </a:pPr>
+            <a:endParaRPr lang="en-US" sz="1800" dirty="0"/>
+          </a:p>
+          <a:p>
+            <a:pPr algn="l" indent="0" marL="0">
+              <a:lnSpc>
+                <a:spcPts val="3400"/>
+              </a:lnSpc>
+              <a:buNone/>
+            </a:pPr>
+            <a:r>
+              <a:rPr lang="en-US" sz="1800" dirty="0">
+                <a:solidFill>
+                  <a:srgbClr val="2B2620"/>
+                </a:solidFill>
+                <a:latin typeface="游ゴシック" pitchFamily="34" charset="0"/>
+                <a:ea typeface="游ゴシック" pitchFamily="34" charset="-122"/>
+                <a:cs typeface="游ゴシック" pitchFamily="34" charset="-120"/>
+              </a:rPr>
+              <a:t>私が、全部読みます。</a:t>
+            </a:r>
+            <a:endParaRPr lang="en-US" sz="1800" dirty="0"/>
+          </a:p>
+        </p:txBody>
+      </p:sp>
+      <p:sp>
+        <p:nvSpPr>
+          <p:cNvPr id="5" name="Shape 3"/>
+          <p:cNvSpPr/>
+          <p:nvPr/>
+        </p:nvSpPr>
+        <p:spPr>
+          <a:xfrm>
+            <a:off x="7242487" y="1834005"/>
+            <a:ext cx="4217688" cy="3405709"/>
+          </a:xfrm>
+          <a:prstGeom prst="roundRect">
+            <a:avLst>
+              <a:gd name="adj" fmla="val 2685"/>
+            </a:avLst>
+          </a:prstGeom>
+          <a:solidFill>
+            <a:srgbClr val="FCFAF4"/>
+          </a:solidFill>
+          <a:ln w="19050">
+            <a:solidFill>
+              <a:srgbClr val="9C5446"/>
+            </a:solidFill>
+            <a:prstDash val="dash"/>
+          </a:ln>
+        </p:spPr>
+      </p:sp>
+      <p:sp>
+        <p:nvSpPr>
+          <p:cNvPr id="6" name="Text 4"/>
+          <p:cNvSpPr txBox="1"/>
+          <p:nvPr/>
+        </p:nvSpPr>
+        <p:spPr>
+          <a:xfrm>
+            <a:off x="7516807" y="3016542"/>
+            <a:ext cx="3669048" cy="851427"/>
+          </a:xfrm>
+          <a:prstGeom prst="rect">
+            <a:avLst/>
+          </a:prstGeom>
+          <a:noFill/>
+          <a:ln/>
+        </p:spPr>
+        <p:txBody>
+          <a:bodyPr wrap="square" lIns="0" tIns="0" rIns="0" bIns="0" rtlCol="0" anchor="ctr"/>
+          <a:lstStyle/>
+          <a:p>
+            <a:pPr algn="ctr" indent="0" marL="0">
+              <a:lnSpc>
+                <a:spcPts val="2200"/>
+              </a:lnSpc>
+              <a:buNone/>
+            </a:pPr>
+            <a:r>
+              <a:rPr lang="en-US" sz="1300" b="1" dirty="0">
+                <a:solidFill>
+                  <a:srgbClr val="7A6E60"/>
+                </a:solidFill>
+                <a:latin typeface="游ゴシック" pitchFamily="34" charset="0"/>
+                <a:ea typeface="游ゴシック" pitchFamily="34" charset="-122"/>
+                <a:cs typeface="游ゴシック" pitchFamily="34" charset="-120"/>
+              </a:rPr>
+              <a:t>▶ 公式LINEのQRコードを</a:t>
+            </a:r>
+            <a:endParaRPr lang="en-US" sz="1300" dirty="0"/>
+          </a:p>
+          <a:p>
+            <a:pPr algn="ctr" indent="0" marL="0">
+              <a:lnSpc>
+                <a:spcPts val="2200"/>
+              </a:lnSpc>
+              <a:buNone/>
+            </a:pPr>
+            <a:r>
+              <a:rPr lang="en-US" sz="1300" b="1" dirty="0">
+                <a:solidFill>
+                  <a:srgbClr val="7A6E60"/>
+                </a:solidFill>
+                <a:latin typeface="游ゴシック" pitchFamily="34" charset="0"/>
+                <a:ea typeface="游ゴシック" pitchFamily="34" charset="-122"/>
+                <a:cs typeface="游ゴシック" pitchFamily="34" charset="-120"/>
+              </a:rPr>
+              <a:t>ここに大きく貼ってください</a:t>
+            </a:r>
+            <a:endParaRPr lang="en-US" sz="1300" dirty="0"/>
+          </a:p>
+        </p:txBody>
+      </p:sp>
+      <p:sp>
+        <p:nvSpPr>
+          <p:cNvPr id="7" name="Text 5"/>
+          <p:cNvSpPr txBox="1"/>
+          <p:nvPr/>
+        </p:nvSpPr>
+        <p:spPr>
+          <a:xfrm>
+            <a:off x="7516807" y="4482889"/>
+            <a:ext cx="3669048" cy="378412"/>
+          </a:xfrm>
+          <a:prstGeom prst="rect">
+            <a:avLst/>
+          </a:prstGeom>
+          <a:noFill/>
+          <a:ln/>
+        </p:spPr>
+        <p:txBody>
+          <a:bodyPr wrap="square" lIns="0" tIns="0" rIns="0" bIns="0" rtlCol="0" anchor="ctr"/>
+          <a:lstStyle/>
+          <a:p>
+            <a:pPr algn="ctr" indent="0" marL="0">
+              <a:buNone/>
+            </a:pPr>
+            <a:r>
+              <a:rPr lang="en-US" sz="1100" dirty="0">
+                <a:solidFill>
+                  <a:srgbClr val="7A6E60"/>
+                </a:solidFill>
+                <a:latin typeface="游ゴシック" pitchFamily="34" charset="0"/>
+                <a:ea typeface="游ゴシック" pitchFamily="34" charset="-122"/>
+                <a:cs typeface="游ゴシック" pitchFamily="34" charset="-120"/>
+              </a:rPr>
+              <a:t>▶ 短縮URLをここに（口頭でも読み上げる）</a:t>
+            </a:r>
+            <a:endParaRPr lang="en-US" sz="1100" dirty="0"/>
+          </a:p>
+        </p:txBody>
+      </p:sp>
+      <p:sp>
+        <p:nvSpPr>
+          <p:cNvPr id="8" name="Shape 6"/>
+          <p:cNvSpPr/>
+          <p:nvPr/>
+        </p:nvSpPr>
+        <p:spPr>
+          <a:xfrm>
+            <a:off x="731520" y="5428919"/>
+            <a:ext cx="10728655" cy="898729"/>
+          </a:xfrm>
+          <a:prstGeom prst="roundRect">
+            <a:avLst>
+              <a:gd name="adj" fmla="val 10174"/>
+            </a:avLst>
+          </a:prstGeom>
+          <a:solidFill>
+            <a:srgbClr val="5E7060"/>
+          </a:solidFill>
+          <a:ln/>
+        </p:spPr>
+      </p:sp>
+      <p:sp>
+        <p:nvSpPr>
+          <p:cNvPr id="9" name="Text 7"/>
+          <p:cNvSpPr txBox="1"/>
+          <p:nvPr/>
+        </p:nvSpPr>
+        <p:spPr>
+          <a:xfrm>
+            <a:off x="1097280" y="5428919"/>
+            <a:ext cx="9997135" cy="898729"/>
+          </a:xfrm>
+          <a:prstGeom prst="rect">
+            <a:avLst/>
+          </a:prstGeom>
+          <a:noFill/>
+          <a:ln/>
+        </p:spPr>
+        <p:txBody>
+          <a:bodyPr wrap="square" lIns="0" tIns="0" rIns="0" bIns="0" rtlCol="0" anchor="ctr"/>
+          <a:lstStyle/>
+          <a:p>
+            <a:pPr indent="0" marL="0">
+              <a:buNone/>
+            </a:pPr>
+            <a:r>
+              <a:rPr lang="en-US" sz="1500" b="1" dirty="0">
+                <a:solidFill>
+                  <a:srgbClr val="FFFFFF"/>
+                </a:solidFill>
+                <a:latin typeface="游ゴシック" pitchFamily="34" charset="0"/>
+                <a:ea typeface="游ゴシック" pitchFamily="34" charset="-122"/>
+                <a:cs typeface="游ゴシック" pitchFamily="34" charset="-120"/>
+              </a:rPr>
+              <a:t>録画でご覧の方も、同じように送ってください。全部読みます。　／　本日のスライドをお送りします。</a:t>
+            </a:r>
+            <a:endParaRPr lang="en-US" sz="1500" dirty="0"/>
+          </a:p>
+        </p:txBody>
+      </p:sp>
+      <p:sp>
+        <p:nvSpPr>
+          <p:cNvPr id="10" name="Text 8"/>
+          <p:cNvSpPr txBox="1"/>
+          <p:nvPr/>
+        </p:nvSpPr>
+        <p:spPr>
+          <a:xfrm>
+            <a:off x="11414455" y="6400800"/>
+            <a:ext cx="457200" cy="274320"/>
+          </a:xfrm>
+          <a:prstGeom prst="rect">
+            <a:avLst/>
+          </a:prstGeom>
+          <a:noFill/>
+          <a:ln/>
+        </p:spPr>
+        <p:txBody>
+          <a:bodyPr wrap="square" lIns="0" tIns="0" rIns="0" bIns="0" rtlCol="0" anchor="ctr"/>
+          <a:lstStyle/>
+          <a:p>
+            <a:pPr algn="r" indent="0" marL="0">
+              <a:buNone/>
+            </a:pPr>
+            <a:r>
+              <a:rPr lang="en-US" sz="1000" dirty="0">
+                <a:solidFill>
+                  <a:srgbClr val="B7A991"/>
+                </a:solidFill>
+                <a:latin typeface="游ゴシック" pitchFamily="34" charset="0"/>
+                <a:ea typeface="游ゴシック" pitchFamily="34" charset="-122"/>
+                <a:cs typeface="游ゴシック" pitchFamily="34" charset="-120"/>
+              </a:rPr>
+              <a:t>63</a:t>
             </a:r>
             <a:endParaRPr lang="en-US" sz="1000" dirty="0"/>
           </a:p>

--- a/docs/slides/APNET-keicho-60min.pptx
+++ b/docs/slides/APNET-keicho-60min.pptx
@@ -195,11 +195,11 @@
           </c:tx>
           <c:spPr>
             <a:solidFill>
-              <a:srgbClr val="9C5446"/>
+              <a:srgbClr val="C92A78"/>
             </a:solidFill>
             <a:ln w="31750" cap="flat">
               <a:solidFill>
-                <a:srgbClr val="9C5446"/>
+                <a:srgbClr val="C92A78"/>
               </a:solidFill>
               <a:prstDash val="solid"/>
               <a:round/>
@@ -236,11 +236,11 @@
             <c:size val="8"/>
             <c:spPr>
               <a:solidFill>
-                <a:srgbClr val="9C5446"/>
+                <a:srgbClr val="C92A78"/>
               </a:solidFill>
               <a:ln w="9525" cap="flat">
                 <a:solidFill>
-                  <a:srgbClr val="FCFAF4"/>
+                  <a:srgbClr val="FFFFFF"/>
                 </a:solidFill>
                 <a:prstDash val="solid"/>
                 <a:round/>
@@ -342,7 +342,7 @@
         <c:spPr>
           <a:ln w="12700" cap="flat">
             <a:solidFill>
-              <a:srgbClr val="D3C7B2"/>
+              <a:srgbClr val="BCDDCC"/>
             </a:solidFill>
             <a:prstDash val="solid"/>
             <a:round/>
@@ -355,7 +355,7 @@
             <a:pPr>
               <a:defRPr sz="1000" b="0" i="0" u="none" strike="noStrike">
                 <a:solidFill>
-                  <a:srgbClr val="7A6E60"/>
+                  <a:srgbClr val="4F6F60"/>
                 </a:solidFill>
                 <a:latin typeface="游ゴシック"/>
               </a:defRPr>
@@ -382,7 +382,7 @@
           <c:spPr>
             <a:ln w="12700" cap="flat">
               <a:solidFill>
-                <a:srgbClr val="DED3C0"/>
+                <a:srgbClr val="D2EBDF"/>
               </a:solidFill>
               <a:prstDash val="solid"/>
               <a:round/>
@@ -407,7 +407,7 @@
             <a:pPr>
               <a:defRPr sz="1000" b="0" i="0" u="none" strike="noStrike">
                 <a:solidFill>
-                  <a:srgbClr val="7A6E60"/>
+                  <a:srgbClr val="4F6F60"/>
                 </a:solidFill>
                 <a:latin typeface="游ゴシック"/>
               </a:defRPr>
@@ -422,11 +422,11 @@
       </c:valAx>
       <c:spPr>
         <a:solidFill>
-          <a:srgbClr val="ECE3D4"/>
+          <a:srgbClr val="F0FAF5"/>
         </a:solidFill>
         <a:ln w="12700" cap="flat">
           <a:solidFill>
-            <a:srgbClr val="ECE3D4"/>
+            <a:srgbClr val="F0FAF5"/>
           </a:solidFill>
         </a:ln>
         <a:effectLst/>
@@ -6813,7 +6813,7 @@
     <p:bg>
       <p:bgPr>
         <a:solidFill>
-          <a:srgbClr val="2B2620"/>
+          <a:srgbClr val="123C2A"/>
         </a:solidFill>
       </p:bgPr>
     </p:bg>
@@ -6846,7 +6846,7 @@
             <a:avLst/>
           </a:prstGeom>
           <a:solidFill>
-            <a:srgbClr val="35302A"/>
+            <a:srgbClr val="1B4E36"/>
           </a:solidFill>
           <a:ln/>
         </p:spPr>
@@ -6878,7 +6878,7 @@
             <a:r>
               <a:rPr lang="en-US" sz="1200" b="1" spc="300" kern="0" dirty="0">
                 <a:solidFill>
-                  <a:srgbClr val="A2937F"/>
+                  <a:srgbClr val="8FB8A2"/>
                 </a:solidFill>
                 <a:latin typeface="游ゴシック" pitchFamily="34" charset="0"/>
                 <a:ea typeface="游ゴシック" pitchFamily="34" charset="-122"/>
@@ -6920,7 +6920,7 @@
             <a:r>
               <a:rPr lang="en-US" sz="4400" b="1" dirty="0">
                 <a:solidFill>
-                  <a:srgbClr val="ECE3D4"/>
+                  <a:srgbClr val="E8F5EE"/>
                 </a:solidFill>
                 <a:latin typeface="游明朝" pitchFamily="34" charset="0"/>
                 <a:ea typeface="游明朝" pitchFamily="34" charset="-122"/>
@@ -6940,7 +6940,7 @@
             <a:r>
               <a:rPr lang="en-US" sz="4400" b="1" dirty="0">
                 <a:solidFill>
-                  <a:srgbClr val="ECE3D4"/>
+                  <a:srgbClr val="E8F5EE"/>
                 </a:solidFill>
                 <a:latin typeface="游明朝" pitchFamily="34" charset="0"/>
                 <a:ea typeface="游明朝" pitchFamily="34" charset="-122"/>
@@ -6979,7 +6979,7 @@
             <a:r>
               <a:rPr lang="en-US" sz="1700" dirty="0">
                 <a:solidFill>
-                  <a:srgbClr val="A2937F"/>
+                  <a:srgbClr val="8FB8A2"/>
                 </a:solidFill>
                 <a:latin typeface="游ゴシック" pitchFamily="34" charset="0"/>
                 <a:ea typeface="游ゴシック" pitchFamily="34" charset="-122"/>
@@ -7021,7 +7021,7 @@
             <a:r>
               <a:rPr lang="en-US" sz="1200" dirty="0">
                 <a:solidFill>
-                  <a:srgbClr val="A2937F"/>
+                  <a:srgbClr val="8FB8A2"/>
                 </a:solidFill>
                 <a:latin typeface="游ゴシック" pitchFamily="34" charset="0"/>
                 <a:ea typeface="游ゴシック" pitchFamily="34" charset="-122"/>
@@ -7041,7 +7041,7 @@
             <a:r>
               <a:rPr lang="en-US" sz="1200" dirty="0">
                 <a:solidFill>
-                  <a:srgbClr val="A2937F"/>
+                  <a:srgbClr val="8FB8A2"/>
                 </a:solidFill>
                 <a:latin typeface="游ゴシック" pitchFamily="34" charset="0"/>
                 <a:ea typeface="游ゴシック" pitchFamily="34" charset="-122"/>
@@ -7061,7 +7061,7 @@
             <a:r>
               <a:rPr lang="en-US" sz="1200" dirty="0">
                 <a:solidFill>
-                  <a:srgbClr val="A2937F"/>
+                  <a:srgbClr val="8FB8A2"/>
                 </a:solidFill>
                 <a:latin typeface="游ゴシック" pitchFamily="34" charset="0"/>
                 <a:ea typeface="游ゴシック" pitchFamily="34" charset="-122"/>
@@ -7087,7 +7087,7 @@
     <p:bg>
       <p:bgPr>
         <a:solidFill>
-          <a:srgbClr val="ECE3D4"/>
+          <a:srgbClr val="F0FAF5"/>
         </a:solidFill>
       </p:bgPr>
     </p:bg>
@@ -7132,7 +7132,7 @@
             <a:r>
               <a:rPr lang="en-US" sz="1100" b="1" spc="200" kern="0" dirty="0">
                 <a:solidFill>
-                  <a:srgbClr val="9C5446"/>
+                  <a:srgbClr val="17784A"/>
                 </a:solidFill>
                 <a:latin typeface="游ゴシック" pitchFamily="34" charset="0"/>
                 <a:ea typeface="游ゴシック" pitchFamily="34" charset="-122"/>
@@ -7174,7 +7174,7 @@
             <a:r>
               <a:rPr lang="en-US" sz="3200" b="1" dirty="0">
                 <a:solidFill>
-                  <a:srgbClr val="2B2620"/>
+                  <a:srgbClr val="123C2A"/>
                 </a:solidFill>
                 <a:latin typeface="游明朝" pitchFamily="34" charset="0"/>
                 <a:ea typeface="游明朝" pitchFamily="34" charset="-122"/>
@@ -7203,12 +7203,12 @@
             </a:avLst>
           </a:prstGeom>
           <a:solidFill>
-            <a:srgbClr val="FCFAF4"/>
+            <a:srgbClr val="FFFFFF"/>
           </a:solidFill>
           <a:ln/>
           <a:effectLst>
             <a:outerShdw sx="100000" sy="100000" kx="0" ky="0" algn="bl" rotWithShape="0" blurRad="127000" dist="508" dir="5400000">
-              <a:srgbClr val="8C7F6E">
+              <a:srgbClr val="7FA795">
                 <a:alpha val="25000"/>
               </a:srgbClr>
             </a:outerShdw>
@@ -7242,7 +7242,7 @@
             <a:r>
               <a:rPr lang="en-US" sz="4400" b="1" dirty="0">
                 <a:solidFill>
-                  <a:srgbClr val="2B2620"/>
+                  <a:srgbClr val="123C2A"/>
                 </a:solidFill>
                 <a:latin typeface="游明朝" pitchFamily="34" charset="0"/>
                 <a:ea typeface="游明朝" pitchFamily="34" charset="-122"/>
@@ -7281,7 +7281,7 @@
             <a:r>
               <a:rPr lang="en-US" sz="2400" dirty="0">
                 <a:solidFill>
-                  <a:srgbClr val="7A6E60"/>
+                  <a:srgbClr val="4F6F60"/>
                 </a:solidFill>
                 <a:latin typeface="游ゴシック" pitchFamily="34" charset="0"/>
                 <a:ea typeface="游ゴシック" pitchFamily="34" charset="-122"/>
@@ -7320,7 +7320,7 @@
             <a:r>
               <a:rPr lang="en-US" sz="1400" dirty="0">
                 <a:solidFill>
-                  <a:srgbClr val="7A6E60"/>
+                  <a:srgbClr val="4F6F60"/>
                 </a:solidFill>
                 <a:latin typeface="游ゴシック" pitchFamily="34" charset="0"/>
                 <a:ea typeface="游ゴシック" pitchFamily="34" charset="-122"/>
@@ -7359,7 +7359,7 @@
             <a:r>
               <a:rPr lang="en-US" sz="4000" b="1" dirty="0">
                 <a:solidFill>
-                  <a:srgbClr val="9C5446"/>
+                  <a:srgbClr val="17784A"/>
                 </a:solidFill>
                 <a:latin typeface="游明朝" pitchFamily="34" charset="0"/>
                 <a:ea typeface="游明朝" pitchFamily="34" charset="-122"/>
@@ -7398,7 +7398,7 @@
             <a:r>
               <a:rPr lang="en-US" sz="1500" dirty="0">
                 <a:solidFill>
-                  <a:srgbClr val="7A6E60"/>
+                  <a:srgbClr val="4F6F60"/>
                 </a:solidFill>
                 <a:latin typeface="游ゴシック" pitchFamily="34" charset="0"/>
                 <a:ea typeface="游ゴシック" pitchFamily="34" charset="-122"/>
@@ -7437,7 +7437,7 @@
             <a:r>
               <a:rPr lang="en-US" sz="2200" b="1" dirty="0">
                 <a:solidFill>
-                  <a:srgbClr val="2B2620"/>
+                  <a:srgbClr val="123C2A"/>
                 </a:solidFill>
                 <a:latin typeface="游明朝" pitchFamily="34" charset="0"/>
                 <a:ea typeface="游明朝" pitchFamily="34" charset="-122"/>
@@ -7476,7 +7476,7 @@
             <a:r>
               <a:rPr lang="en-US" sz="1000" dirty="0">
                 <a:solidFill>
-                  <a:srgbClr val="B7A991"/>
+                  <a:srgbClr val="AFD2C1"/>
                 </a:solidFill>
                 <a:latin typeface="游ゴシック" pitchFamily="34" charset="0"/>
                 <a:ea typeface="游ゴシック" pitchFamily="34" charset="-122"/>
@@ -7502,7 +7502,7 @@
     <p:bg>
       <p:bgPr>
         <a:solidFill>
-          <a:srgbClr val="ECE3D4"/>
+          <a:srgbClr val="F0FAF5"/>
         </a:solidFill>
       </p:bgPr>
     </p:bg>
@@ -7547,7 +7547,7 @@
             <a:r>
               <a:rPr lang="en-US" sz="1100" b="1" spc="200" kern="0" dirty="0">
                 <a:solidFill>
-                  <a:srgbClr val="9C5446"/>
+                  <a:srgbClr val="17784A"/>
                 </a:solidFill>
                 <a:latin typeface="游ゴシック" pitchFamily="34" charset="0"/>
                 <a:ea typeface="游ゴシック" pitchFamily="34" charset="-122"/>
@@ -7589,7 +7589,7 @@
             <a:r>
               <a:rPr lang="en-US" sz="3200" b="1" dirty="0">
                 <a:solidFill>
-                  <a:srgbClr val="2B2620"/>
+                  <a:srgbClr val="123C2A"/>
                 </a:solidFill>
                 <a:latin typeface="游明朝" pitchFamily="34" charset="0"/>
                 <a:ea typeface="游明朝" pitchFamily="34" charset="-122"/>
@@ -7628,7 +7628,7 @@
             <a:r>
               <a:rPr lang="en-US" sz="1200" b="1" spc="200" kern="0" dirty="0">
                 <a:solidFill>
-                  <a:srgbClr val="7A6E60"/>
+                  <a:srgbClr val="4F6F60"/>
                 </a:solidFill>
                 <a:latin typeface="游ゴシック" pitchFamily="34" charset="0"/>
                 <a:ea typeface="游ゴシック" pitchFamily="34" charset="-122"/>
@@ -7655,7 +7655,7 @@
             <a:avLst/>
           </a:prstGeom>
           <a:solidFill>
-            <a:srgbClr val="D9CDB8"/>
+            <a:srgbClr val="CDEBDC"/>
           </a:solidFill>
           <a:ln/>
         </p:spPr>
@@ -7687,7 +7687,7 @@
             <a:r>
               <a:rPr lang="en-US" sz="2800" b="1" dirty="0">
                 <a:solidFill>
-                  <a:srgbClr val="2B2620"/>
+                  <a:srgbClr val="123C2A"/>
                 </a:solidFill>
                 <a:latin typeface="游明朝" pitchFamily="34" charset="0"/>
                 <a:ea typeface="游明朝" pitchFamily="34" charset="-122"/>
@@ -7726,7 +7726,7 @@
             <a:r>
               <a:rPr lang="en-US" sz="1100" dirty="0">
                 <a:solidFill>
-                  <a:srgbClr val="7A6E60"/>
+                  <a:srgbClr val="4F6F60"/>
                 </a:solidFill>
                 <a:latin typeface="游ゴシック" pitchFamily="34" charset="0"/>
                 <a:ea typeface="游ゴシック" pitchFamily="34" charset="-122"/>
@@ -7753,7 +7753,7 @@
             <a:avLst/>
           </a:prstGeom>
           <a:solidFill>
-            <a:srgbClr val="D9CDB8"/>
+            <a:srgbClr val="CDEBDC"/>
           </a:solidFill>
           <a:ln/>
         </p:spPr>
@@ -7785,7 +7785,7 @@
             <a:r>
               <a:rPr lang="en-US" sz="2800" b="1" dirty="0">
                 <a:solidFill>
-                  <a:srgbClr val="2B2620"/>
+                  <a:srgbClr val="123C2A"/>
                 </a:solidFill>
                 <a:latin typeface="游明朝" pitchFamily="34" charset="0"/>
                 <a:ea typeface="游明朝" pitchFamily="34" charset="-122"/>
@@ -7824,7 +7824,7 @@
             <a:r>
               <a:rPr lang="en-US" sz="1100" dirty="0">
                 <a:solidFill>
-                  <a:srgbClr val="7A6E60"/>
+                  <a:srgbClr val="4F6F60"/>
                 </a:solidFill>
                 <a:latin typeface="游ゴシック" pitchFamily="34" charset="0"/>
                 <a:ea typeface="游ゴシック" pitchFamily="34" charset="-122"/>
@@ -7851,7 +7851,7 @@
             <a:avLst/>
           </a:prstGeom>
           <a:solidFill>
-            <a:srgbClr val="9C5446"/>
+            <a:srgbClr val="17784A"/>
           </a:solidFill>
           <a:ln/>
         </p:spPr>
@@ -7883,7 +7883,7 @@
             <a:r>
               <a:rPr lang="en-US" sz="2800" b="1" dirty="0">
                 <a:solidFill>
-                  <a:srgbClr val="FCFAF4"/>
+                  <a:srgbClr val="FFFFFF"/>
                 </a:solidFill>
                 <a:latin typeface="游明朝" pitchFamily="34" charset="0"/>
                 <a:ea typeface="游明朝" pitchFamily="34" charset="-122"/>
@@ -7922,7 +7922,7 @@
             <a:r>
               <a:rPr lang="en-US" sz="1100" b="1" dirty="0">
                 <a:solidFill>
-                  <a:srgbClr val="9C5446"/>
+                  <a:srgbClr val="17784A"/>
                 </a:solidFill>
                 <a:latin typeface="游ゴシック" pitchFamily="34" charset="0"/>
                 <a:ea typeface="游ゴシック" pitchFamily="34" charset="-122"/>
@@ -7949,7 +7949,7 @@
             <a:avLst/>
           </a:prstGeom>
           <a:solidFill>
-            <a:srgbClr val="D9CDB8"/>
+            <a:srgbClr val="CDEBDC"/>
           </a:solidFill>
           <a:ln/>
         </p:spPr>
@@ -7981,7 +7981,7 @@
             <a:r>
               <a:rPr lang="en-US" sz="2800" b="1" dirty="0">
                 <a:solidFill>
-                  <a:srgbClr val="2B2620"/>
+                  <a:srgbClr val="123C2A"/>
                 </a:solidFill>
                 <a:latin typeface="游明朝" pitchFamily="34" charset="0"/>
                 <a:ea typeface="游明朝" pitchFamily="34" charset="-122"/>
@@ -8020,7 +8020,7 @@
             <a:r>
               <a:rPr lang="en-US" sz="1100" dirty="0">
                 <a:solidFill>
-                  <a:srgbClr val="7A6E60"/>
+                  <a:srgbClr val="4F6F60"/>
                 </a:solidFill>
                 <a:latin typeface="游ゴシック" pitchFamily="34" charset="0"/>
                 <a:ea typeface="游ゴシック" pitchFamily="34" charset="-122"/>
@@ -8049,12 +8049,12 @@
             </a:avLst>
           </a:prstGeom>
           <a:solidFill>
-            <a:srgbClr val="FCFAF4"/>
+            <a:srgbClr val="FFFFFF"/>
           </a:solidFill>
           <a:ln/>
           <a:effectLst>
             <a:outerShdw sx="100000" sy="100000" kx="0" ky="0" algn="bl" rotWithShape="0" blurRad="127000" dist="508" dir="5400000">
-              <a:srgbClr val="8C7F6E">
+              <a:srgbClr val="7FA795">
                 <a:alpha val="25000"/>
               </a:srgbClr>
             </a:outerShdw>
@@ -8088,7 +8088,7 @@
             <a:r>
               <a:rPr lang="en-US" sz="1800" b="1" dirty="0">
                 <a:solidFill>
-                  <a:srgbClr val="2B2620"/>
+                  <a:srgbClr val="123C2A"/>
                 </a:solidFill>
                 <a:latin typeface="游明朝" pitchFamily="34" charset="0"/>
                 <a:ea typeface="游明朝" pitchFamily="34" charset="-122"/>
@@ -8130,7 +8130,7 @@
             <a:r>
               <a:rPr lang="en-US" sz="1500" dirty="0">
                 <a:solidFill>
-                  <a:srgbClr val="2B2620"/>
+                  <a:srgbClr val="123C2A"/>
                 </a:solidFill>
                 <a:latin typeface="游ゴシック" pitchFamily="34" charset="0"/>
                 <a:ea typeface="游ゴシック" pitchFamily="34" charset="-122"/>
@@ -8150,7 +8150,7 @@
             <a:r>
               <a:rPr lang="en-US" sz="1500" dirty="0">
                 <a:solidFill>
-                  <a:srgbClr val="2B2620"/>
+                  <a:srgbClr val="123C2A"/>
                 </a:solidFill>
                 <a:latin typeface="游ゴシック" pitchFamily="34" charset="0"/>
                 <a:ea typeface="游ゴシック" pitchFamily="34" charset="-122"/>
@@ -8189,7 +8189,7 @@
             <a:r>
               <a:rPr lang="en-US" sz="1600" b="1" dirty="0">
                 <a:solidFill>
-                  <a:srgbClr val="9C5446"/>
+                  <a:srgbClr val="17784A"/>
                 </a:solidFill>
                 <a:latin typeface="游明朝" pitchFamily="34" charset="0"/>
                 <a:ea typeface="游明朝" pitchFamily="34" charset="-122"/>
@@ -8228,7 +8228,7 @@
             <a:r>
               <a:rPr lang="en-US" sz="2100" b="1" dirty="0">
                 <a:solidFill>
-                  <a:srgbClr val="2B2620"/>
+                  <a:srgbClr val="123C2A"/>
                 </a:solidFill>
                 <a:latin typeface="游明朝" pitchFamily="34" charset="0"/>
                 <a:ea typeface="游明朝" pitchFamily="34" charset="-122"/>
@@ -8267,7 +8267,7 @@
             <a:r>
               <a:rPr lang="en-US" sz="1000" dirty="0">
                 <a:solidFill>
-                  <a:srgbClr val="B7A991"/>
+                  <a:srgbClr val="AFD2C1"/>
                 </a:solidFill>
                 <a:latin typeface="游ゴシック" pitchFamily="34" charset="0"/>
                 <a:ea typeface="游ゴシック" pitchFamily="34" charset="-122"/>
@@ -8293,7 +8293,7 @@
     <p:bg>
       <p:bgPr>
         <a:solidFill>
-          <a:srgbClr val="ECE3D4"/>
+          <a:srgbClr val="F0FAF5"/>
         </a:solidFill>
       </p:bgPr>
     </p:bg>
@@ -8338,7 +8338,7 @@
             <a:r>
               <a:rPr lang="en-US" sz="1100" b="1" spc="200" kern="0" dirty="0">
                 <a:solidFill>
-                  <a:srgbClr val="9C5446"/>
+                  <a:srgbClr val="17784A"/>
                 </a:solidFill>
                 <a:latin typeface="游ゴシック" pitchFamily="34" charset="0"/>
                 <a:ea typeface="游ゴシック" pitchFamily="34" charset="-122"/>
@@ -8380,7 +8380,7 @@
             <a:r>
               <a:rPr lang="en-US" sz="3200" b="1" dirty="0">
                 <a:solidFill>
-                  <a:srgbClr val="2B2620"/>
+                  <a:srgbClr val="123C2A"/>
                 </a:solidFill>
                 <a:latin typeface="游明朝" pitchFamily="34" charset="0"/>
                 <a:ea typeface="游明朝" pitchFamily="34" charset="-122"/>
@@ -8409,12 +8409,12 @@
             </a:avLst>
           </a:prstGeom>
           <a:solidFill>
-            <a:srgbClr val="FCFAF4"/>
+            <a:srgbClr val="FFFFFF"/>
           </a:solidFill>
           <a:ln/>
           <a:effectLst>
             <a:outerShdw sx="100000" sy="100000" kx="0" ky="0" algn="bl" rotWithShape="0" blurRad="127000" dist="508" dir="5400000">
-              <a:srgbClr val="8C7F6E">
+              <a:srgbClr val="7FA795">
                 <a:alpha val="25000"/>
               </a:srgbClr>
             </a:outerShdw>
@@ -8436,7 +8436,7 @@
             <a:avLst/>
           </a:prstGeom>
           <a:solidFill>
-            <a:srgbClr val="9C5446"/>
+            <a:srgbClr val="17784A"/>
           </a:solidFill>
           <a:ln/>
         </p:spPr>
@@ -8468,7 +8468,7 @@
             <a:r>
               <a:rPr lang="en-US" sz="700" b="1" dirty="0">
                 <a:solidFill>
-                  <a:srgbClr val="FCFAF4"/>
+                  <a:srgbClr val="FFFFFF"/>
                 </a:solidFill>
                 <a:latin typeface="游明朝" pitchFamily="34" charset="0"/>
                 <a:ea typeface="游明朝" pitchFamily="34" charset="-122"/>
@@ -8507,7 +8507,7 @@
             <a:r>
               <a:rPr lang="en-US" sz="1600" b="1" dirty="0">
                 <a:solidFill>
-                  <a:srgbClr val="2B2620"/>
+                  <a:srgbClr val="123C2A"/>
                 </a:solidFill>
                 <a:latin typeface="游明朝" pitchFamily="34" charset="0"/>
                 <a:ea typeface="游明朝" pitchFamily="34" charset="-122"/>
@@ -8546,7 +8546,7 @@
             <a:r>
               <a:rPr lang="en-US" sz="1300" dirty="0">
                 <a:solidFill>
-                  <a:srgbClr val="7A6E60"/>
+                  <a:srgbClr val="4F6F60"/>
                 </a:solidFill>
                 <a:latin typeface="游ゴシック" pitchFamily="34" charset="0"/>
                 <a:ea typeface="游ゴシック" pitchFamily="34" charset="-122"/>
@@ -8575,12 +8575,12 @@
             </a:avLst>
           </a:prstGeom>
           <a:solidFill>
-            <a:srgbClr val="FCFAF4"/>
+            <a:srgbClr val="FFFFFF"/>
           </a:solidFill>
           <a:ln/>
           <a:effectLst>
             <a:outerShdw sx="100000" sy="100000" kx="0" ky="0" algn="bl" rotWithShape="0" blurRad="127000" dist="508" dir="5400000">
-              <a:srgbClr val="8C7F6E">
+              <a:srgbClr val="7FA795">
                 <a:alpha val="25000"/>
               </a:srgbClr>
             </a:outerShdw>
@@ -8602,7 +8602,7 @@
             <a:avLst/>
           </a:prstGeom>
           <a:solidFill>
-            <a:srgbClr val="9C5446"/>
+            <a:srgbClr val="17784A"/>
           </a:solidFill>
           <a:ln/>
         </p:spPr>
@@ -8634,7 +8634,7 @@
             <a:r>
               <a:rPr lang="en-US" sz="700" b="1" dirty="0">
                 <a:solidFill>
-                  <a:srgbClr val="FCFAF4"/>
+                  <a:srgbClr val="FFFFFF"/>
                 </a:solidFill>
                 <a:latin typeface="游明朝" pitchFamily="34" charset="0"/>
                 <a:ea typeface="游明朝" pitchFamily="34" charset="-122"/>
@@ -8673,7 +8673,7 @@
             <a:r>
               <a:rPr lang="en-US" sz="1600" b="1" dirty="0">
                 <a:solidFill>
-                  <a:srgbClr val="2B2620"/>
+                  <a:srgbClr val="123C2A"/>
                 </a:solidFill>
                 <a:latin typeface="游明朝" pitchFamily="34" charset="0"/>
                 <a:ea typeface="游明朝" pitchFamily="34" charset="-122"/>
@@ -8712,7 +8712,7 @@
             <a:r>
               <a:rPr lang="en-US" sz="1300" dirty="0">
                 <a:solidFill>
-                  <a:srgbClr val="7A6E60"/>
+                  <a:srgbClr val="4F6F60"/>
                 </a:solidFill>
                 <a:latin typeface="游ゴシック" pitchFamily="34" charset="0"/>
                 <a:ea typeface="游ゴシック" pitchFamily="34" charset="-122"/>
@@ -8741,12 +8741,12 @@
             </a:avLst>
           </a:prstGeom>
           <a:solidFill>
-            <a:srgbClr val="FCFAF4"/>
+            <a:srgbClr val="FFFFFF"/>
           </a:solidFill>
           <a:ln/>
           <a:effectLst>
             <a:outerShdw sx="100000" sy="100000" kx="0" ky="0" algn="bl" rotWithShape="0" blurRad="127000" dist="508" dir="5400000">
-              <a:srgbClr val="8C7F6E">
+              <a:srgbClr val="7FA795">
                 <a:alpha val="25000"/>
               </a:srgbClr>
             </a:outerShdw>
@@ -8768,7 +8768,7 @@
             <a:avLst/>
           </a:prstGeom>
           <a:solidFill>
-            <a:srgbClr val="5E7060"/>
+            <a:srgbClr val="C92A78"/>
           </a:solidFill>
           <a:ln/>
         </p:spPr>
@@ -8800,7 +8800,7 @@
             <a:r>
               <a:rPr lang="en-US" sz="700" b="1" dirty="0">
                 <a:solidFill>
-                  <a:srgbClr val="FCFAF4"/>
+                  <a:srgbClr val="FFFFFF"/>
                 </a:solidFill>
                 <a:latin typeface="游明朝" pitchFamily="34" charset="0"/>
                 <a:ea typeface="游明朝" pitchFamily="34" charset="-122"/>
@@ -8839,7 +8839,7 @@
             <a:r>
               <a:rPr lang="en-US" sz="1600" b="1" dirty="0">
                 <a:solidFill>
-                  <a:srgbClr val="2B2620"/>
+                  <a:srgbClr val="123C2A"/>
                 </a:solidFill>
                 <a:latin typeface="游明朝" pitchFamily="34" charset="0"/>
                 <a:ea typeface="游明朝" pitchFamily="34" charset="-122"/>
@@ -8878,7 +8878,7 @@
             <a:r>
               <a:rPr lang="en-US" sz="1300" dirty="0">
                 <a:solidFill>
-                  <a:srgbClr val="7A6E60"/>
+                  <a:srgbClr val="4F6F60"/>
                 </a:solidFill>
                 <a:latin typeface="游ゴシック" pitchFamily="34" charset="0"/>
                 <a:ea typeface="游ゴシック" pitchFamily="34" charset="-122"/>
@@ -8907,12 +8907,12 @@
             </a:avLst>
           </a:prstGeom>
           <a:solidFill>
-            <a:srgbClr val="FCFAF4"/>
+            <a:srgbClr val="FFFFFF"/>
           </a:solidFill>
           <a:ln/>
           <a:effectLst>
             <a:outerShdw sx="100000" sy="100000" kx="0" ky="0" algn="bl" rotWithShape="0" blurRad="127000" dist="508" dir="5400000">
-              <a:srgbClr val="8C7F6E">
+              <a:srgbClr val="7FA795">
                 <a:alpha val="25000"/>
               </a:srgbClr>
             </a:outerShdw>
@@ -8934,7 +8934,7 @@
             <a:avLst/>
           </a:prstGeom>
           <a:solidFill>
-            <a:srgbClr val="9C5446"/>
+            <a:srgbClr val="17784A"/>
           </a:solidFill>
           <a:ln/>
         </p:spPr>
@@ -8966,7 +8966,7 @@
             <a:r>
               <a:rPr lang="en-US" sz="700" b="1" dirty="0">
                 <a:solidFill>
-                  <a:srgbClr val="FCFAF4"/>
+                  <a:srgbClr val="FFFFFF"/>
                 </a:solidFill>
                 <a:latin typeface="游明朝" pitchFamily="34" charset="0"/>
                 <a:ea typeface="游明朝" pitchFamily="34" charset="-122"/>
@@ -9005,7 +9005,7 @@
             <a:r>
               <a:rPr lang="en-US" sz="1600" b="1" dirty="0">
                 <a:solidFill>
-                  <a:srgbClr val="2B2620"/>
+                  <a:srgbClr val="123C2A"/>
                 </a:solidFill>
                 <a:latin typeface="游明朝" pitchFamily="34" charset="0"/>
                 <a:ea typeface="游明朝" pitchFamily="34" charset="-122"/>
@@ -9044,7 +9044,7 @@
             <a:r>
               <a:rPr lang="en-US" sz="1300" dirty="0">
                 <a:solidFill>
-                  <a:srgbClr val="7A6E60"/>
+                  <a:srgbClr val="4F6F60"/>
                 </a:solidFill>
                 <a:latin typeface="游ゴシック" pitchFamily="34" charset="0"/>
                 <a:ea typeface="游ゴシック" pitchFamily="34" charset="-122"/>
@@ -9073,12 +9073,12 @@
             </a:avLst>
           </a:prstGeom>
           <a:solidFill>
-            <a:srgbClr val="FCFAF4"/>
+            <a:srgbClr val="FFFFFF"/>
           </a:solidFill>
           <a:ln/>
           <a:effectLst>
             <a:outerShdw sx="100000" sy="100000" kx="0" ky="0" algn="bl" rotWithShape="0" blurRad="127000" dist="508" dir="5400000">
-              <a:srgbClr val="8C7F6E">
+              <a:srgbClr val="7FA795">
                 <a:alpha val="25000"/>
               </a:srgbClr>
             </a:outerShdw>
@@ -9100,7 +9100,7 @@
             <a:avLst/>
           </a:prstGeom>
           <a:solidFill>
-            <a:srgbClr val="9C5446"/>
+            <a:srgbClr val="17784A"/>
           </a:solidFill>
           <a:ln/>
         </p:spPr>
@@ -9132,7 +9132,7 @@
             <a:r>
               <a:rPr lang="en-US" sz="700" b="1" dirty="0">
                 <a:solidFill>
-                  <a:srgbClr val="FCFAF4"/>
+                  <a:srgbClr val="FFFFFF"/>
                 </a:solidFill>
                 <a:latin typeface="游明朝" pitchFamily="34" charset="0"/>
                 <a:ea typeface="游明朝" pitchFamily="34" charset="-122"/>
@@ -9171,7 +9171,7 @@
             <a:r>
               <a:rPr lang="en-US" sz="1600" b="1" dirty="0">
                 <a:solidFill>
-                  <a:srgbClr val="2B2620"/>
+                  <a:srgbClr val="123C2A"/>
                 </a:solidFill>
                 <a:latin typeface="游明朝" pitchFamily="34" charset="0"/>
                 <a:ea typeface="游明朝" pitchFamily="34" charset="-122"/>
@@ -9210,7 +9210,7 @@
             <a:r>
               <a:rPr lang="en-US" sz="1300" dirty="0">
                 <a:solidFill>
-                  <a:srgbClr val="7A6E60"/>
+                  <a:srgbClr val="4F6F60"/>
                 </a:solidFill>
                 <a:latin typeface="游ゴシック" pitchFamily="34" charset="0"/>
                 <a:ea typeface="游ゴシック" pitchFamily="34" charset="-122"/>
@@ -9249,7 +9249,7 @@
             <a:r>
               <a:rPr lang="en-US" sz="1050" dirty="0">
                 <a:solidFill>
-                  <a:srgbClr val="9E9484"/>
+                  <a:srgbClr val="4F6F60"/>
                 </a:solidFill>
                 <a:latin typeface="游ゴシック" pitchFamily="34" charset="0"/>
                 <a:ea typeface="游ゴシック" pitchFamily="34" charset="-122"/>
@@ -9288,7 +9288,7 @@
             <a:r>
               <a:rPr lang="en-US" sz="2200" b="1" dirty="0">
                 <a:solidFill>
-                  <a:srgbClr val="9C5446"/>
+                  <a:srgbClr val="17784A"/>
                 </a:solidFill>
                 <a:latin typeface="游明朝" pitchFamily="34" charset="0"/>
                 <a:ea typeface="游明朝" pitchFamily="34" charset="-122"/>
@@ -9327,7 +9327,7 @@
             <a:r>
               <a:rPr lang="en-US" sz="1000" dirty="0">
                 <a:solidFill>
-                  <a:srgbClr val="B7A991"/>
+                  <a:srgbClr val="AFD2C1"/>
                 </a:solidFill>
                 <a:latin typeface="游ゴシック" pitchFamily="34" charset="0"/>
                 <a:ea typeface="游ゴシック" pitchFamily="34" charset="-122"/>
@@ -9353,7 +9353,7 @@
     <p:bg>
       <p:bgPr>
         <a:solidFill>
-          <a:srgbClr val="ECE3D4"/>
+          <a:srgbClr val="F0FAF5"/>
         </a:solidFill>
       </p:bgPr>
     </p:bg>
@@ -9398,7 +9398,7 @@
             <a:r>
               <a:rPr lang="en-US" sz="1100" b="1" spc="200" kern="0" dirty="0">
                 <a:solidFill>
-                  <a:srgbClr val="9C5446"/>
+                  <a:srgbClr val="17784A"/>
                 </a:solidFill>
                 <a:latin typeface="游ゴシック" pitchFamily="34" charset="0"/>
                 <a:ea typeface="游ゴシック" pitchFamily="34" charset="-122"/>
@@ -9440,7 +9440,7 @@
             <a:r>
               <a:rPr lang="en-US" sz="3200" b="1" dirty="0">
                 <a:solidFill>
-                  <a:srgbClr val="2B2620"/>
+                  <a:srgbClr val="123C2A"/>
                 </a:solidFill>
                 <a:latin typeface="游明朝" pitchFamily="34" charset="0"/>
                 <a:ea typeface="游明朝" pitchFamily="34" charset="-122"/>
@@ -9469,12 +9469,12 @@
             </a:avLst>
           </a:prstGeom>
           <a:solidFill>
-            <a:srgbClr val="FCFAF4"/>
+            <a:srgbClr val="FFFFFF"/>
           </a:solidFill>
           <a:ln/>
           <a:effectLst>
             <a:outerShdw sx="100000" sy="100000" kx="0" ky="0" algn="bl" rotWithShape="0" blurRad="127000" dist="508" dir="5400000">
-              <a:srgbClr val="8C7F6E">
+              <a:srgbClr val="7FA795">
                 <a:alpha val="25000"/>
               </a:srgbClr>
             </a:outerShdw>
@@ -9496,7 +9496,7 @@
             <a:avLst/>
           </a:prstGeom>
           <a:solidFill>
-            <a:srgbClr val="9C5446"/>
+            <a:srgbClr val="17784A"/>
           </a:solidFill>
           <a:ln/>
         </p:spPr>
@@ -9528,7 +9528,7 @@
             <a:r>
               <a:rPr lang="en-US" sz="1500" b="1" dirty="0">
                 <a:solidFill>
-                  <a:srgbClr val="FCFAF4"/>
+                  <a:srgbClr val="FFFFFF"/>
                 </a:solidFill>
                 <a:latin typeface="游明朝" pitchFamily="34" charset="0"/>
                 <a:ea typeface="游明朝" pitchFamily="34" charset="-122"/>
@@ -9567,7 +9567,7 @@
             <a:r>
               <a:rPr lang="en-US" sz="1600" b="1" dirty="0">
                 <a:solidFill>
-                  <a:srgbClr val="2B2620"/>
+                  <a:srgbClr val="123C2A"/>
                 </a:solidFill>
                 <a:latin typeface="游明朝" pitchFamily="34" charset="0"/>
                 <a:ea typeface="游明朝" pitchFamily="34" charset="-122"/>
@@ -9609,7 +9609,7 @@
             <a:r>
               <a:rPr lang="en-US" sz="1150" dirty="0">
                 <a:solidFill>
-                  <a:srgbClr val="7A6E60"/>
+                  <a:srgbClr val="4F6F60"/>
                 </a:solidFill>
                 <a:latin typeface="游ゴシック" pitchFamily="34" charset="0"/>
                 <a:ea typeface="游ゴシック" pitchFamily="34" charset="-122"/>
@@ -9629,7 +9629,7 @@
             <a:r>
               <a:rPr lang="en-US" sz="1150" dirty="0">
                 <a:solidFill>
-                  <a:srgbClr val="7A6E60"/>
+                  <a:srgbClr val="4F6F60"/>
                 </a:solidFill>
                 <a:latin typeface="游ゴシック" pitchFamily="34" charset="0"/>
                 <a:ea typeface="游ゴシック" pitchFamily="34" charset="-122"/>
@@ -9658,12 +9658,12 @@
             </a:avLst>
           </a:prstGeom>
           <a:solidFill>
-            <a:srgbClr val="FCFAF4"/>
+            <a:srgbClr val="FFFFFF"/>
           </a:solidFill>
           <a:ln/>
           <a:effectLst>
             <a:outerShdw sx="100000" sy="100000" kx="0" ky="0" algn="bl" rotWithShape="0" blurRad="127000" dist="508" dir="5400000">
-              <a:srgbClr val="8C7F6E">
+              <a:srgbClr val="7FA795">
                 <a:alpha val="25000"/>
               </a:srgbClr>
             </a:outerShdw>
@@ -9685,7 +9685,7 @@
             <a:avLst/>
           </a:prstGeom>
           <a:solidFill>
-            <a:srgbClr val="5E7060"/>
+            <a:srgbClr val="C92A78"/>
           </a:solidFill>
           <a:ln/>
         </p:spPr>
@@ -9717,7 +9717,7 @@
             <a:r>
               <a:rPr lang="en-US" sz="1500" b="1" dirty="0">
                 <a:solidFill>
-                  <a:srgbClr val="FCFAF4"/>
+                  <a:srgbClr val="FFFFFF"/>
                 </a:solidFill>
                 <a:latin typeface="游明朝" pitchFamily="34" charset="0"/>
                 <a:ea typeface="游明朝" pitchFamily="34" charset="-122"/>
@@ -9756,7 +9756,7 @@
             <a:r>
               <a:rPr lang="en-US" sz="1600" b="1" dirty="0">
                 <a:solidFill>
-                  <a:srgbClr val="2B2620"/>
+                  <a:srgbClr val="123C2A"/>
                 </a:solidFill>
                 <a:latin typeface="游明朝" pitchFamily="34" charset="0"/>
                 <a:ea typeface="游明朝" pitchFamily="34" charset="-122"/>
@@ -9798,7 +9798,7 @@
             <a:r>
               <a:rPr lang="en-US" sz="1150" dirty="0">
                 <a:solidFill>
-                  <a:srgbClr val="7A6E60"/>
+                  <a:srgbClr val="4F6F60"/>
                 </a:solidFill>
                 <a:latin typeface="游ゴシック" pitchFamily="34" charset="0"/>
                 <a:ea typeface="游ゴシック" pitchFamily="34" charset="-122"/>
@@ -9818,7 +9818,7 @@
             <a:r>
               <a:rPr lang="en-US" sz="1150" dirty="0">
                 <a:solidFill>
-                  <a:srgbClr val="7A6E60"/>
+                  <a:srgbClr val="4F6F60"/>
                 </a:solidFill>
                 <a:latin typeface="游ゴシック" pitchFamily="34" charset="0"/>
                 <a:ea typeface="游ゴシック" pitchFamily="34" charset="-122"/>
@@ -9847,12 +9847,12 @@
             </a:avLst>
           </a:prstGeom>
           <a:solidFill>
-            <a:srgbClr val="FCFAF4"/>
+            <a:srgbClr val="FFFFFF"/>
           </a:solidFill>
           <a:ln/>
           <a:effectLst>
             <a:outerShdw sx="100000" sy="100000" kx="0" ky="0" algn="bl" rotWithShape="0" blurRad="127000" dist="508" dir="5400000">
-              <a:srgbClr val="8C7F6E">
+              <a:srgbClr val="7FA795">
                 <a:alpha val="25000"/>
               </a:srgbClr>
             </a:outerShdw>
@@ -9874,7 +9874,7 @@
             <a:avLst/>
           </a:prstGeom>
           <a:solidFill>
-            <a:srgbClr val="9C5446"/>
+            <a:srgbClr val="17784A"/>
           </a:solidFill>
           <a:ln/>
         </p:spPr>
@@ -9906,7 +9906,7 @@
             <a:r>
               <a:rPr lang="en-US" sz="1500" b="1" dirty="0">
                 <a:solidFill>
-                  <a:srgbClr val="FCFAF4"/>
+                  <a:srgbClr val="FFFFFF"/>
                 </a:solidFill>
                 <a:latin typeface="游明朝" pitchFamily="34" charset="0"/>
                 <a:ea typeface="游明朝" pitchFamily="34" charset="-122"/>
@@ -9945,7 +9945,7 @@
             <a:r>
               <a:rPr lang="en-US" sz="1600" b="1" dirty="0">
                 <a:solidFill>
-                  <a:srgbClr val="2B2620"/>
+                  <a:srgbClr val="123C2A"/>
                 </a:solidFill>
                 <a:latin typeface="游明朝" pitchFamily="34" charset="0"/>
                 <a:ea typeface="游明朝" pitchFamily="34" charset="-122"/>
@@ -9987,7 +9987,7 @@
             <a:r>
               <a:rPr lang="en-US" sz="1150" dirty="0">
                 <a:solidFill>
-                  <a:srgbClr val="7A6E60"/>
+                  <a:srgbClr val="4F6F60"/>
                 </a:solidFill>
                 <a:latin typeface="游ゴシック" pitchFamily="34" charset="0"/>
                 <a:ea typeface="游ゴシック" pitchFamily="34" charset="-122"/>
@@ -10007,7 +10007,7 @@
             <a:r>
               <a:rPr lang="en-US" sz="1150" dirty="0">
                 <a:solidFill>
-                  <a:srgbClr val="7A6E60"/>
+                  <a:srgbClr val="4F6F60"/>
                 </a:solidFill>
                 <a:latin typeface="游ゴシック" pitchFamily="34" charset="0"/>
                 <a:ea typeface="游ゴシック" pitchFamily="34" charset="-122"/>
@@ -10036,12 +10036,12 @@
             </a:avLst>
           </a:prstGeom>
           <a:solidFill>
-            <a:srgbClr val="FCFAF4"/>
+            <a:srgbClr val="FFFFFF"/>
           </a:solidFill>
           <a:ln/>
           <a:effectLst>
             <a:outerShdw sx="100000" sy="100000" kx="0" ky="0" algn="bl" rotWithShape="0" blurRad="127000" dist="508" dir="5400000">
-              <a:srgbClr val="8C7F6E">
+              <a:srgbClr val="7FA795">
                 <a:alpha val="25000"/>
               </a:srgbClr>
             </a:outerShdw>
@@ -10063,7 +10063,7 @@
             <a:avLst/>
           </a:prstGeom>
           <a:solidFill>
-            <a:srgbClr val="5E7060"/>
+            <a:srgbClr val="C92A78"/>
           </a:solidFill>
           <a:ln/>
         </p:spPr>
@@ -10095,7 +10095,7 @@
             <a:r>
               <a:rPr lang="en-US" sz="1500" b="1" dirty="0">
                 <a:solidFill>
-                  <a:srgbClr val="FCFAF4"/>
+                  <a:srgbClr val="FFFFFF"/>
                 </a:solidFill>
                 <a:latin typeface="游明朝" pitchFamily="34" charset="0"/>
                 <a:ea typeface="游明朝" pitchFamily="34" charset="-122"/>
@@ -10134,7 +10134,7 @@
             <a:r>
               <a:rPr lang="en-US" sz="1600" b="1" dirty="0">
                 <a:solidFill>
-                  <a:srgbClr val="2B2620"/>
+                  <a:srgbClr val="123C2A"/>
                 </a:solidFill>
                 <a:latin typeface="游明朝" pitchFamily="34" charset="0"/>
                 <a:ea typeface="游明朝" pitchFamily="34" charset="-122"/>
@@ -10176,7 +10176,7 @@
             <a:r>
               <a:rPr lang="en-US" sz="1150" dirty="0">
                 <a:solidFill>
-                  <a:srgbClr val="7A6E60"/>
+                  <a:srgbClr val="4F6F60"/>
                 </a:solidFill>
                 <a:latin typeface="游ゴシック" pitchFamily="34" charset="0"/>
                 <a:ea typeface="游ゴシック" pitchFamily="34" charset="-122"/>
@@ -10196,7 +10196,7 @@
             <a:r>
               <a:rPr lang="en-US" sz="1150" dirty="0">
                 <a:solidFill>
-                  <a:srgbClr val="7A6E60"/>
+                  <a:srgbClr val="4F6F60"/>
                 </a:solidFill>
                 <a:latin typeface="游ゴシック" pitchFamily="34" charset="0"/>
                 <a:ea typeface="游ゴシック" pitchFamily="34" charset="-122"/>
@@ -10235,7 +10235,7 @@
             <a:r>
               <a:rPr lang="en-US" sz="2400" b="1" dirty="0">
                 <a:solidFill>
-                  <a:srgbClr val="2B2620"/>
+                  <a:srgbClr val="123C2A"/>
                 </a:solidFill>
                 <a:latin typeface="游明朝" pitchFamily="34" charset="0"/>
                 <a:ea typeface="游明朝" pitchFamily="34" charset="-122"/>
@@ -10274,7 +10274,7 @@
             <a:r>
               <a:rPr lang="en-US" sz="1050" dirty="0">
                 <a:solidFill>
-                  <a:srgbClr val="9E9484"/>
+                  <a:srgbClr val="4F6F60"/>
                 </a:solidFill>
                 <a:latin typeface="游ゴシック" pitchFamily="34" charset="0"/>
                 <a:ea typeface="游ゴシック" pitchFamily="34" charset="-122"/>
@@ -10313,7 +10313,7 @@
             <a:r>
               <a:rPr lang="en-US" sz="1000" dirty="0">
                 <a:solidFill>
-                  <a:srgbClr val="B7A991"/>
+                  <a:srgbClr val="AFD2C1"/>
                 </a:solidFill>
                 <a:latin typeface="游ゴシック" pitchFamily="34" charset="0"/>
                 <a:ea typeface="游ゴシック" pitchFamily="34" charset="-122"/>
@@ -10339,7 +10339,7 @@
     <p:bg>
       <p:bgPr>
         <a:solidFill>
-          <a:srgbClr val="ECE3D4"/>
+          <a:srgbClr val="F0FAF5"/>
         </a:solidFill>
       </p:bgPr>
     </p:bg>
@@ -10384,7 +10384,7 @@
             <a:r>
               <a:rPr lang="en-US" sz="1100" b="1" spc="200" kern="0" dirty="0">
                 <a:solidFill>
-                  <a:srgbClr val="9C5446"/>
+                  <a:srgbClr val="17784A"/>
                 </a:solidFill>
                 <a:latin typeface="游ゴシック" pitchFamily="34" charset="0"/>
                 <a:ea typeface="游ゴシック" pitchFamily="34" charset="-122"/>
@@ -10426,7 +10426,7 @@
             <a:r>
               <a:rPr lang="en-US" sz="3200" b="1" dirty="0">
                 <a:solidFill>
-                  <a:srgbClr val="2B2620"/>
+                  <a:srgbClr val="123C2A"/>
                 </a:solidFill>
                 <a:latin typeface="游明朝" pitchFamily="34" charset="0"/>
                 <a:ea typeface="游明朝" pitchFamily="34" charset="-122"/>
@@ -10455,12 +10455,12 @@
             </a:avLst>
           </a:prstGeom>
           <a:solidFill>
-            <a:srgbClr val="FCFAF4"/>
+            <a:srgbClr val="FFFFFF"/>
           </a:solidFill>
           <a:ln/>
           <a:effectLst>
             <a:outerShdw sx="100000" sy="100000" kx="0" ky="0" algn="bl" rotWithShape="0" blurRad="127000" dist="508" dir="5400000">
-              <a:srgbClr val="8C7F6E">
+              <a:srgbClr val="7FA795">
                 <a:alpha val="25000"/>
               </a:srgbClr>
             </a:outerShdw>
@@ -10494,7 +10494,7 @@
             <a:r>
               <a:rPr lang="en-US" sz="1300" dirty="0">
                 <a:solidFill>
-                  <a:srgbClr val="2B2620"/>
+                  <a:srgbClr val="123C2A"/>
                 </a:solidFill>
                 <a:latin typeface="游ゴシック" pitchFamily="34" charset="0"/>
                 <a:ea typeface="游ゴシック" pitchFamily="34" charset="-122"/>
@@ -10523,7 +10523,7 @@
             </a:avLst>
           </a:prstGeom>
           <a:solidFill>
-            <a:srgbClr val="2B2620"/>
+            <a:srgbClr val="123C2A"/>
           </a:solidFill>
           <a:ln/>
         </p:spPr>
@@ -10555,7 +10555,7 @@
             <a:r>
               <a:rPr lang="en-US" sz="1300" dirty="0">
                 <a:solidFill>
-                  <a:srgbClr val="ECE3D4"/>
+                  <a:srgbClr val="E8F5EE"/>
                 </a:solidFill>
                 <a:latin typeface="游ゴシック" pitchFamily="34" charset="0"/>
                 <a:ea typeface="游ゴシック" pitchFamily="34" charset="-122"/>
@@ -10584,12 +10584,12 @@
             </a:avLst>
           </a:prstGeom>
           <a:solidFill>
-            <a:srgbClr val="FCFAF4"/>
+            <a:srgbClr val="FFFFFF"/>
           </a:solidFill>
           <a:ln/>
           <a:effectLst>
             <a:outerShdw sx="100000" sy="100000" kx="0" ky="0" algn="bl" rotWithShape="0" blurRad="127000" dist="508" dir="5400000">
-              <a:srgbClr val="8C7F6E">
+              <a:srgbClr val="7FA795">
                 <a:alpha val="25000"/>
               </a:srgbClr>
             </a:outerShdw>
@@ -10623,7 +10623,7 @@
             <a:r>
               <a:rPr lang="en-US" sz="1300" dirty="0">
                 <a:solidFill>
-                  <a:srgbClr val="2B2620"/>
+                  <a:srgbClr val="123C2A"/>
                 </a:solidFill>
                 <a:latin typeface="游ゴシック" pitchFamily="34" charset="0"/>
                 <a:ea typeface="游ゴシック" pitchFamily="34" charset="-122"/>
@@ -10652,7 +10652,7 @@
             </a:avLst>
           </a:prstGeom>
           <a:solidFill>
-            <a:srgbClr val="2B2620"/>
+            <a:srgbClr val="123C2A"/>
           </a:solidFill>
           <a:ln/>
         </p:spPr>
@@ -10684,7 +10684,7 @@
             <a:r>
               <a:rPr lang="en-US" sz="1300" dirty="0">
                 <a:solidFill>
-                  <a:srgbClr val="ECE3D4"/>
+                  <a:srgbClr val="E8F5EE"/>
                 </a:solidFill>
                 <a:latin typeface="游ゴシック" pitchFamily="34" charset="0"/>
                 <a:ea typeface="游ゴシック" pitchFamily="34" charset="-122"/>
@@ -10713,12 +10713,12 @@
             </a:avLst>
           </a:prstGeom>
           <a:solidFill>
-            <a:srgbClr val="FCFAF4"/>
+            <a:srgbClr val="FFFFFF"/>
           </a:solidFill>
           <a:ln/>
           <a:effectLst>
             <a:outerShdw sx="100000" sy="100000" kx="0" ky="0" algn="bl" rotWithShape="0" blurRad="127000" dist="508" dir="5400000">
-              <a:srgbClr val="8C7F6E">
+              <a:srgbClr val="7FA795">
                 <a:alpha val="25000"/>
               </a:srgbClr>
             </a:outerShdw>
@@ -10752,7 +10752,7 @@
             <a:r>
               <a:rPr lang="en-US" sz="1300" dirty="0">
                 <a:solidFill>
-                  <a:srgbClr val="2B2620"/>
+                  <a:srgbClr val="123C2A"/>
                 </a:solidFill>
                 <a:latin typeface="游ゴシック" pitchFamily="34" charset="0"/>
                 <a:ea typeface="游ゴシック" pitchFamily="34" charset="-122"/>
@@ -10791,7 +10791,7 @@
             <a:r>
               <a:rPr lang="en-US" sz="2200" b="1" dirty="0">
                 <a:solidFill>
-                  <a:srgbClr val="9C5446"/>
+                  <a:srgbClr val="17784A"/>
                 </a:solidFill>
                 <a:latin typeface="游明朝" pitchFamily="34" charset="0"/>
                 <a:ea typeface="游明朝" pitchFamily="34" charset="-122"/>
@@ -10833,7 +10833,7 @@
             <a:r>
               <a:rPr lang="en-US" sz="1050" dirty="0">
                 <a:solidFill>
-                  <a:srgbClr val="7A6E60"/>
+                  <a:srgbClr val="4F6F60"/>
                 </a:solidFill>
                 <a:latin typeface="游ゴシック" pitchFamily="34" charset="0"/>
                 <a:ea typeface="游ゴシック" pitchFamily="34" charset="-122"/>
@@ -10872,7 +10872,7 @@
             <a:r>
               <a:rPr lang="en-US" sz="1000" dirty="0">
                 <a:solidFill>
-                  <a:srgbClr val="B7A991"/>
+                  <a:srgbClr val="AFD2C1"/>
                 </a:solidFill>
                 <a:latin typeface="游ゴシック" pitchFamily="34" charset="0"/>
                 <a:ea typeface="游ゴシック" pitchFamily="34" charset="-122"/>
@@ -10898,7 +10898,7 @@
     <p:bg>
       <p:bgPr>
         <a:solidFill>
-          <a:srgbClr val="ECE3D4"/>
+          <a:srgbClr val="F0FAF5"/>
         </a:solidFill>
       </p:bgPr>
     </p:bg>
@@ -10943,7 +10943,7 @@
             <a:r>
               <a:rPr lang="en-US" sz="1100" b="1" spc="200" kern="0" dirty="0">
                 <a:solidFill>
-                  <a:srgbClr val="9C5446"/>
+                  <a:srgbClr val="17784A"/>
                 </a:solidFill>
                 <a:latin typeface="游ゴシック" pitchFamily="34" charset="0"/>
                 <a:ea typeface="游ゴシック" pitchFamily="34" charset="-122"/>
@@ -10985,7 +10985,7 @@
             <a:r>
               <a:rPr lang="en-US" sz="3200" b="1" dirty="0">
                 <a:solidFill>
-                  <a:srgbClr val="2B2620"/>
+                  <a:srgbClr val="123C2A"/>
                 </a:solidFill>
                 <a:latin typeface="游明朝" pitchFamily="34" charset="0"/>
                 <a:ea typeface="游明朝" pitchFamily="34" charset="-122"/>
@@ -11014,12 +11014,12 @@
             </a:avLst>
           </a:prstGeom>
           <a:solidFill>
-            <a:srgbClr val="FCFAF4"/>
+            <a:srgbClr val="FFFFFF"/>
           </a:solidFill>
           <a:ln/>
           <a:effectLst>
             <a:outerShdw sx="100000" sy="100000" kx="0" ky="0" algn="bl" rotWithShape="0" blurRad="127000" dist="508" dir="5400000">
-              <a:srgbClr val="8C7F6E">
+              <a:srgbClr val="7FA795">
                 <a:alpha val="25000"/>
               </a:srgbClr>
             </a:outerShdw>
@@ -11041,7 +11041,7 @@
             <a:avLst/>
           </a:prstGeom>
           <a:solidFill>
-            <a:srgbClr val="2B2620"/>
+            <a:srgbClr val="123C2A"/>
           </a:solidFill>
           <a:ln/>
         </p:spPr>
@@ -11073,7 +11073,7 @@
             <a:r>
               <a:rPr lang="en-US" sz="1600" b="1" dirty="0">
                 <a:solidFill>
-                  <a:srgbClr val="FCFAF4"/>
+                  <a:srgbClr val="FFFFFF"/>
                 </a:solidFill>
                 <a:latin typeface="游明朝" pitchFamily="34" charset="0"/>
                 <a:ea typeface="游明朝" pitchFamily="34" charset="-122"/>
@@ -11112,7 +11112,7 @@
             <a:r>
               <a:rPr lang="en-US" sz="1700" dirty="0">
                 <a:solidFill>
-                  <a:srgbClr val="2B2620"/>
+                  <a:srgbClr val="123C2A"/>
                 </a:solidFill>
                 <a:latin typeface="游ゴシック" pitchFamily="34" charset="0"/>
                 <a:ea typeface="游ゴシック" pitchFamily="34" charset="-122"/>
@@ -11141,12 +11141,12 @@
             </a:avLst>
           </a:prstGeom>
           <a:solidFill>
-            <a:srgbClr val="FCFAF4"/>
+            <a:srgbClr val="FFFFFF"/>
           </a:solidFill>
           <a:ln/>
           <a:effectLst>
             <a:outerShdw sx="100000" sy="100000" kx="0" ky="0" algn="bl" rotWithShape="0" blurRad="127000" dist="508" dir="5400000">
-              <a:srgbClr val="8C7F6E">
+              <a:srgbClr val="7FA795">
                 <a:alpha val="25000"/>
               </a:srgbClr>
             </a:outerShdw>
@@ -11168,7 +11168,7 @@
             <a:avLst/>
           </a:prstGeom>
           <a:solidFill>
-            <a:srgbClr val="2B2620"/>
+            <a:srgbClr val="123C2A"/>
           </a:solidFill>
           <a:ln/>
         </p:spPr>
@@ -11200,7 +11200,7 @@
             <a:r>
               <a:rPr lang="en-US" sz="1600" b="1" dirty="0">
                 <a:solidFill>
-                  <a:srgbClr val="FCFAF4"/>
+                  <a:srgbClr val="FFFFFF"/>
                 </a:solidFill>
                 <a:latin typeface="游明朝" pitchFamily="34" charset="0"/>
                 <a:ea typeface="游明朝" pitchFamily="34" charset="-122"/>
@@ -11239,7 +11239,7 @@
             <a:r>
               <a:rPr lang="en-US" sz="1700" dirty="0">
                 <a:solidFill>
-                  <a:srgbClr val="2B2620"/>
+                  <a:srgbClr val="123C2A"/>
                 </a:solidFill>
                 <a:latin typeface="游ゴシック" pitchFamily="34" charset="0"/>
                 <a:ea typeface="游ゴシック" pitchFamily="34" charset="-122"/>
@@ -11268,12 +11268,12 @@
             </a:avLst>
           </a:prstGeom>
           <a:solidFill>
-            <a:srgbClr val="FCFAF4"/>
+            <a:srgbClr val="FFFFFF"/>
           </a:solidFill>
           <a:ln/>
           <a:effectLst>
             <a:outerShdw sx="100000" sy="100000" kx="0" ky="0" algn="bl" rotWithShape="0" blurRad="127000" dist="508" dir="5400000">
-              <a:srgbClr val="8C7F6E">
+              <a:srgbClr val="7FA795">
                 <a:alpha val="25000"/>
               </a:srgbClr>
             </a:outerShdw>
@@ -11295,7 +11295,7 @@
             <a:avLst/>
           </a:prstGeom>
           <a:solidFill>
-            <a:srgbClr val="2B2620"/>
+            <a:srgbClr val="123C2A"/>
           </a:solidFill>
           <a:ln/>
         </p:spPr>
@@ -11327,7 +11327,7 @@
             <a:r>
               <a:rPr lang="en-US" sz="1600" b="1" dirty="0">
                 <a:solidFill>
-                  <a:srgbClr val="FCFAF4"/>
+                  <a:srgbClr val="FFFFFF"/>
                 </a:solidFill>
                 <a:latin typeface="游明朝" pitchFamily="34" charset="0"/>
                 <a:ea typeface="游明朝" pitchFamily="34" charset="-122"/>
@@ -11366,7 +11366,7 @@
             <a:r>
               <a:rPr lang="en-US" sz="1700" dirty="0">
                 <a:solidFill>
-                  <a:srgbClr val="2B2620"/>
+                  <a:srgbClr val="123C2A"/>
                 </a:solidFill>
                 <a:latin typeface="游ゴシック" pitchFamily="34" charset="0"/>
                 <a:ea typeface="游ゴシック" pitchFamily="34" charset="-122"/>
@@ -11405,7 +11405,7 @@
             <a:r>
               <a:rPr lang="en-US" sz="1300" b="1" dirty="0">
                 <a:solidFill>
-                  <a:srgbClr val="5E7060"/>
+                  <a:srgbClr val="C92A78"/>
                 </a:solidFill>
                 <a:latin typeface="游ゴシック" pitchFamily="34" charset="0"/>
                 <a:ea typeface="游ゴシック" pitchFamily="34" charset="-122"/>
@@ -11444,7 +11444,7 @@
             <a:r>
               <a:rPr lang="en-US" sz="1000" dirty="0">
                 <a:solidFill>
-                  <a:srgbClr val="B7A991"/>
+                  <a:srgbClr val="AFD2C1"/>
                 </a:solidFill>
                 <a:latin typeface="游ゴシック" pitchFamily="34" charset="0"/>
                 <a:ea typeface="游ゴシック" pitchFamily="34" charset="-122"/>
@@ -11470,7 +11470,7 @@
     <p:bg>
       <p:bgPr>
         <a:solidFill>
-          <a:srgbClr val="ECE3D4"/>
+          <a:srgbClr val="F0FAF5"/>
         </a:solidFill>
       </p:bgPr>
     </p:bg>
@@ -11515,7 +11515,7 @@
             <a:r>
               <a:rPr lang="en-US" sz="1100" b="1" spc="200" kern="0" dirty="0">
                 <a:solidFill>
-                  <a:srgbClr val="9C5446"/>
+                  <a:srgbClr val="17784A"/>
                 </a:solidFill>
                 <a:latin typeface="游ゴシック" pitchFamily="34" charset="0"/>
                 <a:ea typeface="游ゴシック" pitchFamily="34" charset="-122"/>
@@ -11557,7 +11557,7 @@
             <a:r>
               <a:rPr lang="en-US" sz="3200" b="1" dirty="0">
                 <a:solidFill>
-                  <a:srgbClr val="2B2620"/>
+                  <a:srgbClr val="123C2A"/>
                 </a:solidFill>
                 <a:latin typeface="游明朝" pitchFamily="34" charset="0"/>
                 <a:ea typeface="游明朝" pitchFamily="34" charset="-122"/>
@@ -11586,12 +11586,12 @@
             </a:avLst>
           </a:prstGeom>
           <a:solidFill>
-            <a:srgbClr val="FCFAF4"/>
+            <a:srgbClr val="FFFFFF"/>
           </a:solidFill>
           <a:ln/>
           <a:effectLst>
             <a:outerShdw sx="100000" sy="100000" kx="0" ky="0" algn="bl" rotWithShape="0" blurRad="127000" dist="508" dir="5400000">
-              <a:srgbClr val="8C7F6E">
+              <a:srgbClr val="7FA795">
                 <a:alpha val="25000"/>
               </a:srgbClr>
             </a:outerShdw>
@@ -11625,7 +11625,7 @@
             <a:r>
               <a:rPr lang="en-US" sz="2000" b="1" dirty="0">
                 <a:solidFill>
-                  <a:srgbClr val="9C5446"/>
+                  <a:srgbClr val="17784A"/>
                 </a:solidFill>
                 <a:latin typeface="游明朝" pitchFamily="34" charset="0"/>
                 <a:ea typeface="游明朝" pitchFamily="34" charset="-122"/>
@@ -11667,7 +11667,7 @@
             <a:r>
               <a:rPr lang="en-US" sz="1300" dirty="0">
                 <a:solidFill>
-                  <a:srgbClr val="7A6E60"/>
+                  <a:srgbClr val="4F6F60"/>
                 </a:solidFill>
                 <a:latin typeface="游ゴシック" pitchFamily="34" charset="0"/>
                 <a:ea typeface="游ゴシック" pitchFamily="34" charset="-122"/>
@@ -11696,12 +11696,12 @@
             </a:avLst>
           </a:prstGeom>
           <a:solidFill>
-            <a:srgbClr val="FCFAF4"/>
+            <a:srgbClr val="FFFFFF"/>
           </a:solidFill>
           <a:ln/>
           <a:effectLst>
             <a:outerShdw sx="100000" sy="100000" kx="0" ky="0" algn="bl" rotWithShape="0" blurRad="127000" dist="508" dir="5400000">
-              <a:srgbClr val="8C7F6E">
+              <a:srgbClr val="7FA795">
                 <a:alpha val="25000"/>
               </a:srgbClr>
             </a:outerShdw>
@@ -11735,7 +11735,7 @@
             <a:r>
               <a:rPr lang="en-US" sz="2000" b="1" dirty="0">
                 <a:solidFill>
-                  <a:srgbClr val="9C5446"/>
+                  <a:srgbClr val="17784A"/>
                 </a:solidFill>
                 <a:latin typeface="游明朝" pitchFamily="34" charset="0"/>
                 <a:ea typeface="游明朝" pitchFamily="34" charset="-122"/>
@@ -11777,7 +11777,7 @@
             <a:r>
               <a:rPr lang="en-US" sz="1300" dirty="0">
                 <a:solidFill>
-                  <a:srgbClr val="7A6E60"/>
+                  <a:srgbClr val="4F6F60"/>
                 </a:solidFill>
                 <a:latin typeface="游ゴシック" pitchFamily="34" charset="0"/>
                 <a:ea typeface="游ゴシック" pitchFamily="34" charset="-122"/>
@@ -11806,12 +11806,12 @@
             </a:avLst>
           </a:prstGeom>
           <a:solidFill>
-            <a:srgbClr val="FCFAF4"/>
+            <a:srgbClr val="FFFFFF"/>
           </a:solidFill>
           <a:ln/>
           <a:effectLst>
             <a:outerShdw sx="100000" sy="100000" kx="0" ky="0" algn="bl" rotWithShape="0" blurRad="127000" dist="508" dir="5400000">
-              <a:srgbClr val="8C7F6E">
+              <a:srgbClr val="7FA795">
                 <a:alpha val="25000"/>
               </a:srgbClr>
             </a:outerShdw>
@@ -11845,7 +11845,7 @@
             <a:r>
               <a:rPr lang="en-US" sz="2000" b="1" dirty="0">
                 <a:solidFill>
-                  <a:srgbClr val="9C5446"/>
+                  <a:srgbClr val="17784A"/>
                 </a:solidFill>
                 <a:latin typeface="游明朝" pitchFamily="34" charset="0"/>
                 <a:ea typeface="游明朝" pitchFamily="34" charset="-122"/>
@@ -11887,7 +11887,7 @@
             <a:r>
               <a:rPr lang="en-US" sz="1300" dirty="0">
                 <a:solidFill>
-                  <a:srgbClr val="7A6E60"/>
+                  <a:srgbClr val="4F6F60"/>
                 </a:solidFill>
                 <a:latin typeface="游ゴシック" pitchFamily="34" charset="0"/>
                 <a:ea typeface="游ゴシック" pitchFamily="34" charset="-122"/>
@@ -11926,7 +11926,7 @@
             <a:r>
               <a:rPr lang="en-US" sz="2400" b="1" dirty="0">
                 <a:solidFill>
-                  <a:srgbClr val="2B2620"/>
+                  <a:srgbClr val="123C2A"/>
                 </a:solidFill>
                 <a:latin typeface="游明朝" pitchFamily="34" charset="0"/>
                 <a:ea typeface="游明朝" pitchFamily="34" charset="-122"/>
@@ -11965,7 +11965,7 @@
             <a:r>
               <a:rPr lang="en-US" sz="2800" b="1" dirty="0">
                 <a:solidFill>
-                  <a:srgbClr val="9C5446"/>
+                  <a:srgbClr val="C92A78"/>
                 </a:solidFill>
                 <a:latin typeface="游明朝" pitchFamily="34" charset="0"/>
                 <a:ea typeface="游明朝" pitchFamily="34" charset="-122"/>
@@ -12004,7 +12004,7 @@
             <a:r>
               <a:rPr lang="en-US" sz="1000" dirty="0">
                 <a:solidFill>
-                  <a:srgbClr val="B7A991"/>
+                  <a:srgbClr val="AFD2C1"/>
                 </a:solidFill>
                 <a:latin typeface="游ゴシック" pitchFamily="34" charset="0"/>
                 <a:ea typeface="游ゴシック" pitchFamily="34" charset="-122"/>
@@ -12030,7 +12030,7 @@
     <p:bg>
       <p:bgPr>
         <a:solidFill>
-          <a:srgbClr val="ECE3D4"/>
+          <a:srgbClr val="F0FAF5"/>
         </a:solidFill>
       </p:bgPr>
     </p:bg>
@@ -12075,7 +12075,7 @@
             <a:r>
               <a:rPr lang="en-US" sz="1100" b="1" spc="200" kern="0" dirty="0">
                 <a:solidFill>
-                  <a:srgbClr val="9C5446"/>
+                  <a:srgbClr val="17784A"/>
                 </a:solidFill>
                 <a:latin typeface="游ゴシック" pitchFamily="34" charset="0"/>
                 <a:ea typeface="游ゴシック" pitchFamily="34" charset="-122"/>
@@ -12117,7 +12117,7 @@
             <a:r>
               <a:rPr lang="en-US" sz="3200" b="1" dirty="0">
                 <a:solidFill>
-                  <a:srgbClr val="2B2620"/>
+                  <a:srgbClr val="123C2A"/>
                 </a:solidFill>
                 <a:latin typeface="游明朝" pitchFamily="34" charset="0"/>
                 <a:ea typeface="游明朝" pitchFamily="34" charset="-122"/>
@@ -12146,12 +12146,12 @@
             </a:avLst>
           </a:prstGeom>
           <a:solidFill>
-            <a:srgbClr val="FCFAF4"/>
+            <a:srgbClr val="FFFFFF"/>
           </a:solidFill>
           <a:ln/>
           <a:effectLst>
             <a:outerShdw sx="100000" sy="100000" kx="0" ky="0" algn="bl" rotWithShape="0" blurRad="127000" dist="508" dir="5400000">
-              <a:srgbClr val="8C7F6E">
+              <a:srgbClr val="7FA795">
                 <a:alpha val="25000"/>
               </a:srgbClr>
             </a:outerShdw>
@@ -12185,7 +12185,7 @@
             <a:r>
               <a:rPr lang="en-US" sz="1900" b="1" dirty="0">
                 <a:solidFill>
-                  <a:srgbClr val="9C5446"/>
+                  <a:srgbClr val="17784A"/>
                 </a:solidFill>
                 <a:latin typeface="游明朝" pitchFamily="34" charset="0"/>
                 <a:ea typeface="游明朝" pitchFamily="34" charset="-122"/>
@@ -12227,7 +12227,7 @@
             <a:r>
               <a:rPr lang="en-US" sz="1350" dirty="0">
                 <a:solidFill>
-                  <a:srgbClr val="2B2620"/>
+                  <a:srgbClr val="123C2A"/>
                 </a:solidFill>
                 <a:latin typeface="游ゴシック" pitchFamily="34" charset="0"/>
                 <a:ea typeface="游ゴシック" pitchFamily="34" charset="-122"/>
@@ -12247,7 +12247,7 @@
             <a:r>
               <a:rPr lang="en-US" sz="1350" dirty="0">
                 <a:solidFill>
-                  <a:srgbClr val="2B2620"/>
+                  <a:srgbClr val="123C2A"/>
                 </a:solidFill>
                 <a:latin typeface="游ゴシック" pitchFamily="34" charset="0"/>
                 <a:ea typeface="游ゴシック" pitchFamily="34" charset="-122"/>
@@ -12267,7 +12267,7 @@
             <a:r>
               <a:rPr lang="en-US" sz="1350" dirty="0">
                 <a:solidFill>
-                  <a:srgbClr val="2B2620"/>
+                  <a:srgbClr val="123C2A"/>
                 </a:solidFill>
                 <a:latin typeface="游ゴシック" pitchFamily="34" charset="0"/>
                 <a:ea typeface="游ゴシック" pitchFamily="34" charset="-122"/>
@@ -12287,7 +12287,7 @@
             <a:r>
               <a:rPr lang="en-US" sz="1350" dirty="0">
                 <a:solidFill>
-                  <a:srgbClr val="2B2620"/>
+                  <a:srgbClr val="123C2A"/>
                 </a:solidFill>
                 <a:latin typeface="游ゴシック" pitchFamily="34" charset="0"/>
                 <a:ea typeface="游ゴシック" pitchFamily="34" charset="-122"/>
@@ -12316,12 +12316,12 @@
             </a:avLst>
           </a:prstGeom>
           <a:solidFill>
-            <a:srgbClr val="FCFAF4"/>
+            <a:srgbClr val="FFFFFF"/>
           </a:solidFill>
           <a:ln/>
           <a:effectLst>
             <a:outerShdw sx="100000" sy="100000" kx="0" ky="0" algn="bl" rotWithShape="0" blurRad="127000" dist="508" dir="5400000">
-              <a:srgbClr val="8C7F6E">
+              <a:srgbClr val="7FA795">
                 <a:alpha val="25000"/>
               </a:srgbClr>
             </a:outerShdw>
@@ -12355,7 +12355,7 @@
             <a:r>
               <a:rPr lang="en-US" sz="1900" b="1" dirty="0">
                 <a:solidFill>
-                  <a:srgbClr val="5E7060"/>
+                  <a:srgbClr val="C92A78"/>
                 </a:solidFill>
                 <a:latin typeface="游明朝" pitchFamily="34" charset="0"/>
                 <a:ea typeface="游明朝" pitchFamily="34" charset="-122"/>
@@ -12397,7 +12397,7 @@
             <a:r>
               <a:rPr lang="en-US" sz="1350" dirty="0">
                 <a:solidFill>
-                  <a:srgbClr val="2B2620"/>
+                  <a:srgbClr val="123C2A"/>
                 </a:solidFill>
                 <a:latin typeface="游ゴシック" pitchFamily="34" charset="0"/>
                 <a:ea typeface="游ゴシック" pitchFamily="34" charset="-122"/>
@@ -12417,7 +12417,7 @@
             <a:r>
               <a:rPr lang="en-US" sz="1350" dirty="0">
                 <a:solidFill>
-                  <a:srgbClr val="2B2620"/>
+                  <a:srgbClr val="123C2A"/>
                 </a:solidFill>
                 <a:latin typeface="游ゴシック" pitchFamily="34" charset="0"/>
                 <a:ea typeface="游ゴシック" pitchFamily="34" charset="-122"/>
@@ -12437,7 +12437,7 @@
             <a:r>
               <a:rPr lang="en-US" sz="1350" dirty="0">
                 <a:solidFill>
-                  <a:srgbClr val="2B2620"/>
+                  <a:srgbClr val="123C2A"/>
                 </a:solidFill>
                 <a:latin typeface="游ゴシック" pitchFamily="34" charset="0"/>
                 <a:ea typeface="游ゴシック" pitchFamily="34" charset="-122"/>
@@ -12466,12 +12466,12 @@
             </a:avLst>
           </a:prstGeom>
           <a:solidFill>
-            <a:srgbClr val="FCFAF4"/>
+            <a:srgbClr val="FFFFFF"/>
           </a:solidFill>
           <a:ln/>
           <a:effectLst>
             <a:outerShdw sx="100000" sy="100000" kx="0" ky="0" algn="bl" rotWithShape="0" blurRad="127000" dist="508" dir="5400000">
-              <a:srgbClr val="8C7F6E">
+              <a:srgbClr val="7FA795">
                 <a:alpha val="25000"/>
               </a:srgbClr>
             </a:outerShdw>
@@ -12505,7 +12505,7 @@
             <a:r>
               <a:rPr lang="en-US" sz="1900" b="1" dirty="0">
                 <a:solidFill>
-                  <a:srgbClr val="9C5446"/>
+                  <a:srgbClr val="17784A"/>
                 </a:solidFill>
                 <a:latin typeface="游明朝" pitchFamily="34" charset="0"/>
                 <a:ea typeface="游明朝" pitchFamily="34" charset="-122"/>
@@ -12547,7 +12547,7 @@
             <a:r>
               <a:rPr lang="en-US" sz="1350" dirty="0">
                 <a:solidFill>
-                  <a:srgbClr val="2B2620"/>
+                  <a:srgbClr val="123C2A"/>
                 </a:solidFill>
                 <a:latin typeface="游ゴシック" pitchFamily="34" charset="0"/>
                 <a:ea typeface="游ゴシック" pitchFamily="34" charset="-122"/>
@@ -12567,7 +12567,7 @@
             <a:r>
               <a:rPr lang="en-US" sz="1350" dirty="0">
                 <a:solidFill>
-                  <a:srgbClr val="2B2620"/>
+                  <a:srgbClr val="123C2A"/>
                 </a:solidFill>
                 <a:latin typeface="游ゴシック" pitchFamily="34" charset="0"/>
                 <a:ea typeface="游ゴシック" pitchFamily="34" charset="-122"/>
@@ -12587,7 +12587,7 @@
             <a:r>
               <a:rPr lang="en-US" sz="1350" dirty="0">
                 <a:solidFill>
-                  <a:srgbClr val="2B2620"/>
+                  <a:srgbClr val="123C2A"/>
                 </a:solidFill>
                 <a:latin typeface="游ゴシック" pitchFamily="34" charset="0"/>
                 <a:ea typeface="游ゴシック" pitchFamily="34" charset="-122"/>
@@ -12626,7 +12626,7 @@
             <a:r>
               <a:rPr lang="en-US" sz="2600" b="1" dirty="0">
                 <a:solidFill>
-                  <a:srgbClr val="2B2620"/>
+                  <a:srgbClr val="123C2A"/>
                 </a:solidFill>
                 <a:latin typeface="游明朝" pitchFamily="34" charset="0"/>
                 <a:ea typeface="游明朝" pitchFamily="34" charset="-122"/>
@@ -12668,7 +12668,7 @@
             <a:r>
               <a:rPr lang="en-US" sz="1050" dirty="0">
                 <a:solidFill>
-                  <a:srgbClr val="9E9484"/>
+                  <a:srgbClr val="4F6F60"/>
                 </a:solidFill>
                 <a:latin typeface="游ゴシック" pitchFamily="34" charset="0"/>
                 <a:ea typeface="游ゴシック" pitchFamily="34" charset="-122"/>
@@ -12707,7 +12707,7 @@
             <a:r>
               <a:rPr lang="en-US" sz="1000" dirty="0">
                 <a:solidFill>
-                  <a:srgbClr val="B7A991"/>
+                  <a:srgbClr val="AFD2C1"/>
                 </a:solidFill>
                 <a:latin typeface="游ゴシック" pitchFamily="34" charset="0"/>
                 <a:ea typeface="游ゴシック" pitchFamily="34" charset="-122"/>
@@ -12733,7 +12733,7 @@
     <p:bg>
       <p:bgPr>
         <a:solidFill>
-          <a:srgbClr val="2B2620"/>
+          <a:srgbClr val="123C2A"/>
         </a:solidFill>
       </p:bgPr>
     </p:bg>
@@ -12766,7 +12766,7 @@
             <a:avLst/>
           </a:prstGeom>
           <a:solidFill>
-            <a:srgbClr val="342F28"/>
+            <a:srgbClr val="18452F"/>
           </a:solidFill>
           <a:ln/>
         </p:spPr>
@@ -12801,7 +12801,7 @@
             <a:r>
               <a:rPr lang="en-US" sz="4000" b="1" dirty="0">
                 <a:solidFill>
-                  <a:srgbClr val="ECE3D4"/>
+                  <a:srgbClr val="E8F5EE"/>
                 </a:solidFill>
                 <a:latin typeface="游明朝" pitchFamily="34" charset="0"/>
                 <a:ea typeface="游明朝" pitchFamily="34" charset="-122"/>
@@ -12821,7 +12821,7 @@
             <a:r>
               <a:rPr lang="en-US" sz="4000" b="1" dirty="0">
                 <a:solidFill>
-                  <a:srgbClr val="ECE3D4"/>
+                  <a:srgbClr val="E8F5EE"/>
                 </a:solidFill>
                 <a:latin typeface="游明朝" pitchFamily="34" charset="0"/>
                 <a:ea typeface="游明朝" pitchFamily="34" charset="-122"/>
@@ -12860,7 +12860,7 @@
             <a:r>
               <a:rPr lang="en-US" sz="1600" dirty="0">
                 <a:solidFill>
-                  <a:srgbClr val="A2937F"/>
+                  <a:srgbClr val="8FB8A2"/>
                 </a:solidFill>
                 <a:latin typeface="游ゴシック" pitchFamily="34" charset="0"/>
                 <a:ea typeface="游ゴシック" pitchFamily="34" charset="-122"/>
@@ -12899,7 +12899,7 @@
             <a:r>
               <a:rPr lang="en-US" sz="1000" dirty="0">
                 <a:solidFill>
-                  <a:srgbClr val="6B5F51"/>
+                  <a:srgbClr val="3A6450"/>
                 </a:solidFill>
                 <a:latin typeface="游ゴシック" pitchFamily="34" charset="0"/>
                 <a:ea typeface="游ゴシック" pitchFamily="34" charset="-122"/>
@@ -12925,7 +12925,7 @@
     <p:bg>
       <p:bgPr>
         <a:solidFill>
-          <a:srgbClr val="ECE3D4"/>
+          <a:srgbClr val="F0FAF5"/>
         </a:solidFill>
       </p:bgPr>
     </p:bg>
@@ -12970,7 +12970,7 @@
             <a:r>
               <a:rPr lang="en-US" sz="1100" b="1" spc="200" kern="0" dirty="0">
                 <a:solidFill>
-                  <a:srgbClr val="9C5446"/>
+                  <a:srgbClr val="17784A"/>
                 </a:solidFill>
                 <a:latin typeface="游ゴシック" pitchFamily="34" charset="0"/>
                 <a:ea typeface="游ゴシック" pitchFamily="34" charset="-122"/>
@@ -13012,7 +13012,7 @@
             <a:r>
               <a:rPr lang="en-US" sz="3200" b="1" dirty="0">
                 <a:solidFill>
-                  <a:srgbClr val="2B2620"/>
+                  <a:srgbClr val="123C2A"/>
                 </a:solidFill>
                 <a:latin typeface="游明朝" pitchFamily="34" charset="0"/>
                 <a:ea typeface="游明朝" pitchFamily="34" charset="-122"/>
@@ -13041,12 +13041,12 @@
             </a:avLst>
           </a:prstGeom>
           <a:solidFill>
-            <a:srgbClr val="FCFAF4"/>
+            <a:srgbClr val="FFFFFF"/>
           </a:solidFill>
           <a:ln/>
           <a:effectLst>
             <a:outerShdw sx="100000" sy="100000" kx="0" ky="0" algn="bl" rotWithShape="0" blurRad="127000" dist="508" dir="5400000">
-              <a:srgbClr val="8C7F6E">
+              <a:srgbClr val="7FA795">
                 <a:alpha val="25000"/>
               </a:srgbClr>
             </a:outerShdw>
@@ -13068,7 +13068,7 @@
             <a:avLst/>
           </a:prstGeom>
           <a:solidFill>
-            <a:srgbClr val="9C5446"/>
+            <a:srgbClr val="17784A"/>
           </a:solidFill>
           <a:ln/>
         </p:spPr>
@@ -13100,7 +13100,7 @@
             <a:r>
               <a:rPr lang="en-US" sz="1800" b="1" dirty="0">
                 <a:solidFill>
-                  <a:srgbClr val="FCFAF4"/>
+                  <a:srgbClr val="FFFFFF"/>
                 </a:solidFill>
                 <a:latin typeface="游明朝" pitchFamily="34" charset="0"/>
                 <a:ea typeface="游明朝" pitchFamily="34" charset="-122"/>
@@ -13142,7 +13142,7 @@
             <a:r>
               <a:rPr lang="en-US" sz="1500" b="1" dirty="0">
                 <a:solidFill>
-                  <a:srgbClr val="2B2620"/>
+                  <a:srgbClr val="123C2A"/>
                 </a:solidFill>
                 <a:latin typeface="游ゴシック" pitchFamily="34" charset="0"/>
                 <a:ea typeface="游ゴシック" pitchFamily="34" charset="-122"/>
@@ -13171,12 +13171,12 @@
             </a:avLst>
           </a:prstGeom>
           <a:solidFill>
-            <a:srgbClr val="FCFAF4"/>
+            <a:srgbClr val="FFFFFF"/>
           </a:solidFill>
           <a:ln/>
           <a:effectLst>
             <a:outerShdw sx="100000" sy="100000" kx="0" ky="0" algn="bl" rotWithShape="0" blurRad="127000" dist="508" dir="5400000">
-              <a:srgbClr val="8C7F6E">
+              <a:srgbClr val="7FA795">
                 <a:alpha val="25000"/>
               </a:srgbClr>
             </a:outerShdw>
@@ -13198,7 +13198,7 @@
             <a:avLst/>
           </a:prstGeom>
           <a:solidFill>
-            <a:srgbClr val="9C5446"/>
+            <a:srgbClr val="17784A"/>
           </a:solidFill>
           <a:ln/>
         </p:spPr>
@@ -13230,7 +13230,7 @@
             <a:r>
               <a:rPr lang="en-US" sz="1800" b="1" dirty="0">
                 <a:solidFill>
-                  <a:srgbClr val="FCFAF4"/>
+                  <a:srgbClr val="FFFFFF"/>
                 </a:solidFill>
                 <a:latin typeface="游明朝" pitchFamily="34" charset="0"/>
                 <a:ea typeface="游明朝" pitchFamily="34" charset="-122"/>
@@ -13272,7 +13272,7 @@
             <a:r>
               <a:rPr lang="en-US" sz="1500" b="1" dirty="0">
                 <a:solidFill>
-                  <a:srgbClr val="2B2620"/>
+                  <a:srgbClr val="123C2A"/>
                 </a:solidFill>
                 <a:latin typeface="游ゴシック" pitchFamily="34" charset="0"/>
                 <a:ea typeface="游ゴシック" pitchFamily="34" charset="-122"/>
@@ -13301,12 +13301,12 @@
             </a:avLst>
           </a:prstGeom>
           <a:solidFill>
-            <a:srgbClr val="FCFAF4"/>
+            <a:srgbClr val="FFFFFF"/>
           </a:solidFill>
           <a:ln/>
           <a:effectLst>
             <a:outerShdw sx="100000" sy="100000" kx="0" ky="0" algn="bl" rotWithShape="0" blurRad="127000" dist="508" dir="5400000">
-              <a:srgbClr val="8C7F6E">
+              <a:srgbClr val="7FA795">
                 <a:alpha val="25000"/>
               </a:srgbClr>
             </a:outerShdw>
@@ -13328,7 +13328,7 @@
             <a:avLst/>
           </a:prstGeom>
           <a:solidFill>
-            <a:srgbClr val="9C5446"/>
+            <a:srgbClr val="17784A"/>
           </a:solidFill>
           <a:ln/>
         </p:spPr>
@@ -13360,7 +13360,7 @@
             <a:r>
               <a:rPr lang="en-US" sz="1800" b="1" dirty="0">
                 <a:solidFill>
-                  <a:srgbClr val="FCFAF4"/>
+                  <a:srgbClr val="FFFFFF"/>
                 </a:solidFill>
                 <a:latin typeface="游明朝" pitchFamily="34" charset="0"/>
                 <a:ea typeface="游明朝" pitchFamily="34" charset="-122"/>
@@ -13402,7 +13402,7 @@
             <a:r>
               <a:rPr lang="en-US" sz="1500" b="1" dirty="0">
                 <a:solidFill>
-                  <a:srgbClr val="2B2620"/>
+                  <a:srgbClr val="123C2A"/>
                 </a:solidFill>
                 <a:latin typeface="游ゴシック" pitchFamily="34" charset="0"/>
                 <a:ea typeface="游ゴシック" pitchFamily="34" charset="-122"/>
@@ -13441,7 +13441,7 @@
             <a:r>
               <a:rPr lang="en-US" sz="3200" b="1" dirty="0">
                 <a:solidFill>
-                  <a:srgbClr val="2B2620"/>
+                  <a:srgbClr val="123C2A"/>
                 </a:solidFill>
                 <a:latin typeface="游明朝" pitchFamily="34" charset="0"/>
                 <a:ea typeface="游明朝" pitchFamily="34" charset="-122"/>
@@ -13480,7 +13480,7 @@
             <a:r>
               <a:rPr lang="en-US" sz="1000" dirty="0">
                 <a:solidFill>
-                  <a:srgbClr val="B7A991"/>
+                  <a:srgbClr val="AFD2C1"/>
                 </a:solidFill>
                 <a:latin typeface="游ゴシック" pitchFamily="34" charset="0"/>
                 <a:ea typeface="游ゴシック" pitchFamily="34" charset="-122"/>
@@ -13506,7 +13506,7 @@
     <p:bg>
       <p:bgPr>
         <a:solidFill>
-          <a:srgbClr val="2B2620"/>
+          <a:srgbClr val="123C2A"/>
         </a:solidFill>
       </p:bgPr>
     </p:bg>
@@ -13554,7 +13554,7 @@
             <a:r>
               <a:rPr lang="en-US" sz="4000" b="1" dirty="0">
                 <a:solidFill>
-                  <a:srgbClr val="ECE3D4"/>
+                  <a:srgbClr val="E8F5EE"/>
                 </a:solidFill>
                 <a:latin typeface="游明朝" pitchFamily="34" charset="0"/>
                 <a:ea typeface="游明朝" pitchFamily="34" charset="-122"/>
@@ -13574,7 +13574,7 @@
             <a:r>
               <a:rPr lang="en-US" sz="4000" b="1" dirty="0">
                 <a:solidFill>
-                  <a:srgbClr val="ECE3D4"/>
+                  <a:srgbClr val="E8F5EE"/>
                 </a:solidFill>
                 <a:latin typeface="游明朝" pitchFamily="34" charset="0"/>
                 <a:ea typeface="游明朝" pitchFamily="34" charset="-122"/>
@@ -13594,7 +13594,7 @@
             <a:r>
               <a:rPr lang="en-US" sz="4000" b="1" dirty="0">
                 <a:solidFill>
-                  <a:srgbClr val="ECE3D4"/>
+                  <a:srgbClr val="E8F5EE"/>
                 </a:solidFill>
                 <a:latin typeface="游明朝" pitchFamily="34" charset="0"/>
                 <a:ea typeface="游明朝" pitchFamily="34" charset="-122"/>
@@ -13633,7 +13633,7 @@
             <a:r>
               <a:rPr lang="en-US" sz="1400" dirty="0">
                 <a:solidFill>
-                  <a:srgbClr val="A2937F"/>
+                  <a:srgbClr val="8FB8A2"/>
                 </a:solidFill>
                 <a:latin typeface="游ゴシック" pitchFamily="34" charset="0"/>
                 <a:ea typeface="游ゴシック" pitchFamily="34" charset="-122"/>
@@ -13672,7 +13672,7 @@
             <a:r>
               <a:rPr lang="en-US" sz="1000" dirty="0">
                 <a:solidFill>
-                  <a:srgbClr val="6B5F51"/>
+                  <a:srgbClr val="3A6450"/>
                 </a:solidFill>
                 <a:latin typeface="游ゴシック" pitchFamily="34" charset="0"/>
                 <a:ea typeface="游ゴシック" pitchFamily="34" charset="-122"/>
@@ -13698,7 +13698,7 @@
     <p:bg>
       <p:bgPr>
         <a:solidFill>
-          <a:srgbClr val="ECE3D4"/>
+          <a:srgbClr val="F0FAF5"/>
         </a:solidFill>
       </p:bgPr>
     </p:bg>
@@ -13743,7 +13743,7 @@
             <a:r>
               <a:rPr lang="en-US" sz="1100" b="1" spc="200" kern="0" dirty="0">
                 <a:solidFill>
-                  <a:srgbClr val="9C5446"/>
+                  <a:srgbClr val="17784A"/>
                 </a:solidFill>
                 <a:latin typeface="游ゴシック" pitchFamily="34" charset="0"/>
                 <a:ea typeface="游ゴシック" pitchFamily="34" charset="-122"/>
@@ -13785,7 +13785,7 @@
             <a:r>
               <a:rPr lang="en-US" sz="3200" b="1" dirty="0">
                 <a:solidFill>
-                  <a:srgbClr val="2B2620"/>
+                  <a:srgbClr val="123C2A"/>
                 </a:solidFill>
                 <a:latin typeface="游明朝" pitchFamily="34" charset="0"/>
                 <a:ea typeface="游明朝" pitchFamily="34" charset="-122"/>
@@ -13814,12 +13814,12 @@
             </a:avLst>
           </a:prstGeom>
           <a:solidFill>
-            <a:srgbClr val="FCFAF4"/>
+            <a:srgbClr val="FFFFFF"/>
           </a:solidFill>
           <a:ln/>
           <a:effectLst>
             <a:outerShdw sx="100000" sy="100000" kx="0" ky="0" algn="bl" rotWithShape="0" blurRad="127000" dist="508" dir="5400000">
-              <a:srgbClr val="8C7F6E">
+              <a:srgbClr val="7FA795">
                 <a:alpha val="25000"/>
               </a:srgbClr>
             </a:outerShdw>
@@ -13853,7 +13853,7 @@
             <a:r>
               <a:rPr lang="en-US" sz="1900" b="1" dirty="0">
                 <a:solidFill>
-                  <a:srgbClr val="9C5446"/>
+                  <a:srgbClr val="17784A"/>
                 </a:solidFill>
                 <a:latin typeface="游明朝" pitchFamily="34" charset="0"/>
                 <a:ea typeface="游明朝" pitchFamily="34" charset="-122"/>
@@ -13892,7 +13892,7 @@
             <a:r>
               <a:rPr lang="en-US" sz="1500" dirty="0">
                 <a:solidFill>
-                  <a:srgbClr val="7A6E60"/>
+                  <a:srgbClr val="4F6F60"/>
                 </a:solidFill>
                 <a:latin typeface="游ゴシック" pitchFamily="34" charset="0"/>
                 <a:ea typeface="游ゴシック" pitchFamily="34" charset="-122"/>
@@ -13931,7 +13931,7 @@
             <a:r>
               <a:rPr lang="en-US" sz="1600" dirty="0">
                 <a:solidFill>
-                  <a:srgbClr val="2B2620"/>
+                  <a:srgbClr val="123C2A"/>
                 </a:solidFill>
                 <a:latin typeface="游ゴシック" pitchFamily="34" charset="0"/>
                 <a:ea typeface="游ゴシック" pitchFamily="34" charset="-122"/>
@@ -13960,12 +13960,12 @@
             </a:avLst>
           </a:prstGeom>
           <a:solidFill>
-            <a:srgbClr val="FCFAF4"/>
+            <a:srgbClr val="FFFFFF"/>
           </a:solidFill>
           <a:ln/>
           <a:effectLst>
             <a:outerShdw sx="100000" sy="100000" kx="0" ky="0" algn="bl" rotWithShape="0" blurRad="127000" dist="508" dir="5400000">
-              <a:srgbClr val="8C7F6E">
+              <a:srgbClr val="7FA795">
                 <a:alpha val="25000"/>
               </a:srgbClr>
             </a:outerShdw>
@@ -13999,7 +13999,7 @@
             <a:r>
               <a:rPr lang="en-US" sz="1900" b="1" dirty="0">
                 <a:solidFill>
-                  <a:srgbClr val="9C5446"/>
+                  <a:srgbClr val="17784A"/>
                 </a:solidFill>
                 <a:latin typeface="游明朝" pitchFamily="34" charset="0"/>
                 <a:ea typeface="游明朝" pitchFamily="34" charset="-122"/>
@@ -14038,7 +14038,7 @@
             <a:r>
               <a:rPr lang="en-US" sz="1500" dirty="0">
                 <a:solidFill>
-                  <a:srgbClr val="7A6E60"/>
+                  <a:srgbClr val="4F6F60"/>
                 </a:solidFill>
                 <a:latin typeface="游ゴシック" pitchFamily="34" charset="0"/>
                 <a:ea typeface="游ゴシック" pitchFamily="34" charset="-122"/>
@@ -14077,7 +14077,7 @@
             <a:r>
               <a:rPr lang="en-US" sz="1600" dirty="0">
                 <a:solidFill>
-                  <a:srgbClr val="2B2620"/>
+                  <a:srgbClr val="123C2A"/>
                 </a:solidFill>
                 <a:latin typeface="游ゴシック" pitchFamily="34" charset="0"/>
                 <a:ea typeface="游ゴシック" pitchFamily="34" charset="-122"/>
@@ -14106,12 +14106,12 @@
             </a:avLst>
           </a:prstGeom>
           <a:solidFill>
-            <a:srgbClr val="FCFAF4"/>
+            <a:srgbClr val="FFFFFF"/>
           </a:solidFill>
           <a:ln/>
           <a:effectLst>
             <a:outerShdw sx="100000" sy="100000" kx="0" ky="0" algn="bl" rotWithShape="0" blurRad="127000" dist="508" dir="5400000">
-              <a:srgbClr val="8C7F6E">
+              <a:srgbClr val="7FA795">
                 <a:alpha val="25000"/>
               </a:srgbClr>
             </a:outerShdw>
@@ -14145,7 +14145,7 @@
             <a:r>
               <a:rPr lang="en-US" sz="1900" b="1" dirty="0">
                 <a:solidFill>
-                  <a:srgbClr val="9C5446"/>
+                  <a:srgbClr val="17784A"/>
                 </a:solidFill>
                 <a:latin typeface="游明朝" pitchFamily="34" charset="0"/>
                 <a:ea typeface="游明朝" pitchFamily="34" charset="-122"/>
@@ -14184,7 +14184,7 @@
             <a:r>
               <a:rPr lang="en-US" sz="1500" dirty="0">
                 <a:solidFill>
-                  <a:srgbClr val="7A6E60"/>
+                  <a:srgbClr val="4F6F60"/>
                 </a:solidFill>
                 <a:latin typeface="游ゴシック" pitchFamily="34" charset="0"/>
                 <a:ea typeface="游ゴシック" pitchFamily="34" charset="-122"/>
@@ -14223,7 +14223,7 @@
             <a:r>
               <a:rPr lang="en-US" sz="1600" dirty="0">
                 <a:solidFill>
-                  <a:srgbClr val="2B2620"/>
+                  <a:srgbClr val="123C2A"/>
                 </a:solidFill>
                 <a:latin typeface="游ゴシック" pitchFamily="34" charset="0"/>
                 <a:ea typeface="游ゴシック" pitchFamily="34" charset="-122"/>
@@ -14262,7 +14262,7 @@
             <a:r>
               <a:rPr lang="en-US" sz="1150" dirty="0">
                 <a:solidFill>
-                  <a:srgbClr val="7A6E60"/>
+                  <a:srgbClr val="4F6F60"/>
                 </a:solidFill>
                 <a:latin typeface="游ゴシック" pitchFamily="34" charset="0"/>
                 <a:ea typeface="游ゴシック" pitchFamily="34" charset="-122"/>
@@ -14301,7 +14301,7 @@
             <a:r>
               <a:rPr lang="en-US" sz="1000" dirty="0">
                 <a:solidFill>
-                  <a:srgbClr val="B7A991"/>
+                  <a:srgbClr val="AFD2C1"/>
                 </a:solidFill>
                 <a:latin typeface="游ゴシック" pitchFamily="34" charset="0"/>
                 <a:ea typeface="游ゴシック" pitchFamily="34" charset="-122"/>
@@ -14327,7 +14327,7 @@
     <p:bg>
       <p:bgPr>
         <a:solidFill>
-          <a:srgbClr val="ECE3D4"/>
+          <a:srgbClr val="F0FAF5"/>
         </a:solidFill>
       </p:bgPr>
     </p:bg>
@@ -14372,7 +14372,7 @@
             <a:r>
               <a:rPr lang="en-US" sz="1100" b="1" spc="200" kern="0" dirty="0">
                 <a:solidFill>
-                  <a:srgbClr val="9C5446"/>
+                  <a:srgbClr val="17784A"/>
                 </a:solidFill>
                 <a:latin typeface="游ゴシック" pitchFamily="34" charset="0"/>
                 <a:ea typeface="游ゴシック" pitchFamily="34" charset="-122"/>
@@ -14399,7 +14399,7 @@
             <a:avLst/>
           </a:prstGeom>
           <a:solidFill>
-            <a:srgbClr val="9C5446"/>
+            <a:srgbClr val="17784A"/>
           </a:solidFill>
           <a:ln/>
         </p:spPr>
@@ -14431,7 +14431,7 @@
             <a:r>
               <a:rPr lang="en-US" sz="3000" b="1" dirty="0">
                 <a:solidFill>
-                  <a:srgbClr val="FCFAF4"/>
+                  <a:srgbClr val="FFFFFF"/>
                 </a:solidFill>
                 <a:latin typeface="游明朝" pitchFamily="34" charset="0"/>
                 <a:ea typeface="游明朝" pitchFamily="34" charset="-122"/>
@@ -14470,7 +14470,7 @@
             <a:r>
               <a:rPr lang="en-US" sz="1200" b="1" spc="200" kern="0" dirty="0">
                 <a:solidFill>
-                  <a:srgbClr val="7A6E60"/>
+                  <a:srgbClr val="4F6F60"/>
                 </a:solidFill>
                 <a:latin typeface="游ゴシック" pitchFamily="34" charset="0"/>
                 <a:ea typeface="游ゴシック" pitchFamily="34" charset="-122"/>
@@ -14509,7 +14509,7 @@
             <a:r>
               <a:rPr lang="en-US" sz="3400" b="1" dirty="0">
                 <a:solidFill>
-                  <a:srgbClr val="2B2620"/>
+                  <a:srgbClr val="123C2A"/>
                 </a:solidFill>
                 <a:latin typeface="游明朝" pitchFamily="34" charset="0"/>
                 <a:ea typeface="游明朝" pitchFamily="34" charset="-122"/>
@@ -14538,12 +14538,12 @@
             </a:avLst>
           </a:prstGeom>
           <a:solidFill>
-            <a:srgbClr val="FCFAF4"/>
+            <a:srgbClr val="FFFFFF"/>
           </a:solidFill>
           <a:ln/>
           <a:effectLst>
             <a:outerShdw sx="100000" sy="100000" kx="0" ky="0" algn="bl" rotWithShape="0" blurRad="127000" dist="508" dir="5400000">
-              <a:srgbClr val="8C7F6E">
+              <a:srgbClr val="7FA795">
                 <a:alpha val="25000"/>
               </a:srgbClr>
             </a:outerShdw>
@@ -14580,7 +14580,7 @@
             <a:r>
               <a:rPr lang="en-US" sz="2200" b="1" dirty="0">
                 <a:solidFill>
-                  <a:srgbClr val="9C5446"/>
+                  <a:srgbClr val="17784A"/>
                 </a:solidFill>
                 <a:latin typeface="游明朝" pitchFamily="34" charset="0"/>
                 <a:ea typeface="游明朝" pitchFamily="34" charset="-122"/>
@@ -14622,7 +14622,7 @@
             <a:r>
               <a:rPr lang="en-US" sz="1600" dirty="0">
                 <a:solidFill>
-                  <a:srgbClr val="2B2620"/>
+                  <a:srgbClr val="123C2A"/>
                 </a:solidFill>
                 <a:latin typeface="游ゴシック" pitchFamily="34" charset="0"/>
                 <a:ea typeface="游ゴシック" pitchFamily="34" charset="-122"/>
@@ -14642,7 +14642,7 @@
             <a:r>
               <a:rPr lang="en-US" sz="1600" dirty="0">
                 <a:solidFill>
-                  <a:srgbClr val="2B2620"/>
+                  <a:srgbClr val="123C2A"/>
                 </a:solidFill>
                 <a:latin typeface="游ゴシック" pitchFamily="34" charset="0"/>
                 <a:ea typeface="游ゴシック" pitchFamily="34" charset="-122"/>
@@ -14681,7 +14681,7 @@
             <a:r>
               <a:rPr lang="en-US" sz="1000" dirty="0">
                 <a:solidFill>
-                  <a:srgbClr val="B7A991"/>
+                  <a:srgbClr val="AFD2C1"/>
                 </a:solidFill>
                 <a:latin typeface="游ゴシック" pitchFamily="34" charset="0"/>
                 <a:ea typeface="游ゴシック" pitchFamily="34" charset="-122"/>
@@ -14707,7 +14707,7 @@
     <p:bg>
       <p:bgPr>
         <a:solidFill>
-          <a:srgbClr val="ECE3D4"/>
+          <a:srgbClr val="F0FAF5"/>
         </a:solidFill>
       </p:bgPr>
     </p:bg>
@@ -14752,7 +14752,7 @@
             <a:r>
               <a:rPr lang="en-US" sz="1100" b="1" spc="200" kern="0" dirty="0">
                 <a:solidFill>
-                  <a:srgbClr val="9C5446"/>
+                  <a:srgbClr val="17784A"/>
                 </a:solidFill>
                 <a:latin typeface="游ゴシック" pitchFamily="34" charset="0"/>
                 <a:ea typeface="游ゴシック" pitchFamily="34" charset="-122"/>
@@ -14779,7 +14779,7 @@
             <a:avLst/>
           </a:prstGeom>
           <a:solidFill>
-            <a:srgbClr val="5E7060"/>
+            <a:srgbClr val="C92A78"/>
           </a:solidFill>
           <a:ln/>
         </p:spPr>
@@ -14811,7 +14811,7 @@
             <a:r>
               <a:rPr lang="en-US" sz="3000" b="1" dirty="0">
                 <a:solidFill>
-                  <a:srgbClr val="FCFAF4"/>
+                  <a:srgbClr val="FFFFFF"/>
                 </a:solidFill>
                 <a:latin typeface="游明朝" pitchFamily="34" charset="0"/>
                 <a:ea typeface="游明朝" pitchFamily="34" charset="-122"/>
@@ -14850,7 +14850,7 @@
             <a:r>
               <a:rPr lang="en-US" sz="1200" b="1" spc="200" kern="0" dirty="0">
                 <a:solidFill>
-                  <a:srgbClr val="7A6E60"/>
+                  <a:srgbClr val="4F6F60"/>
                 </a:solidFill>
                 <a:latin typeface="游ゴシック" pitchFamily="34" charset="0"/>
                 <a:ea typeface="游ゴシック" pitchFamily="34" charset="-122"/>
@@ -14889,7 +14889,7 @@
             <a:r>
               <a:rPr lang="en-US" sz="3400" b="1" dirty="0">
                 <a:solidFill>
-                  <a:srgbClr val="2B2620"/>
+                  <a:srgbClr val="123C2A"/>
                 </a:solidFill>
                 <a:latin typeface="游明朝" pitchFamily="34" charset="0"/>
                 <a:ea typeface="游明朝" pitchFamily="34" charset="-122"/>
@@ -14918,12 +14918,12 @@
             </a:avLst>
           </a:prstGeom>
           <a:solidFill>
-            <a:srgbClr val="FCFAF4"/>
+            <a:srgbClr val="FFFFFF"/>
           </a:solidFill>
           <a:ln/>
           <a:effectLst>
             <a:outerShdw sx="100000" sy="100000" kx="0" ky="0" algn="bl" rotWithShape="0" blurRad="127000" dist="508" dir="5400000">
-              <a:srgbClr val="8C7F6E">
+              <a:srgbClr val="7FA795">
                 <a:alpha val="25000"/>
               </a:srgbClr>
             </a:outerShdw>
@@ -14960,7 +14960,7 @@
             <a:r>
               <a:rPr lang="en-US" sz="2200" b="1" dirty="0">
                 <a:solidFill>
-                  <a:srgbClr val="5E7060"/>
+                  <a:srgbClr val="C92A78"/>
                 </a:solidFill>
                 <a:latin typeface="游明朝" pitchFamily="34" charset="0"/>
                 <a:ea typeface="游明朝" pitchFamily="34" charset="-122"/>
@@ -15002,7 +15002,7 @@
             <a:r>
               <a:rPr lang="en-US" sz="1600" dirty="0">
                 <a:solidFill>
-                  <a:srgbClr val="2B2620"/>
+                  <a:srgbClr val="123C2A"/>
                 </a:solidFill>
                 <a:latin typeface="游ゴシック" pitchFamily="34" charset="0"/>
                 <a:ea typeface="游ゴシック" pitchFamily="34" charset="-122"/>
@@ -15022,7 +15022,7 @@
             <a:r>
               <a:rPr lang="en-US" sz="1600" dirty="0">
                 <a:solidFill>
-                  <a:srgbClr val="2B2620"/>
+                  <a:srgbClr val="123C2A"/>
                 </a:solidFill>
                 <a:latin typeface="游ゴシック" pitchFamily="34" charset="0"/>
                 <a:ea typeface="游ゴシック" pitchFamily="34" charset="-122"/>
@@ -15061,7 +15061,7 @@
             <a:r>
               <a:rPr lang="en-US" sz="1000" dirty="0">
                 <a:solidFill>
-                  <a:srgbClr val="B7A991"/>
+                  <a:srgbClr val="AFD2C1"/>
                 </a:solidFill>
                 <a:latin typeface="游ゴシック" pitchFamily="34" charset="0"/>
                 <a:ea typeface="游ゴシック" pitchFamily="34" charset="-122"/>
@@ -15087,7 +15087,7 @@
     <p:bg>
       <p:bgPr>
         <a:solidFill>
-          <a:srgbClr val="ECE3D4"/>
+          <a:srgbClr val="F0FAF5"/>
         </a:solidFill>
       </p:bgPr>
     </p:bg>
@@ -15132,7 +15132,7 @@
             <a:r>
               <a:rPr lang="en-US" sz="1100" b="1" spc="200" kern="0" dirty="0">
                 <a:solidFill>
-                  <a:srgbClr val="9C5446"/>
+                  <a:srgbClr val="17784A"/>
                 </a:solidFill>
                 <a:latin typeface="游ゴシック" pitchFamily="34" charset="0"/>
                 <a:ea typeface="游ゴシック" pitchFamily="34" charset="-122"/>
@@ -15159,7 +15159,7 @@
             <a:avLst/>
           </a:prstGeom>
           <a:solidFill>
-            <a:srgbClr val="9C5446"/>
+            <a:srgbClr val="17784A"/>
           </a:solidFill>
           <a:ln/>
         </p:spPr>
@@ -15191,7 +15191,7 @@
             <a:r>
               <a:rPr lang="en-US" sz="3000" b="1" dirty="0">
                 <a:solidFill>
-                  <a:srgbClr val="FCFAF4"/>
+                  <a:srgbClr val="FFFFFF"/>
                 </a:solidFill>
                 <a:latin typeface="游明朝" pitchFamily="34" charset="0"/>
                 <a:ea typeface="游明朝" pitchFamily="34" charset="-122"/>
@@ -15230,7 +15230,7 @@
             <a:r>
               <a:rPr lang="en-US" sz="1200" b="1" spc="200" kern="0" dirty="0">
                 <a:solidFill>
-                  <a:srgbClr val="7A6E60"/>
+                  <a:srgbClr val="4F6F60"/>
                 </a:solidFill>
                 <a:latin typeface="游ゴシック" pitchFamily="34" charset="0"/>
                 <a:ea typeface="游ゴシック" pitchFamily="34" charset="-122"/>
@@ -15269,7 +15269,7 @@
             <a:r>
               <a:rPr lang="en-US" sz="3400" b="1" dirty="0">
                 <a:solidFill>
-                  <a:srgbClr val="2B2620"/>
+                  <a:srgbClr val="123C2A"/>
                 </a:solidFill>
                 <a:latin typeface="游明朝" pitchFamily="34" charset="0"/>
                 <a:ea typeface="游明朝" pitchFamily="34" charset="-122"/>
@@ -15298,12 +15298,12 @@
             </a:avLst>
           </a:prstGeom>
           <a:solidFill>
-            <a:srgbClr val="FCFAF4"/>
+            <a:srgbClr val="FFFFFF"/>
           </a:solidFill>
           <a:ln/>
           <a:effectLst>
             <a:outerShdw sx="100000" sy="100000" kx="0" ky="0" algn="bl" rotWithShape="0" blurRad="127000" dist="508" dir="5400000">
-              <a:srgbClr val="8C7F6E">
+              <a:srgbClr val="7FA795">
                 <a:alpha val="25000"/>
               </a:srgbClr>
             </a:outerShdw>
@@ -15340,7 +15340,7 @@
             <a:r>
               <a:rPr lang="en-US" sz="2200" b="1" dirty="0">
                 <a:solidFill>
-                  <a:srgbClr val="9C5446"/>
+                  <a:srgbClr val="17784A"/>
                 </a:solidFill>
                 <a:latin typeface="游明朝" pitchFamily="34" charset="0"/>
                 <a:ea typeface="游明朝" pitchFamily="34" charset="-122"/>
@@ -15382,7 +15382,7 @@
             <a:r>
               <a:rPr lang="en-US" sz="1600" dirty="0">
                 <a:solidFill>
-                  <a:srgbClr val="2B2620"/>
+                  <a:srgbClr val="123C2A"/>
                 </a:solidFill>
                 <a:latin typeface="游ゴシック" pitchFamily="34" charset="0"/>
                 <a:ea typeface="游ゴシック" pitchFamily="34" charset="-122"/>
@@ -15402,7 +15402,7 @@
             <a:r>
               <a:rPr lang="en-US" sz="1600" dirty="0">
                 <a:solidFill>
-                  <a:srgbClr val="2B2620"/>
+                  <a:srgbClr val="123C2A"/>
                 </a:solidFill>
                 <a:latin typeface="游ゴシック" pitchFamily="34" charset="0"/>
                 <a:ea typeface="游ゴシック" pitchFamily="34" charset="-122"/>
@@ -15441,7 +15441,7 @@
             <a:r>
               <a:rPr lang="en-US" sz="1000" dirty="0">
                 <a:solidFill>
-                  <a:srgbClr val="B7A991"/>
+                  <a:srgbClr val="AFD2C1"/>
                 </a:solidFill>
                 <a:latin typeface="游ゴシック" pitchFamily="34" charset="0"/>
                 <a:ea typeface="游ゴシック" pitchFamily="34" charset="-122"/>
@@ -15467,7 +15467,7 @@
     <p:bg>
       <p:bgPr>
         <a:solidFill>
-          <a:srgbClr val="2B2620"/>
+          <a:srgbClr val="123C2A"/>
         </a:solidFill>
       </p:bgPr>
     </p:bg>
@@ -15512,7 +15512,7 @@
             <a:r>
               <a:rPr lang="en-US" sz="3400" b="1" dirty="0">
                 <a:solidFill>
-                  <a:srgbClr val="A2937F"/>
+                  <a:srgbClr val="8FB8A2"/>
                 </a:solidFill>
                 <a:latin typeface="游明朝" pitchFamily="34" charset="0"/>
                 <a:ea typeface="游明朝" pitchFamily="34" charset="-122"/>
@@ -15551,7 +15551,7 @@
             <a:r>
               <a:rPr lang="en-US" sz="4000" b="1" dirty="0">
                 <a:solidFill>
-                  <a:srgbClr val="ECE3D4"/>
+                  <a:srgbClr val="E8F5EE"/>
                 </a:solidFill>
                 <a:latin typeface="游明朝" pitchFamily="34" charset="0"/>
                 <a:ea typeface="游明朝" pitchFamily="34" charset="-122"/>
@@ -15590,7 +15590,7 @@
             <a:r>
               <a:rPr lang="en-US" sz="2000" dirty="0">
                 <a:solidFill>
-                  <a:srgbClr val="9C5446"/>
+                  <a:srgbClr val="34D39B"/>
                 </a:solidFill>
                 <a:latin typeface="游ゴシック" pitchFamily="34" charset="0"/>
                 <a:ea typeface="游ゴシック" pitchFamily="34" charset="-122"/>
@@ -15629,7 +15629,7 @@
             <a:r>
               <a:rPr lang="en-US" sz="1000" dirty="0">
                 <a:solidFill>
-                  <a:srgbClr val="6B5F51"/>
+                  <a:srgbClr val="3A6450"/>
                 </a:solidFill>
                 <a:latin typeface="游ゴシック" pitchFamily="34" charset="0"/>
                 <a:ea typeface="游ゴシック" pitchFamily="34" charset="-122"/>
@@ -15655,7 +15655,7 @@
     <p:bg>
       <p:bgPr>
         <a:solidFill>
-          <a:srgbClr val="ECE3D4"/>
+          <a:srgbClr val="F0FAF5"/>
         </a:solidFill>
       </p:bgPr>
     </p:bg>
@@ -15700,7 +15700,7 @@
             <a:r>
               <a:rPr lang="en-US" sz="1100" b="1" spc="200" kern="0" dirty="0">
                 <a:solidFill>
-                  <a:srgbClr val="9C5446"/>
+                  <a:srgbClr val="17784A"/>
                 </a:solidFill>
                 <a:latin typeface="游ゴシック" pitchFamily="34" charset="0"/>
                 <a:ea typeface="游ゴシック" pitchFamily="34" charset="-122"/>
@@ -15742,7 +15742,7 @@
             <a:r>
               <a:rPr lang="en-US" sz="3200" b="1" dirty="0">
                 <a:solidFill>
-                  <a:srgbClr val="2B2620"/>
+                  <a:srgbClr val="123C2A"/>
                 </a:solidFill>
                 <a:latin typeface="游明朝" pitchFamily="34" charset="0"/>
                 <a:ea typeface="游明朝" pitchFamily="34" charset="-122"/>
@@ -15771,12 +15771,12 @@
             </a:avLst>
           </a:prstGeom>
           <a:solidFill>
-            <a:srgbClr val="FCFAF4"/>
+            <a:srgbClr val="FFFFFF"/>
           </a:solidFill>
           <a:ln/>
           <a:effectLst>
             <a:outerShdw sx="100000" sy="100000" kx="0" ky="0" algn="bl" rotWithShape="0" blurRad="127000" dist="508" dir="5400000">
-              <a:srgbClr val="8C7F6E">
+              <a:srgbClr val="7FA795">
                 <a:alpha val="25000"/>
               </a:srgbClr>
             </a:outerShdw>
@@ -15813,7 +15813,7 @@
             <a:r>
               <a:rPr lang="en-US" sz="1800" dirty="0">
                 <a:solidFill>
-                  <a:srgbClr val="2B2620"/>
+                  <a:srgbClr val="123C2A"/>
                 </a:solidFill>
                 <a:latin typeface="游ゴシック" pitchFamily="34" charset="0"/>
                 <a:ea typeface="游ゴシック" pitchFamily="34" charset="-122"/>
@@ -15833,7 +15833,7 @@
             <a:r>
               <a:rPr lang="en-US" sz="1800" dirty="0">
                 <a:solidFill>
-                  <a:srgbClr val="2B2620"/>
+                  <a:srgbClr val="123C2A"/>
                 </a:solidFill>
                 <a:latin typeface="游ゴシック" pitchFamily="34" charset="0"/>
                 <a:ea typeface="游ゴシック" pitchFamily="34" charset="-122"/>
@@ -15862,7 +15862,7 @@
             <a:r>
               <a:rPr lang="en-US" sz="1800" dirty="0">
                 <a:solidFill>
-                  <a:srgbClr val="2B2620"/>
+                  <a:srgbClr val="123C2A"/>
                 </a:solidFill>
                 <a:latin typeface="游ゴシック" pitchFamily="34" charset="0"/>
                 <a:ea typeface="游ゴシック" pitchFamily="34" charset="-122"/>
@@ -15901,7 +15901,7 @@
             <a:r>
               <a:rPr lang="en-US" sz="1900" b="1" dirty="0">
                 <a:solidFill>
-                  <a:srgbClr val="5E7060"/>
+                  <a:srgbClr val="C92A78"/>
                 </a:solidFill>
                 <a:latin typeface="游明朝" pitchFamily="34" charset="0"/>
                 <a:ea typeface="游明朝" pitchFamily="34" charset="-122"/>
@@ -15940,7 +15940,7 @@
             <a:r>
               <a:rPr lang="en-US" sz="1000" dirty="0">
                 <a:solidFill>
-                  <a:srgbClr val="B7A991"/>
+                  <a:srgbClr val="AFD2C1"/>
                 </a:solidFill>
                 <a:latin typeface="游ゴシック" pitchFamily="34" charset="0"/>
                 <a:ea typeface="游ゴシック" pitchFamily="34" charset="-122"/>
@@ -15966,7 +15966,7 @@
     <p:bg>
       <p:bgPr>
         <a:solidFill>
-          <a:srgbClr val="ECE3D4"/>
+          <a:srgbClr val="F0FAF5"/>
         </a:solidFill>
       </p:bgPr>
     </p:bg>
@@ -16011,7 +16011,7 @@
             <a:r>
               <a:rPr lang="en-US" sz="1100" b="1" spc="200" kern="0" dirty="0">
                 <a:solidFill>
-                  <a:srgbClr val="9C5446"/>
+                  <a:srgbClr val="17784A"/>
                 </a:solidFill>
                 <a:latin typeface="游ゴシック" pitchFamily="34" charset="0"/>
                 <a:ea typeface="游ゴシック" pitchFamily="34" charset="-122"/>
@@ -16053,7 +16053,7 @@
             <a:r>
               <a:rPr lang="en-US" sz="3200" b="1" dirty="0">
                 <a:solidFill>
-                  <a:srgbClr val="2B2620"/>
+                  <a:srgbClr val="123C2A"/>
                 </a:solidFill>
                 <a:latin typeface="游明朝" pitchFamily="34" charset="0"/>
                 <a:ea typeface="游明朝" pitchFamily="34" charset="-122"/>
@@ -16082,12 +16082,12 @@
             </a:avLst>
           </a:prstGeom>
           <a:solidFill>
-            <a:srgbClr val="FCFAF4"/>
+            <a:srgbClr val="FFFFFF"/>
           </a:solidFill>
           <a:ln/>
           <a:effectLst>
             <a:outerShdw sx="100000" sy="100000" kx="0" ky="0" algn="bl" rotWithShape="0" blurRad="127000" dist="508" dir="5400000">
-              <a:srgbClr val="8C7F6E">
+              <a:srgbClr val="7FA795">
                 <a:alpha val="25000"/>
               </a:srgbClr>
             </a:outerShdw>
@@ -16109,7 +16109,7 @@
             <a:avLst/>
           </a:prstGeom>
           <a:solidFill>
-            <a:srgbClr val="2B2620"/>
+            <a:srgbClr val="123C2A"/>
           </a:solidFill>
           <a:ln/>
         </p:spPr>
@@ -16141,7 +16141,7 @@
             <a:r>
               <a:rPr lang="en-US" sz="1400" b="1" dirty="0">
                 <a:solidFill>
-                  <a:srgbClr val="FCFAF4"/>
+                  <a:srgbClr val="FFFFFF"/>
                 </a:solidFill>
                 <a:latin typeface="游明朝" pitchFamily="34" charset="0"/>
                 <a:ea typeface="游明朝" pitchFamily="34" charset="-122"/>
@@ -16180,7 +16180,7 @@
             <a:r>
               <a:rPr lang="en-US" sz="1700" dirty="0">
                 <a:solidFill>
-                  <a:srgbClr val="2B2620"/>
+                  <a:srgbClr val="123C2A"/>
                 </a:solidFill>
                 <a:latin typeface="游ゴシック" pitchFamily="34" charset="0"/>
                 <a:ea typeface="游ゴシック" pitchFamily="34" charset="-122"/>
@@ -16207,7 +16207,7 @@
             <a:avLst/>
           </a:prstGeom>
           <a:solidFill>
-            <a:srgbClr val="2B2620"/>
+            <a:srgbClr val="123C2A"/>
           </a:solidFill>
           <a:ln/>
         </p:spPr>
@@ -16239,7 +16239,7 @@
             <a:r>
               <a:rPr lang="en-US" sz="1400" b="1" dirty="0">
                 <a:solidFill>
-                  <a:srgbClr val="FCFAF4"/>
+                  <a:srgbClr val="FFFFFF"/>
                 </a:solidFill>
                 <a:latin typeface="游明朝" pitchFamily="34" charset="0"/>
                 <a:ea typeface="游明朝" pitchFamily="34" charset="-122"/>
@@ -16278,7 +16278,7 @@
             <a:r>
               <a:rPr lang="en-US" sz="1700" dirty="0">
                 <a:solidFill>
-                  <a:srgbClr val="2B2620"/>
+                  <a:srgbClr val="123C2A"/>
                 </a:solidFill>
                 <a:latin typeface="游ゴシック" pitchFamily="34" charset="0"/>
                 <a:ea typeface="游ゴシック" pitchFamily="34" charset="-122"/>
@@ -16305,7 +16305,7 @@
             <a:avLst/>
           </a:prstGeom>
           <a:solidFill>
-            <a:srgbClr val="9C5446"/>
+            <a:srgbClr val="17784A"/>
           </a:solidFill>
           <a:ln/>
         </p:spPr>
@@ -16337,7 +16337,7 @@
             <a:r>
               <a:rPr lang="en-US" sz="1400" b="1" dirty="0">
                 <a:solidFill>
-                  <a:srgbClr val="FCFAF4"/>
+                  <a:srgbClr val="FFFFFF"/>
                 </a:solidFill>
                 <a:latin typeface="游明朝" pitchFamily="34" charset="0"/>
                 <a:ea typeface="游明朝" pitchFamily="34" charset="-122"/>
@@ -16376,7 +16376,7 @@
             <a:r>
               <a:rPr lang="en-US" sz="1700" dirty="0">
                 <a:solidFill>
-                  <a:srgbClr val="2B2620"/>
+                  <a:srgbClr val="123C2A"/>
                 </a:solidFill>
                 <a:latin typeface="游ゴシック" pitchFamily="34" charset="0"/>
                 <a:ea typeface="游ゴシック" pitchFamily="34" charset="-122"/>
@@ -16415,7 +16415,7 @@
             <a:r>
               <a:rPr lang="en-US" sz="1700" b="1" dirty="0">
                 <a:solidFill>
-                  <a:srgbClr val="9C5446"/>
+                  <a:srgbClr val="17784A"/>
                 </a:solidFill>
                 <a:latin typeface="游明朝" pitchFamily="34" charset="0"/>
                 <a:ea typeface="游明朝" pitchFamily="34" charset="-122"/>
@@ -16454,7 +16454,7 @@
             <a:r>
               <a:rPr lang="en-US" sz="2200" b="1" dirty="0">
                 <a:solidFill>
-                  <a:srgbClr val="2B2620"/>
+                  <a:srgbClr val="123C2A"/>
                 </a:solidFill>
                 <a:latin typeface="游明朝" pitchFamily="34" charset="0"/>
                 <a:ea typeface="游明朝" pitchFamily="34" charset="-122"/>
@@ -16493,7 +16493,7 @@
             <a:r>
               <a:rPr lang="en-US" sz="1000" dirty="0">
                 <a:solidFill>
-                  <a:srgbClr val="B7A991"/>
+                  <a:srgbClr val="AFD2C1"/>
                 </a:solidFill>
                 <a:latin typeface="游ゴシック" pitchFamily="34" charset="0"/>
                 <a:ea typeface="游ゴシック" pitchFamily="34" charset="-122"/>
@@ -16519,7 +16519,7 @@
     <p:bg>
       <p:bgPr>
         <a:solidFill>
-          <a:srgbClr val="2B2620"/>
+          <a:srgbClr val="123C2A"/>
         </a:solidFill>
       </p:bgPr>
     </p:bg>
@@ -16552,11 +16552,11 @@
             <a:avLst/>
           </a:prstGeom>
           <a:solidFill>
-            <a:srgbClr val="2B2620"/>
+            <a:srgbClr val="123C2A"/>
           </a:solidFill>
           <a:ln w="38100">
             <a:solidFill>
-              <a:srgbClr val="9C5446"/>
+              <a:srgbClr val="34D39B"/>
             </a:solidFill>
             <a:prstDash val="solid"/>
           </a:ln>
@@ -16589,7 +16589,7 @@
             <a:r>
               <a:rPr lang="en-US" sz="9600" b="1" dirty="0">
                 <a:solidFill>
-                  <a:srgbClr val="ECE3D4"/>
+                  <a:srgbClr val="E8F5EE"/>
                 </a:solidFill>
                 <a:latin typeface="游明朝" pitchFamily="34" charset="0"/>
                 <a:ea typeface="游明朝" pitchFamily="34" charset="-122"/>
@@ -16628,7 +16628,7 @@
             <a:r>
               <a:rPr lang="en-US" sz="2200" b="1" dirty="0">
                 <a:solidFill>
-                  <a:srgbClr val="A2937F"/>
+                  <a:srgbClr val="8FB8A2"/>
                 </a:solidFill>
                 <a:latin typeface="游明朝" pitchFamily="34" charset="0"/>
                 <a:ea typeface="游明朝" pitchFamily="34" charset="-122"/>
@@ -16667,7 +16667,7 @@
             <a:r>
               <a:rPr lang="en-US" sz="1600" dirty="0">
                 <a:solidFill>
-                  <a:srgbClr val="A2937F"/>
+                  <a:srgbClr val="8FB8A2"/>
                 </a:solidFill>
                 <a:latin typeface="游ゴシック" pitchFamily="34" charset="0"/>
                 <a:ea typeface="游ゴシック" pitchFamily="34" charset="-122"/>
@@ -16706,7 +16706,7 @@
             <a:r>
               <a:rPr lang="en-US" sz="1000" dirty="0">
                 <a:solidFill>
-                  <a:srgbClr val="6B5F51"/>
+                  <a:srgbClr val="3A6450"/>
                 </a:solidFill>
                 <a:latin typeface="游ゴシック" pitchFamily="34" charset="0"/>
                 <a:ea typeface="游ゴシック" pitchFamily="34" charset="-122"/>
@@ -16732,7 +16732,7 @@
     <p:bg>
       <p:bgPr>
         <a:solidFill>
-          <a:srgbClr val="2B2620"/>
+          <a:srgbClr val="123C2A"/>
         </a:solidFill>
       </p:bgPr>
     </p:bg>
@@ -16765,11 +16765,11 @@
             <a:avLst/>
           </a:prstGeom>
           <a:solidFill>
-            <a:srgbClr val="2B2620"/>
+            <a:srgbClr val="123C2A"/>
           </a:solidFill>
           <a:ln w="38100">
             <a:solidFill>
-              <a:srgbClr val="A2937F"/>
+              <a:srgbClr val="8FB8A2"/>
             </a:solidFill>
             <a:prstDash val="solid"/>
           </a:ln>
@@ -16802,7 +16802,7 @@
             <a:r>
               <a:rPr lang="en-US" sz="9600" b="1" dirty="0">
                 <a:solidFill>
-                  <a:srgbClr val="A2937F"/>
+                  <a:srgbClr val="8FB8A2"/>
                 </a:solidFill>
                 <a:latin typeface="游明朝" pitchFamily="34" charset="0"/>
                 <a:ea typeface="游明朝" pitchFamily="34" charset="-122"/>
@@ -16841,7 +16841,7 @@
             <a:r>
               <a:rPr lang="en-US" sz="2000" b="1" dirty="0">
                 <a:solidFill>
-                  <a:srgbClr val="A2937F"/>
+                  <a:srgbClr val="8FB8A2"/>
                 </a:solidFill>
                 <a:latin typeface="游明朝" pitchFamily="34" charset="0"/>
                 <a:ea typeface="游明朝" pitchFamily="34" charset="-122"/>
@@ -16880,7 +16880,7 @@
             <a:r>
               <a:rPr lang="en-US" sz="2000" b="1" dirty="0">
                 <a:solidFill>
-                  <a:srgbClr val="A2937F"/>
+                  <a:srgbClr val="8FB8A2"/>
                 </a:solidFill>
                 <a:latin typeface="游明朝" pitchFamily="34" charset="0"/>
                 <a:ea typeface="游明朝" pitchFamily="34" charset="-122"/>
@@ -16919,7 +16919,7 @@
             <a:r>
               <a:rPr lang="en-US" sz="1000" dirty="0">
                 <a:solidFill>
-                  <a:srgbClr val="6B5F51"/>
+                  <a:srgbClr val="3A6450"/>
                 </a:solidFill>
                 <a:latin typeface="游ゴシック" pitchFamily="34" charset="0"/>
                 <a:ea typeface="游ゴシック" pitchFamily="34" charset="-122"/>
@@ -16945,7 +16945,7 @@
     <p:bg>
       <p:bgPr>
         <a:solidFill>
-          <a:srgbClr val="ECE3D4"/>
+          <a:srgbClr val="F0FAF5"/>
         </a:solidFill>
       </p:bgPr>
     </p:bg>
@@ -16990,7 +16990,7 @@
             <a:r>
               <a:rPr lang="en-US" sz="1100" b="1" spc="200" kern="0" dirty="0">
                 <a:solidFill>
-                  <a:srgbClr val="9C5446"/>
+                  <a:srgbClr val="17784A"/>
                 </a:solidFill>
                 <a:latin typeface="游ゴシック" pitchFamily="34" charset="0"/>
                 <a:ea typeface="游ゴシック" pitchFamily="34" charset="-122"/>
@@ -17032,7 +17032,7 @@
             <a:r>
               <a:rPr lang="en-US" sz="3200" b="1" dirty="0">
                 <a:solidFill>
-                  <a:srgbClr val="2B2620"/>
+                  <a:srgbClr val="123C2A"/>
                 </a:solidFill>
                 <a:latin typeface="游明朝" pitchFamily="34" charset="0"/>
                 <a:ea typeface="游明朝" pitchFamily="34" charset="-122"/>
@@ -17071,7 +17071,7 @@
             <a:r>
               <a:rPr lang="en-US" sz="3600" b="1" dirty="0">
                 <a:solidFill>
-                  <a:srgbClr val="9C5446"/>
+                  <a:srgbClr val="17784A"/>
                 </a:solidFill>
                 <a:latin typeface="游明朝" pitchFamily="34" charset="0"/>
                 <a:ea typeface="游明朝" pitchFamily="34" charset="-122"/>
@@ -17100,12 +17100,12 @@
             </a:avLst>
           </a:prstGeom>
           <a:solidFill>
-            <a:srgbClr val="FCFAF4"/>
+            <a:srgbClr val="FFFFFF"/>
           </a:solidFill>
           <a:ln/>
           <a:effectLst>
             <a:outerShdw sx="100000" sy="100000" kx="0" ky="0" algn="bl" rotWithShape="0" blurRad="127000" dist="508" dir="5400000">
-              <a:srgbClr val="8C7F6E">
+              <a:srgbClr val="7FA795">
                 <a:alpha val="25000"/>
               </a:srgbClr>
             </a:outerShdw>
@@ -17142,7 +17142,7 @@
             <a:r>
               <a:rPr lang="en-US" sz="1800" dirty="0">
                 <a:solidFill>
-                  <a:srgbClr val="2B2620"/>
+                  <a:srgbClr val="123C2A"/>
                 </a:solidFill>
                 <a:latin typeface="游ゴシック" pitchFamily="34" charset="0"/>
                 <a:ea typeface="游ゴシック" pitchFamily="34" charset="-122"/>
@@ -17162,7 +17162,7 @@
             <a:r>
               <a:rPr lang="en-US" sz="1800" dirty="0">
                 <a:solidFill>
-                  <a:srgbClr val="2B2620"/>
+                  <a:srgbClr val="123C2A"/>
                 </a:solidFill>
                 <a:latin typeface="游ゴシック" pitchFamily="34" charset="0"/>
                 <a:ea typeface="游ゴシック" pitchFamily="34" charset="-122"/>
@@ -17191,7 +17191,7 @@
             </a:avLst>
           </a:prstGeom>
           <a:solidFill>
-            <a:srgbClr val="5E7060"/>
+            <a:srgbClr val="34D39B"/>
           </a:solidFill>
           <a:ln/>
         </p:spPr>
@@ -17223,7 +17223,7 @@
             <a:r>
               <a:rPr lang="en-US" sz="1700" b="1" dirty="0">
                 <a:solidFill>
-                  <a:srgbClr val="FFFFFF"/>
+                  <a:srgbClr val="123C2A"/>
                 </a:solidFill>
                 <a:latin typeface="游ゴシック" pitchFamily="34" charset="0"/>
                 <a:ea typeface="游ゴシック" pitchFamily="34" charset="-122"/>
@@ -17262,7 +17262,7 @@
             <a:r>
               <a:rPr lang="en-US" sz="1000" dirty="0">
                 <a:solidFill>
-                  <a:srgbClr val="B7A991"/>
+                  <a:srgbClr val="AFD2C1"/>
                 </a:solidFill>
                 <a:latin typeface="游ゴシック" pitchFamily="34" charset="0"/>
                 <a:ea typeface="游ゴシック" pitchFamily="34" charset="-122"/>
@@ -17288,7 +17288,7 @@
     <p:bg>
       <p:bgPr>
         <a:solidFill>
-          <a:srgbClr val="2B2620"/>
+          <a:srgbClr val="123C2A"/>
         </a:solidFill>
       </p:bgPr>
     </p:bg>
@@ -17333,7 +17333,7 @@
             <a:r>
               <a:rPr lang="en-US" sz="19000" b="1" dirty="0">
                 <a:solidFill>
-                  <a:srgbClr val="9C5446"/>
+                  <a:srgbClr val="F15C9E"/>
                 </a:solidFill>
                 <a:latin typeface="游明朝" pitchFamily="34" charset="0"/>
                 <a:ea typeface="游明朝" pitchFamily="34" charset="-122"/>
@@ -17372,7 +17372,7 @@
             <a:r>
               <a:rPr lang="en-US" sz="3000" b="1" dirty="0">
                 <a:solidFill>
-                  <a:srgbClr val="ECE3D4"/>
+                  <a:srgbClr val="E8F5EE"/>
                 </a:solidFill>
                 <a:latin typeface="游明朝" pitchFamily="34" charset="0"/>
                 <a:ea typeface="游明朝" pitchFamily="34" charset="-122"/>
@@ -17414,7 +17414,7 @@
             <a:r>
               <a:rPr lang="en-US" sz="2200" b="1" dirty="0">
                 <a:solidFill>
-                  <a:srgbClr val="ECE3D4"/>
+                  <a:srgbClr val="E8F5EE"/>
                 </a:solidFill>
                 <a:latin typeface="游明朝" pitchFamily="34" charset="0"/>
                 <a:ea typeface="游明朝" pitchFamily="34" charset="-122"/>
@@ -17456,7 +17456,7 @@
             <a:r>
               <a:rPr lang="en-US" sz="1400" dirty="0">
                 <a:solidFill>
-                  <a:srgbClr val="A2937F"/>
+                  <a:srgbClr val="8FB8A2"/>
                 </a:solidFill>
                 <a:latin typeface="游ゴシック" pitchFamily="34" charset="0"/>
                 <a:ea typeface="游ゴシック" pitchFamily="34" charset="-122"/>
@@ -17476,7 +17476,7 @@
             <a:r>
               <a:rPr lang="en-US" sz="1400" dirty="0">
                 <a:solidFill>
-                  <a:srgbClr val="A2937F"/>
+                  <a:srgbClr val="8FB8A2"/>
                 </a:solidFill>
                 <a:latin typeface="游ゴシック" pitchFamily="34" charset="0"/>
                 <a:ea typeface="游ゴシック" pitchFamily="34" charset="-122"/>
@@ -17518,7 +17518,7 @@
             <a:r>
               <a:rPr lang="en-US" sz="950" dirty="0">
                 <a:solidFill>
-                  <a:srgbClr val="6B5F51"/>
+                  <a:srgbClr val="8FB8A2"/>
                 </a:solidFill>
                 <a:latin typeface="游ゴシック" pitchFamily="34" charset="0"/>
                 <a:ea typeface="游ゴシック" pitchFamily="34" charset="-122"/>
@@ -17557,7 +17557,7 @@
             <a:r>
               <a:rPr lang="en-US" sz="2100" b="1" dirty="0">
                 <a:solidFill>
-                  <a:srgbClr val="ECE3D4"/>
+                  <a:srgbClr val="E8F5EE"/>
                 </a:solidFill>
                 <a:latin typeface="游明朝" pitchFamily="34" charset="0"/>
                 <a:ea typeface="游明朝" pitchFamily="34" charset="-122"/>
@@ -17596,7 +17596,7 @@
             <a:r>
               <a:rPr lang="en-US" sz="1000" dirty="0">
                 <a:solidFill>
-                  <a:srgbClr val="6B5F51"/>
+                  <a:srgbClr val="3A6450"/>
                 </a:solidFill>
                 <a:latin typeface="游ゴシック" pitchFamily="34" charset="0"/>
                 <a:ea typeface="游ゴシック" pitchFamily="34" charset="-122"/>
@@ -17622,7 +17622,7 @@
     <p:bg>
       <p:bgPr>
         <a:solidFill>
-          <a:srgbClr val="ECE3D4"/>
+          <a:srgbClr val="F0FAF5"/>
         </a:solidFill>
       </p:bgPr>
     </p:bg>
@@ -17667,7 +17667,7 @@
             <a:r>
               <a:rPr lang="en-US" sz="1100" b="1" spc="200" kern="0" dirty="0">
                 <a:solidFill>
-                  <a:srgbClr val="9C5446"/>
+                  <a:srgbClr val="17784A"/>
                 </a:solidFill>
                 <a:latin typeface="游ゴシック" pitchFamily="34" charset="0"/>
                 <a:ea typeface="游ゴシック" pitchFamily="34" charset="-122"/>
@@ -17709,7 +17709,7 @@
             <a:r>
               <a:rPr lang="en-US" sz="3200" b="1" dirty="0">
                 <a:solidFill>
-                  <a:srgbClr val="2B2620"/>
+                  <a:srgbClr val="123C2A"/>
                 </a:solidFill>
                 <a:latin typeface="游明朝" pitchFamily="34" charset="0"/>
                 <a:ea typeface="游明朝" pitchFamily="34" charset="-122"/>
@@ -17738,12 +17738,12 @@
             </a:avLst>
           </a:prstGeom>
           <a:solidFill>
-            <a:srgbClr val="FCFAF4"/>
+            <a:srgbClr val="FFFFFF"/>
           </a:solidFill>
           <a:ln/>
           <a:effectLst>
             <a:outerShdw sx="100000" sy="100000" kx="0" ky="0" algn="bl" rotWithShape="0" blurRad="127000" dist="508" dir="5400000">
-              <a:srgbClr val="8C7F6E">
+              <a:srgbClr val="7FA795">
                 <a:alpha val="25000"/>
               </a:srgbClr>
             </a:outerShdw>
@@ -17780,7 +17780,7 @@
             <a:r>
               <a:rPr lang="en-US" sz="1800" dirty="0">
                 <a:solidFill>
-                  <a:srgbClr val="2B2620"/>
+                  <a:srgbClr val="123C2A"/>
                 </a:solidFill>
                 <a:latin typeface="游ゴシック" pitchFamily="34" charset="0"/>
                 <a:ea typeface="游ゴシック" pitchFamily="34" charset="-122"/>
@@ -17800,7 +17800,7 @@
             <a:r>
               <a:rPr lang="en-US" sz="1800" dirty="0">
                 <a:solidFill>
-                  <a:srgbClr val="2B2620"/>
+                  <a:srgbClr val="123C2A"/>
                 </a:solidFill>
                 <a:latin typeface="游ゴシック" pitchFamily="34" charset="0"/>
                 <a:ea typeface="游ゴシック" pitchFamily="34" charset="-122"/>
@@ -17829,7 +17829,7 @@
             <a:r>
               <a:rPr lang="en-US" sz="1800" dirty="0">
                 <a:solidFill>
-                  <a:srgbClr val="2B2620"/>
+                  <a:srgbClr val="123C2A"/>
                 </a:solidFill>
                 <a:latin typeface="游ゴシック" pitchFamily="34" charset="0"/>
                 <a:ea typeface="游ゴシック" pitchFamily="34" charset="-122"/>
@@ -17868,7 +17868,7 @@
             <a:r>
               <a:rPr lang="en-US" sz="2600" b="1" dirty="0">
                 <a:solidFill>
-                  <a:srgbClr val="9C5446"/>
+                  <a:srgbClr val="17784A"/>
                 </a:solidFill>
                 <a:latin typeface="游明朝" pitchFamily="34" charset="0"/>
                 <a:ea typeface="游明朝" pitchFamily="34" charset="-122"/>
@@ -17907,7 +17907,7 @@
             <a:r>
               <a:rPr lang="en-US" sz="1000" dirty="0">
                 <a:solidFill>
-                  <a:srgbClr val="B7A991"/>
+                  <a:srgbClr val="AFD2C1"/>
                 </a:solidFill>
                 <a:latin typeface="游ゴシック" pitchFamily="34" charset="0"/>
                 <a:ea typeface="游ゴシック" pitchFamily="34" charset="-122"/>
@@ -17933,7 +17933,7 @@
     <p:bg>
       <p:bgPr>
         <a:solidFill>
-          <a:srgbClr val="2B2620"/>
+          <a:srgbClr val="123C2A"/>
         </a:solidFill>
       </p:bgPr>
     </p:bg>
@@ -17966,11 +17966,11 @@
             <a:avLst/>
           </a:prstGeom>
           <a:solidFill>
-            <a:srgbClr val="2B2620"/>
+            <a:srgbClr val="123C2A"/>
           </a:solidFill>
           <a:ln w="31750">
             <a:solidFill>
-              <a:srgbClr val="4A4239"/>
+              <a:srgbClr val="2C6448"/>
             </a:solidFill>
             <a:prstDash val="solid"/>
           </a:ln>
@@ -18003,7 +18003,7 @@
             <a:r>
               <a:rPr lang="en-US" sz="8800" b="1" dirty="0">
                 <a:solidFill>
-                  <a:srgbClr val="ECE3D4"/>
+                  <a:srgbClr val="E8F5EE"/>
                 </a:solidFill>
                 <a:latin typeface="游明朝" pitchFamily="34" charset="0"/>
                 <a:ea typeface="游明朝" pitchFamily="34" charset="-122"/>
@@ -18042,7 +18042,7 @@
             <a:r>
               <a:rPr lang="en-US" sz="1300" dirty="0">
                 <a:solidFill>
-                  <a:srgbClr val="6B5F51"/>
+                  <a:srgbClr val="8FB8A2"/>
                 </a:solidFill>
                 <a:latin typeface="游ゴシック" pitchFamily="34" charset="0"/>
                 <a:ea typeface="游ゴシック" pitchFamily="34" charset="-122"/>
@@ -18081,7 +18081,7 @@
             <a:r>
               <a:rPr lang="en-US" sz="1000" dirty="0">
                 <a:solidFill>
-                  <a:srgbClr val="6B5F51"/>
+                  <a:srgbClr val="3A6450"/>
                 </a:solidFill>
                 <a:latin typeface="游ゴシック" pitchFamily="34" charset="0"/>
                 <a:ea typeface="游ゴシック" pitchFamily="34" charset="-122"/>
@@ -18107,7 +18107,7 @@
     <p:bg>
       <p:bgPr>
         <a:solidFill>
-          <a:srgbClr val="2B2620"/>
+          <a:srgbClr val="123C2A"/>
         </a:solidFill>
       </p:bgPr>
     </p:bg>
@@ -18140,11 +18140,11 @@
             <a:avLst/>
           </a:prstGeom>
           <a:solidFill>
-            <a:srgbClr val="2B2620"/>
+            <a:srgbClr val="123C2A"/>
           </a:solidFill>
           <a:ln w="31750">
             <a:solidFill>
-              <a:srgbClr val="4A4239"/>
+              <a:srgbClr val="2C6448"/>
             </a:solidFill>
             <a:prstDash val="solid"/>
           </a:ln>
@@ -18177,7 +18177,7 @@
             <a:r>
               <a:rPr lang="en-US" sz="8800" b="1" dirty="0">
                 <a:solidFill>
-                  <a:srgbClr val="ECE3D4"/>
+                  <a:srgbClr val="E8F5EE"/>
                 </a:solidFill>
                 <a:latin typeface="游明朝" pitchFamily="34" charset="0"/>
                 <a:ea typeface="游明朝" pitchFamily="34" charset="-122"/>
@@ -18216,7 +18216,7 @@
             <a:r>
               <a:rPr lang="en-US" sz="1300" dirty="0">
                 <a:solidFill>
-                  <a:srgbClr val="6B5F51"/>
+                  <a:srgbClr val="8FB8A2"/>
                 </a:solidFill>
                 <a:latin typeface="游ゴシック" pitchFamily="34" charset="0"/>
                 <a:ea typeface="游ゴシック" pitchFamily="34" charset="-122"/>
@@ -18255,7 +18255,7 @@
             <a:r>
               <a:rPr lang="en-US" sz="1000" dirty="0">
                 <a:solidFill>
-                  <a:srgbClr val="6B5F51"/>
+                  <a:srgbClr val="3A6450"/>
                 </a:solidFill>
                 <a:latin typeface="游ゴシック" pitchFamily="34" charset="0"/>
                 <a:ea typeface="游ゴシック" pitchFamily="34" charset="-122"/>
@@ -18281,7 +18281,7 @@
     <p:bg>
       <p:bgPr>
         <a:solidFill>
-          <a:srgbClr val="2B2620"/>
+          <a:srgbClr val="123C2A"/>
         </a:solidFill>
       </p:bgPr>
     </p:bg>
@@ -18314,11 +18314,11 @@
             <a:avLst/>
           </a:prstGeom>
           <a:solidFill>
-            <a:srgbClr val="2B2620"/>
+            <a:srgbClr val="123C2A"/>
           </a:solidFill>
           <a:ln w="31750">
             <a:solidFill>
-              <a:srgbClr val="4A4239"/>
+              <a:srgbClr val="2C6448"/>
             </a:solidFill>
             <a:prstDash val="solid"/>
           </a:ln>
@@ -18351,7 +18351,7 @@
             <a:r>
               <a:rPr lang="en-US" sz="8800" b="1" dirty="0">
                 <a:solidFill>
-                  <a:srgbClr val="ECE3D4"/>
+                  <a:srgbClr val="E8F5EE"/>
                 </a:solidFill>
                 <a:latin typeface="游明朝" pitchFamily="34" charset="0"/>
                 <a:ea typeface="游明朝" pitchFamily="34" charset="-122"/>
@@ -18390,7 +18390,7 @@
             <a:r>
               <a:rPr lang="en-US" sz="1300" dirty="0">
                 <a:solidFill>
-                  <a:srgbClr val="6B5F51"/>
+                  <a:srgbClr val="8FB8A2"/>
                 </a:solidFill>
                 <a:latin typeface="游ゴシック" pitchFamily="34" charset="0"/>
                 <a:ea typeface="游ゴシック" pitchFamily="34" charset="-122"/>
@@ -18429,7 +18429,7 @@
             <a:r>
               <a:rPr lang="en-US" sz="1000" dirty="0">
                 <a:solidFill>
-                  <a:srgbClr val="6B5F51"/>
+                  <a:srgbClr val="3A6450"/>
                 </a:solidFill>
                 <a:latin typeface="游ゴシック" pitchFamily="34" charset="0"/>
                 <a:ea typeface="游ゴシック" pitchFamily="34" charset="-122"/>
@@ -18455,7 +18455,7 @@
     <p:bg>
       <p:bgPr>
         <a:solidFill>
-          <a:srgbClr val="2B2620"/>
+          <a:srgbClr val="123C2A"/>
         </a:solidFill>
       </p:bgPr>
     </p:bg>
@@ -18488,11 +18488,11 @@
             <a:avLst/>
           </a:prstGeom>
           <a:solidFill>
-            <a:srgbClr val="2B2620"/>
+            <a:srgbClr val="123C2A"/>
           </a:solidFill>
           <a:ln w="31750">
             <a:solidFill>
-              <a:srgbClr val="4A4239"/>
+              <a:srgbClr val="2C6448"/>
             </a:solidFill>
             <a:prstDash val="solid"/>
           </a:ln>
@@ -18525,7 +18525,7 @@
             <a:r>
               <a:rPr lang="en-US" sz="8800" b="1" dirty="0">
                 <a:solidFill>
-                  <a:srgbClr val="ECE3D4"/>
+                  <a:srgbClr val="E8F5EE"/>
                 </a:solidFill>
                 <a:latin typeface="游明朝" pitchFamily="34" charset="0"/>
                 <a:ea typeface="游明朝" pitchFamily="34" charset="-122"/>
@@ -18564,7 +18564,7 @@
             <a:r>
               <a:rPr lang="en-US" sz="1300" dirty="0">
                 <a:solidFill>
-                  <a:srgbClr val="6B5F51"/>
+                  <a:srgbClr val="8FB8A2"/>
                 </a:solidFill>
                 <a:latin typeface="游ゴシック" pitchFamily="34" charset="0"/>
                 <a:ea typeface="游ゴシック" pitchFamily="34" charset="-122"/>
@@ -18603,7 +18603,7 @@
             <a:r>
               <a:rPr lang="en-US" sz="1000" dirty="0">
                 <a:solidFill>
-                  <a:srgbClr val="6B5F51"/>
+                  <a:srgbClr val="3A6450"/>
                 </a:solidFill>
                 <a:latin typeface="游ゴシック" pitchFamily="34" charset="0"/>
                 <a:ea typeface="游ゴシック" pitchFamily="34" charset="-122"/>
@@ -18629,7 +18629,7 @@
     <p:bg>
       <p:bgPr>
         <a:solidFill>
-          <a:srgbClr val="2B2620"/>
+          <a:srgbClr val="123C2A"/>
         </a:solidFill>
       </p:bgPr>
     </p:bg>
@@ -18662,11 +18662,11 @@
             <a:avLst/>
           </a:prstGeom>
           <a:solidFill>
-            <a:srgbClr val="2B2620"/>
+            <a:srgbClr val="123C2A"/>
           </a:solidFill>
           <a:ln w="31750">
             <a:solidFill>
-              <a:srgbClr val="4A4239"/>
+              <a:srgbClr val="2C6448"/>
             </a:solidFill>
             <a:prstDash val="solid"/>
           </a:ln>
@@ -18699,7 +18699,7 @@
             <a:r>
               <a:rPr lang="en-US" sz="8800" b="1" dirty="0">
                 <a:solidFill>
-                  <a:srgbClr val="ECE3D4"/>
+                  <a:srgbClr val="E8F5EE"/>
                 </a:solidFill>
                 <a:latin typeface="游明朝" pitchFamily="34" charset="0"/>
                 <a:ea typeface="游明朝" pitchFamily="34" charset="-122"/>
@@ -18738,7 +18738,7 @@
             <a:r>
               <a:rPr lang="en-US" sz="1300" dirty="0">
                 <a:solidFill>
-                  <a:srgbClr val="6B5F51"/>
+                  <a:srgbClr val="8FB8A2"/>
                 </a:solidFill>
                 <a:latin typeface="游ゴシック" pitchFamily="34" charset="0"/>
                 <a:ea typeface="游ゴシック" pitchFamily="34" charset="-122"/>
@@ -18777,7 +18777,7 @@
             <a:r>
               <a:rPr lang="en-US" sz="1000" dirty="0">
                 <a:solidFill>
-                  <a:srgbClr val="6B5F51"/>
+                  <a:srgbClr val="3A6450"/>
                 </a:solidFill>
                 <a:latin typeface="游ゴシック" pitchFamily="34" charset="0"/>
                 <a:ea typeface="游ゴシック" pitchFamily="34" charset="-122"/>
@@ -18803,7 +18803,7 @@
     <p:bg>
       <p:bgPr>
         <a:solidFill>
-          <a:srgbClr val="2B2620"/>
+          <a:srgbClr val="123C2A"/>
         </a:solidFill>
       </p:bgPr>
     </p:bg>
@@ -18836,11 +18836,11 @@
             <a:avLst/>
           </a:prstGeom>
           <a:solidFill>
-            <a:srgbClr val="2B2620"/>
+            <a:srgbClr val="123C2A"/>
           </a:solidFill>
           <a:ln w="31750">
             <a:solidFill>
-              <a:srgbClr val="4A4239"/>
+              <a:srgbClr val="2C6448"/>
             </a:solidFill>
             <a:prstDash val="solid"/>
           </a:ln>
@@ -18873,7 +18873,7 @@
             <a:r>
               <a:rPr lang="en-US" sz="8800" b="1" dirty="0">
                 <a:solidFill>
-                  <a:srgbClr val="ECE3D4"/>
+                  <a:srgbClr val="E8F5EE"/>
                 </a:solidFill>
                 <a:latin typeface="游明朝" pitchFamily="34" charset="0"/>
                 <a:ea typeface="游明朝" pitchFamily="34" charset="-122"/>
@@ -18912,7 +18912,7 @@
             <a:r>
               <a:rPr lang="en-US" sz="1300" dirty="0">
                 <a:solidFill>
-                  <a:srgbClr val="6B5F51"/>
+                  <a:srgbClr val="8FB8A2"/>
                 </a:solidFill>
                 <a:latin typeface="游ゴシック" pitchFamily="34" charset="0"/>
                 <a:ea typeface="游ゴシック" pitchFamily="34" charset="-122"/>
@@ -18951,7 +18951,7 @@
             <a:r>
               <a:rPr lang="en-US" sz="1000" dirty="0">
                 <a:solidFill>
-                  <a:srgbClr val="6B5F51"/>
+                  <a:srgbClr val="3A6450"/>
                 </a:solidFill>
                 <a:latin typeface="游ゴシック" pitchFamily="34" charset="0"/>
                 <a:ea typeface="游ゴシック" pitchFamily="34" charset="-122"/>
@@ -18977,7 +18977,7 @@
     <p:bg>
       <p:bgPr>
         <a:solidFill>
-          <a:srgbClr val="2B2620"/>
+          <a:srgbClr val="123C2A"/>
         </a:solidFill>
       </p:bgPr>
     </p:bg>
@@ -19010,11 +19010,11 @@
             <a:avLst/>
           </a:prstGeom>
           <a:solidFill>
-            <a:srgbClr val="2B2620"/>
+            <a:srgbClr val="123C2A"/>
           </a:solidFill>
           <a:ln w="31750">
             <a:solidFill>
-              <a:srgbClr val="4A4239"/>
+              <a:srgbClr val="2C6448"/>
             </a:solidFill>
             <a:prstDash val="solid"/>
           </a:ln>
@@ -19047,7 +19047,7 @@
             <a:r>
               <a:rPr lang="en-US" sz="8800" b="1" dirty="0">
                 <a:solidFill>
-                  <a:srgbClr val="ECE3D4"/>
+                  <a:srgbClr val="E8F5EE"/>
                 </a:solidFill>
                 <a:latin typeface="游明朝" pitchFamily="34" charset="0"/>
                 <a:ea typeface="游明朝" pitchFamily="34" charset="-122"/>
@@ -19086,7 +19086,7 @@
             <a:r>
               <a:rPr lang="en-US" sz="1300" dirty="0">
                 <a:solidFill>
-                  <a:srgbClr val="6B5F51"/>
+                  <a:srgbClr val="8FB8A2"/>
                 </a:solidFill>
                 <a:latin typeface="游ゴシック" pitchFamily="34" charset="0"/>
                 <a:ea typeface="游ゴシック" pitchFamily="34" charset="-122"/>
@@ -19125,7 +19125,7 @@
             <a:r>
               <a:rPr lang="en-US" sz="1000" dirty="0">
                 <a:solidFill>
-                  <a:srgbClr val="6B5F51"/>
+                  <a:srgbClr val="3A6450"/>
                 </a:solidFill>
                 <a:latin typeface="游ゴシック" pitchFamily="34" charset="0"/>
                 <a:ea typeface="游ゴシック" pitchFamily="34" charset="-122"/>
@@ -19151,7 +19151,7 @@
     <p:bg>
       <p:bgPr>
         <a:solidFill>
-          <a:srgbClr val="2B2620"/>
+          <a:srgbClr val="123C2A"/>
         </a:solidFill>
       </p:bgPr>
     </p:bg>
@@ -19184,11 +19184,11 @@
             <a:avLst/>
           </a:prstGeom>
           <a:solidFill>
-            <a:srgbClr val="2B2620"/>
+            <a:srgbClr val="123C2A"/>
           </a:solidFill>
           <a:ln w="31750">
             <a:solidFill>
-              <a:srgbClr val="9C5446"/>
+              <a:srgbClr val="F15C9E"/>
             </a:solidFill>
             <a:prstDash val="solid"/>
           </a:ln>
@@ -19221,7 +19221,7 @@
             <a:r>
               <a:rPr lang="en-US" sz="8800" b="1" dirty="0">
                 <a:solidFill>
-                  <a:srgbClr val="9C5446"/>
+                  <a:srgbClr val="F15C9E"/>
                 </a:solidFill>
                 <a:latin typeface="游明朝" pitchFamily="34" charset="0"/>
                 <a:ea typeface="游明朝" pitchFamily="34" charset="-122"/>
@@ -19260,7 +19260,7 @@
             <a:r>
               <a:rPr lang="en-US" sz="1300" dirty="0">
                 <a:solidFill>
-                  <a:srgbClr val="6B5F51"/>
+                  <a:srgbClr val="8FB8A2"/>
                 </a:solidFill>
                 <a:latin typeface="游ゴシック" pitchFamily="34" charset="0"/>
                 <a:ea typeface="游ゴシック" pitchFamily="34" charset="-122"/>
@@ -19299,7 +19299,7 @@
             <a:r>
               <a:rPr lang="en-US" sz="1000" dirty="0">
                 <a:solidFill>
-                  <a:srgbClr val="6B5F51"/>
+                  <a:srgbClr val="3A6450"/>
                 </a:solidFill>
                 <a:latin typeface="游ゴシック" pitchFamily="34" charset="0"/>
                 <a:ea typeface="游ゴシック" pitchFamily="34" charset="-122"/>
@@ -19325,7 +19325,7 @@
     <p:bg>
       <p:bgPr>
         <a:solidFill>
-          <a:srgbClr val="2B2620"/>
+          <a:srgbClr val="123C2A"/>
         </a:solidFill>
       </p:bgPr>
     </p:bg>
@@ -19358,11 +19358,11 @@
             <a:avLst/>
           </a:prstGeom>
           <a:solidFill>
-            <a:srgbClr val="2B2620"/>
+            <a:srgbClr val="123C2A"/>
           </a:solidFill>
           <a:ln w="31750">
             <a:solidFill>
-              <a:srgbClr val="9C5446"/>
+              <a:srgbClr val="F15C9E"/>
             </a:solidFill>
             <a:prstDash val="solid"/>
           </a:ln>
@@ -19395,7 +19395,7 @@
             <a:r>
               <a:rPr lang="en-US" sz="8800" b="1" dirty="0">
                 <a:solidFill>
-                  <a:srgbClr val="9C5446"/>
+                  <a:srgbClr val="F15C9E"/>
                 </a:solidFill>
                 <a:latin typeface="游明朝" pitchFamily="34" charset="0"/>
                 <a:ea typeface="游明朝" pitchFamily="34" charset="-122"/>
@@ -19434,7 +19434,7 @@
             <a:r>
               <a:rPr lang="en-US" sz="1300" dirty="0">
                 <a:solidFill>
-                  <a:srgbClr val="6B5F51"/>
+                  <a:srgbClr val="8FB8A2"/>
                 </a:solidFill>
                 <a:latin typeface="游ゴシック" pitchFamily="34" charset="0"/>
                 <a:ea typeface="游ゴシック" pitchFamily="34" charset="-122"/>
@@ -19473,7 +19473,7 @@
             <a:r>
               <a:rPr lang="en-US" sz="1000" dirty="0">
                 <a:solidFill>
-                  <a:srgbClr val="6B5F51"/>
+                  <a:srgbClr val="3A6450"/>
                 </a:solidFill>
                 <a:latin typeface="游ゴシック" pitchFamily="34" charset="0"/>
                 <a:ea typeface="游ゴシック" pitchFamily="34" charset="-122"/>
@@ -19499,7 +19499,7 @@
     <p:bg>
       <p:bgPr>
         <a:solidFill>
-          <a:srgbClr val="ECE3D4"/>
+          <a:srgbClr val="F0FAF5"/>
         </a:solidFill>
       </p:bgPr>
     </p:bg>
@@ -19544,7 +19544,7 @@
             <a:r>
               <a:rPr lang="en-US" sz="1100" b="1" spc="200" kern="0" dirty="0">
                 <a:solidFill>
-                  <a:srgbClr val="9C5446"/>
+                  <a:srgbClr val="17784A"/>
                 </a:solidFill>
                 <a:latin typeface="游ゴシック" pitchFamily="34" charset="0"/>
                 <a:ea typeface="游ゴシック" pitchFamily="34" charset="-122"/>
@@ -19586,7 +19586,7 @@
             <a:r>
               <a:rPr lang="en-US" sz="3200" b="1" dirty="0">
                 <a:solidFill>
-                  <a:srgbClr val="2B2620"/>
+                  <a:srgbClr val="123C2A"/>
                 </a:solidFill>
                 <a:latin typeface="游明朝" pitchFamily="34" charset="0"/>
                 <a:ea typeface="游明朝" pitchFamily="34" charset="-122"/>
@@ -19615,12 +19615,12 @@
             </a:avLst>
           </a:prstGeom>
           <a:solidFill>
-            <a:srgbClr val="FCFAF4"/>
+            <a:srgbClr val="FFFFFF"/>
           </a:solidFill>
           <a:ln/>
           <a:effectLst>
             <a:outerShdw sx="100000" sy="100000" kx="0" ky="0" algn="bl" rotWithShape="0" blurRad="127000" dist="508" dir="5400000">
-              <a:srgbClr val="8C7F6E">
+              <a:srgbClr val="7FA795">
                 <a:alpha val="25000"/>
               </a:srgbClr>
             </a:outerShdw>
@@ -19654,7 +19654,7 @@
             <a:r>
               <a:rPr lang="en-US" sz="1800" b="1" dirty="0">
                 <a:solidFill>
-                  <a:srgbClr val="2B2620"/>
+                  <a:srgbClr val="123C2A"/>
                 </a:solidFill>
                 <a:latin typeface="游明朝" pitchFamily="34" charset="0"/>
                 <a:ea typeface="游明朝" pitchFamily="34" charset="-122"/>
@@ -19696,7 +19696,7 @@
             <a:r>
               <a:rPr lang="en-US" sz="1500" dirty="0">
                 <a:solidFill>
-                  <a:srgbClr val="2B2620"/>
+                  <a:srgbClr val="123C2A"/>
                 </a:solidFill>
                 <a:latin typeface="游ゴシック" pitchFamily="34" charset="0"/>
                 <a:ea typeface="游ゴシック" pitchFamily="34" charset="-122"/>
@@ -19716,7 +19716,7 @@
             <a:r>
               <a:rPr lang="en-US" sz="1500" dirty="0">
                 <a:solidFill>
-                  <a:srgbClr val="2B2620"/>
+                  <a:srgbClr val="123C2A"/>
                 </a:solidFill>
                 <a:latin typeface="游ゴシック" pitchFamily="34" charset="0"/>
                 <a:ea typeface="游ゴシック" pitchFamily="34" charset="-122"/>
@@ -19745,7 +19745,7 @@
             <a:r>
               <a:rPr lang="en-US" sz="1500" dirty="0">
                 <a:solidFill>
-                  <a:srgbClr val="2B2620"/>
+                  <a:srgbClr val="123C2A"/>
                 </a:solidFill>
                 <a:latin typeface="游ゴシック" pitchFamily="34" charset="0"/>
                 <a:ea typeface="游ゴシック" pitchFamily="34" charset="-122"/>
@@ -19787,7 +19787,7 @@
             <a:r>
               <a:rPr lang="en-US" sz="2000" b="1" dirty="0">
                 <a:solidFill>
-                  <a:srgbClr val="2B2620"/>
+                  <a:srgbClr val="123C2A"/>
                 </a:solidFill>
                 <a:latin typeface="游明朝" pitchFamily="34" charset="0"/>
                 <a:ea typeface="游明朝" pitchFamily="34" charset="-122"/>
@@ -19807,7 +19807,7 @@
             <a:r>
               <a:rPr lang="en-US" sz="2000" b="1" dirty="0">
                 <a:solidFill>
-                  <a:srgbClr val="2B2620"/>
+                  <a:srgbClr val="123C2A"/>
                 </a:solidFill>
                 <a:latin typeface="游明朝" pitchFamily="34" charset="0"/>
                 <a:ea typeface="游明朝" pitchFamily="34" charset="-122"/>
@@ -19849,7 +19849,7 @@
             <a:r>
               <a:rPr lang="en-US" sz="2200" b="1" dirty="0">
                 <a:solidFill>
-                  <a:srgbClr val="9C5446"/>
+                  <a:srgbClr val="C92A78"/>
                 </a:solidFill>
                 <a:latin typeface="游明朝" pitchFamily="34" charset="0"/>
                 <a:ea typeface="游明朝" pitchFamily="34" charset="-122"/>
@@ -19869,7 +19869,7 @@
             <a:r>
               <a:rPr lang="en-US" sz="2200" b="1" dirty="0">
                 <a:solidFill>
-                  <a:srgbClr val="9C5446"/>
+                  <a:srgbClr val="C92A78"/>
                 </a:solidFill>
                 <a:latin typeface="游明朝" pitchFamily="34" charset="0"/>
                 <a:ea typeface="游明朝" pitchFamily="34" charset="-122"/>
@@ -19908,7 +19908,7 @@
             <a:r>
               <a:rPr lang="en-US" sz="1000" dirty="0">
                 <a:solidFill>
-                  <a:srgbClr val="B7A991"/>
+                  <a:srgbClr val="AFD2C1"/>
                 </a:solidFill>
                 <a:latin typeface="游ゴシック" pitchFamily="34" charset="0"/>
                 <a:ea typeface="游ゴシック" pitchFamily="34" charset="-122"/>
@@ -19934,7 +19934,7 @@
     <p:bg>
       <p:bgPr>
         <a:solidFill>
-          <a:srgbClr val="2B2620"/>
+          <a:srgbClr val="123C2A"/>
         </a:solidFill>
       </p:bgPr>
     </p:bg>
@@ -19967,11 +19967,11 @@
             <a:avLst/>
           </a:prstGeom>
           <a:solidFill>
-            <a:srgbClr val="2B2620"/>
+            <a:srgbClr val="123C2A"/>
           </a:solidFill>
           <a:ln w="31750">
             <a:solidFill>
-              <a:srgbClr val="9C5446"/>
+              <a:srgbClr val="F15C9E"/>
             </a:solidFill>
             <a:prstDash val="solid"/>
           </a:ln>
@@ -20004,7 +20004,7 @@
             <a:r>
               <a:rPr lang="en-US" sz="8800" b="1" dirty="0">
                 <a:solidFill>
-                  <a:srgbClr val="9C5446"/>
+                  <a:srgbClr val="F15C9E"/>
                 </a:solidFill>
                 <a:latin typeface="游明朝" pitchFamily="34" charset="0"/>
                 <a:ea typeface="游明朝" pitchFamily="34" charset="-122"/>
@@ -20043,7 +20043,7 @@
             <a:r>
               <a:rPr lang="en-US" sz="1300" dirty="0">
                 <a:solidFill>
-                  <a:srgbClr val="6B5F51"/>
+                  <a:srgbClr val="8FB8A2"/>
                 </a:solidFill>
                 <a:latin typeface="游ゴシック" pitchFamily="34" charset="0"/>
                 <a:ea typeface="游ゴシック" pitchFamily="34" charset="-122"/>
@@ -20082,7 +20082,7 @@
             <a:r>
               <a:rPr lang="en-US" sz="1000" dirty="0">
                 <a:solidFill>
-                  <a:srgbClr val="6B5F51"/>
+                  <a:srgbClr val="3A6450"/>
                 </a:solidFill>
                 <a:latin typeface="游ゴシック" pitchFamily="34" charset="0"/>
                 <a:ea typeface="游ゴシック" pitchFamily="34" charset="-122"/>
@@ -20108,7 +20108,7 @@
     <p:bg>
       <p:bgPr>
         <a:solidFill>
-          <a:srgbClr val="ECE3D4"/>
+          <a:srgbClr val="F0FAF5"/>
         </a:solidFill>
       </p:bgPr>
     </p:bg>
@@ -20153,7 +20153,7 @@
             <a:r>
               <a:rPr lang="en-US" sz="1100" b="1" spc="200" kern="0" dirty="0">
                 <a:solidFill>
-                  <a:srgbClr val="9C5446"/>
+                  <a:srgbClr val="17784A"/>
                 </a:solidFill>
                 <a:latin typeface="游ゴシック" pitchFamily="34" charset="0"/>
                 <a:ea typeface="游ゴシック" pitchFamily="34" charset="-122"/>
@@ -20195,7 +20195,7 @@
             <a:r>
               <a:rPr lang="en-US" sz="3200" b="1" dirty="0">
                 <a:solidFill>
-                  <a:srgbClr val="2B2620"/>
+                  <a:srgbClr val="123C2A"/>
                 </a:solidFill>
                 <a:latin typeface="游明朝" pitchFamily="34" charset="0"/>
                 <a:ea typeface="游明朝" pitchFamily="34" charset="-122"/>
@@ -20224,7 +20224,7 @@
             </a:avLst>
           </a:prstGeom>
           <a:solidFill>
-            <a:srgbClr val="5E7060"/>
+            <a:srgbClr val="34D39B"/>
           </a:solidFill>
           <a:ln/>
         </p:spPr>
@@ -20256,7 +20256,7 @@
             <a:r>
               <a:rPr lang="en-US" sz="1700" b="1" dirty="0">
                 <a:solidFill>
-                  <a:srgbClr val="FFFFFF"/>
+                  <a:srgbClr val="123C2A"/>
                 </a:solidFill>
                 <a:latin typeface="游ゴシック" pitchFamily="34" charset="0"/>
                 <a:ea typeface="游ゴシック" pitchFamily="34" charset="-122"/>
@@ -20285,12 +20285,12 @@
             </a:avLst>
           </a:prstGeom>
           <a:solidFill>
-            <a:srgbClr val="FCFAF4"/>
+            <a:srgbClr val="FFFFFF"/>
           </a:solidFill>
           <a:ln/>
           <a:effectLst>
             <a:outerShdw sx="100000" sy="100000" kx="0" ky="0" algn="bl" rotWithShape="0" blurRad="127000" dist="508" dir="5400000">
-              <a:srgbClr val="8C7F6E">
+              <a:srgbClr val="7FA795">
                 <a:alpha val="25000"/>
               </a:srgbClr>
             </a:outerShdw>
@@ -20327,7 +20327,7 @@
             <a:r>
               <a:rPr lang="en-US" sz="1800" dirty="0">
                 <a:solidFill>
-                  <a:srgbClr val="2B2620"/>
+                  <a:srgbClr val="123C2A"/>
                 </a:solidFill>
                 <a:latin typeface="游ゴシック" pitchFamily="34" charset="0"/>
                 <a:ea typeface="游ゴシック" pitchFamily="34" charset="-122"/>
@@ -20356,7 +20356,7 @@
             <a:r>
               <a:rPr lang="en-US" sz="1800" dirty="0">
                 <a:solidFill>
-                  <a:srgbClr val="2B2620"/>
+                  <a:srgbClr val="123C2A"/>
                 </a:solidFill>
                 <a:latin typeface="游ゴシック" pitchFamily="34" charset="0"/>
                 <a:ea typeface="游ゴシック" pitchFamily="34" charset="-122"/>
@@ -20376,7 +20376,7 @@
             <a:r>
               <a:rPr lang="en-US" sz="1800" dirty="0">
                 <a:solidFill>
-                  <a:srgbClr val="2B2620"/>
+                  <a:srgbClr val="123C2A"/>
                 </a:solidFill>
                 <a:latin typeface="游ゴシック" pitchFamily="34" charset="0"/>
                 <a:ea typeface="游ゴシック" pitchFamily="34" charset="-122"/>
@@ -20415,7 +20415,7 @@
             <a:r>
               <a:rPr lang="en-US" sz="1000" dirty="0">
                 <a:solidFill>
-                  <a:srgbClr val="B7A991"/>
+                  <a:srgbClr val="AFD2C1"/>
                 </a:solidFill>
                 <a:latin typeface="游ゴシック" pitchFamily="34" charset="0"/>
                 <a:ea typeface="游ゴシック" pitchFamily="34" charset="-122"/>
@@ -20441,7 +20441,7 @@
     <p:bg>
       <p:bgPr>
         <a:solidFill>
-          <a:srgbClr val="ECE3D4"/>
+          <a:srgbClr val="F0FAF5"/>
         </a:solidFill>
       </p:bgPr>
     </p:bg>
@@ -20486,7 +20486,7 @@
             <a:r>
               <a:rPr lang="en-US" sz="1100" b="1" spc="200" kern="0" dirty="0">
                 <a:solidFill>
-                  <a:srgbClr val="9C5446"/>
+                  <a:srgbClr val="17784A"/>
                 </a:solidFill>
                 <a:latin typeface="游ゴシック" pitchFamily="34" charset="0"/>
                 <a:ea typeface="游ゴシック" pitchFamily="34" charset="-122"/>
@@ -20528,7 +20528,7 @@
             <a:r>
               <a:rPr lang="en-US" sz="3200" b="1" dirty="0">
                 <a:solidFill>
-                  <a:srgbClr val="2B2620"/>
+                  <a:srgbClr val="123C2A"/>
                 </a:solidFill>
                 <a:latin typeface="游明朝" pitchFamily="34" charset="0"/>
                 <a:ea typeface="游明朝" pitchFamily="34" charset="-122"/>
@@ -20557,12 +20557,12 @@
             </a:avLst>
           </a:prstGeom>
           <a:solidFill>
-            <a:srgbClr val="FCFAF4"/>
+            <a:srgbClr val="FFFFFF"/>
           </a:solidFill>
           <a:ln/>
           <a:effectLst>
             <a:outerShdw sx="100000" sy="100000" kx="0" ky="0" algn="bl" rotWithShape="0" blurRad="127000" dist="508" dir="5400000">
-              <a:srgbClr val="8C7F6E">
+              <a:srgbClr val="7FA795">
                 <a:alpha val="25000"/>
               </a:srgbClr>
             </a:outerShdw>
@@ -20596,7 +20596,7 @@
             <a:r>
               <a:rPr lang="en-US" sz="1400" dirty="0">
                 <a:solidFill>
-                  <a:srgbClr val="7A6E60"/>
+                  <a:srgbClr val="4F6F60"/>
                 </a:solidFill>
                 <a:latin typeface="游ゴシック" pitchFamily="34" charset="0"/>
                 <a:ea typeface="游ゴシック" pitchFamily="34" charset="-122"/>
@@ -20635,7 +20635,7 @@
             <a:r>
               <a:rPr lang="en-US" sz="2400" b="1" dirty="0">
                 <a:solidFill>
-                  <a:srgbClr val="2B2620"/>
+                  <a:srgbClr val="123C2A"/>
                 </a:solidFill>
                 <a:latin typeface="游明朝" pitchFamily="34" charset="0"/>
                 <a:ea typeface="游明朝" pitchFamily="34" charset="-122"/>
@@ -20674,7 +20674,7 @@
             <a:r>
               <a:rPr lang="en-US" sz="1700" dirty="0">
                 <a:solidFill>
-                  <a:srgbClr val="2B2620"/>
+                  <a:srgbClr val="123C2A"/>
                 </a:solidFill>
                 <a:latin typeface="游ゴシック" pitchFamily="34" charset="0"/>
                 <a:ea typeface="游ゴシック" pitchFamily="34" charset="-122"/>
@@ -20713,7 +20713,7 @@
             <a:r>
               <a:rPr lang="en-US" sz="1800" b="1" dirty="0">
                 <a:solidFill>
-                  <a:srgbClr val="5E7060"/>
+                  <a:srgbClr val="C92A78"/>
                 </a:solidFill>
                 <a:latin typeface="游明朝" pitchFamily="34" charset="0"/>
                 <a:ea typeface="游明朝" pitchFamily="34" charset="-122"/>
@@ -20752,7 +20752,7 @@
             <a:r>
               <a:rPr lang="en-US" sz="1000" dirty="0">
                 <a:solidFill>
-                  <a:srgbClr val="B7A991"/>
+                  <a:srgbClr val="AFD2C1"/>
                 </a:solidFill>
                 <a:latin typeface="游ゴシック" pitchFamily="34" charset="0"/>
                 <a:ea typeface="游ゴシック" pitchFamily="34" charset="-122"/>
@@ -20778,7 +20778,7 @@
     <p:bg>
       <p:bgPr>
         <a:solidFill>
-          <a:srgbClr val="ECE3D4"/>
+          <a:srgbClr val="F0FAF5"/>
         </a:solidFill>
       </p:bgPr>
     </p:bg>
@@ -20823,7 +20823,7 @@
             <a:r>
               <a:rPr lang="en-US" sz="1100" b="1" spc="200" kern="0" dirty="0">
                 <a:solidFill>
-                  <a:srgbClr val="9C5446"/>
+                  <a:srgbClr val="17784A"/>
                 </a:solidFill>
                 <a:latin typeface="游ゴシック" pitchFamily="34" charset="0"/>
                 <a:ea typeface="游ゴシック" pitchFamily="34" charset="-122"/>
@@ -20865,7 +20865,7 @@
             <a:r>
               <a:rPr lang="en-US" sz="3200" b="1" dirty="0">
                 <a:solidFill>
-                  <a:srgbClr val="2B2620"/>
+                  <a:srgbClr val="123C2A"/>
                 </a:solidFill>
                 <a:latin typeface="游明朝" pitchFamily="34" charset="0"/>
                 <a:ea typeface="游明朝" pitchFamily="34" charset="-122"/>
@@ -20894,12 +20894,12 @@
             </a:avLst>
           </a:prstGeom>
           <a:solidFill>
-            <a:srgbClr val="FCFAF4"/>
+            <a:srgbClr val="FFFFFF"/>
           </a:solidFill>
           <a:ln/>
           <a:effectLst>
             <a:outerShdw sx="100000" sy="100000" kx="0" ky="0" algn="bl" rotWithShape="0" blurRad="127000" dist="508" dir="5400000">
-              <a:srgbClr val="8C7F6E">
+              <a:srgbClr val="7FA795">
                 <a:alpha val="25000"/>
               </a:srgbClr>
             </a:outerShdw>
@@ -20921,7 +20921,7 @@
             <a:avLst/>
           </a:prstGeom>
           <a:solidFill>
-            <a:srgbClr val="2B2620"/>
+            <a:srgbClr val="123C2A"/>
           </a:solidFill>
           <a:ln/>
         </p:spPr>
@@ -20953,7 +20953,7 @@
             <a:r>
               <a:rPr lang="en-US" sz="1700" b="1" dirty="0">
                 <a:solidFill>
-                  <a:srgbClr val="FCFAF4"/>
+                  <a:srgbClr val="FFFFFF"/>
                 </a:solidFill>
                 <a:latin typeface="游明朝" pitchFamily="34" charset="0"/>
                 <a:ea typeface="游明朝" pitchFamily="34" charset="-122"/>
@@ -20992,7 +20992,7 @@
             <a:r>
               <a:rPr lang="en-US" sz="1900" b="1" dirty="0">
                 <a:solidFill>
-                  <a:srgbClr val="2B2620"/>
+                  <a:srgbClr val="123C2A"/>
                 </a:solidFill>
                 <a:latin typeface="游明朝" pitchFamily="34" charset="0"/>
                 <a:ea typeface="游明朝" pitchFamily="34" charset="-122"/>
@@ -21034,7 +21034,7 @@
             <a:r>
               <a:rPr lang="en-US" sz="1450" dirty="0">
                 <a:solidFill>
-                  <a:srgbClr val="2B2620"/>
+                  <a:srgbClr val="123C2A"/>
                 </a:solidFill>
                 <a:latin typeface="游ゴシック" pitchFamily="34" charset="0"/>
                 <a:ea typeface="游ゴシック" pitchFamily="34" charset="-122"/>
@@ -21054,7 +21054,7 @@
             <a:r>
               <a:rPr lang="en-US" sz="1450" dirty="0">
                 <a:solidFill>
-                  <a:srgbClr val="2B2620"/>
+                  <a:srgbClr val="123C2A"/>
                 </a:solidFill>
                 <a:latin typeface="游ゴシック" pitchFamily="34" charset="0"/>
                 <a:ea typeface="游ゴシック" pitchFamily="34" charset="-122"/>
@@ -21074,7 +21074,7 @@
             <a:r>
               <a:rPr lang="en-US" sz="1450" dirty="0">
                 <a:solidFill>
-                  <a:srgbClr val="2B2620"/>
+                  <a:srgbClr val="123C2A"/>
                 </a:solidFill>
                 <a:latin typeface="游ゴシック" pitchFamily="34" charset="0"/>
                 <a:ea typeface="游ゴシック" pitchFamily="34" charset="-122"/>
@@ -21113,7 +21113,7 @@
             <a:r>
               <a:rPr lang="en-US" sz="1300" b="1" dirty="0">
                 <a:solidFill>
-                  <a:srgbClr val="7A6E60"/>
+                  <a:srgbClr val="4F6F60"/>
                 </a:solidFill>
                 <a:latin typeface="游ゴシック" pitchFamily="34" charset="0"/>
                 <a:ea typeface="游ゴシック" pitchFamily="34" charset="-122"/>
@@ -21142,12 +21142,12 @@
             </a:avLst>
           </a:prstGeom>
           <a:solidFill>
-            <a:srgbClr val="FCFAF4"/>
+            <a:srgbClr val="FFFFFF"/>
           </a:solidFill>
           <a:ln/>
           <a:effectLst>
             <a:outerShdw sx="100000" sy="100000" kx="0" ky="0" algn="bl" rotWithShape="0" blurRad="127000" dist="508" dir="5400000">
-              <a:srgbClr val="8C7F6E">
+              <a:srgbClr val="7FA795">
                 <a:alpha val="25000"/>
               </a:srgbClr>
             </a:outerShdw>
@@ -21169,7 +21169,7 @@
             <a:avLst/>
           </a:prstGeom>
           <a:solidFill>
-            <a:srgbClr val="9C5446"/>
+            <a:srgbClr val="17784A"/>
           </a:solidFill>
           <a:ln/>
         </p:spPr>
@@ -21201,7 +21201,7 @@
             <a:r>
               <a:rPr lang="en-US" sz="1700" b="1" dirty="0">
                 <a:solidFill>
-                  <a:srgbClr val="FCFAF4"/>
+                  <a:srgbClr val="FFFFFF"/>
                 </a:solidFill>
                 <a:latin typeface="游明朝" pitchFamily="34" charset="0"/>
                 <a:ea typeface="游明朝" pitchFamily="34" charset="-122"/>
@@ -21240,7 +21240,7 @@
             <a:r>
               <a:rPr lang="en-US" sz="1900" b="1" dirty="0">
                 <a:solidFill>
-                  <a:srgbClr val="9C5446"/>
+                  <a:srgbClr val="17784A"/>
                 </a:solidFill>
                 <a:latin typeface="游明朝" pitchFamily="34" charset="0"/>
                 <a:ea typeface="游明朝" pitchFamily="34" charset="-122"/>
@@ -21282,7 +21282,7 @@
             <a:r>
               <a:rPr lang="en-US" sz="1450" dirty="0">
                 <a:solidFill>
-                  <a:srgbClr val="2B2620"/>
+                  <a:srgbClr val="123C2A"/>
                 </a:solidFill>
                 <a:latin typeface="游ゴシック" pitchFamily="34" charset="0"/>
                 <a:ea typeface="游ゴシック" pitchFamily="34" charset="-122"/>
@@ -21311,7 +21311,7 @@
             <a:r>
               <a:rPr lang="en-US" sz="1450" dirty="0">
                 <a:solidFill>
-                  <a:srgbClr val="2B2620"/>
+                  <a:srgbClr val="123C2A"/>
                 </a:solidFill>
                 <a:latin typeface="游ゴシック" pitchFamily="34" charset="0"/>
                 <a:ea typeface="游ゴシック" pitchFamily="34" charset="-122"/>
@@ -21350,7 +21350,7 @@
             <a:r>
               <a:rPr lang="en-US" sz="1300" b="1" dirty="0">
                 <a:solidFill>
-                  <a:srgbClr val="7A6E60"/>
+                  <a:srgbClr val="4F6F60"/>
                 </a:solidFill>
                 <a:latin typeface="游ゴシック" pitchFamily="34" charset="0"/>
                 <a:ea typeface="游ゴシック" pitchFamily="34" charset="-122"/>
@@ -21389,7 +21389,7 @@
             <a:r>
               <a:rPr lang="en-US" sz="2100" b="1" dirty="0">
                 <a:solidFill>
-                  <a:srgbClr val="2B2620"/>
+                  <a:srgbClr val="123C2A"/>
                 </a:solidFill>
                 <a:latin typeface="游明朝" pitchFamily="34" charset="0"/>
                 <a:ea typeface="游明朝" pitchFamily="34" charset="-122"/>
@@ -21428,7 +21428,7 @@
             <a:r>
               <a:rPr lang="en-US" sz="1000" dirty="0">
                 <a:solidFill>
-                  <a:srgbClr val="B7A991"/>
+                  <a:srgbClr val="AFD2C1"/>
                 </a:solidFill>
                 <a:latin typeface="游ゴシック" pitchFamily="34" charset="0"/>
                 <a:ea typeface="游ゴシック" pitchFamily="34" charset="-122"/>
@@ -21454,7 +21454,7 @@
     <p:bg>
       <p:bgPr>
         <a:solidFill>
-          <a:srgbClr val="2B2620"/>
+          <a:srgbClr val="123C2A"/>
         </a:solidFill>
       </p:bgPr>
     </p:bg>
@@ -21499,7 +21499,7 @@
             <a:r>
               <a:rPr lang="en-US" sz="3400" b="1" dirty="0">
                 <a:solidFill>
-                  <a:srgbClr val="A2937F"/>
+                  <a:srgbClr val="8FB8A2"/>
                 </a:solidFill>
                 <a:latin typeface="游明朝" pitchFamily="34" charset="0"/>
                 <a:ea typeface="游明朝" pitchFamily="34" charset="-122"/>
@@ -21538,7 +21538,7 @@
             <a:r>
               <a:rPr lang="en-US" sz="4800" b="1" dirty="0">
                 <a:solidFill>
-                  <a:srgbClr val="ECE3D4"/>
+                  <a:srgbClr val="E8F5EE"/>
                 </a:solidFill>
                 <a:latin typeface="游明朝" pitchFamily="34" charset="0"/>
                 <a:ea typeface="游明朝" pitchFamily="34" charset="-122"/>
@@ -21577,7 +21577,7 @@
             <a:r>
               <a:rPr lang="en-US" sz="1000" dirty="0">
                 <a:solidFill>
-                  <a:srgbClr val="6B5F51"/>
+                  <a:srgbClr val="3A6450"/>
                 </a:solidFill>
                 <a:latin typeface="游ゴシック" pitchFamily="34" charset="0"/>
                 <a:ea typeface="游ゴシック" pitchFamily="34" charset="-122"/>
@@ -21603,7 +21603,7 @@
     <p:bg>
       <p:bgPr>
         <a:solidFill>
-          <a:srgbClr val="ECE3D4"/>
+          <a:srgbClr val="F0FAF5"/>
         </a:solidFill>
       </p:bgPr>
     </p:bg>
@@ -21648,7 +21648,7 @@
             <a:r>
               <a:rPr lang="en-US" sz="1100" b="1" spc="200" kern="0" dirty="0">
                 <a:solidFill>
-                  <a:srgbClr val="9C5446"/>
+                  <a:srgbClr val="17784A"/>
                 </a:solidFill>
                 <a:latin typeface="游ゴシック" pitchFamily="34" charset="0"/>
                 <a:ea typeface="游ゴシック" pitchFamily="34" charset="-122"/>
@@ -21690,7 +21690,7 @@
             <a:r>
               <a:rPr lang="en-US" sz="3200" b="1" dirty="0">
                 <a:solidFill>
-                  <a:srgbClr val="2B2620"/>
+                  <a:srgbClr val="123C2A"/>
                 </a:solidFill>
                 <a:latin typeface="游明朝" pitchFamily="34" charset="0"/>
                 <a:ea typeface="游明朝" pitchFamily="34" charset="-122"/>
@@ -21719,7 +21719,7 @@
             </a:avLst>
           </a:prstGeom>
           <a:solidFill>
-            <a:srgbClr val="9C5446"/>
+            <a:srgbClr val="17784A"/>
           </a:solidFill>
           <a:ln/>
         </p:spPr>
@@ -21803,12 +21803,12 @@
             </a:avLst>
           </a:prstGeom>
           <a:solidFill>
-            <a:srgbClr val="FCFAF4"/>
+            <a:srgbClr val="FFFFFF"/>
           </a:solidFill>
           <a:ln/>
           <a:effectLst>
             <a:outerShdw sx="100000" sy="100000" kx="0" ky="0" algn="bl" rotWithShape="0" blurRad="127000" dist="508" dir="5400000">
-              <a:srgbClr val="8C7F6E">
+              <a:srgbClr val="7FA795">
                 <a:alpha val="25000"/>
               </a:srgbClr>
             </a:outerShdw>
@@ -21845,7 +21845,7 @@
             <a:r>
               <a:rPr lang="en-US" sz="1800" dirty="0">
                 <a:solidFill>
-                  <a:srgbClr val="2B2620"/>
+                  <a:srgbClr val="123C2A"/>
                 </a:solidFill>
                 <a:latin typeface="游ゴシック" pitchFamily="34" charset="0"/>
                 <a:ea typeface="游ゴシック" pitchFamily="34" charset="-122"/>
@@ -21865,7 +21865,7 @@
             <a:r>
               <a:rPr lang="en-US" sz="1800" dirty="0">
                 <a:solidFill>
-                  <a:srgbClr val="2B2620"/>
+                  <a:srgbClr val="123C2A"/>
                 </a:solidFill>
                 <a:latin typeface="游ゴシック" pitchFamily="34" charset="0"/>
                 <a:ea typeface="游ゴシック" pitchFamily="34" charset="-122"/>
@@ -21904,7 +21904,7 @@
             <a:r>
               <a:rPr lang="en-US" sz="1300" dirty="0">
                 <a:solidFill>
-                  <a:srgbClr val="7A6E60"/>
+                  <a:srgbClr val="4F6F60"/>
                 </a:solidFill>
                 <a:latin typeface="游ゴシック" pitchFamily="34" charset="0"/>
                 <a:ea typeface="游ゴシック" pitchFamily="34" charset="-122"/>
@@ -21943,7 +21943,7 @@
             <a:r>
               <a:rPr lang="en-US" sz="1000" dirty="0">
                 <a:solidFill>
-                  <a:srgbClr val="B7A991"/>
+                  <a:srgbClr val="AFD2C1"/>
                 </a:solidFill>
                 <a:latin typeface="游ゴシック" pitchFamily="34" charset="0"/>
                 <a:ea typeface="游ゴシック" pitchFamily="34" charset="-122"/>
@@ -21969,7 +21969,7 @@
     <p:bg>
       <p:bgPr>
         <a:solidFill>
-          <a:srgbClr val="2B2620"/>
+          <a:srgbClr val="123C2A"/>
         </a:solidFill>
       </p:bgPr>
     </p:bg>
@@ -22014,7 +22014,7 @@
             <a:r>
               <a:rPr lang="en-US" sz="3400" b="1" dirty="0">
                 <a:solidFill>
-                  <a:srgbClr val="A2937F"/>
+                  <a:srgbClr val="8FB8A2"/>
                 </a:solidFill>
                 <a:latin typeface="游明朝" pitchFamily="34" charset="0"/>
                 <a:ea typeface="游明朝" pitchFamily="34" charset="-122"/>
@@ -22053,7 +22053,7 @@
             <a:r>
               <a:rPr lang="en-US" sz="4400" b="1" dirty="0">
                 <a:solidFill>
-                  <a:srgbClr val="ECE3D4"/>
+                  <a:srgbClr val="E8F5EE"/>
                 </a:solidFill>
                 <a:latin typeface="游明朝" pitchFamily="34" charset="0"/>
                 <a:ea typeface="游明朝" pitchFamily="34" charset="-122"/>
@@ -22082,11 +22082,11 @@
             </a:avLst>
           </a:prstGeom>
           <a:solidFill>
-            <a:srgbClr val="35302A"/>
+            <a:srgbClr val="1B4E36"/>
           </a:solidFill>
           <a:ln w="12700">
             <a:solidFill>
-              <a:srgbClr val="A2937F"/>
+              <a:srgbClr val="8FB8A2"/>
             </a:solidFill>
             <a:prstDash val="dash"/>
           </a:ln>
@@ -22122,7 +22122,7 @@
             <a:r>
               <a:rPr lang="en-US" sz="1100" dirty="0">
                 <a:solidFill>
-                  <a:srgbClr val="A2937F"/>
+                  <a:srgbClr val="8FB8A2"/>
                 </a:solidFill>
                 <a:latin typeface="游ゴシック" pitchFamily="34" charset="0"/>
                 <a:ea typeface="游ゴシック" pitchFamily="34" charset="-122"/>
@@ -22142,7 +22142,7 @@
             <a:r>
               <a:rPr lang="en-US" sz="1100" dirty="0">
                 <a:solidFill>
-                  <a:srgbClr val="A2937F"/>
+                  <a:srgbClr val="8FB8A2"/>
                 </a:solidFill>
                 <a:latin typeface="游ゴシック" pitchFamily="34" charset="0"/>
                 <a:ea typeface="游ゴシック" pitchFamily="34" charset="-122"/>
@@ -22162,7 +22162,7 @@
             <a:r>
               <a:rPr lang="en-US" sz="1100" dirty="0">
                 <a:solidFill>
-                  <a:srgbClr val="A2937F"/>
+                  <a:srgbClr val="8FB8A2"/>
                 </a:solidFill>
                 <a:latin typeface="游ゴシック" pitchFamily="34" charset="0"/>
                 <a:ea typeface="游ゴシック" pitchFamily="34" charset="-122"/>
@@ -22201,7 +22201,7 @@
             <a:r>
               <a:rPr lang="en-US" sz="1000" dirty="0">
                 <a:solidFill>
-                  <a:srgbClr val="6B5F51"/>
+                  <a:srgbClr val="8FB8A2"/>
                 </a:solidFill>
                 <a:latin typeface="游ゴシック" pitchFamily="34" charset="0"/>
                 <a:ea typeface="游ゴシック" pitchFamily="34" charset="-122"/>
@@ -22240,7 +22240,7 @@
             <a:r>
               <a:rPr lang="en-US" sz="1000" dirty="0">
                 <a:solidFill>
-                  <a:srgbClr val="6B5F51"/>
+                  <a:srgbClr val="3A6450"/>
                 </a:solidFill>
                 <a:latin typeface="游ゴシック" pitchFamily="34" charset="0"/>
                 <a:ea typeface="游ゴシック" pitchFamily="34" charset="-122"/>
@@ -22266,7 +22266,7 @@
     <p:bg>
       <p:bgPr>
         <a:solidFill>
-          <a:srgbClr val="ECE3D4"/>
+          <a:srgbClr val="F0FAF5"/>
         </a:solidFill>
       </p:bgPr>
     </p:bg>
@@ -22311,7 +22311,7 @@
             <a:r>
               <a:rPr lang="en-US" sz="1100" b="1" spc="200" kern="0" dirty="0">
                 <a:solidFill>
-                  <a:srgbClr val="9C5446"/>
+                  <a:srgbClr val="17784A"/>
                 </a:solidFill>
                 <a:latin typeface="游ゴシック" pitchFamily="34" charset="0"/>
                 <a:ea typeface="游ゴシック" pitchFamily="34" charset="-122"/>
@@ -22353,7 +22353,7 @@
             <a:r>
               <a:rPr lang="en-US" sz="3200" b="1" dirty="0">
                 <a:solidFill>
-                  <a:srgbClr val="2B2620"/>
+                  <a:srgbClr val="123C2A"/>
                 </a:solidFill>
                 <a:latin typeface="游明朝" pitchFamily="34" charset="0"/>
                 <a:ea typeface="游明朝" pitchFamily="34" charset="-122"/>
@@ -22382,12 +22382,12 @@
             </a:avLst>
           </a:prstGeom>
           <a:solidFill>
-            <a:srgbClr val="FCFAF4"/>
+            <a:srgbClr val="FFFFFF"/>
           </a:solidFill>
           <a:ln/>
           <a:effectLst>
             <a:outerShdw sx="100000" sy="100000" kx="0" ky="0" algn="bl" rotWithShape="0" blurRad="127000" dist="508" dir="5400000">
-              <a:srgbClr val="8C7F6E">
+              <a:srgbClr val="7FA795">
                 <a:alpha val="25000"/>
               </a:srgbClr>
             </a:outerShdw>
@@ -22409,7 +22409,7 @@
             <a:avLst/>
           </a:prstGeom>
           <a:solidFill>
-            <a:srgbClr val="9C5446"/>
+            <a:srgbClr val="17784A"/>
           </a:solidFill>
           <a:ln/>
         </p:spPr>
@@ -22441,7 +22441,7 @@
             <a:r>
               <a:rPr lang="en-US" sz="1700" b="1" dirty="0">
                 <a:solidFill>
-                  <a:srgbClr val="FCFAF4"/>
+                  <a:srgbClr val="FFFFFF"/>
                 </a:solidFill>
                 <a:latin typeface="游明朝" pitchFamily="34" charset="0"/>
                 <a:ea typeface="游明朝" pitchFamily="34" charset="-122"/>
@@ -22480,7 +22480,7 @@
             <a:r>
               <a:rPr lang="en-US" sz="2000" b="1" dirty="0">
                 <a:solidFill>
-                  <a:srgbClr val="2B2620"/>
+                  <a:srgbClr val="123C2A"/>
                 </a:solidFill>
                 <a:latin typeface="游明朝" pitchFamily="34" charset="0"/>
                 <a:ea typeface="游明朝" pitchFamily="34" charset="-122"/>
@@ -22519,7 +22519,7 @@
             <a:r>
               <a:rPr lang="en-US" sz="1300" dirty="0">
                 <a:solidFill>
-                  <a:srgbClr val="7A6E60"/>
+                  <a:srgbClr val="4F6F60"/>
                 </a:solidFill>
                 <a:latin typeface="游ゴシック" pitchFamily="34" charset="0"/>
                 <a:ea typeface="游ゴシック" pitchFamily="34" charset="-122"/>
@@ -22548,12 +22548,12 @@
             </a:avLst>
           </a:prstGeom>
           <a:solidFill>
-            <a:srgbClr val="FCFAF4"/>
+            <a:srgbClr val="FFFFFF"/>
           </a:solidFill>
           <a:ln/>
           <a:effectLst>
             <a:outerShdw sx="100000" sy="100000" kx="0" ky="0" algn="bl" rotWithShape="0" blurRad="127000" dist="508" dir="5400000">
-              <a:srgbClr val="8C7F6E">
+              <a:srgbClr val="7FA795">
                 <a:alpha val="25000"/>
               </a:srgbClr>
             </a:outerShdw>
@@ -22575,7 +22575,7 @@
             <a:avLst/>
           </a:prstGeom>
           <a:solidFill>
-            <a:srgbClr val="5E7060"/>
+            <a:srgbClr val="C92A78"/>
           </a:solidFill>
           <a:ln/>
         </p:spPr>
@@ -22607,7 +22607,7 @@
             <a:r>
               <a:rPr lang="en-US" sz="1700" b="1" dirty="0">
                 <a:solidFill>
-                  <a:srgbClr val="FCFAF4"/>
+                  <a:srgbClr val="FFFFFF"/>
                 </a:solidFill>
                 <a:latin typeface="游明朝" pitchFamily="34" charset="0"/>
                 <a:ea typeface="游明朝" pitchFamily="34" charset="-122"/>
@@ -22646,7 +22646,7 @@
             <a:r>
               <a:rPr lang="en-US" sz="2000" b="1" dirty="0">
                 <a:solidFill>
-                  <a:srgbClr val="2B2620"/>
+                  <a:srgbClr val="123C2A"/>
                 </a:solidFill>
                 <a:latin typeface="游明朝" pitchFamily="34" charset="0"/>
                 <a:ea typeface="游明朝" pitchFamily="34" charset="-122"/>
@@ -22685,7 +22685,7 @@
             <a:r>
               <a:rPr lang="en-US" sz="1300" dirty="0">
                 <a:solidFill>
-                  <a:srgbClr val="7A6E60"/>
+                  <a:srgbClr val="4F6F60"/>
                 </a:solidFill>
                 <a:latin typeface="游ゴシック" pitchFamily="34" charset="0"/>
                 <a:ea typeface="游ゴシック" pitchFamily="34" charset="-122"/>
@@ -22714,12 +22714,12 @@
             </a:avLst>
           </a:prstGeom>
           <a:solidFill>
-            <a:srgbClr val="FCFAF4"/>
+            <a:srgbClr val="FFFFFF"/>
           </a:solidFill>
           <a:ln/>
           <a:effectLst>
             <a:outerShdw sx="100000" sy="100000" kx="0" ky="0" algn="bl" rotWithShape="0" blurRad="127000" dist="508" dir="5400000">
-              <a:srgbClr val="8C7F6E">
+              <a:srgbClr val="7FA795">
                 <a:alpha val="25000"/>
               </a:srgbClr>
             </a:outerShdw>
@@ -22741,7 +22741,7 @@
             <a:avLst/>
           </a:prstGeom>
           <a:solidFill>
-            <a:srgbClr val="9C5446"/>
+            <a:srgbClr val="17784A"/>
           </a:solidFill>
           <a:ln/>
         </p:spPr>
@@ -22773,7 +22773,7 @@
             <a:r>
               <a:rPr lang="en-US" sz="1700" b="1" dirty="0">
                 <a:solidFill>
-                  <a:srgbClr val="FCFAF4"/>
+                  <a:srgbClr val="FFFFFF"/>
                 </a:solidFill>
                 <a:latin typeface="游明朝" pitchFamily="34" charset="0"/>
                 <a:ea typeface="游明朝" pitchFamily="34" charset="-122"/>
@@ -22812,7 +22812,7 @@
             <a:r>
               <a:rPr lang="en-US" sz="2000" b="1" dirty="0">
                 <a:solidFill>
-                  <a:srgbClr val="2B2620"/>
+                  <a:srgbClr val="123C2A"/>
                 </a:solidFill>
                 <a:latin typeface="游明朝" pitchFamily="34" charset="0"/>
                 <a:ea typeface="游明朝" pitchFamily="34" charset="-122"/>
@@ -22851,7 +22851,7 @@
             <a:r>
               <a:rPr lang="en-US" sz="1300" dirty="0">
                 <a:solidFill>
-                  <a:srgbClr val="7A6E60"/>
+                  <a:srgbClr val="4F6F60"/>
                 </a:solidFill>
                 <a:latin typeface="游ゴシック" pitchFamily="34" charset="0"/>
                 <a:ea typeface="游ゴシック" pitchFamily="34" charset="-122"/>
@@ -22890,7 +22890,7 @@
             <a:r>
               <a:rPr lang="en-US" sz="1600" dirty="0">
                 <a:solidFill>
-                  <a:srgbClr val="2B2620"/>
+                  <a:srgbClr val="123C2A"/>
                 </a:solidFill>
                 <a:latin typeface="游ゴシック" pitchFamily="34" charset="0"/>
                 <a:ea typeface="游ゴシック" pitchFamily="34" charset="-122"/>
@@ -22929,7 +22929,7 @@
             <a:r>
               <a:rPr lang="en-US" sz="1000" dirty="0">
                 <a:solidFill>
-                  <a:srgbClr val="B7A991"/>
+                  <a:srgbClr val="AFD2C1"/>
                 </a:solidFill>
                 <a:latin typeface="游ゴシック" pitchFamily="34" charset="0"/>
                 <a:ea typeface="游ゴシック" pitchFamily="34" charset="-122"/>
@@ -22955,7 +22955,7 @@
     <p:bg>
       <p:bgPr>
         <a:solidFill>
-          <a:srgbClr val="ECE3D4"/>
+          <a:srgbClr val="F0FAF5"/>
         </a:solidFill>
       </p:bgPr>
     </p:bg>
@@ -23000,7 +23000,7 @@
             <a:r>
               <a:rPr lang="en-US" sz="1100" b="1" spc="200" kern="0" dirty="0">
                 <a:solidFill>
-                  <a:srgbClr val="9C5446"/>
+                  <a:srgbClr val="17784A"/>
                 </a:solidFill>
                 <a:latin typeface="游ゴシック" pitchFamily="34" charset="0"/>
                 <a:ea typeface="游ゴシック" pitchFamily="34" charset="-122"/>
@@ -23027,7 +23027,7 @@
             <a:avLst/>
           </a:prstGeom>
           <a:solidFill>
-            <a:srgbClr val="9C5446"/>
+            <a:srgbClr val="17784A"/>
           </a:solidFill>
           <a:ln/>
         </p:spPr>
@@ -23059,7 +23059,7 @@
             <a:r>
               <a:rPr lang="en-US" sz="3000" b="1" dirty="0">
                 <a:solidFill>
-                  <a:srgbClr val="FCFAF4"/>
+                  <a:srgbClr val="FFFFFF"/>
                 </a:solidFill>
                 <a:latin typeface="游明朝" pitchFamily="34" charset="0"/>
                 <a:ea typeface="游明朝" pitchFamily="34" charset="-122"/>
@@ -23098,7 +23098,7 @@
             <a:r>
               <a:rPr lang="en-US" sz="1200" b="1" spc="200" kern="0" dirty="0">
                 <a:solidFill>
-                  <a:srgbClr val="7A6E60"/>
+                  <a:srgbClr val="4F6F60"/>
                 </a:solidFill>
                 <a:latin typeface="游ゴシック" pitchFamily="34" charset="0"/>
                 <a:ea typeface="游ゴシック" pitchFamily="34" charset="-122"/>
@@ -23137,7 +23137,7 @@
             <a:r>
               <a:rPr lang="en-US" sz="3200" b="1" dirty="0">
                 <a:solidFill>
-                  <a:srgbClr val="2B2620"/>
+                  <a:srgbClr val="123C2A"/>
                 </a:solidFill>
                 <a:latin typeface="游明朝" pitchFamily="34" charset="0"/>
                 <a:ea typeface="游明朝" pitchFamily="34" charset="-122"/>
@@ -23166,12 +23166,12 @@
             </a:avLst>
           </a:prstGeom>
           <a:solidFill>
-            <a:srgbClr val="FCFAF4"/>
+            <a:srgbClr val="FFFFFF"/>
           </a:solidFill>
           <a:ln/>
           <a:effectLst>
             <a:outerShdw sx="100000" sy="100000" kx="0" ky="0" algn="bl" rotWithShape="0" blurRad="127000" dist="508" dir="5400000">
-              <a:srgbClr val="8C7F6E">
+              <a:srgbClr val="7FA795">
                 <a:alpha val="25000"/>
               </a:srgbClr>
             </a:outerShdw>
@@ -23193,7 +23193,7 @@
             <a:avLst/>
           </a:prstGeom>
           <a:solidFill>
-            <a:srgbClr val="9C5446"/>
+            <a:srgbClr val="17784A"/>
           </a:solidFill>
           <a:ln/>
         </p:spPr>
@@ -23225,7 +23225,7 @@
             <a:r>
               <a:rPr lang="en-US" sz="800" b="1" dirty="0">
                 <a:solidFill>
-                  <a:srgbClr val="FCFAF4"/>
+                  <a:srgbClr val="FFFFFF"/>
                 </a:solidFill>
                 <a:latin typeface="游明朝" pitchFamily="34" charset="0"/>
                 <a:ea typeface="游明朝" pitchFamily="34" charset="-122"/>
@@ -23264,7 +23264,7 @@
             <a:r>
               <a:rPr lang="en-US" sz="1600" dirty="0">
                 <a:solidFill>
-                  <a:srgbClr val="2B2620"/>
+                  <a:srgbClr val="123C2A"/>
                 </a:solidFill>
                 <a:latin typeface="游ゴシック" pitchFamily="34" charset="0"/>
                 <a:ea typeface="游ゴシック" pitchFamily="34" charset="-122"/>
@@ -23293,12 +23293,12 @@
             </a:avLst>
           </a:prstGeom>
           <a:solidFill>
-            <a:srgbClr val="FCFAF4"/>
+            <a:srgbClr val="FFFFFF"/>
           </a:solidFill>
           <a:ln/>
           <a:effectLst>
             <a:outerShdw sx="100000" sy="100000" kx="0" ky="0" algn="bl" rotWithShape="0" blurRad="127000" dist="508" dir="5400000">
-              <a:srgbClr val="8C7F6E">
+              <a:srgbClr val="7FA795">
                 <a:alpha val="25000"/>
               </a:srgbClr>
             </a:outerShdw>
@@ -23320,7 +23320,7 @@
             <a:avLst/>
           </a:prstGeom>
           <a:solidFill>
-            <a:srgbClr val="9C5446"/>
+            <a:srgbClr val="17784A"/>
           </a:solidFill>
           <a:ln/>
         </p:spPr>
@@ -23352,7 +23352,7 @@
             <a:r>
               <a:rPr lang="en-US" sz="800" b="1" dirty="0">
                 <a:solidFill>
-                  <a:srgbClr val="FCFAF4"/>
+                  <a:srgbClr val="FFFFFF"/>
                 </a:solidFill>
                 <a:latin typeface="游明朝" pitchFamily="34" charset="0"/>
                 <a:ea typeface="游明朝" pitchFamily="34" charset="-122"/>
@@ -23391,7 +23391,7 @@
             <a:r>
               <a:rPr lang="en-US" sz="1600" dirty="0">
                 <a:solidFill>
-                  <a:srgbClr val="2B2620"/>
+                  <a:srgbClr val="123C2A"/>
                 </a:solidFill>
                 <a:latin typeface="游ゴシック" pitchFamily="34" charset="0"/>
                 <a:ea typeface="游ゴシック" pitchFamily="34" charset="-122"/>
@@ -23420,12 +23420,12 @@
             </a:avLst>
           </a:prstGeom>
           <a:solidFill>
-            <a:srgbClr val="FCFAF4"/>
+            <a:srgbClr val="FFFFFF"/>
           </a:solidFill>
           <a:ln/>
           <a:effectLst>
             <a:outerShdw sx="100000" sy="100000" kx="0" ky="0" algn="bl" rotWithShape="0" blurRad="127000" dist="508" dir="5400000">
-              <a:srgbClr val="8C7F6E">
+              <a:srgbClr val="7FA795">
                 <a:alpha val="25000"/>
               </a:srgbClr>
             </a:outerShdw>
@@ -23447,7 +23447,7 @@
             <a:avLst/>
           </a:prstGeom>
           <a:solidFill>
-            <a:srgbClr val="9C5446"/>
+            <a:srgbClr val="17784A"/>
           </a:solidFill>
           <a:ln/>
         </p:spPr>
@@ -23479,7 +23479,7 @@
             <a:r>
               <a:rPr lang="en-US" sz="800" b="1" dirty="0">
                 <a:solidFill>
-                  <a:srgbClr val="FCFAF4"/>
+                  <a:srgbClr val="FFFFFF"/>
                 </a:solidFill>
                 <a:latin typeface="游明朝" pitchFamily="34" charset="0"/>
                 <a:ea typeface="游明朝" pitchFamily="34" charset="-122"/>
@@ -23518,7 +23518,7 @@
             <a:r>
               <a:rPr lang="en-US" sz="1600" dirty="0">
                 <a:solidFill>
-                  <a:srgbClr val="2B2620"/>
+                  <a:srgbClr val="123C2A"/>
                 </a:solidFill>
                 <a:latin typeface="游ゴシック" pitchFamily="34" charset="0"/>
                 <a:ea typeface="游ゴシック" pitchFamily="34" charset="-122"/>
@@ -23557,7 +23557,7 @@
             <a:r>
               <a:rPr lang="en-US" sz="2100" b="1" dirty="0">
                 <a:solidFill>
-                  <a:srgbClr val="9C5446"/>
+                  <a:srgbClr val="17784A"/>
                 </a:solidFill>
                 <a:latin typeface="游明朝" pitchFamily="34" charset="0"/>
                 <a:ea typeface="游明朝" pitchFamily="34" charset="-122"/>
@@ -23596,7 +23596,7 @@
             <a:r>
               <a:rPr lang="en-US" sz="1000" dirty="0">
                 <a:solidFill>
-                  <a:srgbClr val="B7A991"/>
+                  <a:srgbClr val="AFD2C1"/>
                 </a:solidFill>
                 <a:latin typeface="游ゴシック" pitchFamily="34" charset="0"/>
                 <a:ea typeface="游ゴシック" pitchFamily="34" charset="-122"/>
@@ -23622,7 +23622,7 @@
     <p:bg>
       <p:bgPr>
         <a:solidFill>
-          <a:srgbClr val="ECE3D4"/>
+          <a:srgbClr val="F0FAF5"/>
         </a:solidFill>
       </p:bgPr>
     </p:bg>
@@ -23667,7 +23667,7 @@
             <a:r>
               <a:rPr lang="en-US" sz="1100" b="1" spc="200" kern="0" dirty="0">
                 <a:solidFill>
-                  <a:srgbClr val="9C5446"/>
+                  <a:srgbClr val="17784A"/>
                 </a:solidFill>
                 <a:latin typeface="游ゴシック" pitchFamily="34" charset="0"/>
                 <a:ea typeface="游ゴシック" pitchFamily="34" charset="-122"/>
@@ -23694,7 +23694,7 @@
             <a:avLst/>
           </a:prstGeom>
           <a:solidFill>
-            <a:srgbClr val="5E7060"/>
+            <a:srgbClr val="C92A78"/>
           </a:solidFill>
           <a:ln/>
         </p:spPr>
@@ -23726,7 +23726,7 @@
             <a:r>
               <a:rPr lang="en-US" sz="3000" b="1" dirty="0">
                 <a:solidFill>
-                  <a:srgbClr val="FCFAF4"/>
+                  <a:srgbClr val="FFFFFF"/>
                 </a:solidFill>
                 <a:latin typeface="游明朝" pitchFamily="34" charset="0"/>
                 <a:ea typeface="游明朝" pitchFamily="34" charset="-122"/>
@@ -23765,7 +23765,7 @@
             <a:r>
               <a:rPr lang="en-US" sz="1200" b="1" spc="200" kern="0" dirty="0">
                 <a:solidFill>
-                  <a:srgbClr val="7A6E60"/>
+                  <a:srgbClr val="4F6F60"/>
                 </a:solidFill>
                 <a:latin typeface="游ゴシック" pitchFamily="34" charset="0"/>
                 <a:ea typeface="游ゴシック" pitchFamily="34" charset="-122"/>
@@ -23804,7 +23804,7 @@
             <a:r>
               <a:rPr lang="en-US" sz="3200" b="1" dirty="0">
                 <a:solidFill>
-                  <a:srgbClr val="2B2620"/>
+                  <a:srgbClr val="123C2A"/>
                 </a:solidFill>
                 <a:latin typeface="游明朝" pitchFamily="34" charset="0"/>
                 <a:ea typeface="游明朝" pitchFamily="34" charset="-122"/>
@@ -23833,12 +23833,12 @@
             </a:avLst>
           </a:prstGeom>
           <a:solidFill>
-            <a:srgbClr val="FCFAF4"/>
+            <a:srgbClr val="FFFFFF"/>
           </a:solidFill>
           <a:ln/>
           <a:effectLst>
             <a:outerShdw sx="100000" sy="100000" kx="0" ky="0" algn="bl" rotWithShape="0" blurRad="127000" dist="508" dir="5400000">
-              <a:srgbClr val="8C7F6E">
+              <a:srgbClr val="7FA795">
                 <a:alpha val="25000"/>
               </a:srgbClr>
             </a:outerShdw>
@@ -23860,7 +23860,7 @@
             <a:avLst/>
           </a:prstGeom>
           <a:solidFill>
-            <a:srgbClr val="5E7060"/>
+            <a:srgbClr val="C92A78"/>
           </a:solidFill>
           <a:ln/>
         </p:spPr>
@@ -23892,7 +23892,7 @@
             <a:r>
               <a:rPr lang="en-US" sz="800" b="1" dirty="0">
                 <a:solidFill>
-                  <a:srgbClr val="FCFAF4"/>
+                  <a:srgbClr val="FFFFFF"/>
                 </a:solidFill>
                 <a:latin typeface="游明朝" pitchFamily="34" charset="0"/>
                 <a:ea typeface="游明朝" pitchFamily="34" charset="-122"/>
@@ -23931,7 +23931,7 @@
             <a:r>
               <a:rPr lang="en-US" sz="1600" dirty="0">
                 <a:solidFill>
-                  <a:srgbClr val="2B2620"/>
+                  <a:srgbClr val="123C2A"/>
                 </a:solidFill>
                 <a:latin typeface="游ゴシック" pitchFamily="34" charset="0"/>
                 <a:ea typeface="游ゴシック" pitchFamily="34" charset="-122"/>
@@ -23960,12 +23960,12 @@
             </a:avLst>
           </a:prstGeom>
           <a:solidFill>
-            <a:srgbClr val="FCFAF4"/>
+            <a:srgbClr val="FFFFFF"/>
           </a:solidFill>
           <a:ln/>
           <a:effectLst>
             <a:outerShdw sx="100000" sy="100000" kx="0" ky="0" algn="bl" rotWithShape="0" blurRad="127000" dist="508" dir="5400000">
-              <a:srgbClr val="8C7F6E">
+              <a:srgbClr val="7FA795">
                 <a:alpha val="25000"/>
               </a:srgbClr>
             </a:outerShdw>
@@ -23987,7 +23987,7 @@
             <a:avLst/>
           </a:prstGeom>
           <a:solidFill>
-            <a:srgbClr val="5E7060"/>
+            <a:srgbClr val="C92A78"/>
           </a:solidFill>
           <a:ln/>
         </p:spPr>
@@ -24019,7 +24019,7 @@
             <a:r>
               <a:rPr lang="en-US" sz="800" b="1" dirty="0">
                 <a:solidFill>
-                  <a:srgbClr val="FCFAF4"/>
+                  <a:srgbClr val="FFFFFF"/>
                 </a:solidFill>
                 <a:latin typeface="游明朝" pitchFamily="34" charset="0"/>
                 <a:ea typeface="游明朝" pitchFamily="34" charset="-122"/>
@@ -24058,7 +24058,7 @@
             <a:r>
               <a:rPr lang="en-US" sz="1600" dirty="0">
                 <a:solidFill>
-                  <a:srgbClr val="2B2620"/>
+                  <a:srgbClr val="123C2A"/>
                 </a:solidFill>
                 <a:latin typeface="游ゴシック" pitchFamily="34" charset="0"/>
                 <a:ea typeface="游ゴシック" pitchFamily="34" charset="-122"/>
@@ -24087,12 +24087,12 @@
             </a:avLst>
           </a:prstGeom>
           <a:solidFill>
-            <a:srgbClr val="FCFAF4"/>
+            <a:srgbClr val="FFFFFF"/>
           </a:solidFill>
           <a:ln/>
           <a:effectLst>
             <a:outerShdw sx="100000" sy="100000" kx="0" ky="0" algn="bl" rotWithShape="0" blurRad="127000" dist="508" dir="5400000">
-              <a:srgbClr val="8C7F6E">
+              <a:srgbClr val="7FA795">
                 <a:alpha val="25000"/>
               </a:srgbClr>
             </a:outerShdw>
@@ -24114,7 +24114,7 @@
             <a:avLst/>
           </a:prstGeom>
           <a:solidFill>
-            <a:srgbClr val="5E7060"/>
+            <a:srgbClr val="C92A78"/>
           </a:solidFill>
           <a:ln/>
         </p:spPr>
@@ -24146,7 +24146,7 @@
             <a:r>
               <a:rPr lang="en-US" sz="800" b="1" dirty="0">
                 <a:solidFill>
-                  <a:srgbClr val="FCFAF4"/>
+                  <a:srgbClr val="FFFFFF"/>
                 </a:solidFill>
                 <a:latin typeface="游明朝" pitchFamily="34" charset="0"/>
                 <a:ea typeface="游明朝" pitchFamily="34" charset="-122"/>
@@ -24185,7 +24185,7 @@
             <a:r>
               <a:rPr lang="en-US" sz="1600" dirty="0">
                 <a:solidFill>
-                  <a:srgbClr val="2B2620"/>
+                  <a:srgbClr val="123C2A"/>
                 </a:solidFill>
                 <a:latin typeface="游ゴシック" pitchFamily="34" charset="0"/>
                 <a:ea typeface="游ゴシック" pitchFamily="34" charset="-122"/>
@@ -24224,7 +24224,7 @@
             <a:r>
               <a:rPr lang="en-US" sz="2100" b="1" dirty="0">
                 <a:solidFill>
-                  <a:srgbClr val="5E7060"/>
+                  <a:srgbClr val="C92A78"/>
                 </a:solidFill>
                 <a:latin typeface="游明朝" pitchFamily="34" charset="0"/>
                 <a:ea typeface="游明朝" pitchFamily="34" charset="-122"/>
@@ -24263,7 +24263,7 @@
             <a:r>
               <a:rPr lang="en-US" sz="1000" dirty="0">
                 <a:solidFill>
-                  <a:srgbClr val="B7A991"/>
+                  <a:srgbClr val="AFD2C1"/>
                 </a:solidFill>
                 <a:latin typeface="游ゴシック" pitchFamily="34" charset="0"/>
                 <a:ea typeface="游ゴシック" pitchFamily="34" charset="-122"/>
@@ -24289,7 +24289,7 @@
     <p:bg>
       <p:bgPr>
         <a:solidFill>
-          <a:srgbClr val="ECE3D4"/>
+          <a:srgbClr val="F0FAF5"/>
         </a:solidFill>
       </p:bgPr>
     </p:bg>
@@ -24334,7 +24334,7 @@
             <a:r>
               <a:rPr lang="en-US" sz="1100" b="1" spc="200" kern="0" dirty="0">
                 <a:solidFill>
-                  <a:srgbClr val="9C5446"/>
+                  <a:srgbClr val="17784A"/>
                 </a:solidFill>
                 <a:latin typeface="游ゴシック" pitchFamily="34" charset="0"/>
                 <a:ea typeface="游ゴシック" pitchFamily="34" charset="-122"/>
@@ -24376,7 +24376,7 @@
             <a:r>
               <a:rPr lang="en-US" sz="3200" b="1" dirty="0">
                 <a:solidFill>
-                  <a:srgbClr val="2B2620"/>
+                  <a:srgbClr val="123C2A"/>
                 </a:solidFill>
                 <a:latin typeface="游明朝" pitchFamily="34" charset="0"/>
                 <a:ea typeface="游明朝" pitchFamily="34" charset="-122"/>
@@ -24405,12 +24405,12 @@
             </a:avLst>
           </a:prstGeom>
           <a:solidFill>
-            <a:srgbClr val="FCFAF4"/>
+            <a:srgbClr val="FFFFFF"/>
           </a:solidFill>
           <a:ln/>
           <a:effectLst>
             <a:outerShdw sx="100000" sy="100000" kx="0" ky="0" algn="bl" rotWithShape="0" blurRad="127000" dist="508" dir="5400000">
-              <a:srgbClr val="8C7F6E">
+              <a:srgbClr val="7FA795">
                 <a:alpha val="25000"/>
               </a:srgbClr>
             </a:outerShdw>
@@ -24447,7 +24447,7 @@
             <a:r>
               <a:rPr lang="en-US" sz="1600" dirty="0">
                 <a:solidFill>
-                  <a:srgbClr val="2B2620"/>
+                  <a:srgbClr val="123C2A"/>
                 </a:solidFill>
                 <a:latin typeface="游ゴシック" pitchFamily="34" charset="0"/>
                 <a:ea typeface="游ゴシック" pitchFamily="34" charset="-122"/>
@@ -24467,7 +24467,7 @@
             <a:r>
               <a:rPr lang="en-US" sz="1600" dirty="0">
                 <a:solidFill>
-                  <a:srgbClr val="2B2620"/>
+                  <a:srgbClr val="123C2A"/>
                 </a:solidFill>
                 <a:latin typeface="游ゴシック" pitchFamily="34" charset="0"/>
                 <a:ea typeface="游ゴシック" pitchFamily="34" charset="-122"/>
@@ -24496,7 +24496,7 @@
             <a:r>
               <a:rPr lang="en-US" sz="1600" dirty="0">
                 <a:solidFill>
-                  <a:srgbClr val="2B2620"/>
+                  <a:srgbClr val="123C2A"/>
                 </a:solidFill>
                 <a:latin typeface="游ゴシック" pitchFamily="34" charset="0"/>
                 <a:ea typeface="游ゴシック" pitchFamily="34" charset="-122"/>
@@ -24516,7 +24516,7 @@
             <a:r>
               <a:rPr lang="en-US" sz="1600" dirty="0">
                 <a:solidFill>
-                  <a:srgbClr val="2B2620"/>
+                  <a:srgbClr val="123C2A"/>
                 </a:solidFill>
                 <a:latin typeface="游ゴシック" pitchFamily="34" charset="0"/>
                 <a:ea typeface="游ゴシック" pitchFamily="34" charset="-122"/>
@@ -24555,7 +24555,7 @@
             <a:r>
               <a:rPr lang="en-US" sz="1400" dirty="0">
                 <a:solidFill>
-                  <a:srgbClr val="7A6E60"/>
+                  <a:srgbClr val="4F6F60"/>
                 </a:solidFill>
                 <a:latin typeface="游ゴシック" pitchFamily="34" charset="0"/>
                 <a:ea typeface="游ゴシック" pitchFamily="34" charset="-122"/>
@@ -24594,7 +24594,7 @@
             <a:r>
               <a:rPr lang="en-US" sz="1000" dirty="0">
                 <a:solidFill>
-                  <a:srgbClr val="B7A991"/>
+                  <a:srgbClr val="AFD2C1"/>
                 </a:solidFill>
                 <a:latin typeface="游ゴシック" pitchFamily="34" charset="0"/>
                 <a:ea typeface="游ゴシック" pitchFamily="34" charset="-122"/>
@@ -24620,7 +24620,7 @@
     <p:bg>
       <p:bgPr>
         <a:solidFill>
-          <a:srgbClr val="ECE3D4"/>
+          <a:srgbClr val="F0FAF5"/>
         </a:solidFill>
       </p:bgPr>
     </p:bg>
@@ -24665,7 +24665,7 @@
             <a:r>
               <a:rPr lang="en-US" sz="1100" b="1" spc="200" kern="0" dirty="0">
                 <a:solidFill>
-                  <a:srgbClr val="9C5446"/>
+                  <a:srgbClr val="17784A"/>
                 </a:solidFill>
                 <a:latin typeface="游ゴシック" pitchFamily="34" charset="0"/>
                 <a:ea typeface="游ゴシック" pitchFamily="34" charset="-122"/>
@@ -24692,7 +24692,7 @@
             <a:avLst/>
           </a:prstGeom>
           <a:solidFill>
-            <a:srgbClr val="9C5446"/>
+            <a:srgbClr val="17784A"/>
           </a:solidFill>
           <a:ln/>
         </p:spPr>
@@ -24724,7 +24724,7 @@
             <a:r>
               <a:rPr lang="en-US" sz="3000" b="1" dirty="0">
                 <a:solidFill>
-                  <a:srgbClr val="FCFAF4"/>
+                  <a:srgbClr val="FFFFFF"/>
                 </a:solidFill>
                 <a:latin typeface="游明朝" pitchFamily="34" charset="0"/>
                 <a:ea typeface="游明朝" pitchFamily="34" charset="-122"/>
@@ -24763,7 +24763,7 @@
             <a:r>
               <a:rPr lang="en-US" sz="1200" b="1" spc="200" kern="0" dirty="0">
                 <a:solidFill>
-                  <a:srgbClr val="7A6E60"/>
+                  <a:srgbClr val="4F6F60"/>
                 </a:solidFill>
                 <a:latin typeface="游ゴシック" pitchFamily="34" charset="0"/>
                 <a:ea typeface="游ゴシック" pitchFamily="34" charset="-122"/>
@@ -24802,7 +24802,7 @@
             <a:r>
               <a:rPr lang="en-US" sz="3200" b="1" dirty="0">
                 <a:solidFill>
-                  <a:srgbClr val="2B2620"/>
+                  <a:srgbClr val="123C2A"/>
                 </a:solidFill>
                 <a:latin typeface="游明朝" pitchFamily="34" charset="0"/>
                 <a:ea typeface="游明朝" pitchFamily="34" charset="-122"/>
@@ -24831,12 +24831,12 @@
             </a:avLst>
           </a:prstGeom>
           <a:solidFill>
-            <a:srgbClr val="FCFAF4"/>
+            <a:srgbClr val="FFFFFF"/>
           </a:solidFill>
           <a:ln/>
           <a:effectLst>
             <a:outerShdw sx="100000" sy="100000" kx="0" ky="0" algn="bl" rotWithShape="0" blurRad="127000" dist="508" dir="5400000">
-              <a:srgbClr val="8C7F6E">
+              <a:srgbClr val="7FA795">
                 <a:alpha val="25000"/>
               </a:srgbClr>
             </a:outerShdw>
@@ -24858,7 +24858,7 @@
             <a:avLst/>
           </a:prstGeom>
           <a:solidFill>
-            <a:srgbClr val="9C5446"/>
+            <a:srgbClr val="17784A"/>
           </a:solidFill>
           <a:ln/>
         </p:spPr>
@@ -24890,7 +24890,7 @@
             <a:r>
               <a:rPr lang="en-US" sz="800" b="1" dirty="0">
                 <a:solidFill>
-                  <a:srgbClr val="FCFAF4"/>
+                  <a:srgbClr val="FFFFFF"/>
                 </a:solidFill>
                 <a:latin typeface="游明朝" pitchFamily="34" charset="0"/>
                 <a:ea typeface="游明朝" pitchFamily="34" charset="-122"/>
@@ -24929,7 +24929,7 @@
             <a:r>
               <a:rPr lang="en-US" sz="1600" dirty="0">
                 <a:solidFill>
-                  <a:srgbClr val="2B2620"/>
+                  <a:srgbClr val="123C2A"/>
                 </a:solidFill>
                 <a:latin typeface="游ゴシック" pitchFamily="34" charset="0"/>
                 <a:ea typeface="游ゴシック" pitchFamily="34" charset="-122"/>
@@ -24958,12 +24958,12 @@
             </a:avLst>
           </a:prstGeom>
           <a:solidFill>
-            <a:srgbClr val="FCFAF4"/>
+            <a:srgbClr val="FFFFFF"/>
           </a:solidFill>
           <a:ln/>
           <a:effectLst>
             <a:outerShdw sx="100000" sy="100000" kx="0" ky="0" algn="bl" rotWithShape="0" blurRad="127000" dist="508" dir="5400000">
-              <a:srgbClr val="8C7F6E">
+              <a:srgbClr val="7FA795">
                 <a:alpha val="25000"/>
               </a:srgbClr>
             </a:outerShdw>
@@ -24985,7 +24985,7 @@
             <a:avLst/>
           </a:prstGeom>
           <a:solidFill>
-            <a:srgbClr val="9C5446"/>
+            <a:srgbClr val="17784A"/>
           </a:solidFill>
           <a:ln/>
         </p:spPr>
@@ -25017,7 +25017,7 @@
             <a:r>
               <a:rPr lang="en-US" sz="800" b="1" dirty="0">
                 <a:solidFill>
-                  <a:srgbClr val="FCFAF4"/>
+                  <a:srgbClr val="FFFFFF"/>
                 </a:solidFill>
                 <a:latin typeface="游明朝" pitchFamily="34" charset="0"/>
                 <a:ea typeface="游明朝" pitchFamily="34" charset="-122"/>
@@ -25056,7 +25056,7 @@
             <a:r>
               <a:rPr lang="en-US" sz="1600" dirty="0">
                 <a:solidFill>
-                  <a:srgbClr val="2B2620"/>
+                  <a:srgbClr val="123C2A"/>
                 </a:solidFill>
                 <a:latin typeface="游ゴシック" pitchFamily="34" charset="0"/>
                 <a:ea typeface="游ゴシック" pitchFamily="34" charset="-122"/>
@@ -25085,12 +25085,12 @@
             </a:avLst>
           </a:prstGeom>
           <a:solidFill>
-            <a:srgbClr val="FCFAF4"/>
+            <a:srgbClr val="FFFFFF"/>
           </a:solidFill>
           <a:ln/>
           <a:effectLst>
             <a:outerShdw sx="100000" sy="100000" kx="0" ky="0" algn="bl" rotWithShape="0" blurRad="127000" dist="508" dir="5400000">
-              <a:srgbClr val="8C7F6E">
+              <a:srgbClr val="7FA795">
                 <a:alpha val="25000"/>
               </a:srgbClr>
             </a:outerShdw>
@@ -25112,7 +25112,7 @@
             <a:avLst/>
           </a:prstGeom>
           <a:solidFill>
-            <a:srgbClr val="9C5446"/>
+            <a:srgbClr val="17784A"/>
           </a:solidFill>
           <a:ln/>
         </p:spPr>
@@ -25144,7 +25144,7 @@
             <a:r>
               <a:rPr lang="en-US" sz="800" b="1" dirty="0">
                 <a:solidFill>
-                  <a:srgbClr val="FCFAF4"/>
+                  <a:srgbClr val="FFFFFF"/>
                 </a:solidFill>
                 <a:latin typeface="游明朝" pitchFamily="34" charset="0"/>
                 <a:ea typeface="游明朝" pitchFamily="34" charset="-122"/>
@@ -25183,7 +25183,7 @@
             <a:r>
               <a:rPr lang="en-US" sz="1600" dirty="0">
                 <a:solidFill>
-                  <a:srgbClr val="2B2620"/>
+                  <a:srgbClr val="123C2A"/>
                 </a:solidFill>
                 <a:latin typeface="游ゴシック" pitchFamily="34" charset="0"/>
                 <a:ea typeface="游ゴシック" pitchFamily="34" charset="-122"/>
@@ -25222,7 +25222,7 @@
             <a:r>
               <a:rPr lang="en-US" sz="2100" b="1" dirty="0">
                 <a:solidFill>
-                  <a:srgbClr val="9C5446"/>
+                  <a:srgbClr val="17784A"/>
                 </a:solidFill>
                 <a:latin typeface="游明朝" pitchFamily="34" charset="0"/>
                 <a:ea typeface="游明朝" pitchFamily="34" charset="-122"/>
@@ -25261,7 +25261,7 @@
             <a:r>
               <a:rPr lang="en-US" sz="1000" dirty="0">
                 <a:solidFill>
-                  <a:srgbClr val="B7A991"/>
+                  <a:srgbClr val="AFD2C1"/>
                 </a:solidFill>
                 <a:latin typeface="游ゴシック" pitchFamily="34" charset="0"/>
                 <a:ea typeface="游ゴシック" pitchFamily="34" charset="-122"/>
@@ -25287,7 +25287,7 @@
     <p:bg>
       <p:bgPr>
         <a:solidFill>
-          <a:srgbClr val="ECE3D4"/>
+          <a:srgbClr val="F0FAF5"/>
         </a:solidFill>
       </p:bgPr>
     </p:bg>
@@ -25332,7 +25332,7 @@
             <a:r>
               <a:rPr lang="en-US" sz="1100" b="1" spc="200" kern="0" dirty="0">
                 <a:solidFill>
-                  <a:srgbClr val="9C5446"/>
+                  <a:srgbClr val="17784A"/>
                 </a:solidFill>
                 <a:latin typeface="游ゴシック" pitchFamily="34" charset="0"/>
                 <a:ea typeface="游ゴシック" pitchFamily="34" charset="-122"/>
@@ -25374,7 +25374,7 @@
             <a:r>
               <a:rPr lang="en-US" sz="3200" b="1" dirty="0">
                 <a:solidFill>
-                  <a:srgbClr val="2B2620"/>
+                  <a:srgbClr val="123C2A"/>
                 </a:solidFill>
                 <a:latin typeface="游明朝" pitchFamily="34" charset="0"/>
                 <a:ea typeface="游明朝" pitchFamily="34" charset="-122"/>
@@ -25403,12 +25403,12 @@
             </a:avLst>
           </a:prstGeom>
           <a:solidFill>
-            <a:srgbClr val="FCFAF4"/>
+            <a:srgbClr val="FFFFFF"/>
           </a:solidFill>
           <a:ln/>
           <a:effectLst>
             <a:outerShdw sx="100000" sy="100000" kx="0" ky="0" algn="bl" rotWithShape="0" blurRad="127000" dist="508" dir="5400000">
-              <a:srgbClr val="8C7F6E">
+              <a:srgbClr val="7FA795">
                 <a:alpha val="25000"/>
               </a:srgbClr>
             </a:outerShdw>
@@ -25442,7 +25442,7 @@
             <a:r>
               <a:rPr lang="en-US" sz="1900" b="1" dirty="0">
                 <a:solidFill>
-                  <a:srgbClr val="2B2620"/>
+                  <a:srgbClr val="123C2A"/>
                 </a:solidFill>
                 <a:latin typeface="游明朝" pitchFamily="34" charset="0"/>
                 <a:ea typeface="游明朝" pitchFamily="34" charset="-122"/>
@@ -25484,7 +25484,7 @@
             <a:r>
               <a:rPr lang="en-US" sz="1450" dirty="0">
                 <a:solidFill>
-                  <a:srgbClr val="2B2620"/>
+                  <a:srgbClr val="123C2A"/>
                 </a:solidFill>
                 <a:latin typeface="游ゴシック" pitchFamily="34" charset="0"/>
                 <a:ea typeface="游ゴシック" pitchFamily="34" charset="-122"/>
@@ -25513,7 +25513,7 @@
             <a:r>
               <a:rPr lang="en-US" sz="1450" dirty="0">
                 <a:solidFill>
-                  <a:srgbClr val="2B2620"/>
+                  <a:srgbClr val="123C2A"/>
                 </a:solidFill>
                 <a:latin typeface="游ゴシック" pitchFamily="34" charset="0"/>
                 <a:ea typeface="游ゴシック" pitchFamily="34" charset="-122"/>
@@ -25533,7 +25533,7 @@
             <a:r>
               <a:rPr lang="en-US" sz="1450" dirty="0">
                 <a:solidFill>
-                  <a:srgbClr val="2B2620"/>
+                  <a:srgbClr val="123C2A"/>
                 </a:solidFill>
                 <a:latin typeface="游ゴシック" pitchFamily="34" charset="0"/>
                 <a:ea typeface="游ゴシック" pitchFamily="34" charset="-122"/>
@@ -25553,7 +25553,7 @@
             <a:r>
               <a:rPr lang="en-US" sz="1450" dirty="0">
                 <a:solidFill>
-                  <a:srgbClr val="2B2620"/>
+                  <a:srgbClr val="123C2A"/>
                 </a:solidFill>
                 <a:latin typeface="游ゴシック" pitchFamily="34" charset="0"/>
                 <a:ea typeface="游ゴシック" pitchFamily="34" charset="-122"/>
@@ -25592,7 +25592,7 @@
             <a:r>
               <a:rPr lang="en-US" sz="1100" b="1" dirty="0">
                 <a:solidFill>
-                  <a:srgbClr val="7A6E60"/>
+                  <a:srgbClr val="4F6F60"/>
                 </a:solidFill>
                 <a:latin typeface="游ゴシック" pitchFamily="34" charset="0"/>
                 <a:ea typeface="游ゴシック" pitchFamily="34" charset="-122"/>
@@ -25631,7 +25631,7 @@
             <a:r>
               <a:rPr lang="en-US" sz="1700" b="1" dirty="0">
                 <a:solidFill>
-                  <a:srgbClr val="2B2620"/>
+                  <a:srgbClr val="123C2A"/>
                 </a:solidFill>
                 <a:latin typeface="游明朝" pitchFamily="34" charset="0"/>
                 <a:ea typeface="游明朝" pitchFamily="34" charset="-122"/>
@@ -25670,7 +25670,7 @@
             <a:r>
               <a:rPr lang="en-US" sz="1100" b="1" dirty="0">
                 <a:solidFill>
-                  <a:srgbClr val="7A6E60"/>
+                  <a:srgbClr val="4F6F60"/>
                 </a:solidFill>
                 <a:latin typeface="游ゴシック" pitchFamily="34" charset="0"/>
                 <a:ea typeface="游ゴシック" pitchFamily="34" charset="-122"/>
@@ -25709,7 +25709,7 @@
             <a:r>
               <a:rPr lang="en-US" sz="1700" b="1" dirty="0">
                 <a:solidFill>
-                  <a:srgbClr val="2B2620"/>
+                  <a:srgbClr val="123C2A"/>
                 </a:solidFill>
                 <a:latin typeface="游明朝" pitchFamily="34" charset="0"/>
                 <a:ea typeface="游明朝" pitchFamily="34" charset="-122"/>
@@ -25748,7 +25748,7 @@
             <a:r>
               <a:rPr lang="en-US" sz="1100" b="1" dirty="0">
                 <a:solidFill>
-                  <a:srgbClr val="7A6E60"/>
+                  <a:srgbClr val="4F6F60"/>
                 </a:solidFill>
                 <a:latin typeface="游ゴシック" pitchFamily="34" charset="0"/>
                 <a:ea typeface="游ゴシック" pitchFamily="34" charset="-122"/>
@@ -25787,7 +25787,7 @@
             <a:r>
               <a:rPr lang="en-US" sz="2200" b="1" dirty="0">
                 <a:solidFill>
-                  <a:srgbClr val="9C5446"/>
+                  <a:srgbClr val="17784A"/>
                 </a:solidFill>
                 <a:latin typeface="游明朝" pitchFamily="34" charset="0"/>
                 <a:ea typeface="游明朝" pitchFamily="34" charset="-122"/>
@@ -25826,7 +25826,7 @@
             <a:r>
               <a:rPr lang="en-US" sz="2300" b="1" dirty="0">
                 <a:solidFill>
-                  <a:srgbClr val="2B2620"/>
+                  <a:srgbClr val="123C2A"/>
                 </a:solidFill>
                 <a:latin typeface="游明朝" pitchFamily="34" charset="0"/>
                 <a:ea typeface="游明朝" pitchFamily="34" charset="-122"/>
@@ -25865,7 +25865,7 @@
             <a:r>
               <a:rPr lang="en-US" sz="1000" dirty="0">
                 <a:solidFill>
-                  <a:srgbClr val="9E9484"/>
+                  <a:srgbClr val="4F6F60"/>
                 </a:solidFill>
                 <a:latin typeface="游ゴシック" pitchFamily="34" charset="0"/>
                 <a:ea typeface="游ゴシック" pitchFamily="34" charset="-122"/>
@@ -25904,7 +25904,7 @@
             <a:r>
               <a:rPr lang="en-US" sz="1000" dirty="0">
                 <a:solidFill>
-                  <a:srgbClr val="B7A991"/>
+                  <a:srgbClr val="AFD2C1"/>
                 </a:solidFill>
                 <a:latin typeface="游ゴシック" pitchFamily="34" charset="0"/>
                 <a:ea typeface="游ゴシック" pitchFamily="34" charset="-122"/>
@@ -25930,7 +25930,7 @@
     <p:bg>
       <p:bgPr>
         <a:solidFill>
-          <a:srgbClr val="ECE3D4"/>
+          <a:srgbClr val="F0FAF5"/>
         </a:solidFill>
       </p:bgPr>
     </p:bg>
@@ -25975,7 +25975,7 @@
             <a:r>
               <a:rPr lang="en-US" sz="1100" b="1" spc="200" kern="0" dirty="0">
                 <a:solidFill>
-                  <a:srgbClr val="9C5446"/>
+                  <a:srgbClr val="17784A"/>
                 </a:solidFill>
                 <a:latin typeface="游ゴシック" pitchFamily="34" charset="0"/>
                 <a:ea typeface="游ゴシック" pitchFamily="34" charset="-122"/>
@@ -26017,7 +26017,7 @@
             <a:r>
               <a:rPr lang="en-US" sz="3200" b="1" dirty="0">
                 <a:solidFill>
-                  <a:srgbClr val="2B2620"/>
+                  <a:srgbClr val="123C2A"/>
                 </a:solidFill>
                 <a:latin typeface="游明朝" pitchFamily="34" charset="0"/>
                 <a:ea typeface="游明朝" pitchFamily="34" charset="-122"/>
@@ -26046,12 +26046,12 @@
             </a:avLst>
           </a:prstGeom>
           <a:solidFill>
-            <a:srgbClr val="FCFAF4"/>
+            <a:srgbClr val="FFFFFF"/>
           </a:solidFill>
           <a:ln/>
           <a:effectLst>
             <a:outerShdw sx="100000" sy="100000" kx="0" ky="0" algn="bl" rotWithShape="0" blurRad="127000" dist="508" dir="5400000">
-              <a:srgbClr val="8C7F6E">
+              <a:srgbClr val="7FA795">
                 <a:alpha val="25000"/>
               </a:srgbClr>
             </a:outerShdw>
@@ -26085,7 +26085,7 @@
             <a:r>
               <a:rPr lang="en-US" sz="1600" b="1" dirty="0">
                 <a:solidFill>
-                  <a:srgbClr val="9C5446"/>
+                  <a:srgbClr val="17784A"/>
                 </a:solidFill>
                 <a:latin typeface="游明朝" pitchFamily="34" charset="0"/>
                 <a:ea typeface="游明朝" pitchFamily="34" charset="-122"/>
@@ -26124,7 +26124,7 @@
             <a:r>
               <a:rPr lang="en-US" sz="1300" dirty="0">
                 <a:solidFill>
-                  <a:srgbClr val="2B2620"/>
+                  <a:srgbClr val="123C2A"/>
                 </a:solidFill>
                 <a:latin typeface="游ゴシック" pitchFamily="34" charset="0"/>
                 <a:ea typeface="游ゴシック" pitchFamily="34" charset="-122"/>
@@ -26153,12 +26153,12 @@
             </a:avLst>
           </a:prstGeom>
           <a:solidFill>
-            <a:srgbClr val="FCFAF4"/>
+            <a:srgbClr val="FFFFFF"/>
           </a:solidFill>
           <a:ln/>
           <a:effectLst>
             <a:outerShdw sx="100000" sy="100000" kx="0" ky="0" algn="bl" rotWithShape="0" blurRad="127000" dist="508" dir="5400000">
-              <a:srgbClr val="8C7F6E">
+              <a:srgbClr val="7FA795">
                 <a:alpha val="25000"/>
               </a:srgbClr>
             </a:outerShdw>
@@ -26192,7 +26192,7 @@
             <a:r>
               <a:rPr lang="en-US" sz="1600" b="1" dirty="0">
                 <a:solidFill>
-                  <a:srgbClr val="9C5446"/>
+                  <a:srgbClr val="17784A"/>
                 </a:solidFill>
                 <a:latin typeface="游明朝" pitchFamily="34" charset="0"/>
                 <a:ea typeface="游明朝" pitchFamily="34" charset="-122"/>
@@ -26231,7 +26231,7 @@
             <a:r>
               <a:rPr lang="en-US" sz="1300" dirty="0">
                 <a:solidFill>
-                  <a:srgbClr val="2B2620"/>
+                  <a:srgbClr val="123C2A"/>
                 </a:solidFill>
                 <a:latin typeface="游ゴシック" pitchFamily="34" charset="0"/>
                 <a:ea typeface="游ゴシック" pitchFamily="34" charset="-122"/>
@@ -26260,12 +26260,12 @@
             </a:avLst>
           </a:prstGeom>
           <a:solidFill>
-            <a:srgbClr val="FCFAF4"/>
+            <a:srgbClr val="FFFFFF"/>
           </a:solidFill>
           <a:ln/>
           <a:effectLst>
             <a:outerShdw sx="100000" sy="100000" kx="0" ky="0" algn="bl" rotWithShape="0" blurRad="127000" dist="508" dir="5400000">
-              <a:srgbClr val="8C7F6E">
+              <a:srgbClr val="7FA795">
                 <a:alpha val="25000"/>
               </a:srgbClr>
             </a:outerShdw>
@@ -26299,7 +26299,7 @@
             <a:r>
               <a:rPr lang="en-US" sz="1600" b="1" dirty="0">
                 <a:solidFill>
-                  <a:srgbClr val="9C5446"/>
+                  <a:srgbClr val="17784A"/>
                 </a:solidFill>
                 <a:latin typeface="游明朝" pitchFamily="34" charset="0"/>
                 <a:ea typeface="游明朝" pitchFamily="34" charset="-122"/>
@@ -26338,7 +26338,7 @@
             <a:r>
               <a:rPr lang="en-US" sz="1300" dirty="0">
                 <a:solidFill>
-                  <a:srgbClr val="2B2620"/>
+                  <a:srgbClr val="123C2A"/>
                 </a:solidFill>
                 <a:latin typeface="游ゴシック" pitchFamily="34" charset="0"/>
                 <a:ea typeface="游ゴシック" pitchFamily="34" charset="-122"/>
@@ -26367,12 +26367,12 @@
             </a:avLst>
           </a:prstGeom>
           <a:solidFill>
-            <a:srgbClr val="FCFAF4"/>
+            <a:srgbClr val="FFFFFF"/>
           </a:solidFill>
           <a:ln/>
           <a:effectLst>
             <a:outerShdw sx="100000" sy="100000" kx="0" ky="0" algn="bl" rotWithShape="0" blurRad="127000" dist="508" dir="5400000">
-              <a:srgbClr val="8C7F6E">
+              <a:srgbClr val="7FA795">
                 <a:alpha val="25000"/>
               </a:srgbClr>
             </a:outerShdw>
@@ -26406,7 +26406,7 @@
             <a:r>
               <a:rPr lang="en-US" sz="1100" b="1" dirty="0">
                 <a:solidFill>
-                  <a:srgbClr val="7A6E60"/>
+                  <a:srgbClr val="4F6F60"/>
                 </a:solidFill>
                 <a:latin typeface="游ゴシック" pitchFamily="34" charset="0"/>
                 <a:ea typeface="游ゴシック" pitchFamily="34" charset="-122"/>
@@ -26448,7 +26448,7 @@
             <a:r>
               <a:rPr lang="en-US" sz="1900" b="1" dirty="0">
                 <a:solidFill>
-                  <a:srgbClr val="2B2620"/>
+                  <a:srgbClr val="123C2A"/>
                 </a:solidFill>
                 <a:latin typeface="游明朝" pitchFamily="34" charset="0"/>
                 <a:ea typeface="游明朝" pitchFamily="34" charset="-122"/>
@@ -26468,7 +26468,7 @@
             <a:r>
               <a:rPr lang="en-US" sz="1900" b="1" dirty="0">
                 <a:solidFill>
-                  <a:srgbClr val="2B2620"/>
+                  <a:srgbClr val="123C2A"/>
                 </a:solidFill>
                 <a:latin typeface="游明朝" pitchFamily="34" charset="0"/>
                 <a:ea typeface="游明朝" pitchFamily="34" charset="-122"/>
@@ -26507,7 +26507,7 @@
             <a:r>
               <a:rPr lang="en-US" sz="1300" dirty="0">
                 <a:solidFill>
-                  <a:srgbClr val="5E7060"/>
+                  <a:srgbClr val="C92A78"/>
                 </a:solidFill>
                 <a:latin typeface="游ゴシック" pitchFamily="34" charset="0"/>
                 <a:ea typeface="游ゴシック" pitchFamily="34" charset="-122"/>
@@ -26549,7 +26549,7 @@
             <a:r>
               <a:rPr lang="en-US" sz="1200" dirty="0">
                 <a:solidFill>
-                  <a:srgbClr val="7A6E60"/>
+                  <a:srgbClr val="4F6F60"/>
                 </a:solidFill>
                 <a:latin typeface="游ゴシック" pitchFamily="34" charset="0"/>
                 <a:ea typeface="游ゴシック" pitchFamily="34" charset="-122"/>
@@ -26569,7 +26569,7 @@
             <a:r>
               <a:rPr lang="en-US" sz="1200" dirty="0">
                 <a:solidFill>
-                  <a:srgbClr val="7A6E60"/>
+                  <a:srgbClr val="4F6F60"/>
                 </a:solidFill>
                 <a:latin typeface="游ゴシック" pitchFamily="34" charset="0"/>
                 <a:ea typeface="游ゴシック" pitchFamily="34" charset="-122"/>
@@ -26608,7 +26608,7 @@
             <a:r>
               <a:rPr lang="en-US" sz="2400" b="1" dirty="0">
                 <a:solidFill>
-                  <a:srgbClr val="2B2620"/>
+                  <a:srgbClr val="123C2A"/>
                 </a:solidFill>
                 <a:latin typeface="游明朝" pitchFamily="34" charset="0"/>
                 <a:ea typeface="游明朝" pitchFamily="34" charset="-122"/>
@@ -26647,7 +26647,7 @@
             <a:r>
               <a:rPr lang="en-US" sz="1000" dirty="0">
                 <a:solidFill>
-                  <a:srgbClr val="B7A991"/>
+                  <a:srgbClr val="AFD2C1"/>
                 </a:solidFill>
                 <a:latin typeface="游ゴシック" pitchFamily="34" charset="0"/>
                 <a:ea typeface="游ゴシック" pitchFamily="34" charset="-122"/>
@@ -26673,7 +26673,7 @@
     <p:bg>
       <p:bgPr>
         <a:solidFill>
-          <a:srgbClr val="ECE3D4"/>
+          <a:srgbClr val="F0FAF5"/>
         </a:solidFill>
       </p:bgPr>
     </p:bg>
@@ -26718,7 +26718,7 @@
             <a:r>
               <a:rPr lang="en-US" sz="1100" b="1" spc="200" kern="0" dirty="0">
                 <a:solidFill>
-                  <a:srgbClr val="9C5446"/>
+                  <a:srgbClr val="17784A"/>
                 </a:solidFill>
                 <a:latin typeface="游ゴシック" pitchFamily="34" charset="0"/>
                 <a:ea typeface="游ゴシック" pitchFamily="34" charset="-122"/>
@@ -26760,7 +26760,7 @@
             <a:r>
               <a:rPr lang="en-US" sz="3200" b="1" dirty="0">
                 <a:solidFill>
-                  <a:srgbClr val="2B2620"/>
+                  <a:srgbClr val="123C2A"/>
                 </a:solidFill>
                 <a:latin typeface="游明朝" pitchFamily="34" charset="0"/>
                 <a:ea typeface="游明朝" pitchFamily="34" charset="-122"/>
@@ -26789,12 +26789,12 @@
             </a:avLst>
           </a:prstGeom>
           <a:solidFill>
-            <a:srgbClr val="FCFAF4"/>
+            <a:srgbClr val="FFFFFF"/>
           </a:solidFill>
           <a:ln/>
           <a:effectLst>
             <a:outerShdw sx="100000" sy="100000" kx="0" ky="0" algn="bl" rotWithShape="0" blurRad="127000" dist="508" dir="5400000">
-              <a:srgbClr val="8C7F6E">
+              <a:srgbClr val="7FA795">
                 <a:alpha val="25000"/>
               </a:srgbClr>
             </a:outerShdw>
@@ -26828,7 +26828,7 @@
             <a:r>
               <a:rPr lang="en-US" sz="1500" b="1" dirty="0">
                 <a:solidFill>
-                  <a:srgbClr val="9C5446"/>
+                  <a:srgbClr val="17784A"/>
                 </a:solidFill>
                 <a:latin typeface="游明朝" pitchFamily="34" charset="0"/>
                 <a:ea typeface="游明朝" pitchFamily="34" charset="-122"/>
@@ -26867,7 +26867,7 @@
             <a:r>
               <a:rPr lang="en-US" sz="1350" b="1" dirty="0">
                 <a:solidFill>
-                  <a:srgbClr val="2B2620"/>
+                  <a:srgbClr val="123C2A"/>
                 </a:solidFill>
                 <a:latin typeface="游ゴシック" pitchFamily="34" charset="0"/>
                 <a:ea typeface="游ゴシック" pitchFamily="34" charset="-122"/>
@@ -26906,7 +26906,7 @@
             <a:r>
               <a:rPr lang="en-US" sz="1200" dirty="0">
                 <a:solidFill>
-                  <a:srgbClr val="7A6E60"/>
+                  <a:srgbClr val="4F6F60"/>
                 </a:solidFill>
                 <a:latin typeface="游ゴシック" pitchFamily="34" charset="0"/>
                 <a:ea typeface="游ゴシック" pitchFamily="34" charset="-122"/>
@@ -26945,7 +26945,7 @@
             <a:r>
               <a:rPr lang="en-US" sz="1300" dirty="0">
                 <a:solidFill>
-                  <a:srgbClr val="7A6E60"/>
+                  <a:srgbClr val="4F6F60"/>
                 </a:solidFill>
                 <a:latin typeface="游ゴシック" pitchFamily="34" charset="0"/>
                 <a:ea typeface="游ゴシック" pitchFamily="34" charset="-122"/>
@@ -26974,12 +26974,12 @@
             </a:avLst>
           </a:prstGeom>
           <a:solidFill>
-            <a:srgbClr val="FCFAF4"/>
+            <a:srgbClr val="FFFFFF"/>
           </a:solidFill>
           <a:ln/>
           <a:effectLst>
             <a:outerShdw sx="100000" sy="100000" kx="0" ky="0" algn="bl" rotWithShape="0" blurRad="127000" dist="508" dir="5400000">
-              <a:srgbClr val="8C7F6E">
+              <a:srgbClr val="7FA795">
                 <a:alpha val="25000"/>
               </a:srgbClr>
             </a:outerShdw>
@@ -27013,7 +27013,7 @@
             <a:r>
               <a:rPr lang="en-US" sz="1500" b="1" dirty="0">
                 <a:solidFill>
-                  <a:srgbClr val="5E7060"/>
+                  <a:srgbClr val="C92A78"/>
                 </a:solidFill>
                 <a:latin typeface="游明朝" pitchFamily="34" charset="0"/>
                 <a:ea typeface="游明朝" pitchFamily="34" charset="-122"/>
@@ -27052,7 +27052,7 @@
             <a:r>
               <a:rPr lang="en-US" sz="1350" b="1" dirty="0">
                 <a:solidFill>
-                  <a:srgbClr val="2B2620"/>
+                  <a:srgbClr val="123C2A"/>
                 </a:solidFill>
                 <a:latin typeface="游ゴシック" pitchFamily="34" charset="0"/>
                 <a:ea typeface="游ゴシック" pitchFamily="34" charset="-122"/>
@@ -27091,7 +27091,7 @@
             <a:r>
               <a:rPr lang="en-US" sz="1200" dirty="0">
                 <a:solidFill>
-                  <a:srgbClr val="7A6E60"/>
+                  <a:srgbClr val="4F6F60"/>
                 </a:solidFill>
                 <a:latin typeface="游ゴシック" pitchFamily="34" charset="0"/>
                 <a:ea typeface="游ゴシック" pitchFamily="34" charset="-122"/>
@@ -27130,7 +27130,7 @@
             <a:r>
               <a:rPr lang="en-US" sz="1300" dirty="0">
                 <a:solidFill>
-                  <a:srgbClr val="7A6E60"/>
+                  <a:srgbClr val="4F6F60"/>
                 </a:solidFill>
                 <a:latin typeface="游ゴシック" pitchFamily="34" charset="0"/>
                 <a:ea typeface="游ゴシック" pitchFamily="34" charset="-122"/>
@@ -27159,12 +27159,12 @@
             </a:avLst>
           </a:prstGeom>
           <a:solidFill>
-            <a:srgbClr val="FCFAF4"/>
+            <a:srgbClr val="FFFFFF"/>
           </a:solidFill>
           <a:ln/>
           <a:effectLst>
             <a:outerShdw sx="100000" sy="100000" kx="0" ky="0" algn="bl" rotWithShape="0" blurRad="127000" dist="508" dir="5400000">
-              <a:srgbClr val="8C7F6E">
+              <a:srgbClr val="7FA795">
                 <a:alpha val="25000"/>
               </a:srgbClr>
             </a:outerShdw>
@@ -27198,7 +27198,7 @@
             <a:r>
               <a:rPr lang="en-US" sz="1500" b="1" dirty="0">
                 <a:solidFill>
-                  <a:srgbClr val="9C5446"/>
+                  <a:srgbClr val="17784A"/>
                 </a:solidFill>
                 <a:latin typeface="游明朝" pitchFamily="34" charset="0"/>
                 <a:ea typeface="游明朝" pitchFamily="34" charset="-122"/>
@@ -27237,7 +27237,7 @@
             <a:r>
               <a:rPr lang="en-US" sz="1350" b="1" dirty="0">
                 <a:solidFill>
-                  <a:srgbClr val="2B2620"/>
+                  <a:srgbClr val="123C2A"/>
                 </a:solidFill>
                 <a:latin typeface="游ゴシック" pitchFamily="34" charset="0"/>
                 <a:ea typeface="游ゴシック" pitchFamily="34" charset="-122"/>
@@ -27276,7 +27276,7 @@
             <a:r>
               <a:rPr lang="en-US" sz="1200" dirty="0">
                 <a:solidFill>
-                  <a:srgbClr val="7A6E60"/>
+                  <a:srgbClr val="4F6F60"/>
                 </a:solidFill>
                 <a:latin typeface="游ゴシック" pitchFamily="34" charset="0"/>
                 <a:ea typeface="游ゴシック" pitchFamily="34" charset="-122"/>
@@ -27315,7 +27315,7 @@
             <a:r>
               <a:rPr lang="en-US" sz="1300" dirty="0">
                 <a:solidFill>
-                  <a:srgbClr val="7A6E60"/>
+                  <a:srgbClr val="4F6F60"/>
                 </a:solidFill>
                 <a:latin typeface="游ゴシック" pitchFamily="34" charset="0"/>
                 <a:ea typeface="游ゴシック" pitchFamily="34" charset="-122"/>
@@ -27344,12 +27344,12 @@
             </a:avLst>
           </a:prstGeom>
           <a:solidFill>
-            <a:srgbClr val="FCFAF4"/>
+            <a:srgbClr val="FFFFFF"/>
           </a:solidFill>
           <a:ln/>
           <a:effectLst>
             <a:outerShdw sx="100000" sy="100000" kx="0" ky="0" algn="bl" rotWithShape="0" blurRad="127000" dist="508" dir="5400000">
-              <a:srgbClr val="8C7F6E">
+              <a:srgbClr val="7FA795">
                 <a:alpha val="25000"/>
               </a:srgbClr>
             </a:outerShdw>
@@ -27383,7 +27383,7 @@
             <a:r>
               <a:rPr lang="en-US" sz="1500" b="1" dirty="0">
                 <a:solidFill>
-                  <a:srgbClr val="5E7060"/>
+                  <a:srgbClr val="C92A78"/>
                 </a:solidFill>
                 <a:latin typeface="游明朝" pitchFamily="34" charset="0"/>
                 <a:ea typeface="游明朝" pitchFamily="34" charset="-122"/>
@@ -27422,7 +27422,7 @@
             <a:r>
               <a:rPr lang="en-US" sz="1350" b="1" dirty="0">
                 <a:solidFill>
-                  <a:srgbClr val="2B2620"/>
+                  <a:srgbClr val="123C2A"/>
                 </a:solidFill>
                 <a:latin typeface="游ゴシック" pitchFamily="34" charset="0"/>
                 <a:ea typeface="游ゴシック" pitchFamily="34" charset="-122"/>
@@ -27461,7 +27461,7 @@
             <a:r>
               <a:rPr lang="en-US" sz="1200" dirty="0">
                 <a:solidFill>
-                  <a:srgbClr val="7A6E60"/>
+                  <a:srgbClr val="4F6F60"/>
                 </a:solidFill>
                 <a:latin typeface="游ゴシック" pitchFamily="34" charset="0"/>
                 <a:ea typeface="游ゴシック" pitchFamily="34" charset="-122"/>
@@ -27500,7 +27500,7 @@
             <a:r>
               <a:rPr lang="en-US" sz="1300" dirty="0">
                 <a:solidFill>
-                  <a:srgbClr val="7A6E60"/>
+                  <a:srgbClr val="4F6F60"/>
                 </a:solidFill>
                 <a:latin typeface="游ゴシック" pitchFamily="34" charset="0"/>
                 <a:ea typeface="游ゴシック" pitchFamily="34" charset="-122"/>
@@ -27539,7 +27539,7 @@
             <a:r>
               <a:rPr lang="en-US" sz="2600" b="1" dirty="0">
                 <a:solidFill>
-                  <a:srgbClr val="2B2620"/>
+                  <a:srgbClr val="123C2A"/>
                 </a:solidFill>
                 <a:latin typeface="游明朝" pitchFamily="34" charset="0"/>
                 <a:ea typeface="游明朝" pitchFamily="34" charset="-122"/>
@@ -27578,7 +27578,7 @@
             <a:r>
               <a:rPr lang="en-US" sz="1000" dirty="0">
                 <a:solidFill>
-                  <a:srgbClr val="B7A991"/>
+                  <a:srgbClr val="AFD2C1"/>
                 </a:solidFill>
                 <a:latin typeface="游ゴシック" pitchFamily="34" charset="0"/>
                 <a:ea typeface="游ゴシック" pitchFamily="34" charset="-122"/>
@@ -27604,7 +27604,7 @@
     <p:bg>
       <p:bgPr>
         <a:solidFill>
-          <a:srgbClr val="ECE3D4"/>
+          <a:srgbClr val="F0FAF5"/>
         </a:solidFill>
       </p:bgPr>
     </p:bg>
@@ -27649,7 +27649,7 @@
             <a:r>
               <a:rPr lang="en-US" sz="1100" b="1" spc="200" kern="0" dirty="0">
                 <a:solidFill>
-                  <a:srgbClr val="9C5446"/>
+                  <a:srgbClr val="17784A"/>
                 </a:solidFill>
                 <a:latin typeface="游ゴシック" pitchFamily="34" charset="0"/>
                 <a:ea typeface="游ゴシック" pitchFamily="34" charset="-122"/>
@@ -27691,7 +27691,7 @@
             <a:r>
               <a:rPr lang="en-US" sz="3200" b="1" dirty="0">
                 <a:solidFill>
-                  <a:srgbClr val="2B2620"/>
+                  <a:srgbClr val="123C2A"/>
                 </a:solidFill>
                 <a:latin typeface="游明朝" pitchFamily="34" charset="0"/>
                 <a:ea typeface="游明朝" pitchFamily="34" charset="-122"/>
@@ -27730,7 +27730,7 @@
             <a:r>
               <a:rPr lang="en-US" sz="1200" b="1" dirty="0">
                 <a:solidFill>
-                  <a:srgbClr val="7A6E60"/>
+                  <a:srgbClr val="4F6F60"/>
                 </a:solidFill>
                 <a:latin typeface="游ゴシック" pitchFamily="34" charset="0"/>
                 <a:ea typeface="游ゴシック" pitchFamily="34" charset="-122"/>
@@ -27785,7 +27785,7 @@
             <a:r>
               <a:rPr lang="en-US" sz="1100" b="1" dirty="0">
                 <a:solidFill>
-                  <a:srgbClr val="7A6E60"/>
+                  <a:srgbClr val="4F6F60"/>
                 </a:solidFill>
                 <a:latin typeface="游ゴシック" pitchFamily="34" charset="0"/>
                 <a:ea typeface="游ゴシック" pitchFamily="34" charset="-122"/>
@@ -27824,7 +27824,7 @@
             <a:r>
               <a:rPr lang="en-US" sz="4600" b="1" dirty="0">
                 <a:solidFill>
-                  <a:srgbClr val="9C5446"/>
+                  <a:srgbClr val="C92A78"/>
                 </a:solidFill>
                 <a:latin typeface="游明朝" pitchFamily="34" charset="0"/>
                 <a:ea typeface="游明朝" pitchFamily="34" charset="-122"/>
@@ -27866,7 +27866,7 @@
             <a:r>
               <a:rPr lang="en-US" sz="1350" dirty="0">
                 <a:solidFill>
-                  <a:srgbClr val="2B2620"/>
+                  <a:srgbClr val="123C2A"/>
                 </a:solidFill>
                 <a:latin typeface="游ゴシック" pitchFamily="34" charset="0"/>
                 <a:ea typeface="游ゴシック" pitchFamily="34" charset="-122"/>
@@ -27886,7 +27886,7 @@
             <a:r>
               <a:rPr lang="en-US" sz="1350" dirty="0">
                 <a:solidFill>
-                  <a:srgbClr val="2B2620"/>
+                  <a:srgbClr val="123C2A"/>
                 </a:solidFill>
                 <a:latin typeface="游ゴシック" pitchFamily="34" charset="0"/>
                 <a:ea typeface="游ゴシック" pitchFamily="34" charset="-122"/>
@@ -27915,7 +27915,7 @@
             <a:r>
               <a:rPr lang="en-US" sz="1350" dirty="0">
                 <a:solidFill>
-                  <a:srgbClr val="2B2620"/>
+                  <a:srgbClr val="123C2A"/>
                 </a:solidFill>
                 <a:latin typeface="游ゴシック" pitchFamily="34" charset="0"/>
                 <a:ea typeface="游ゴシック" pitchFamily="34" charset="-122"/>
@@ -27935,7 +27935,7 @@
             <a:r>
               <a:rPr lang="en-US" sz="1350" dirty="0">
                 <a:solidFill>
-                  <a:srgbClr val="2B2620"/>
+                  <a:srgbClr val="123C2A"/>
                 </a:solidFill>
                 <a:latin typeface="游ゴシック" pitchFamily="34" charset="0"/>
                 <a:ea typeface="游ゴシック" pitchFamily="34" charset="-122"/>
@@ -27974,7 +27974,7 @@
             <a:r>
               <a:rPr lang="en-US" sz="2800" b="1" dirty="0">
                 <a:solidFill>
-                  <a:srgbClr val="2B2620"/>
+                  <a:srgbClr val="123C2A"/>
                 </a:solidFill>
                 <a:latin typeface="游明朝" pitchFamily="34" charset="0"/>
                 <a:ea typeface="游明朝" pitchFamily="34" charset="-122"/>
@@ -28013,7 +28013,7 @@
             <a:r>
               <a:rPr lang="en-US" sz="1000" dirty="0">
                 <a:solidFill>
-                  <a:srgbClr val="9E9484"/>
+                  <a:srgbClr val="4F6F60"/>
                 </a:solidFill>
                 <a:latin typeface="游ゴシック" pitchFamily="34" charset="0"/>
                 <a:ea typeface="游ゴシック" pitchFamily="34" charset="-122"/>
@@ -28052,7 +28052,7 @@
             <a:r>
               <a:rPr lang="en-US" sz="1000" dirty="0">
                 <a:solidFill>
-                  <a:srgbClr val="B7A991"/>
+                  <a:srgbClr val="AFD2C1"/>
                 </a:solidFill>
                 <a:latin typeface="游ゴシック" pitchFamily="34" charset="0"/>
                 <a:ea typeface="游ゴシック" pitchFamily="34" charset="-122"/>
@@ -28078,7 +28078,7 @@
     <p:bg>
       <p:bgPr>
         <a:solidFill>
-          <a:srgbClr val="ECE3D4"/>
+          <a:srgbClr val="F0FAF5"/>
         </a:solidFill>
       </p:bgPr>
     </p:bg>
@@ -28123,7 +28123,7 @@
             <a:r>
               <a:rPr lang="en-US" sz="1100" b="1" spc="200" kern="0" dirty="0">
                 <a:solidFill>
-                  <a:srgbClr val="9C5446"/>
+                  <a:srgbClr val="17784A"/>
                 </a:solidFill>
                 <a:latin typeface="游ゴシック" pitchFamily="34" charset="0"/>
                 <a:ea typeface="游ゴシック" pitchFamily="34" charset="-122"/>
@@ -28165,7 +28165,7 @@
             <a:r>
               <a:rPr lang="en-US" sz="3200" b="1" dirty="0">
                 <a:solidFill>
-                  <a:srgbClr val="2B2620"/>
+                  <a:srgbClr val="123C2A"/>
                 </a:solidFill>
                 <a:latin typeface="游明朝" pitchFamily="34" charset="0"/>
                 <a:ea typeface="游明朝" pitchFamily="34" charset="-122"/>
@@ -28194,12 +28194,12 @@
             </a:avLst>
           </a:prstGeom>
           <a:solidFill>
-            <a:srgbClr val="FCFAF4"/>
+            <a:srgbClr val="FFFFFF"/>
           </a:solidFill>
           <a:ln/>
           <a:effectLst>
             <a:outerShdw sx="100000" sy="100000" kx="0" ky="0" algn="bl" rotWithShape="0" blurRad="127000" dist="508" dir="5400000">
-              <a:srgbClr val="8C7F6E">
+              <a:srgbClr val="7FA795">
                 <a:alpha val="25000"/>
               </a:srgbClr>
             </a:outerShdw>
@@ -28233,7 +28233,7 @@
             <a:r>
               <a:rPr lang="en-US" sz="1800" b="1" dirty="0">
                 <a:solidFill>
-                  <a:srgbClr val="9C5446"/>
+                  <a:srgbClr val="17784A"/>
                 </a:solidFill>
                 <a:latin typeface="游明朝" pitchFamily="34" charset="0"/>
                 <a:ea typeface="游明朝" pitchFamily="34" charset="-122"/>
@@ -28275,7 +28275,7 @@
             <a:r>
               <a:rPr lang="en-US" sz="1250" dirty="0">
                 <a:solidFill>
-                  <a:srgbClr val="2B2620"/>
+                  <a:srgbClr val="123C2A"/>
                 </a:solidFill>
                 <a:latin typeface="游ゴシック" pitchFamily="34" charset="0"/>
                 <a:ea typeface="游ゴシック" pitchFamily="34" charset="-122"/>
@@ -28295,7 +28295,7 @@
             <a:r>
               <a:rPr lang="en-US" sz="1250" dirty="0">
                 <a:solidFill>
-                  <a:srgbClr val="2B2620"/>
+                  <a:srgbClr val="123C2A"/>
                 </a:solidFill>
                 <a:latin typeface="游ゴシック" pitchFamily="34" charset="0"/>
                 <a:ea typeface="游ゴシック" pitchFamily="34" charset="-122"/>
@@ -28324,12 +28324,12 @@
             </a:avLst>
           </a:prstGeom>
           <a:solidFill>
-            <a:srgbClr val="FCFAF4"/>
+            <a:srgbClr val="FFFFFF"/>
           </a:solidFill>
           <a:ln/>
           <a:effectLst>
             <a:outerShdw sx="100000" sy="100000" kx="0" ky="0" algn="bl" rotWithShape="0" blurRad="127000" dist="508" dir="5400000">
-              <a:srgbClr val="8C7F6E">
+              <a:srgbClr val="7FA795">
                 <a:alpha val="25000"/>
               </a:srgbClr>
             </a:outerShdw>
@@ -28363,7 +28363,7 @@
             <a:r>
               <a:rPr lang="en-US" sz="1800" b="1" dirty="0">
                 <a:solidFill>
-                  <a:srgbClr val="5E7060"/>
+                  <a:srgbClr val="C92A78"/>
                 </a:solidFill>
                 <a:latin typeface="游明朝" pitchFamily="34" charset="0"/>
                 <a:ea typeface="游明朝" pitchFamily="34" charset="-122"/>
@@ -28405,7 +28405,7 @@
             <a:r>
               <a:rPr lang="en-US" sz="1250" dirty="0">
                 <a:solidFill>
-                  <a:srgbClr val="2B2620"/>
+                  <a:srgbClr val="123C2A"/>
                 </a:solidFill>
                 <a:latin typeface="游ゴシック" pitchFamily="34" charset="0"/>
                 <a:ea typeface="游ゴシック" pitchFamily="34" charset="-122"/>
@@ -28425,7 +28425,7 @@
             <a:r>
               <a:rPr lang="en-US" sz="1250" dirty="0">
                 <a:solidFill>
-                  <a:srgbClr val="2B2620"/>
+                  <a:srgbClr val="123C2A"/>
                 </a:solidFill>
                 <a:latin typeface="游ゴシック" pitchFamily="34" charset="0"/>
                 <a:ea typeface="游ゴシック" pitchFamily="34" charset="-122"/>
@@ -28454,12 +28454,12 @@
             </a:avLst>
           </a:prstGeom>
           <a:solidFill>
-            <a:srgbClr val="FCFAF4"/>
+            <a:srgbClr val="FFFFFF"/>
           </a:solidFill>
           <a:ln/>
           <a:effectLst>
             <a:outerShdw sx="100000" sy="100000" kx="0" ky="0" algn="bl" rotWithShape="0" blurRad="127000" dist="508" dir="5400000">
-              <a:srgbClr val="8C7F6E">
+              <a:srgbClr val="7FA795">
                 <a:alpha val="25000"/>
               </a:srgbClr>
             </a:outerShdw>
@@ -28493,7 +28493,7 @@
             <a:r>
               <a:rPr lang="en-US" sz="1800" b="1" dirty="0">
                 <a:solidFill>
-                  <a:srgbClr val="5E7060"/>
+                  <a:srgbClr val="C92A78"/>
                 </a:solidFill>
                 <a:latin typeface="游明朝" pitchFamily="34" charset="0"/>
                 <a:ea typeface="游明朝" pitchFamily="34" charset="-122"/>
@@ -28535,7 +28535,7 @@
             <a:r>
               <a:rPr lang="en-US" sz="1250" dirty="0">
                 <a:solidFill>
-                  <a:srgbClr val="2B2620"/>
+                  <a:srgbClr val="123C2A"/>
                 </a:solidFill>
                 <a:latin typeface="游ゴシック" pitchFamily="34" charset="0"/>
                 <a:ea typeface="游ゴシック" pitchFamily="34" charset="-122"/>
@@ -28555,7 +28555,7 @@
             <a:r>
               <a:rPr lang="en-US" sz="1250" dirty="0">
                 <a:solidFill>
-                  <a:srgbClr val="2B2620"/>
+                  <a:srgbClr val="123C2A"/>
                 </a:solidFill>
                 <a:latin typeface="游ゴシック" pitchFamily="34" charset="0"/>
                 <a:ea typeface="游ゴシック" pitchFamily="34" charset="-122"/>
@@ -28584,12 +28584,12 @@
             </a:avLst>
           </a:prstGeom>
           <a:solidFill>
-            <a:srgbClr val="FCFAF4"/>
+            <a:srgbClr val="FFFFFF"/>
           </a:solidFill>
           <a:ln/>
           <a:effectLst>
             <a:outerShdw sx="100000" sy="100000" kx="0" ky="0" algn="bl" rotWithShape="0" blurRad="127000" dist="508" dir="5400000">
-              <a:srgbClr val="8C7F6E">
+              <a:srgbClr val="7FA795">
                 <a:alpha val="25000"/>
               </a:srgbClr>
             </a:outerShdw>
@@ -28623,7 +28623,7 @@
             <a:r>
               <a:rPr lang="en-US" sz="1800" b="1" dirty="0">
                 <a:solidFill>
-                  <a:srgbClr val="9C5446"/>
+                  <a:srgbClr val="17784A"/>
                 </a:solidFill>
                 <a:latin typeface="游明朝" pitchFamily="34" charset="0"/>
                 <a:ea typeface="游明朝" pitchFamily="34" charset="-122"/>
@@ -28665,7 +28665,7 @@
             <a:r>
               <a:rPr lang="en-US" sz="1250" dirty="0">
                 <a:solidFill>
-                  <a:srgbClr val="2B2620"/>
+                  <a:srgbClr val="123C2A"/>
                 </a:solidFill>
                 <a:latin typeface="游ゴシック" pitchFamily="34" charset="0"/>
                 <a:ea typeface="游ゴシック" pitchFamily="34" charset="-122"/>
@@ -28685,7 +28685,7 @@
             <a:r>
               <a:rPr lang="en-US" sz="1250" dirty="0">
                 <a:solidFill>
-                  <a:srgbClr val="2B2620"/>
+                  <a:srgbClr val="123C2A"/>
                 </a:solidFill>
                 <a:latin typeface="游ゴシック" pitchFamily="34" charset="0"/>
                 <a:ea typeface="游ゴシック" pitchFamily="34" charset="-122"/>
@@ -28724,7 +28724,7 @@
             <a:r>
               <a:rPr lang="en-US" sz="2500" b="1" dirty="0">
                 <a:solidFill>
-                  <a:srgbClr val="2B2620"/>
+                  <a:srgbClr val="123C2A"/>
                 </a:solidFill>
                 <a:latin typeface="游明朝" pitchFamily="34" charset="0"/>
                 <a:ea typeface="游明朝" pitchFamily="34" charset="-122"/>
@@ -28763,7 +28763,7 @@
             <a:r>
               <a:rPr lang="en-US" sz="1500" dirty="0">
                 <a:solidFill>
-                  <a:srgbClr val="7A6E60"/>
+                  <a:srgbClr val="4F6F60"/>
                 </a:solidFill>
                 <a:latin typeface="游ゴシック" pitchFamily="34" charset="0"/>
                 <a:ea typeface="游ゴシック" pitchFamily="34" charset="-122"/>
@@ -28802,7 +28802,7 @@
             <a:r>
               <a:rPr lang="en-US" sz="1000" dirty="0">
                 <a:solidFill>
-                  <a:srgbClr val="B7A991"/>
+                  <a:srgbClr val="AFD2C1"/>
                 </a:solidFill>
                 <a:latin typeface="游ゴシック" pitchFamily="34" charset="0"/>
                 <a:ea typeface="游ゴシック" pitchFamily="34" charset="-122"/>
@@ -28828,7 +28828,7 @@
     <p:bg>
       <p:bgPr>
         <a:solidFill>
-          <a:srgbClr val="2B2620"/>
+          <a:srgbClr val="123C2A"/>
         </a:solidFill>
       </p:bgPr>
     </p:bg>
@@ -28873,7 +28873,7 @@
             <a:r>
               <a:rPr lang="en-US" sz="1100" b="1" spc="200" kern="0" dirty="0">
                 <a:solidFill>
-                  <a:srgbClr val="A2937F"/>
+                  <a:srgbClr val="8FB8A2"/>
                 </a:solidFill>
                 <a:latin typeface="游ゴシック" pitchFamily="34" charset="0"/>
                 <a:ea typeface="游ゴシック" pitchFamily="34" charset="-122"/>
@@ -28915,7 +28915,7 @@
             <a:r>
               <a:rPr lang="en-US" sz="3200" b="1" dirty="0">
                 <a:solidFill>
-                  <a:srgbClr val="ECE3D4"/>
+                  <a:srgbClr val="E8F5EE"/>
                 </a:solidFill>
                 <a:latin typeface="游明朝" pitchFamily="34" charset="0"/>
                 <a:ea typeface="游明朝" pitchFamily="34" charset="-122"/>
@@ -28944,7 +28944,7 @@
             </a:avLst>
           </a:prstGeom>
           <a:solidFill>
-            <a:srgbClr val="35302A"/>
+            <a:srgbClr val="1B4E36"/>
           </a:solidFill>
           <a:ln/>
         </p:spPr>
@@ -28979,7 +28979,7 @@
             <a:r>
               <a:rPr lang="en-US" sz="1800" dirty="0">
                 <a:solidFill>
-                  <a:srgbClr val="ECE3D4"/>
+                  <a:srgbClr val="E8F5EE"/>
                 </a:solidFill>
                 <a:latin typeface="游ゴシック" pitchFamily="34" charset="0"/>
                 <a:ea typeface="游ゴシック" pitchFamily="34" charset="-122"/>
@@ -28999,7 +28999,7 @@
             <a:r>
               <a:rPr lang="en-US" sz="1800" dirty="0">
                 <a:solidFill>
-                  <a:srgbClr val="ECE3D4"/>
+                  <a:srgbClr val="E8F5EE"/>
                 </a:solidFill>
                 <a:latin typeface="游ゴシック" pitchFamily="34" charset="0"/>
                 <a:ea typeface="游ゴシック" pitchFamily="34" charset="-122"/>
@@ -29028,7 +29028,7 @@
             <a:r>
               <a:rPr lang="en-US" sz="1800" dirty="0">
                 <a:solidFill>
-                  <a:srgbClr val="ECE3D4"/>
+                  <a:srgbClr val="E8F5EE"/>
                 </a:solidFill>
                 <a:latin typeface="游ゴシック" pitchFamily="34" charset="0"/>
                 <a:ea typeface="游ゴシック" pitchFamily="34" charset="-122"/>
@@ -29067,7 +29067,7 @@
             <a:r>
               <a:rPr lang="en-US" sz="3000" b="1" dirty="0">
                 <a:solidFill>
-                  <a:srgbClr val="9C5446"/>
+                  <a:srgbClr val="F15C9E"/>
                 </a:solidFill>
                 <a:latin typeface="游明朝" pitchFamily="34" charset="0"/>
                 <a:ea typeface="游明朝" pitchFamily="34" charset="-122"/>
@@ -29106,7 +29106,7 @@
             <a:r>
               <a:rPr lang="en-US" sz="1000" dirty="0">
                 <a:solidFill>
-                  <a:srgbClr val="6B5F51"/>
+                  <a:srgbClr val="3A6450"/>
                 </a:solidFill>
                 <a:latin typeface="游ゴシック" pitchFamily="34" charset="0"/>
                 <a:ea typeface="游ゴシック" pitchFamily="34" charset="-122"/>
@@ -29132,7 +29132,7 @@
     <p:bg>
       <p:bgPr>
         <a:solidFill>
-          <a:srgbClr val="ECE3D4"/>
+          <a:srgbClr val="F0FAF5"/>
         </a:solidFill>
       </p:bgPr>
     </p:bg>
@@ -29177,7 +29177,7 @@
             <a:r>
               <a:rPr lang="en-US" sz="1100" b="1" spc="200" kern="0" dirty="0">
                 <a:solidFill>
-                  <a:srgbClr val="9C5446"/>
+                  <a:srgbClr val="17784A"/>
                 </a:solidFill>
                 <a:latin typeface="游ゴシック" pitchFamily="34" charset="0"/>
                 <a:ea typeface="游ゴシック" pitchFamily="34" charset="-122"/>
@@ -29219,7 +29219,7 @@
             <a:r>
               <a:rPr lang="en-US" sz="3200" b="1" dirty="0">
                 <a:solidFill>
-                  <a:srgbClr val="2B2620"/>
+                  <a:srgbClr val="123C2A"/>
                 </a:solidFill>
                 <a:latin typeface="游明朝" pitchFamily="34" charset="0"/>
                 <a:ea typeface="游明朝" pitchFamily="34" charset="-122"/>
@@ -29248,12 +29248,12 @@
             </a:avLst>
           </a:prstGeom>
           <a:solidFill>
-            <a:srgbClr val="FCFAF4"/>
+            <a:srgbClr val="FFFFFF"/>
           </a:solidFill>
           <a:ln/>
           <a:effectLst>
             <a:outerShdw sx="100000" sy="100000" kx="0" ky="0" algn="bl" rotWithShape="0" blurRad="127000" dist="508" dir="5400000">
-              <a:srgbClr val="8C7F6E">
+              <a:srgbClr val="7FA795">
                 <a:alpha val="25000"/>
               </a:srgbClr>
             </a:outerShdw>
@@ -29275,7 +29275,7 @@
             <a:avLst/>
           </a:prstGeom>
           <a:solidFill>
-            <a:srgbClr val="2B2620"/>
+            <a:srgbClr val="123C2A"/>
           </a:solidFill>
           <a:ln/>
         </p:spPr>
@@ -29307,7 +29307,7 @@
             <a:r>
               <a:rPr lang="en-US" sz="1600" b="1" dirty="0">
                 <a:solidFill>
-                  <a:srgbClr val="FCFAF4"/>
+                  <a:srgbClr val="FFFFFF"/>
                 </a:solidFill>
                 <a:latin typeface="游明朝" pitchFamily="34" charset="0"/>
                 <a:ea typeface="游明朝" pitchFamily="34" charset="-122"/>
@@ -29346,7 +29346,7 @@
             <a:r>
               <a:rPr lang="en-US" sz="1600" b="1" dirty="0">
                 <a:solidFill>
-                  <a:srgbClr val="2B2620"/>
+                  <a:srgbClr val="123C2A"/>
                 </a:solidFill>
                 <a:latin typeface="游ゴシック" pitchFamily="34" charset="0"/>
                 <a:ea typeface="游ゴシック" pitchFamily="34" charset="-122"/>
@@ -29385,7 +29385,7 @@
             <a:r>
               <a:rPr lang="en-US" sz="1500" dirty="0">
                 <a:solidFill>
-                  <a:srgbClr val="9C5446"/>
+                  <a:srgbClr val="17784A"/>
                 </a:solidFill>
                 <a:latin typeface="游ゴシック" pitchFamily="34" charset="0"/>
                 <a:ea typeface="游ゴシック" pitchFamily="34" charset="-122"/>
@@ -29414,12 +29414,12 @@
             </a:avLst>
           </a:prstGeom>
           <a:solidFill>
-            <a:srgbClr val="FCFAF4"/>
+            <a:srgbClr val="FFFFFF"/>
           </a:solidFill>
           <a:ln/>
           <a:effectLst>
             <a:outerShdw sx="100000" sy="100000" kx="0" ky="0" algn="bl" rotWithShape="0" blurRad="127000" dist="508" dir="5400000">
-              <a:srgbClr val="8C7F6E">
+              <a:srgbClr val="7FA795">
                 <a:alpha val="25000"/>
               </a:srgbClr>
             </a:outerShdw>
@@ -29441,7 +29441,7 @@
             <a:avLst/>
           </a:prstGeom>
           <a:solidFill>
-            <a:srgbClr val="2B2620"/>
+            <a:srgbClr val="123C2A"/>
           </a:solidFill>
           <a:ln/>
         </p:spPr>
@@ -29473,7 +29473,7 @@
             <a:r>
               <a:rPr lang="en-US" sz="1600" b="1" dirty="0">
                 <a:solidFill>
-                  <a:srgbClr val="FCFAF4"/>
+                  <a:srgbClr val="FFFFFF"/>
                 </a:solidFill>
                 <a:latin typeface="游明朝" pitchFamily="34" charset="0"/>
                 <a:ea typeface="游明朝" pitchFamily="34" charset="-122"/>
@@ -29512,7 +29512,7 @@
             <a:r>
               <a:rPr lang="en-US" sz="1600" b="1" dirty="0">
                 <a:solidFill>
-                  <a:srgbClr val="2B2620"/>
+                  <a:srgbClr val="123C2A"/>
                 </a:solidFill>
                 <a:latin typeface="游ゴシック" pitchFamily="34" charset="0"/>
                 <a:ea typeface="游ゴシック" pitchFamily="34" charset="-122"/>
@@ -29551,7 +29551,7 @@
             <a:r>
               <a:rPr lang="en-US" sz="1500" dirty="0">
                 <a:solidFill>
-                  <a:srgbClr val="9C5446"/>
+                  <a:srgbClr val="17784A"/>
                 </a:solidFill>
                 <a:latin typeface="游ゴシック" pitchFamily="34" charset="0"/>
                 <a:ea typeface="游ゴシック" pitchFamily="34" charset="-122"/>
@@ -29580,12 +29580,12 @@
             </a:avLst>
           </a:prstGeom>
           <a:solidFill>
-            <a:srgbClr val="FCFAF4"/>
+            <a:srgbClr val="FFFFFF"/>
           </a:solidFill>
           <a:ln/>
           <a:effectLst>
             <a:outerShdw sx="100000" sy="100000" kx="0" ky="0" algn="bl" rotWithShape="0" blurRad="127000" dist="508" dir="5400000">
-              <a:srgbClr val="8C7F6E">
+              <a:srgbClr val="7FA795">
                 <a:alpha val="25000"/>
               </a:srgbClr>
             </a:outerShdw>
@@ -29607,7 +29607,7 @@
             <a:avLst/>
           </a:prstGeom>
           <a:solidFill>
-            <a:srgbClr val="2B2620"/>
+            <a:srgbClr val="123C2A"/>
           </a:solidFill>
           <a:ln/>
         </p:spPr>
@@ -29639,7 +29639,7 @@
             <a:r>
               <a:rPr lang="en-US" sz="1600" b="1" dirty="0">
                 <a:solidFill>
-                  <a:srgbClr val="FCFAF4"/>
+                  <a:srgbClr val="FFFFFF"/>
                 </a:solidFill>
                 <a:latin typeface="游明朝" pitchFamily="34" charset="0"/>
                 <a:ea typeface="游明朝" pitchFamily="34" charset="-122"/>
@@ -29678,7 +29678,7 @@
             <a:r>
               <a:rPr lang="en-US" sz="1600" b="1" dirty="0">
                 <a:solidFill>
-                  <a:srgbClr val="2B2620"/>
+                  <a:srgbClr val="123C2A"/>
                 </a:solidFill>
                 <a:latin typeface="游ゴシック" pitchFamily="34" charset="0"/>
                 <a:ea typeface="游ゴシック" pitchFamily="34" charset="-122"/>
@@ -29717,7 +29717,7 @@
             <a:r>
               <a:rPr lang="en-US" sz="1500" dirty="0">
                 <a:solidFill>
-                  <a:srgbClr val="9C5446"/>
+                  <a:srgbClr val="17784A"/>
                 </a:solidFill>
                 <a:latin typeface="游ゴシック" pitchFamily="34" charset="0"/>
                 <a:ea typeface="游ゴシック" pitchFamily="34" charset="-122"/>
@@ -29756,7 +29756,7 @@
             <a:r>
               <a:rPr lang="en-US" sz="2600" b="1" dirty="0">
                 <a:solidFill>
-                  <a:srgbClr val="2B2620"/>
+                  <a:srgbClr val="123C2A"/>
                 </a:solidFill>
                 <a:latin typeface="游明朝" pitchFamily="34" charset="0"/>
                 <a:ea typeface="游明朝" pitchFamily="34" charset="-122"/>
@@ -29795,7 +29795,7 @@
             <a:r>
               <a:rPr lang="en-US" sz="1000" dirty="0">
                 <a:solidFill>
-                  <a:srgbClr val="B7A991"/>
+                  <a:srgbClr val="AFD2C1"/>
                 </a:solidFill>
                 <a:latin typeface="游ゴシック" pitchFamily="34" charset="0"/>
                 <a:ea typeface="游ゴシック" pitchFamily="34" charset="-122"/>
@@ -29821,7 +29821,7 @@
     <p:bg>
       <p:bgPr>
         <a:solidFill>
-          <a:srgbClr val="ECE3D4"/>
+          <a:srgbClr val="F0FAF5"/>
         </a:solidFill>
       </p:bgPr>
     </p:bg>
@@ -29866,7 +29866,7 @@
             <a:r>
               <a:rPr lang="en-US" sz="1100" b="1" spc="200" kern="0" dirty="0">
                 <a:solidFill>
-                  <a:srgbClr val="9C5446"/>
+                  <a:srgbClr val="17784A"/>
                 </a:solidFill>
                 <a:latin typeface="游ゴシック" pitchFamily="34" charset="0"/>
                 <a:ea typeface="游ゴシック" pitchFamily="34" charset="-122"/>
@@ -29908,7 +29908,7 @@
             <a:r>
               <a:rPr lang="en-US" sz="3200" b="1" dirty="0">
                 <a:solidFill>
-                  <a:srgbClr val="2B2620"/>
+                  <a:srgbClr val="123C2A"/>
                 </a:solidFill>
                 <a:latin typeface="游明朝" pitchFamily="34" charset="0"/>
                 <a:ea typeface="游明朝" pitchFamily="34" charset="-122"/>
@@ -29937,12 +29937,12 @@
             </a:avLst>
           </a:prstGeom>
           <a:solidFill>
-            <a:srgbClr val="FCFAF4"/>
+            <a:srgbClr val="FFFFFF"/>
           </a:solidFill>
           <a:ln/>
           <a:effectLst>
             <a:outerShdw sx="100000" sy="100000" kx="0" ky="0" algn="bl" rotWithShape="0" blurRad="127000" dist="508" dir="5400000">
-              <a:srgbClr val="8C7F6E">
+              <a:srgbClr val="7FA795">
                 <a:alpha val="25000"/>
               </a:srgbClr>
             </a:outerShdw>
@@ -29979,7 +29979,7 @@
             <a:r>
               <a:rPr lang="en-US" sz="2500" b="1" dirty="0">
                 <a:solidFill>
-                  <a:srgbClr val="2B2620"/>
+                  <a:srgbClr val="123C2A"/>
                 </a:solidFill>
                 <a:latin typeface="游明朝" pitchFamily="34" charset="0"/>
                 <a:ea typeface="游明朝" pitchFamily="34" charset="-122"/>
@@ -29999,7 +29999,7 @@
             <a:r>
               <a:rPr lang="en-US" sz="2500" b="1" dirty="0">
                 <a:solidFill>
-                  <a:srgbClr val="2B2620"/>
+                  <a:srgbClr val="123C2A"/>
                 </a:solidFill>
                 <a:latin typeface="游明朝" pitchFamily="34" charset="0"/>
                 <a:ea typeface="游明朝" pitchFamily="34" charset="-122"/>
@@ -30041,7 +30041,7 @@
             <a:r>
               <a:rPr lang="en-US" sz="1400" dirty="0">
                 <a:solidFill>
-                  <a:srgbClr val="7A6E60"/>
+                  <a:srgbClr val="4F6F60"/>
                 </a:solidFill>
                 <a:latin typeface="游ゴシック" pitchFamily="34" charset="0"/>
                 <a:ea typeface="游ゴシック" pitchFamily="34" charset="-122"/>
@@ -30061,7 +30061,7 @@
             <a:r>
               <a:rPr lang="en-US" sz="1400" dirty="0">
                 <a:solidFill>
-                  <a:srgbClr val="7A6E60"/>
+                  <a:srgbClr val="4F6F60"/>
                 </a:solidFill>
                 <a:latin typeface="游ゴシック" pitchFamily="34" charset="0"/>
                 <a:ea typeface="游ゴシック" pitchFamily="34" charset="-122"/>
@@ -30100,7 +30100,7 @@
             <a:r>
               <a:rPr lang="en-US" sz="1200" dirty="0">
                 <a:solidFill>
-                  <a:srgbClr val="5E7060"/>
+                  <a:srgbClr val="C92A78"/>
                 </a:solidFill>
                 <a:latin typeface="游ゴシック" pitchFamily="34" charset="0"/>
                 <a:ea typeface="游ゴシック" pitchFamily="34" charset="-122"/>
@@ -30127,7 +30127,7 @@
             <a:avLst/>
           </a:prstGeom>
           <a:solidFill>
-            <a:srgbClr val="5E7060"/>
+            <a:srgbClr val="C92A78"/>
           </a:solidFill>
           <a:ln/>
         </p:spPr>
@@ -30159,7 +30159,7 @@
             <a:r>
               <a:rPr lang="en-US" sz="1200" b="1" dirty="0">
                 <a:solidFill>
-                  <a:srgbClr val="FCFAF4"/>
+                  <a:srgbClr val="FFFFFF"/>
                 </a:solidFill>
                 <a:latin typeface="游明朝" pitchFamily="34" charset="0"/>
                 <a:ea typeface="游明朝" pitchFamily="34" charset="-122"/>
@@ -30198,7 +30198,7 @@
             <a:r>
               <a:rPr lang="en-US" sz="1550" b="1" dirty="0">
                 <a:solidFill>
-                  <a:srgbClr val="2B2620"/>
+                  <a:srgbClr val="123C2A"/>
                 </a:solidFill>
                 <a:latin typeface="游ゴシック" pitchFamily="34" charset="0"/>
                 <a:ea typeface="游ゴシック" pitchFamily="34" charset="-122"/>
@@ -30225,7 +30225,7 @@
             <a:avLst/>
           </a:prstGeom>
           <a:solidFill>
-            <a:srgbClr val="9C5446"/>
+            <a:srgbClr val="17784A"/>
           </a:solidFill>
           <a:ln/>
         </p:spPr>
@@ -30257,7 +30257,7 @@
             <a:r>
               <a:rPr lang="en-US" sz="1200" b="1" dirty="0">
                 <a:solidFill>
-                  <a:srgbClr val="FCFAF4"/>
+                  <a:srgbClr val="FFFFFF"/>
                 </a:solidFill>
                 <a:latin typeface="游明朝" pitchFamily="34" charset="0"/>
                 <a:ea typeface="游明朝" pitchFamily="34" charset="-122"/>
@@ -30296,7 +30296,7 @@
             <a:r>
               <a:rPr lang="en-US" sz="1550" b="1" dirty="0">
                 <a:solidFill>
-                  <a:srgbClr val="2B2620"/>
+                  <a:srgbClr val="123C2A"/>
                 </a:solidFill>
                 <a:latin typeface="游ゴシック" pitchFamily="34" charset="0"/>
                 <a:ea typeface="游ゴシック" pitchFamily="34" charset="-122"/>
@@ -30323,7 +30323,7 @@
             <a:avLst/>
           </a:prstGeom>
           <a:solidFill>
-            <a:srgbClr val="5E7060"/>
+            <a:srgbClr val="C92A78"/>
           </a:solidFill>
           <a:ln/>
         </p:spPr>
@@ -30355,7 +30355,7 @@
             <a:r>
               <a:rPr lang="en-US" sz="1200" b="1" dirty="0">
                 <a:solidFill>
-                  <a:srgbClr val="FCFAF4"/>
+                  <a:srgbClr val="FFFFFF"/>
                 </a:solidFill>
                 <a:latin typeface="游明朝" pitchFamily="34" charset="0"/>
                 <a:ea typeface="游明朝" pitchFamily="34" charset="-122"/>
@@ -30394,7 +30394,7 @@
             <a:r>
               <a:rPr lang="en-US" sz="1550" b="1" dirty="0">
                 <a:solidFill>
-                  <a:srgbClr val="2B2620"/>
+                  <a:srgbClr val="123C2A"/>
                 </a:solidFill>
                 <a:latin typeface="游ゴシック" pitchFamily="34" charset="0"/>
                 <a:ea typeface="游ゴシック" pitchFamily="34" charset="-122"/>
@@ -30436,7 +30436,7 @@
             <a:r>
               <a:rPr lang="en-US" sz="1150" dirty="0">
                 <a:solidFill>
-                  <a:srgbClr val="7A6E60"/>
+                  <a:srgbClr val="4F6F60"/>
                 </a:solidFill>
                 <a:latin typeface="游ゴシック" pitchFamily="34" charset="0"/>
                 <a:ea typeface="游ゴシック" pitchFamily="34" charset="-122"/>
@@ -30456,7 +30456,7 @@
             <a:r>
               <a:rPr lang="en-US" sz="1150" dirty="0">
                 <a:solidFill>
-                  <a:srgbClr val="7A6E60"/>
+                  <a:srgbClr val="4F6F60"/>
                 </a:solidFill>
                 <a:latin typeface="游ゴシック" pitchFamily="34" charset="0"/>
                 <a:ea typeface="游ゴシック" pitchFamily="34" charset="-122"/>
@@ -30495,7 +30495,7 @@
             <a:r>
               <a:rPr lang="en-US" sz="1000" dirty="0">
                 <a:solidFill>
-                  <a:srgbClr val="B7A991"/>
+                  <a:srgbClr val="AFD2C1"/>
                 </a:solidFill>
                 <a:latin typeface="游ゴシック" pitchFamily="34" charset="0"/>
                 <a:ea typeface="游ゴシック" pitchFamily="34" charset="-122"/>
@@ -30521,7 +30521,7 @@
     <p:bg>
       <p:bgPr>
         <a:solidFill>
-          <a:srgbClr val="ECE3D4"/>
+          <a:srgbClr val="F0FAF5"/>
         </a:solidFill>
       </p:bgPr>
     </p:bg>
@@ -30566,7 +30566,7 @@
             <a:r>
               <a:rPr lang="en-US" sz="1100" b="1" spc="200" kern="0" dirty="0">
                 <a:solidFill>
-                  <a:srgbClr val="9C5446"/>
+                  <a:srgbClr val="17784A"/>
                 </a:solidFill>
                 <a:latin typeface="游ゴシック" pitchFamily="34" charset="0"/>
                 <a:ea typeface="游ゴシック" pitchFamily="34" charset="-122"/>
@@ -30608,7 +30608,7 @@
             <a:r>
               <a:rPr lang="en-US" sz="3200" b="1" dirty="0">
                 <a:solidFill>
-                  <a:srgbClr val="2B2620"/>
+                  <a:srgbClr val="123C2A"/>
                 </a:solidFill>
                 <a:latin typeface="游明朝" pitchFamily="34" charset="0"/>
                 <a:ea typeface="游明朝" pitchFamily="34" charset="-122"/>
@@ -30637,12 +30637,12 @@
             </a:avLst>
           </a:prstGeom>
           <a:solidFill>
-            <a:srgbClr val="FCFAF4"/>
+            <a:srgbClr val="FFFFFF"/>
           </a:solidFill>
           <a:ln/>
           <a:effectLst>
             <a:outerShdw sx="100000" sy="100000" kx="0" ky="0" algn="bl" rotWithShape="0" blurRad="127000" dist="508" dir="5400000">
-              <a:srgbClr val="8C7F6E">
+              <a:srgbClr val="7FA795">
                 <a:alpha val="25000"/>
               </a:srgbClr>
             </a:outerShdw>
@@ -30676,7 +30676,7 @@
             <a:r>
               <a:rPr lang="en-US" sz="2200" b="1" dirty="0">
                 <a:solidFill>
-                  <a:srgbClr val="9C5446"/>
+                  <a:srgbClr val="17784A"/>
                 </a:solidFill>
                 <a:latin typeface="游明朝" pitchFamily="34" charset="0"/>
                 <a:ea typeface="游明朝" pitchFamily="34" charset="-122"/>
@@ -30718,7 +30718,7 @@
             <a:r>
               <a:rPr lang="en-US" sz="1400" dirty="0">
                 <a:solidFill>
-                  <a:srgbClr val="2B2620"/>
+                  <a:srgbClr val="123C2A"/>
                 </a:solidFill>
                 <a:latin typeface="游ゴシック" pitchFamily="34" charset="0"/>
                 <a:ea typeface="游ゴシック" pitchFamily="34" charset="-122"/>
@@ -30738,7 +30738,7 @@
             <a:r>
               <a:rPr lang="en-US" sz="1400" dirty="0">
                 <a:solidFill>
-                  <a:srgbClr val="2B2620"/>
+                  <a:srgbClr val="123C2A"/>
                 </a:solidFill>
                 <a:latin typeface="游ゴシック" pitchFamily="34" charset="0"/>
                 <a:ea typeface="游ゴシック" pitchFamily="34" charset="-122"/>
@@ -30767,12 +30767,12 @@
             </a:avLst>
           </a:prstGeom>
           <a:solidFill>
-            <a:srgbClr val="FCFAF4"/>
+            <a:srgbClr val="FFFFFF"/>
           </a:solidFill>
           <a:ln/>
           <a:effectLst>
             <a:outerShdw sx="100000" sy="100000" kx="0" ky="0" algn="bl" rotWithShape="0" blurRad="127000" dist="508" dir="5400000">
-              <a:srgbClr val="8C7F6E">
+              <a:srgbClr val="7FA795">
                 <a:alpha val="25000"/>
               </a:srgbClr>
             </a:outerShdw>
@@ -30806,7 +30806,7 @@
             <a:r>
               <a:rPr lang="en-US" sz="2200" b="1" dirty="0">
                 <a:solidFill>
-                  <a:srgbClr val="9C5446"/>
+                  <a:srgbClr val="17784A"/>
                 </a:solidFill>
                 <a:latin typeface="游明朝" pitchFamily="34" charset="0"/>
                 <a:ea typeface="游明朝" pitchFamily="34" charset="-122"/>
@@ -30848,7 +30848,7 @@
             <a:r>
               <a:rPr lang="en-US" sz="1400" dirty="0">
                 <a:solidFill>
-                  <a:srgbClr val="2B2620"/>
+                  <a:srgbClr val="123C2A"/>
                 </a:solidFill>
                 <a:latin typeface="游ゴシック" pitchFamily="34" charset="0"/>
                 <a:ea typeface="游ゴシック" pitchFamily="34" charset="-122"/>
@@ -30868,7 +30868,7 @@
             <a:r>
               <a:rPr lang="en-US" sz="1400" dirty="0">
                 <a:solidFill>
-                  <a:srgbClr val="2B2620"/>
+                  <a:srgbClr val="123C2A"/>
                 </a:solidFill>
                 <a:latin typeface="游ゴシック" pitchFamily="34" charset="0"/>
                 <a:ea typeface="游ゴシック" pitchFamily="34" charset="-122"/>
@@ -30897,12 +30897,12 @@
             </a:avLst>
           </a:prstGeom>
           <a:solidFill>
-            <a:srgbClr val="FCFAF4"/>
+            <a:srgbClr val="FFFFFF"/>
           </a:solidFill>
           <a:ln/>
           <a:effectLst>
             <a:outerShdw sx="100000" sy="100000" kx="0" ky="0" algn="bl" rotWithShape="0" blurRad="127000" dist="508" dir="5400000">
-              <a:srgbClr val="8C7F6E">
+              <a:srgbClr val="7FA795">
                 <a:alpha val="25000"/>
               </a:srgbClr>
             </a:outerShdw>
@@ -30936,7 +30936,7 @@
             <a:r>
               <a:rPr lang="en-US" sz="2200" b="1" dirty="0">
                 <a:solidFill>
-                  <a:srgbClr val="9C5446"/>
+                  <a:srgbClr val="17784A"/>
                 </a:solidFill>
                 <a:latin typeface="游明朝" pitchFamily="34" charset="0"/>
                 <a:ea typeface="游明朝" pitchFamily="34" charset="-122"/>
@@ -30978,7 +30978,7 @@
             <a:r>
               <a:rPr lang="en-US" sz="1400" dirty="0">
                 <a:solidFill>
-                  <a:srgbClr val="2B2620"/>
+                  <a:srgbClr val="123C2A"/>
                 </a:solidFill>
                 <a:latin typeface="游ゴシック" pitchFamily="34" charset="0"/>
                 <a:ea typeface="游ゴシック" pitchFamily="34" charset="-122"/>
@@ -30998,7 +30998,7 @@
             <a:r>
               <a:rPr lang="en-US" sz="1400" dirty="0">
                 <a:solidFill>
-                  <a:srgbClr val="2B2620"/>
+                  <a:srgbClr val="123C2A"/>
                 </a:solidFill>
                 <a:latin typeface="游ゴシック" pitchFamily="34" charset="0"/>
                 <a:ea typeface="游ゴシック" pitchFamily="34" charset="-122"/>
@@ -31037,7 +31037,7 @@
             <a:r>
               <a:rPr lang="en-US" sz="2400" b="1" dirty="0">
                 <a:solidFill>
-                  <a:srgbClr val="2B2620"/>
+                  <a:srgbClr val="123C2A"/>
                 </a:solidFill>
                 <a:latin typeface="游明朝" pitchFamily="34" charset="0"/>
                 <a:ea typeface="游明朝" pitchFamily="34" charset="-122"/>
@@ -31076,7 +31076,7 @@
             <a:r>
               <a:rPr lang="en-US" sz="1000" dirty="0">
                 <a:solidFill>
-                  <a:srgbClr val="B7A991"/>
+                  <a:srgbClr val="AFD2C1"/>
                 </a:solidFill>
                 <a:latin typeface="游ゴシック" pitchFamily="34" charset="0"/>
                 <a:ea typeface="游ゴシック" pitchFamily="34" charset="-122"/>
@@ -31102,7 +31102,7 @@
     <p:bg>
       <p:bgPr>
         <a:solidFill>
-          <a:srgbClr val="ECE3D4"/>
+          <a:srgbClr val="F0FAF5"/>
         </a:solidFill>
       </p:bgPr>
     </p:bg>
@@ -31147,7 +31147,7 @@
             <a:r>
               <a:rPr lang="en-US" sz="1100" b="1" spc="200" kern="0" dirty="0">
                 <a:solidFill>
-                  <a:srgbClr val="9C5446"/>
+                  <a:srgbClr val="17784A"/>
                 </a:solidFill>
                 <a:latin typeface="游ゴシック" pitchFamily="34" charset="0"/>
                 <a:ea typeface="游ゴシック" pitchFamily="34" charset="-122"/>
@@ -31189,7 +31189,7 @@
             <a:r>
               <a:rPr lang="en-US" sz="3200" b="1" dirty="0">
                 <a:solidFill>
-                  <a:srgbClr val="2B2620"/>
+                  <a:srgbClr val="123C2A"/>
                 </a:solidFill>
                 <a:latin typeface="游明朝" pitchFamily="34" charset="0"/>
                 <a:ea typeface="游明朝" pitchFamily="34" charset="-122"/>
@@ -31218,12 +31218,12 @@
             </a:avLst>
           </a:prstGeom>
           <a:solidFill>
-            <a:srgbClr val="FCFAF4"/>
+            <a:srgbClr val="FFFFFF"/>
           </a:solidFill>
           <a:ln/>
           <a:effectLst>
             <a:outerShdw sx="100000" sy="100000" kx="0" ky="0" algn="bl" rotWithShape="0" blurRad="127000" dist="508" dir="5400000">
-              <a:srgbClr val="8C7F6E">
+              <a:srgbClr val="7FA795">
                 <a:alpha val="25000"/>
               </a:srgbClr>
             </a:outerShdw>
@@ -31257,7 +31257,7 @@
             <a:r>
               <a:rPr lang="en-US" sz="2400" b="1" dirty="0">
                 <a:solidFill>
-                  <a:srgbClr val="9C5446"/>
+                  <a:srgbClr val="17784A"/>
                 </a:solidFill>
                 <a:latin typeface="游明朝" pitchFamily="34" charset="0"/>
                 <a:ea typeface="游明朝" pitchFamily="34" charset="-122"/>
@@ -31299,7 +31299,7 @@
             <a:r>
               <a:rPr lang="en-US" sz="1500" dirty="0">
                 <a:solidFill>
-                  <a:srgbClr val="2B2620"/>
+                  <a:srgbClr val="123C2A"/>
                 </a:solidFill>
                 <a:latin typeface="游ゴシック" pitchFamily="34" charset="0"/>
                 <a:ea typeface="游ゴシック" pitchFamily="34" charset="-122"/>
@@ -31328,12 +31328,12 @@
             </a:avLst>
           </a:prstGeom>
           <a:solidFill>
-            <a:srgbClr val="FCFAF4"/>
+            <a:srgbClr val="FFFFFF"/>
           </a:solidFill>
           <a:ln/>
           <a:effectLst>
             <a:outerShdw sx="100000" sy="100000" kx="0" ky="0" algn="bl" rotWithShape="0" blurRad="127000" dist="508" dir="5400000">
-              <a:srgbClr val="8C7F6E">
+              <a:srgbClr val="7FA795">
                 <a:alpha val="25000"/>
               </a:srgbClr>
             </a:outerShdw>
@@ -31367,7 +31367,7 @@
             <a:r>
               <a:rPr lang="en-US" sz="2400" b="1" dirty="0">
                 <a:solidFill>
-                  <a:srgbClr val="9C5446"/>
+                  <a:srgbClr val="17784A"/>
                 </a:solidFill>
                 <a:latin typeface="游明朝" pitchFamily="34" charset="0"/>
                 <a:ea typeface="游明朝" pitchFamily="34" charset="-122"/>
@@ -31409,7 +31409,7 @@
             <a:r>
               <a:rPr lang="en-US" sz="1500" dirty="0">
                 <a:solidFill>
-                  <a:srgbClr val="2B2620"/>
+                  <a:srgbClr val="123C2A"/>
                 </a:solidFill>
                 <a:latin typeface="游ゴシック" pitchFamily="34" charset="0"/>
                 <a:ea typeface="游ゴシック" pitchFamily="34" charset="-122"/>
@@ -31438,12 +31438,12 @@
             </a:avLst>
           </a:prstGeom>
           <a:solidFill>
-            <a:srgbClr val="FCFAF4"/>
+            <a:srgbClr val="FFFFFF"/>
           </a:solidFill>
           <a:ln/>
           <a:effectLst>
             <a:outerShdw sx="100000" sy="100000" kx="0" ky="0" algn="bl" rotWithShape="0" blurRad="127000" dist="508" dir="5400000">
-              <a:srgbClr val="8C7F6E">
+              <a:srgbClr val="7FA795">
                 <a:alpha val="25000"/>
               </a:srgbClr>
             </a:outerShdw>
@@ -31477,7 +31477,7 @@
             <a:r>
               <a:rPr lang="en-US" sz="2400" b="1" dirty="0">
                 <a:solidFill>
-                  <a:srgbClr val="9C5446"/>
+                  <a:srgbClr val="17784A"/>
                 </a:solidFill>
                 <a:latin typeface="游明朝" pitchFamily="34" charset="0"/>
                 <a:ea typeface="游明朝" pitchFamily="34" charset="-122"/>
@@ -31519,7 +31519,7 @@
             <a:r>
               <a:rPr lang="en-US" sz="1500" dirty="0">
                 <a:solidFill>
-                  <a:srgbClr val="2B2620"/>
+                  <a:srgbClr val="123C2A"/>
                 </a:solidFill>
                 <a:latin typeface="游ゴシック" pitchFamily="34" charset="0"/>
                 <a:ea typeface="游ゴシック" pitchFamily="34" charset="-122"/>
@@ -31558,7 +31558,7 @@
             <a:r>
               <a:rPr lang="en-US" sz="3000" b="1" dirty="0">
                 <a:solidFill>
-                  <a:srgbClr val="2B2620"/>
+                  <a:srgbClr val="123C2A"/>
                 </a:solidFill>
                 <a:latin typeface="游明朝" pitchFamily="34" charset="0"/>
                 <a:ea typeface="游明朝" pitchFamily="34" charset="-122"/>
@@ -31597,7 +31597,7 @@
             <a:r>
               <a:rPr lang="en-US" sz="1200" dirty="0">
                 <a:solidFill>
-                  <a:srgbClr val="7A6E60"/>
+                  <a:srgbClr val="4F6F60"/>
                 </a:solidFill>
                 <a:latin typeface="游ゴシック" pitchFamily="34" charset="0"/>
                 <a:ea typeface="游ゴシック" pitchFamily="34" charset="-122"/>
@@ -31636,7 +31636,7 @@
             <a:r>
               <a:rPr lang="en-US" sz="3000" b="1" dirty="0">
                 <a:solidFill>
-                  <a:srgbClr val="2B2620"/>
+                  <a:srgbClr val="123C2A"/>
                 </a:solidFill>
                 <a:latin typeface="游明朝" pitchFamily="34" charset="0"/>
                 <a:ea typeface="游明朝" pitchFamily="34" charset="-122"/>
@@ -31675,7 +31675,7 @@
             <a:r>
               <a:rPr lang="en-US" sz="1200" dirty="0">
                 <a:solidFill>
-                  <a:srgbClr val="7A6E60"/>
+                  <a:srgbClr val="4F6F60"/>
                 </a:solidFill>
                 <a:latin typeface="游ゴシック" pitchFamily="34" charset="0"/>
                 <a:ea typeface="游ゴシック" pitchFamily="34" charset="-122"/>
@@ -31714,7 +31714,7 @@
             <a:r>
               <a:rPr lang="en-US" sz="3000" b="1" dirty="0">
                 <a:solidFill>
-                  <a:srgbClr val="2B2620"/>
+                  <a:srgbClr val="123C2A"/>
                 </a:solidFill>
                 <a:latin typeface="游明朝" pitchFamily="34" charset="0"/>
                 <a:ea typeface="游明朝" pitchFamily="34" charset="-122"/>
@@ -31753,7 +31753,7 @@
             <a:r>
               <a:rPr lang="en-US" sz="1200" dirty="0">
                 <a:solidFill>
-                  <a:srgbClr val="7A6E60"/>
+                  <a:srgbClr val="4F6F60"/>
                 </a:solidFill>
                 <a:latin typeface="游ゴシック" pitchFamily="34" charset="0"/>
                 <a:ea typeface="游ゴシック" pitchFamily="34" charset="-122"/>
@@ -31792,7 +31792,7 @@
             <a:r>
               <a:rPr lang="en-US" sz="1000" dirty="0">
                 <a:solidFill>
-                  <a:srgbClr val="B7A991"/>
+                  <a:srgbClr val="AFD2C1"/>
                 </a:solidFill>
                 <a:latin typeface="游ゴシック" pitchFamily="34" charset="0"/>
                 <a:ea typeface="游ゴシック" pitchFamily="34" charset="-122"/>
@@ -31818,7 +31818,7 @@
     <p:bg>
       <p:bgPr>
         <a:solidFill>
-          <a:srgbClr val="ECE3D4"/>
+          <a:srgbClr val="F0FAF5"/>
         </a:solidFill>
       </p:bgPr>
     </p:bg>
@@ -31863,7 +31863,7 @@
             <a:r>
               <a:rPr lang="en-US" sz="1100" b="1" spc="200" kern="0" dirty="0">
                 <a:solidFill>
-                  <a:srgbClr val="9C5446"/>
+                  <a:srgbClr val="17784A"/>
                 </a:solidFill>
                 <a:latin typeface="游ゴシック" pitchFamily="34" charset="0"/>
                 <a:ea typeface="游ゴシック" pitchFamily="34" charset="-122"/>
@@ -31905,7 +31905,7 @@
             <a:r>
               <a:rPr lang="en-US" sz="3200" b="1" dirty="0">
                 <a:solidFill>
-                  <a:srgbClr val="2B2620"/>
+                  <a:srgbClr val="123C2A"/>
                 </a:solidFill>
                 <a:latin typeface="游明朝" pitchFamily="34" charset="0"/>
                 <a:ea typeface="游明朝" pitchFamily="34" charset="-122"/>
@@ -31934,12 +31934,12 @@
             </a:avLst>
           </a:prstGeom>
           <a:solidFill>
-            <a:srgbClr val="FCFAF4"/>
+            <a:srgbClr val="FFFFFF"/>
           </a:solidFill>
           <a:ln/>
           <a:effectLst>
             <a:outerShdw sx="100000" sy="100000" kx="0" ky="0" algn="bl" rotWithShape="0" blurRad="127000" dist="508" dir="5400000">
-              <a:srgbClr val="8C7F6E">
+              <a:srgbClr val="7FA795">
                 <a:alpha val="25000"/>
               </a:srgbClr>
             </a:outerShdw>
@@ -31973,7 +31973,7 @@
             <a:r>
               <a:rPr lang="en-US" sz="2800" b="1" dirty="0">
                 <a:solidFill>
-                  <a:srgbClr val="2B2620"/>
+                  <a:srgbClr val="123C2A"/>
                 </a:solidFill>
                 <a:latin typeface="游明朝" pitchFamily="34" charset="0"/>
                 <a:ea typeface="游明朝" pitchFamily="34" charset="-122"/>
@@ -32012,7 +32012,7 @@
             <a:r>
               <a:rPr lang="en-US" sz="1300" dirty="0">
                 <a:solidFill>
-                  <a:srgbClr val="7A6E60"/>
+                  <a:srgbClr val="4F6F60"/>
                 </a:solidFill>
                 <a:latin typeface="游ゴシック" pitchFamily="34" charset="0"/>
                 <a:ea typeface="游ゴシック" pitchFamily="34" charset="-122"/>
@@ -32039,7 +32039,7 @@
             <a:avLst/>
           </a:prstGeom>
           <a:solidFill>
-            <a:srgbClr val="9C5446"/>
+            <a:srgbClr val="17784A"/>
           </a:solidFill>
           <a:ln/>
         </p:spPr>
@@ -32071,7 +32071,7 @@
             <a:r>
               <a:rPr lang="en-US" sz="1500" b="1" dirty="0">
                 <a:solidFill>
-                  <a:srgbClr val="FCFAF4"/>
+                  <a:srgbClr val="FFFFFF"/>
                 </a:solidFill>
                 <a:latin typeface="游明朝" pitchFamily="34" charset="0"/>
                 <a:ea typeface="游明朝" pitchFamily="34" charset="-122"/>
@@ -32098,7 +32098,7 @@
             <a:avLst/>
           </a:prstGeom>
           <a:solidFill>
-            <a:srgbClr val="5E7060"/>
+            <a:srgbClr val="C92A78"/>
           </a:solidFill>
           <a:ln/>
         </p:spPr>
@@ -32130,7 +32130,7 @@
             <a:r>
               <a:rPr lang="en-US" sz="1500" b="1" dirty="0">
                 <a:solidFill>
-                  <a:srgbClr val="FCFAF4"/>
+                  <a:srgbClr val="FFFFFF"/>
                 </a:solidFill>
                 <a:latin typeface="游明朝" pitchFamily="34" charset="0"/>
                 <a:ea typeface="游明朝" pitchFamily="34" charset="-122"/>
@@ -32157,7 +32157,7 @@
             <a:avLst/>
           </a:prstGeom>
           <a:solidFill>
-            <a:srgbClr val="9C5446"/>
+            <a:srgbClr val="17784A"/>
           </a:solidFill>
           <a:ln/>
         </p:spPr>
@@ -32189,7 +32189,7 @@
             <a:r>
               <a:rPr lang="en-US" sz="1500" b="1" dirty="0">
                 <a:solidFill>
-                  <a:srgbClr val="FCFAF4"/>
+                  <a:srgbClr val="FFFFFF"/>
                 </a:solidFill>
                 <a:latin typeface="游明朝" pitchFamily="34" charset="0"/>
                 <a:ea typeface="游明朝" pitchFamily="34" charset="-122"/>
@@ -32216,7 +32216,7 @@
             <a:avLst/>
           </a:prstGeom>
           <a:solidFill>
-            <a:srgbClr val="5E7060"/>
+            <a:srgbClr val="C92A78"/>
           </a:solidFill>
           <a:ln/>
         </p:spPr>
@@ -32248,7 +32248,7 @@
             <a:r>
               <a:rPr lang="en-US" sz="1500" b="1" dirty="0">
                 <a:solidFill>
-                  <a:srgbClr val="FCFAF4"/>
+                  <a:srgbClr val="FFFFFF"/>
                 </a:solidFill>
                 <a:latin typeface="游明朝" pitchFamily="34" charset="0"/>
                 <a:ea typeface="游明朝" pitchFamily="34" charset="-122"/>
@@ -32290,7 +32290,7 @@
             <a:r>
               <a:rPr lang="en-US" sz="1500" dirty="0">
                 <a:solidFill>
-                  <a:srgbClr val="2B2620"/>
+                  <a:srgbClr val="123C2A"/>
                 </a:solidFill>
                 <a:latin typeface="游ゴシック" pitchFamily="34" charset="0"/>
                 <a:ea typeface="游ゴシック" pitchFamily="34" charset="-122"/>
@@ -32310,7 +32310,7 @@
             <a:r>
               <a:rPr lang="en-US" sz="1500" dirty="0">
                 <a:solidFill>
-                  <a:srgbClr val="2B2620"/>
+                  <a:srgbClr val="123C2A"/>
                 </a:solidFill>
                 <a:latin typeface="游ゴシック" pitchFamily="34" charset="0"/>
                 <a:ea typeface="游ゴシック" pitchFamily="34" charset="-122"/>
@@ -32349,7 +32349,7 @@
             <a:r>
               <a:rPr lang="en-US" sz="1000" dirty="0">
                 <a:solidFill>
-                  <a:srgbClr val="B7A991"/>
+                  <a:srgbClr val="AFD2C1"/>
                 </a:solidFill>
                 <a:latin typeface="游ゴシック" pitchFamily="34" charset="0"/>
                 <a:ea typeface="游ゴシック" pitchFamily="34" charset="-122"/>
@@ -32375,7 +32375,7 @@
     <p:bg>
       <p:bgPr>
         <a:solidFill>
-          <a:srgbClr val="2B2620"/>
+          <a:srgbClr val="123C2A"/>
         </a:solidFill>
       </p:bgPr>
     </p:bg>
@@ -32420,7 +32420,7 @@
             <a:r>
               <a:rPr lang="en-US" sz="1800" dirty="0">
                 <a:solidFill>
-                  <a:srgbClr val="A2937F"/>
+                  <a:srgbClr val="8FB8A2"/>
                 </a:solidFill>
                 <a:latin typeface="游ゴシック" pitchFamily="34" charset="0"/>
                 <a:ea typeface="游ゴシック" pitchFamily="34" charset="-122"/>
@@ -32449,7 +32449,7 @@
             </a:avLst>
           </a:prstGeom>
           <a:solidFill>
-            <a:srgbClr val="9C5446"/>
+            <a:srgbClr val="F15C9E"/>
           </a:solidFill>
           <a:ln/>
         </p:spPr>
@@ -32520,7 +32520,7 @@
             <a:r>
               <a:rPr lang="en-US" sz="1800" dirty="0">
                 <a:solidFill>
-                  <a:srgbClr val="ECE3D4"/>
+                  <a:srgbClr val="E8F5EE"/>
                 </a:solidFill>
                 <a:latin typeface="游ゴシック" pitchFamily="34" charset="0"/>
                 <a:ea typeface="游ゴシック" pitchFamily="34" charset="-122"/>
@@ -32559,7 +32559,7 @@
             <a:r>
               <a:rPr lang="en-US" sz="1000" dirty="0">
                 <a:solidFill>
-                  <a:srgbClr val="6B5F51"/>
+                  <a:srgbClr val="3A6450"/>
                 </a:solidFill>
                 <a:latin typeface="游ゴシック" pitchFamily="34" charset="0"/>
                 <a:ea typeface="游ゴシック" pitchFamily="34" charset="-122"/>
@@ -32585,7 +32585,7 @@
     <p:bg>
       <p:bgPr>
         <a:solidFill>
-          <a:srgbClr val="2B2620"/>
+          <a:srgbClr val="123C2A"/>
         </a:solidFill>
       </p:bgPr>
     </p:bg>
@@ -32618,7 +32618,7 @@
             <a:avLst/>
           </a:prstGeom>
           <a:solidFill>
-            <a:srgbClr val="342F28"/>
+            <a:srgbClr val="18452F"/>
           </a:solidFill>
           <a:ln/>
         </p:spPr>
@@ -32653,7 +32653,7 @@
             <a:r>
               <a:rPr lang="en-US" sz="4000" b="1" dirty="0">
                 <a:solidFill>
-                  <a:srgbClr val="ECE3D4"/>
+                  <a:srgbClr val="E8F5EE"/>
                 </a:solidFill>
                 <a:latin typeface="游明朝" pitchFamily="34" charset="0"/>
                 <a:ea typeface="游明朝" pitchFamily="34" charset="-122"/>
@@ -32673,7 +32673,7 @@
             <a:r>
               <a:rPr lang="en-US" sz="4000" b="1" dirty="0">
                 <a:solidFill>
-                  <a:srgbClr val="ECE3D4"/>
+                  <a:srgbClr val="E8F5EE"/>
                 </a:solidFill>
                 <a:latin typeface="游明朝" pitchFamily="34" charset="0"/>
                 <a:ea typeface="游明朝" pitchFamily="34" charset="-122"/>
@@ -32712,7 +32712,7 @@
             <a:r>
               <a:rPr lang="en-US" sz="2200" b="1" dirty="0">
                 <a:solidFill>
-                  <a:srgbClr val="9C5446"/>
+                  <a:srgbClr val="F15C9E"/>
                 </a:solidFill>
                 <a:latin typeface="游明朝" pitchFamily="34" charset="0"/>
                 <a:ea typeface="游明朝" pitchFamily="34" charset="-122"/>
@@ -32751,7 +32751,7 @@
             <a:r>
               <a:rPr lang="en-US" sz="1000" dirty="0">
                 <a:solidFill>
-                  <a:srgbClr val="6B5F51"/>
+                  <a:srgbClr val="3A6450"/>
                 </a:solidFill>
                 <a:latin typeface="游ゴシック" pitchFamily="34" charset="0"/>
                 <a:ea typeface="游ゴシック" pitchFamily="34" charset="-122"/>
@@ -32777,7 +32777,7 @@
     <p:bg>
       <p:bgPr>
         <a:solidFill>
-          <a:srgbClr val="ECE3D4"/>
+          <a:srgbClr val="F0FAF5"/>
         </a:solidFill>
       </p:bgPr>
     </p:bg>
@@ -32825,7 +32825,7 @@
             <a:r>
               <a:rPr lang="en-US" sz="3200" b="1" dirty="0">
                 <a:solidFill>
-                  <a:srgbClr val="2B2620"/>
+                  <a:srgbClr val="123C2A"/>
                 </a:solidFill>
                 <a:latin typeface="游明朝" pitchFamily="34" charset="0"/>
                 <a:ea typeface="游明朝" pitchFamily="34" charset="-122"/>
@@ -32854,12 +32854,12 @@
             </a:avLst>
           </a:prstGeom>
           <a:solidFill>
-            <a:srgbClr val="FCFAF4"/>
+            <a:srgbClr val="FFFFFF"/>
           </a:solidFill>
           <a:ln/>
           <a:effectLst>
             <a:outerShdw sx="100000" sy="100000" kx="0" ky="0" algn="bl" rotWithShape="0" blurRad="127000" dist="508" dir="5400000">
-              <a:srgbClr val="8C7F6E">
+              <a:srgbClr val="7FA795">
                 <a:alpha val="25000"/>
               </a:srgbClr>
             </a:outerShdw>
@@ -32896,7 +32896,7 @@
             <a:r>
               <a:rPr lang="en-US" sz="1800" dirty="0">
                 <a:solidFill>
-                  <a:srgbClr val="2B2620"/>
+                  <a:srgbClr val="123C2A"/>
                 </a:solidFill>
                 <a:latin typeface="游ゴシック" pitchFamily="34" charset="0"/>
                 <a:ea typeface="游ゴシック" pitchFamily="34" charset="-122"/>
@@ -32925,7 +32925,7 @@
             <a:r>
               <a:rPr lang="en-US" sz="1800" dirty="0">
                 <a:solidFill>
-                  <a:srgbClr val="2B2620"/>
+                  <a:srgbClr val="123C2A"/>
                 </a:solidFill>
                 <a:latin typeface="游ゴシック" pitchFamily="34" charset="0"/>
                 <a:ea typeface="游ゴシック" pitchFamily="34" charset="-122"/>
@@ -32945,7 +32945,7 @@
             <a:r>
               <a:rPr lang="en-US" sz="1800" dirty="0">
                 <a:solidFill>
-                  <a:srgbClr val="2B2620"/>
+                  <a:srgbClr val="123C2A"/>
                 </a:solidFill>
                 <a:latin typeface="游ゴシック" pitchFamily="34" charset="0"/>
                 <a:ea typeface="游ゴシック" pitchFamily="34" charset="-122"/>
@@ -32974,7 +32974,7 @@
             <a:r>
               <a:rPr lang="en-US" sz="1800" dirty="0">
                 <a:solidFill>
-                  <a:srgbClr val="2B2620"/>
+                  <a:srgbClr val="123C2A"/>
                 </a:solidFill>
                 <a:latin typeface="游ゴシック" pitchFamily="34" charset="0"/>
                 <a:ea typeface="游ゴシック" pitchFamily="34" charset="-122"/>
@@ -33003,11 +33003,11 @@
             </a:avLst>
           </a:prstGeom>
           <a:solidFill>
-            <a:srgbClr val="FCFAF4"/>
+            <a:srgbClr val="FFFFFF"/>
           </a:solidFill>
           <a:ln w="19050">
             <a:solidFill>
-              <a:srgbClr val="9C5446"/>
+              <a:srgbClr val="17784A"/>
             </a:solidFill>
             <a:prstDash val="dash"/>
           </a:ln>
@@ -33043,7 +33043,7 @@
             <a:r>
               <a:rPr lang="en-US" sz="1300" b="1" dirty="0">
                 <a:solidFill>
-                  <a:srgbClr val="7A6E60"/>
+                  <a:srgbClr val="4F6F60"/>
                 </a:solidFill>
                 <a:latin typeface="游ゴシック" pitchFamily="34" charset="0"/>
                 <a:ea typeface="游ゴシック" pitchFamily="34" charset="-122"/>
@@ -33063,7 +33063,7 @@
             <a:r>
               <a:rPr lang="en-US" sz="1300" b="1" dirty="0">
                 <a:solidFill>
-                  <a:srgbClr val="7A6E60"/>
+                  <a:srgbClr val="4F6F60"/>
                 </a:solidFill>
                 <a:latin typeface="游ゴシック" pitchFamily="34" charset="0"/>
                 <a:ea typeface="游ゴシック" pitchFamily="34" charset="-122"/>
@@ -33102,7 +33102,7 @@
             <a:r>
               <a:rPr lang="en-US" sz="1100" dirty="0">
                 <a:solidFill>
-                  <a:srgbClr val="7A6E60"/>
+                  <a:srgbClr val="4F6F60"/>
                 </a:solidFill>
                 <a:latin typeface="游ゴシック" pitchFamily="34" charset="0"/>
                 <a:ea typeface="游ゴシック" pitchFamily="34" charset="-122"/>
@@ -33131,7 +33131,7 @@
             </a:avLst>
           </a:prstGeom>
           <a:solidFill>
-            <a:srgbClr val="5E7060"/>
+            <a:srgbClr val="34D39B"/>
           </a:solidFill>
           <a:ln/>
         </p:spPr>
@@ -33163,7 +33163,7 @@
             <a:r>
               <a:rPr lang="en-US" sz="1500" b="1" dirty="0">
                 <a:solidFill>
-                  <a:srgbClr val="FFFFFF"/>
+                  <a:srgbClr val="123C2A"/>
                 </a:solidFill>
                 <a:latin typeface="游ゴシック" pitchFamily="34" charset="0"/>
                 <a:ea typeface="游ゴシック" pitchFamily="34" charset="-122"/>
@@ -33202,7 +33202,7 @@
             <a:r>
               <a:rPr lang="en-US" sz="1000" dirty="0">
                 <a:solidFill>
-                  <a:srgbClr val="B7A991"/>
+                  <a:srgbClr val="AFD2C1"/>
                 </a:solidFill>
                 <a:latin typeface="游ゴシック" pitchFamily="34" charset="0"/>
                 <a:ea typeface="游ゴシック" pitchFamily="34" charset="-122"/>
@@ -33228,7 +33228,7 @@
     <p:bg>
       <p:bgPr>
         <a:solidFill>
-          <a:srgbClr val="ECE3D4"/>
+          <a:srgbClr val="F0FAF5"/>
         </a:solidFill>
       </p:bgPr>
     </p:bg>
@@ -33273,7 +33273,7 @@
             <a:r>
               <a:rPr lang="en-US" sz="1100" b="1" spc="200" kern="0" dirty="0">
                 <a:solidFill>
-                  <a:srgbClr val="9C5446"/>
+                  <a:srgbClr val="17784A"/>
                 </a:solidFill>
                 <a:latin typeface="游ゴシック" pitchFamily="34" charset="0"/>
                 <a:ea typeface="游ゴシック" pitchFamily="34" charset="-122"/>
@@ -33315,7 +33315,7 @@
             <a:r>
               <a:rPr lang="en-US" sz="3200" b="1" dirty="0">
                 <a:solidFill>
-                  <a:srgbClr val="2B2620"/>
+                  <a:srgbClr val="123C2A"/>
                 </a:solidFill>
                 <a:latin typeface="游明朝" pitchFamily="34" charset="0"/>
                 <a:ea typeface="游明朝" pitchFamily="34" charset="-122"/>
@@ -33344,12 +33344,12 @@
             </a:avLst>
           </a:prstGeom>
           <a:solidFill>
-            <a:srgbClr val="FCFAF4"/>
+            <a:srgbClr val="FFFFFF"/>
           </a:solidFill>
           <a:ln/>
           <a:effectLst>
             <a:outerShdw sx="100000" sy="100000" kx="0" ky="0" algn="bl" rotWithShape="0" blurRad="127000" dist="508" dir="5400000">
-              <a:srgbClr val="8C7F6E">
+              <a:srgbClr val="7FA795">
                 <a:alpha val="25000"/>
               </a:srgbClr>
             </a:outerShdw>
@@ -33371,7 +33371,7 @@
             <a:avLst/>
           </a:prstGeom>
           <a:solidFill>
-            <a:srgbClr val="9C5446"/>
+            <a:srgbClr val="17784A"/>
           </a:solidFill>
           <a:ln/>
         </p:spPr>
@@ -33403,7 +33403,7 @@
             <a:r>
               <a:rPr lang="en-US" sz="1500" b="1" dirty="0">
                 <a:solidFill>
-                  <a:srgbClr val="FCFAF4"/>
+                  <a:srgbClr val="FFFFFF"/>
                 </a:solidFill>
                 <a:latin typeface="游明朝" pitchFamily="34" charset="0"/>
                 <a:ea typeface="游明朝" pitchFamily="34" charset="-122"/>
@@ -33442,7 +33442,7 @@
             <a:r>
               <a:rPr lang="en-US" sz="2100" b="1" dirty="0">
                 <a:solidFill>
-                  <a:srgbClr val="2B2620"/>
+                  <a:srgbClr val="123C2A"/>
                 </a:solidFill>
                 <a:latin typeface="游明朝" pitchFamily="34" charset="0"/>
                 <a:ea typeface="游明朝" pitchFamily="34" charset="-122"/>
@@ -33484,7 +33484,7 @@
             <a:r>
               <a:rPr lang="en-US" sz="1300" b="1" dirty="0">
                 <a:solidFill>
-                  <a:srgbClr val="2B2620"/>
+                  <a:srgbClr val="123C2A"/>
                 </a:solidFill>
                 <a:latin typeface="游ゴシック" pitchFamily="34" charset="0"/>
                 <a:ea typeface="游ゴシック" pitchFamily="34" charset="-122"/>
@@ -33526,7 +33526,7 @@
             <a:r>
               <a:rPr lang="en-US" sz="1150" dirty="0">
                 <a:solidFill>
-                  <a:srgbClr val="7A6E60"/>
+                  <a:srgbClr val="4F6F60"/>
                 </a:solidFill>
                 <a:latin typeface="游ゴシック" pitchFamily="34" charset="0"/>
                 <a:ea typeface="游ゴシック" pitchFamily="34" charset="-122"/>
@@ -33546,7 +33546,7 @@
             <a:r>
               <a:rPr lang="en-US" sz="1150" dirty="0">
                 <a:solidFill>
-                  <a:srgbClr val="7A6E60"/>
+                  <a:srgbClr val="4F6F60"/>
                 </a:solidFill>
                 <a:latin typeface="游ゴシック" pitchFamily="34" charset="0"/>
                 <a:ea typeface="游ゴシック" pitchFamily="34" charset="-122"/>
@@ -33575,12 +33575,12 @@
             </a:avLst>
           </a:prstGeom>
           <a:solidFill>
-            <a:srgbClr val="FCFAF4"/>
+            <a:srgbClr val="FFFFFF"/>
           </a:solidFill>
           <a:ln/>
           <a:effectLst>
             <a:outerShdw sx="100000" sy="100000" kx="0" ky="0" algn="bl" rotWithShape="0" blurRad="127000" dist="508" dir="5400000">
-              <a:srgbClr val="8C7F6E">
+              <a:srgbClr val="7FA795">
                 <a:alpha val="25000"/>
               </a:srgbClr>
             </a:outerShdw>
@@ -33602,7 +33602,7 @@
             <a:avLst/>
           </a:prstGeom>
           <a:solidFill>
-            <a:srgbClr val="5E7060"/>
+            <a:srgbClr val="C92A78"/>
           </a:solidFill>
           <a:ln/>
         </p:spPr>
@@ -33634,7 +33634,7 @@
             <a:r>
               <a:rPr lang="en-US" sz="1500" b="1" dirty="0">
                 <a:solidFill>
-                  <a:srgbClr val="FCFAF4"/>
+                  <a:srgbClr val="FFFFFF"/>
                 </a:solidFill>
                 <a:latin typeface="游明朝" pitchFamily="34" charset="0"/>
                 <a:ea typeface="游明朝" pitchFamily="34" charset="-122"/>
@@ -33673,7 +33673,7 @@
             <a:r>
               <a:rPr lang="en-US" sz="2100" b="1" dirty="0">
                 <a:solidFill>
-                  <a:srgbClr val="2B2620"/>
+                  <a:srgbClr val="123C2A"/>
                 </a:solidFill>
                 <a:latin typeface="游明朝" pitchFamily="34" charset="0"/>
                 <a:ea typeface="游明朝" pitchFamily="34" charset="-122"/>
@@ -33715,7 +33715,7 @@
             <a:r>
               <a:rPr lang="en-US" sz="1300" b="1" dirty="0">
                 <a:solidFill>
-                  <a:srgbClr val="2B2620"/>
+                  <a:srgbClr val="123C2A"/>
                 </a:solidFill>
                 <a:latin typeface="游ゴシック" pitchFamily="34" charset="0"/>
                 <a:ea typeface="游ゴシック" pitchFamily="34" charset="-122"/>
@@ -33757,7 +33757,7 @@
             <a:r>
               <a:rPr lang="en-US" sz="1150" dirty="0">
                 <a:solidFill>
-                  <a:srgbClr val="7A6E60"/>
+                  <a:srgbClr val="4F6F60"/>
                 </a:solidFill>
                 <a:latin typeface="游ゴシック" pitchFamily="34" charset="0"/>
                 <a:ea typeface="游ゴシック" pitchFamily="34" charset="-122"/>
@@ -33777,7 +33777,7 @@
             <a:r>
               <a:rPr lang="en-US" sz="1150" dirty="0">
                 <a:solidFill>
-                  <a:srgbClr val="7A6E60"/>
+                  <a:srgbClr val="4F6F60"/>
                 </a:solidFill>
                 <a:latin typeface="游ゴシック" pitchFamily="34" charset="0"/>
                 <a:ea typeface="游ゴシック" pitchFamily="34" charset="-122"/>
@@ -33806,12 +33806,12 @@
             </a:avLst>
           </a:prstGeom>
           <a:solidFill>
-            <a:srgbClr val="FCFAF4"/>
+            <a:srgbClr val="FFFFFF"/>
           </a:solidFill>
           <a:ln/>
           <a:effectLst>
             <a:outerShdw sx="100000" sy="100000" kx="0" ky="0" algn="bl" rotWithShape="0" blurRad="127000" dist="508" dir="5400000">
-              <a:srgbClr val="8C7F6E">
+              <a:srgbClr val="7FA795">
                 <a:alpha val="25000"/>
               </a:srgbClr>
             </a:outerShdw>
@@ -33833,7 +33833,7 @@
             <a:avLst/>
           </a:prstGeom>
           <a:solidFill>
-            <a:srgbClr val="9C5446"/>
+            <a:srgbClr val="17784A"/>
           </a:solidFill>
           <a:ln/>
         </p:spPr>
@@ -33865,7 +33865,7 @@
             <a:r>
               <a:rPr lang="en-US" sz="1500" b="1" dirty="0">
                 <a:solidFill>
-                  <a:srgbClr val="FCFAF4"/>
+                  <a:srgbClr val="FFFFFF"/>
                 </a:solidFill>
                 <a:latin typeface="游明朝" pitchFamily="34" charset="0"/>
                 <a:ea typeface="游明朝" pitchFamily="34" charset="-122"/>
@@ -33904,7 +33904,7 @@
             <a:r>
               <a:rPr lang="en-US" sz="2100" b="1" dirty="0">
                 <a:solidFill>
-                  <a:srgbClr val="2B2620"/>
+                  <a:srgbClr val="123C2A"/>
                 </a:solidFill>
                 <a:latin typeface="游明朝" pitchFamily="34" charset="0"/>
                 <a:ea typeface="游明朝" pitchFamily="34" charset="-122"/>
@@ -33946,7 +33946,7 @@
             <a:r>
               <a:rPr lang="en-US" sz="1300" b="1" dirty="0">
                 <a:solidFill>
-                  <a:srgbClr val="2B2620"/>
+                  <a:srgbClr val="123C2A"/>
                 </a:solidFill>
                 <a:latin typeface="游ゴシック" pitchFamily="34" charset="0"/>
                 <a:ea typeface="游ゴシック" pitchFamily="34" charset="-122"/>
@@ -33988,7 +33988,7 @@
             <a:r>
               <a:rPr lang="en-US" sz="1150" dirty="0">
                 <a:solidFill>
-                  <a:srgbClr val="7A6E60"/>
+                  <a:srgbClr val="4F6F60"/>
                 </a:solidFill>
                 <a:latin typeface="游ゴシック" pitchFamily="34" charset="0"/>
                 <a:ea typeface="游ゴシック" pitchFamily="34" charset="-122"/>
@@ -34008,7 +34008,7 @@
             <a:r>
               <a:rPr lang="en-US" sz="1150" dirty="0">
                 <a:solidFill>
-                  <a:srgbClr val="7A6E60"/>
+                  <a:srgbClr val="4F6F60"/>
                 </a:solidFill>
                 <a:latin typeface="游ゴシック" pitchFamily="34" charset="0"/>
                 <a:ea typeface="游ゴシック" pitchFamily="34" charset="-122"/>
@@ -34050,7 +34050,7 @@
             <a:r>
               <a:rPr lang="en-US" sz="1200" dirty="0">
                 <a:solidFill>
-                  <a:srgbClr val="7A6E60"/>
+                  <a:srgbClr val="4F6F60"/>
                 </a:solidFill>
                 <a:latin typeface="游ゴシック" pitchFamily="34" charset="0"/>
                 <a:ea typeface="游ゴシック" pitchFamily="34" charset="-122"/>
@@ -34070,7 +34070,7 @@
             <a:r>
               <a:rPr lang="en-US" sz="1200" dirty="0">
                 <a:solidFill>
-                  <a:srgbClr val="7A6E60"/>
+                  <a:srgbClr val="4F6F60"/>
                 </a:solidFill>
                 <a:latin typeface="游ゴシック" pitchFamily="34" charset="0"/>
                 <a:ea typeface="游ゴシック" pitchFamily="34" charset="-122"/>
@@ -34109,7 +34109,7 @@
             <a:r>
               <a:rPr lang="en-US" sz="1000" dirty="0">
                 <a:solidFill>
-                  <a:srgbClr val="B7A991"/>
+                  <a:srgbClr val="AFD2C1"/>
                 </a:solidFill>
                 <a:latin typeface="游ゴシック" pitchFamily="34" charset="0"/>
                 <a:ea typeface="游ゴシック" pitchFamily="34" charset="-122"/>
@@ -34135,7 +34135,7 @@
     <p:bg>
       <p:bgPr>
         <a:solidFill>
-          <a:srgbClr val="ECE3D4"/>
+          <a:srgbClr val="F0FAF5"/>
         </a:solidFill>
       </p:bgPr>
     </p:bg>
@@ -34180,7 +34180,7 @@
             <a:r>
               <a:rPr lang="en-US" sz="1100" b="1" spc="200" kern="0" dirty="0">
                 <a:solidFill>
-                  <a:srgbClr val="9C5446"/>
+                  <a:srgbClr val="17784A"/>
                 </a:solidFill>
                 <a:latin typeface="游ゴシック" pitchFamily="34" charset="0"/>
                 <a:ea typeface="游ゴシック" pitchFamily="34" charset="-122"/>
@@ -34222,7 +34222,7 @@
             <a:r>
               <a:rPr lang="en-US" sz="3200" b="1" dirty="0">
                 <a:solidFill>
-                  <a:srgbClr val="2B2620"/>
+                  <a:srgbClr val="123C2A"/>
                 </a:solidFill>
                 <a:latin typeface="游明朝" pitchFamily="34" charset="0"/>
                 <a:ea typeface="游明朝" pitchFamily="34" charset="-122"/>
@@ -34251,12 +34251,12 @@
             </a:avLst>
           </a:prstGeom>
           <a:solidFill>
-            <a:srgbClr val="FCFAF4"/>
+            <a:srgbClr val="FFFFFF"/>
           </a:solidFill>
           <a:ln/>
           <a:effectLst>
             <a:outerShdw sx="100000" sy="100000" kx="0" ky="0" algn="bl" rotWithShape="0" blurRad="127000" dist="508" dir="5400000">
-              <a:srgbClr val="8C7F6E">
+              <a:srgbClr val="7FA795">
                 <a:alpha val="25000"/>
               </a:srgbClr>
             </a:outerShdw>
@@ -34278,7 +34278,7 @@
             <a:avLst/>
           </a:prstGeom>
           <a:solidFill>
-            <a:srgbClr val="9C5446"/>
+            <a:srgbClr val="17784A"/>
           </a:solidFill>
           <a:ln/>
         </p:spPr>
@@ -34310,7 +34310,7 @@
             <a:r>
               <a:rPr lang="en-US" sz="900" b="1" dirty="0">
                 <a:solidFill>
-                  <a:srgbClr val="FCFAF4"/>
+                  <a:srgbClr val="FFFFFF"/>
                 </a:solidFill>
                 <a:latin typeface="游明朝" pitchFamily="34" charset="0"/>
                 <a:ea typeface="游明朝" pitchFamily="34" charset="-122"/>
@@ -34352,7 +34352,7 @@
             <a:r>
               <a:rPr lang="en-US" sz="2000" b="1" dirty="0">
                 <a:solidFill>
-                  <a:srgbClr val="2B2620"/>
+                  <a:srgbClr val="123C2A"/>
                 </a:solidFill>
                 <a:latin typeface="游明朝" pitchFamily="34" charset="0"/>
                 <a:ea typeface="游明朝" pitchFamily="34" charset="-122"/>
@@ -34372,7 +34372,7 @@
             <a:r>
               <a:rPr lang="en-US" sz="2000" b="1" dirty="0">
                 <a:solidFill>
-                  <a:srgbClr val="2B2620"/>
+                  <a:srgbClr val="123C2A"/>
                 </a:solidFill>
                 <a:latin typeface="游明朝" pitchFamily="34" charset="0"/>
                 <a:ea typeface="游明朝" pitchFamily="34" charset="-122"/>
@@ -34401,12 +34401,12 @@
             </a:avLst>
           </a:prstGeom>
           <a:solidFill>
-            <a:srgbClr val="FCFAF4"/>
+            <a:srgbClr val="FFFFFF"/>
           </a:solidFill>
           <a:ln/>
           <a:effectLst>
             <a:outerShdw sx="100000" sy="100000" kx="0" ky="0" algn="bl" rotWithShape="0" blurRad="127000" dist="508" dir="5400000">
-              <a:srgbClr val="8C7F6E">
+              <a:srgbClr val="7FA795">
                 <a:alpha val="25000"/>
               </a:srgbClr>
             </a:outerShdw>
@@ -34428,7 +34428,7 @@
             <a:avLst/>
           </a:prstGeom>
           <a:solidFill>
-            <a:srgbClr val="5E7060"/>
+            <a:srgbClr val="C92A78"/>
           </a:solidFill>
           <a:ln/>
         </p:spPr>
@@ -34460,7 +34460,7 @@
             <a:r>
               <a:rPr lang="en-US" sz="900" b="1" dirty="0">
                 <a:solidFill>
-                  <a:srgbClr val="FCFAF4"/>
+                  <a:srgbClr val="FFFFFF"/>
                 </a:solidFill>
                 <a:latin typeface="游明朝" pitchFamily="34" charset="0"/>
                 <a:ea typeface="游明朝" pitchFamily="34" charset="-122"/>
@@ -34502,7 +34502,7 @@
             <a:r>
               <a:rPr lang="en-US" sz="2000" b="1" dirty="0">
                 <a:solidFill>
-                  <a:srgbClr val="2B2620"/>
+                  <a:srgbClr val="123C2A"/>
                 </a:solidFill>
                 <a:latin typeface="游明朝" pitchFamily="34" charset="0"/>
                 <a:ea typeface="游明朝" pitchFamily="34" charset="-122"/>
@@ -34522,7 +34522,7 @@
             <a:r>
               <a:rPr lang="en-US" sz="2000" b="1" dirty="0">
                 <a:solidFill>
-                  <a:srgbClr val="2B2620"/>
+                  <a:srgbClr val="123C2A"/>
                 </a:solidFill>
                 <a:latin typeface="游明朝" pitchFamily="34" charset="0"/>
                 <a:ea typeface="游明朝" pitchFamily="34" charset="-122"/>
@@ -34551,12 +34551,12 @@
             </a:avLst>
           </a:prstGeom>
           <a:solidFill>
-            <a:srgbClr val="FCFAF4"/>
+            <a:srgbClr val="FFFFFF"/>
           </a:solidFill>
           <a:ln/>
           <a:effectLst>
             <a:outerShdw sx="100000" sy="100000" kx="0" ky="0" algn="bl" rotWithShape="0" blurRad="127000" dist="508" dir="5400000">
-              <a:srgbClr val="8C7F6E">
+              <a:srgbClr val="7FA795">
                 <a:alpha val="25000"/>
               </a:srgbClr>
             </a:outerShdw>
@@ -34578,7 +34578,7 @@
             <a:avLst/>
           </a:prstGeom>
           <a:solidFill>
-            <a:srgbClr val="9C5446"/>
+            <a:srgbClr val="17784A"/>
           </a:solidFill>
           <a:ln/>
         </p:spPr>
@@ -34610,7 +34610,7 @@
             <a:r>
               <a:rPr lang="en-US" sz="900" b="1" dirty="0">
                 <a:solidFill>
-                  <a:srgbClr val="FCFAF4"/>
+                  <a:srgbClr val="FFFFFF"/>
                 </a:solidFill>
                 <a:latin typeface="游明朝" pitchFamily="34" charset="0"/>
                 <a:ea typeface="游明朝" pitchFamily="34" charset="-122"/>
@@ -34652,7 +34652,7 @@
             <a:r>
               <a:rPr lang="en-US" sz="2000" b="1" dirty="0">
                 <a:solidFill>
-                  <a:srgbClr val="2B2620"/>
+                  <a:srgbClr val="123C2A"/>
                 </a:solidFill>
                 <a:latin typeface="游明朝" pitchFamily="34" charset="0"/>
                 <a:ea typeface="游明朝" pitchFamily="34" charset="-122"/>
@@ -34672,7 +34672,7 @@
             <a:r>
               <a:rPr lang="en-US" sz="2000" b="1" dirty="0">
                 <a:solidFill>
-                  <a:srgbClr val="2B2620"/>
+                  <a:srgbClr val="123C2A"/>
                 </a:solidFill>
                 <a:latin typeface="游明朝" pitchFamily="34" charset="0"/>
                 <a:ea typeface="游明朝" pitchFamily="34" charset="-122"/>
@@ -34711,7 +34711,7 @@
             <a:r>
               <a:rPr lang="en-US" sz="1600" dirty="0">
                 <a:solidFill>
-                  <a:srgbClr val="2B2620"/>
+                  <a:srgbClr val="123C2A"/>
                 </a:solidFill>
                 <a:latin typeface="游ゴシック" pitchFamily="34" charset="0"/>
                 <a:ea typeface="游ゴシック" pitchFamily="34" charset="-122"/>
@@ -34750,7 +34750,7 @@
             <a:r>
               <a:rPr lang="en-US" sz="1000" dirty="0">
                 <a:solidFill>
-                  <a:srgbClr val="B7A991"/>
+                  <a:srgbClr val="AFD2C1"/>
                 </a:solidFill>
                 <a:latin typeface="游ゴシック" pitchFamily="34" charset="0"/>
                 <a:ea typeface="游ゴシック" pitchFamily="34" charset="-122"/>
@@ -34776,7 +34776,7 @@
     <p:bg>
       <p:bgPr>
         <a:solidFill>
-          <a:srgbClr val="2B2620"/>
+          <a:srgbClr val="123C2A"/>
         </a:solidFill>
       </p:bgPr>
     </p:bg>
@@ -34821,7 +34821,7 @@
             <a:r>
               <a:rPr lang="en-US" sz="1100" b="1" spc="200" kern="0" dirty="0">
                 <a:solidFill>
-                  <a:srgbClr val="A2937F"/>
+                  <a:srgbClr val="8FB8A2"/>
                 </a:solidFill>
                 <a:latin typeface="游ゴシック" pitchFamily="34" charset="0"/>
                 <a:ea typeface="游ゴシック" pitchFamily="34" charset="-122"/>
@@ -34860,7 +34860,7 @@
             <a:r>
               <a:rPr lang="en-US" sz="1800" dirty="0">
                 <a:solidFill>
-                  <a:srgbClr val="A2937F"/>
+                  <a:srgbClr val="8FB8A2"/>
                 </a:solidFill>
                 <a:latin typeface="游ゴシック" pitchFamily="34" charset="0"/>
                 <a:ea typeface="游ゴシック" pitchFamily="34" charset="-122"/>
@@ -34887,7 +34887,7 @@
             <a:avLst/>
           </a:prstGeom>
           <a:solidFill>
-            <a:srgbClr val="4A4239"/>
+            <a:srgbClr val="2C6448"/>
           </a:solidFill>
           <a:ln/>
         </p:spPr>
@@ -34919,7 +34919,7 @@
             <a:r>
               <a:rPr lang="en-US" sz="2000" b="1" dirty="0">
                 <a:solidFill>
-                  <a:srgbClr val="ECE3D4"/>
+                  <a:srgbClr val="E8F5EE"/>
                 </a:solidFill>
                 <a:latin typeface="游明朝" pitchFamily="34" charset="0"/>
                 <a:ea typeface="游明朝" pitchFamily="34" charset="-122"/>
@@ -34958,7 +34958,7 @@
             <a:r>
               <a:rPr lang="en-US" sz="3200" b="1" dirty="0">
                 <a:solidFill>
-                  <a:srgbClr val="ECE3D4"/>
+                  <a:srgbClr val="E8F5EE"/>
                 </a:solidFill>
                 <a:latin typeface="游明朝" pitchFamily="34" charset="0"/>
                 <a:ea typeface="游明朝" pitchFamily="34" charset="-122"/>
@@ -34985,7 +34985,7 @@
             <a:avLst/>
           </a:prstGeom>
           <a:solidFill>
-            <a:srgbClr val="9C5446"/>
+            <a:srgbClr val="34D39B"/>
           </a:solidFill>
           <a:ln/>
         </p:spPr>
@@ -35017,7 +35017,7 @@
             <a:r>
               <a:rPr lang="en-US" sz="2000" b="1" dirty="0">
                 <a:solidFill>
-                  <a:srgbClr val="ECE3D4"/>
+                  <a:srgbClr val="123C2A"/>
                 </a:solidFill>
                 <a:latin typeface="游明朝" pitchFamily="34" charset="0"/>
                 <a:ea typeface="游明朝" pitchFamily="34" charset="-122"/>
@@ -35056,7 +35056,7 @@
             <a:r>
               <a:rPr lang="en-US" sz="3200" b="1" dirty="0">
                 <a:solidFill>
-                  <a:srgbClr val="ECE3D4"/>
+                  <a:srgbClr val="E8F5EE"/>
                 </a:solidFill>
                 <a:latin typeface="游明朝" pitchFamily="34" charset="0"/>
                 <a:ea typeface="游明朝" pitchFamily="34" charset="-122"/>
@@ -35095,7 +35095,7 @@
             <a:r>
               <a:rPr lang="en-US" sz="2000" b="1" dirty="0">
                 <a:solidFill>
-                  <a:srgbClr val="9C5446"/>
+                  <a:srgbClr val="34D39B"/>
                 </a:solidFill>
                 <a:latin typeface="游明朝" pitchFamily="34" charset="0"/>
                 <a:ea typeface="游明朝" pitchFamily="34" charset="-122"/>
@@ -35134,7 +35134,7 @@
             <a:r>
               <a:rPr lang="en-US" sz="1000" dirty="0">
                 <a:solidFill>
-                  <a:srgbClr val="6B5F51"/>
+                  <a:srgbClr val="3A6450"/>
                 </a:solidFill>
                 <a:latin typeface="游ゴシック" pitchFamily="34" charset="0"/>
                 <a:ea typeface="游ゴシック" pitchFamily="34" charset="-122"/>
